--- a/entrega-final/Presentacion_Proyecto7_Zabbix.pptx
+++ b/entrega-final/Presentacion_Proyecto7_Zabbix.pptx
@@ -17,6 +17,8 @@
     <p:sldId id="265" r:id="rId16"/>
     <p:sldId id="266" r:id="rId17"/>
     <p:sldId id="267" r:id="rId18"/>
+    <p:sldId id="268" r:id="rId19"/>
+    <p:sldId id="269" r:id="rId20"/>
   </p:sldIdLst>
   <p:sldSz cx="12191695" cy="6858000" type="screen4x3"/>
   <p:notesSz cx="6858000" cy="9144000"/>
@@ -3292,7 +3294,7 @@
                   <a:srgbClr val="11323D"/>
                 </a:solidFill>
               </a:rPr>
-              <a:t>Resultados</a:t>
+              <a:t>Pruebas de carga</a:t>
             </a:r>
           </a:p>
         </p:txBody>
@@ -3306,7 +3308,7 @@
         <p:spPr>
           <a:xfrm>
             <a:off x="640080" y="1234440"/>
-            <a:ext cx="4800600" cy="4389120"/>
+            <a:ext cx="10515600" cy="4389120"/>
           </a:xfrm>
           <a:prstGeom prst="rect">
             <a:avLst/>
@@ -3330,7 +3332,7 @@
               </a:defRPr>
             </a:pPr>
             <a:r>
-              <a:t>Contenedores principales saludables.</a:t>
+              <a:t>Artillery genera trafico real contra frontend y API.</a:t>
             </a:r>
           </a:p>
           <a:p>
@@ -3345,7 +3347,7 @@
               </a:defRPr>
             </a:pPr>
             <a:r>
-              <a:t>Cuatro servicios con check de disponibilidad activo.</a:t>
+              <a:t>El backend registra telemetria e incidentes en MariaDB.</a:t>
             </a:r>
           </a:p>
           <a:p>
@@ -3360,38 +3362,14 @@
               </a:defRPr>
             </a:pPr>
             <a:r>
-              <a:t>Alertas generadas y recuperadas durante la prueba.</a:t>
-            </a:r>
-          </a:p>
-        </p:txBody>
-      </p:sp>
-      <p:pic>
-        <p:nvPicPr>
-          <p:cNvPr id="4" name="Picture 3" descr="04_zabbix_problems.png"/>
-          <p:cNvPicPr>
-            <a:picLocks noChangeAspect="1"/>
-          </p:cNvPicPr>
-          <p:nvPr/>
-        </p:nvPicPr>
-        <p:blipFill>
-          <a:blip r:embed="rId2"/>
-          <a:stretch>
-            <a:fillRect/>
-          </a:stretch>
-        </p:blipFill>
-        <p:spPr>
-          <a:xfrm>
-            <a:off x="5806440" y="1051560"/>
-            <a:ext cx="5715000" cy="4069080"/>
-          </a:xfrm>
-          <a:prstGeom prst="rect">
-            <a:avLst/>
-          </a:prstGeom>
-        </p:spPr>
-      </p:pic>
-      <p:sp>
-        <p:nvSpPr>
-          <p:cNvPr id="5" name="TextBox 4"/>
+              <a:t>Zabbix observa /metrics, DB status y web scenario publico.</a:t>
+            </a:r>
+          </a:p>
+        </p:txBody>
+      </p:sp>
+      <p:sp>
+        <p:nvSpPr>
+          <p:cNvPr id="4" name="TextBox 3"/>
           <p:cNvSpPr txBox="1"/>
           <p:nvPr/>
         </p:nvSpPr>
@@ -3478,7 +3456,7 @@
                   <a:srgbClr val="11323D"/>
                 </a:solidFill>
               </a:rPr>
-              <a:t>Conclusiones</a:t>
+              <a:t>Resultados</a:t>
             </a:r>
           </a:p>
         </p:txBody>
@@ -3492,7 +3470,7 @@
         <p:spPr>
           <a:xfrm>
             <a:off x="640080" y="1234440"/>
-            <a:ext cx="10515600" cy="4389120"/>
+            <a:ext cx="4800600" cy="4389120"/>
           </a:xfrm>
           <a:prstGeom prst="rect">
             <a:avLst/>
@@ -3516,7 +3494,7 @@
               </a:defRPr>
             </a:pPr>
             <a:r>
-              <a:t>Zabbix centraliza observabilidad operativa.</a:t>
+              <a:t>Contenedores principales saludables.</a:t>
             </a:r>
           </a:p>
           <a:p>
@@ -3531,7 +3509,7 @@
               </a:defRPr>
             </a:pPr>
             <a:r>
-              <a:t>Docker Compose hace el despliegue reproducible.</a:t>
+              <a:t>Cuatro servicios con check de disponibilidad activo.</a:t>
             </a:r>
           </a:p>
           <a:p>
@@ -3546,14 +3524,53 @@
               </a:defRPr>
             </a:pPr>
             <a:r>
-              <a:t>La solucion cumple los requerimientos del Proyecto 7.</a:t>
-            </a:r>
-          </a:p>
-        </p:txBody>
-      </p:sp>
-      <p:sp>
-        <p:nvSpPr>
-          <p:cNvPr id="4" name="TextBox 3"/>
+              <a:t>Alertas generadas y recuperadas durante la prueba.</a:t>
+            </a:r>
+          </a:p>
+          <a:p>
+            <a:pPr>
+              <a:spcAft>
+                <a:spcPts val="800"/>
+              </a:spcAft>
+              <a:defRPr sz="2000">
+                <a:solidFill>
+                  <a:srgbClr val="232D37"/>
+                </a:solidFill>
+              </a:defRPr>
+            </a:pPr>
+            <a:r>
+              <a:t>Auditoria automatica con 0 fallas esperadas.</a:t>
+            </a:r>
+          </a:p>
+        </p:txBody>
+      </p:sp>
+      <p:pic>
+        <p:nvPicPr>
+          <p:cNvPr id="4" name="Picture 3" descr="04_zabbix_problems.png"/>
+          <p:cNvPicPr>
+            <a:picLocks noChangeAspect="1"/>
+          </p:cNvPicPr>
+          <p:nvPr/>
+        </p:nvPicPr>
+        <p:blipFill>
+          <a:blip r:embed="rId2"/>
+          <a:stretch>
+            <a:fillRect/>
+          </a:stretch>
+        </p:blipFill>
+        <p:spPr>
+          <a:xfrm>
+            <a:off x="5806440" y="1051560"/>
+            <a:ext cx="5715000" cy="4069080"/>
+          </a:xfrm>
+          <a:prstGeom prst="rect">
+            <a:avLst/>
+          </a:prstGeom>
+        </p:spPr>
+      </p:pic>
+      <p:sp>
+        <p:nvSpPr>
+          <p:cNvPr id="5" name="TextBox 4"/>
           <p:cNvSpPr txBox="1"/>
           <p:nvPr/>
         </p:nvSpPr>
@@ -3640,7 +3657,7 @@
                   <a:srgbClr val="11323D"/>
                 </a:solidFill>
               </a:rPr>
-              <a:t>Demo en vivo</a:t>
+              <a:t>Entregables</a:t>
             </a:r>
           </a:p>
         </p:txBody>
@@ -3678,7 +3695,7 @@
               </a:defRPr>
             </a:pPr>
             <a:r>
-              <a:t>Abrir Zabbix: http://localhost:8088</a:t>
+              <a:t>Informe IEEE: entrega-final/Informe_IEEE_Proyecto7_Zabbix.pdf.</a:t>
             </a:r>
           </a:p>
           <a:p>
@@ -3693,7 +3710,7 @@
               </a:defRPr>
             </a:pPr>
             <a:r>
-              <a:t>Abrir MailHog: http://localhost:8025</a:t>
+              <a:t>Diapositivas: entrega-final/Presentacion_Proyecto7_Zabbix.pptx.</a:t>
             </a:r>
           </a:p>
           <a:p>
@@ -3708,7 +3725,7 @@
               </a:defRPr>
             </a:pPr>
             <a:r>
-              <a:t>Ejecutar: .\scripts\test-failure.ps1 -Service web-service -Seconds 90</a:t>
+              <a:t>Repo GitHub con README, Compose, scripts y evidencias.</a:t>
             </a:r>
           </a:p>
         </p:txBody>
@@ -3743,6 +3760,345 @@
                 </a:solidFill>
               </a:rPr>
               <a:t>Proyecto 7 - Zabbix | 12</a:t>
+            </a:r>
+          </a:p>
+        </p:txBody>
+      </p:sp>
+    </p:spTree>
+  </p:cSld>
+  <p:clrMapOvr>
+    <a:masterClrMapping/>
+  </p:clrMapOvr>
+</p:sld>
+</file>
+
+<file path=ppt/slides/slide13.xml><?xml version="1.0" encoding="utf-8"?>
+<p:sld xmlns:a="http://schemas.openxmlformats.org/drawingml/2006/main" xmlns:p="http://schemas.openxmlformats.org/presentationml/2006/main" xmlns:r="http://schemas.openxmlformats.org/officeDocument/2006/relationships">
+  <p:cSld>
+    <p:bg>
+      <p:bgPr>
+        <a:solidFill>
+          <a:srgbClr val="F8FAFC"/>
+        </a:solidFill>
+        <a:effectLst/>
+      </p:bgPr>
+    </p:bg>
+    <p:spTree>
+      <p:nvGrpSpPr>
+        <p:cNvPr id="1" name=""/>
+        <p:cNvGrpSpPr/>
+        <p:nvPr/>
+      </p:nvGrpSpPr>
+      <p:grpSpPr/>
+      <p:sp>
+        <p:nvSpPr>
+          <p:cNvPr id="2" name="TextBox 1"/>
+          <p:cNvSpPr txBox="1"/>
+          <p:nvPr/>
+        </p:nvSpPr>
+        <p:spPr>
+          <a:xfrm>
+            <a:off x="502920" y="384048"/>
+            <a:ext cx="6949440" cy="457200"/>
+          </a:xfrm>
+          <a:prstGeom prst="rect">
+            <a:avLst/>
+          </a:prstGeom>
+          <a:noFill/>
+        </p:spPr>
+        <p:txBody>
+          <a:bodyPr wrap="none" anchor="t">
+            <a:spAutoFit/>
+          </a:bodyPr>
+          <a:lstStyle/>
+          <a:p>
+            <a:pPr algn="l"/>
+            <a:r>
+              <a:rPr sz="2800" b="1">
+                <a:solidFill>
+                  <a:srgbClr val="11323D"/>
+                </a:solidFill>
+              </a:rPr>
+              <a:t>Conclusiones</a:t>
+            </a:r>
+          </a:p>
+        </p:txBody>
+      </p:sp>
+      <p:sp>
+        <p:nvSpPr>
+          <p:cNvPr id="3" name="TextBox 2"/>
+          <p:cNvSpPr txBox="1"/>
+          <p:nvPr/>
+        </p:nvSpPr>
+        <p:spPr>
+          <a:xfrm>
+            <a:off x="640080" y="1234440"/>
+            <a:ext cx="10515600" cy="4389120"/>
+          </a:xfrm>
+          <a:prstGeom prst="rect">
+            <a:avLst/>
+          </a:prstGeom>
+          <a:noFill/>
+        </p:spPr>
+        <p:txBody>
+          <a:bodyPr wrap="none">
+            <a:spAutoFit/>
+          </a:bodyPr>
+          <a:lstStyle/>
+          <a:p>
+            <a:pPr>
+              <a:spcAft>
+                <a:spcPts val="800"/>
+              </a:spcAft>
+              <a:defRPr sz="2000">
+                <a:solidFill>
+                  <a:srgbClr val="232D37"/>
+                </a:solidFill>
+              </a:defRPr>
+            </a:pPr>
+            <a:r>
+              <a:t>Zabbix centraliza observabilidad operativa.</a:t>
+            </a:r>
+          </a:p>
+          <a:p>
+            <a:pPr>
+              <a:spcAft>
+                <a:spcPts val="800"/>
+              </a:spcAft>
+              <a:defRPr sz="2000">
+                <a:solidFill>
+                  <a:srgbClr val="232D37"/>
+                </a:solidFill>
+              </a:defRPr>
+            </a:pPr>
+            <a:r>
+              <a:t>Docker Compose hace el despliegue reproducible.</a:t>
+            </a:r>
+          </a:p>
+          <a:p>
+            <a:pPr>
+              <a:spcAft>
+                <a:spcPts val="800"/>
+              </a:spcAft>
+              <a:defRPr sz="2000">
+                <a:solidFill>
+                  <a:srgbClr val="232D37"/>
+                </a:solidFill>
+              </a:defRPr>
+            </a:pPr>
+            <a:r>
+              <a:t>El portal publico, Artillery y /api/compliance elevan la solucion sobre el minimo.</a:t>
+            </a:r>
+          </a:p>
+        </p:txBody>
+      </p:sp>
+      <p:sp>
+        <p:nvSpPr>
+          <p:cNvPr id="4" name="TextBox 3"/>
+          <p:cNvSpPr txBox="1"/>
+          <p:nvPr/>
+        </p:nvSpPr>
+        <p:spPr>
+          <a:xfrm>
+            <a:off x="411480" y="6510528"/>
+            <a:ext cx="3657600" cy="228600"/>
+          </a:xfrm>
+          <a:prstGeom prst="rect">
+            <a:avLst/>
+          </a:prstGeom>
+          <a:noFill/>
+        </p:spPr>
+        <p:txBody>
+          <a:bodyPr wrap="none" anchor="t">
+            <a:spAutoFit/>
+          </a:bodyPr>
+          <a:lstStyle/>
+          <a:p>
+            <a:pPr algn="l"/>
+            <a:r>
+              <a:rPr sz="800" b="0">
+                <a:solidFill>
+                  <a:srgbClr val="5D6B7A"/>
+                </a:solidFill>
+              </a:rPr>
+              <a:t>Proyecto 7 - Zabbix | 13</a:t>
+            </a:r>
+          </a:p>
+        </p:txBody>
+      </p:sp>
+    </p:spTree>
+  </p:cSld>
+  <p:clrMapOvr>
+    <a:masterClrMapping/>
+  </p:clrMapOvr>
+</p:sld>
+</file>
+
+<file path=ppt/slides/slide14.xml><?xml version="1.0" encoding="utf-8"?>
+<p:sld xmlns:a="http://schemas.openxmlformats.org/drawingml/2006/main" xmlns:p="http://schemas.openxmlformats.org/presentationml/2006/main" xmlns:r="http://schemas.openxmlformats.org/officeDocument/2006/relationships">
+  <p:cSld>
+    <p:bg>
+      <p:bgPr>
+        <a:solidFill>
+          <a:srgbClr val="F8FAFC"/>
+        </a:solidFill>
+        <a:effectLst/>
+      </p:bgPr>
+    </p:bg>
+    <p:spTree>
+      <p:nvGrpSpPr>
+        <p:cNvPr id="1" name=""/>
+        <p:cNvGrpSpPr/>
+        <p:nvPr/>
+      </p:nvGrpSpPr>
+      <p:grpSpPr/>
+      <p:sp>
+        <p:nvSpPr>
+          <p:cNvPr id="2" name="TextBox 1"/>
+          <p:cNvSpPr txBox="1"/>
+          <p:nvPr/>
+        </p:nvSpPr>
+        <p:spPr>
+          <a:xfrm>
+            <a:off x="502920" y="384048"/>
+            <a:ext cx="6949440" cy="457200"/>
+          </a:xfrm>
+          <a:prstGeom prst="rect">
+            <a:avLst/>
+          </a:prstGeom>
+          <a:noFill/>
+        </p:spPr>
+        <p:txBody>
+          <a:bodyPr wrap="none" anchor="t">
+            <a:spAutoFit/>
+          </a:bodyPr>
+          <a:lstStyle/>
+          <a:p>
+            <a:pPr algn="l"/>
+            <a:r>
+              <a:rPr sz="2800" b="1">
+                <a:solidFill>
+                  <a:srgbClr val="11323D"/>
+                </a:solidFill>
+              </a:rPr>
+              <a:t>Demo en vivo</a:t>
+            </a:r>
+          </a:p>
+        </p:txBody>
+      </p:sp>
+      <p:sp>
+        <p:nvSpPr>
+          <p:cNvPr id="3" name="TextBox 2"/>
+          <p:cNvSpPr txBox="1"/>
+          <p:nvPr/>
+        </p:nvSpPr>
+        <p:spPr>
+          <a:xfrm>
+            <a:off x="640080" y="1234440"/>
+            <a:ext cx="10515600" cy="4389120"/>
+          </a:xfrm>
+          <a:prstGeom prst="rect">
+            <a:avLst/>
+          </a:prstGeom>
+          <a:noFill/>
+        </p:spPr>
+        <p:txBody>
+          <a:bodyPr wrap="none">
+            <a:spAutoFit/>
+          </a:bodyPr>
+          <a:lstStyle/>
+          <a:p>
+            <a:pPr>
+              <a:spcAft>
+                <a:spcPts val="800"/>
+              </a:spcAft>
+              <a:defRPr sz="2000">
+                <a:solidFill>
+                  <a:srgbClr val="232D37"/>
+                </a:solidFill>
+              </a:defRPr>
+            </a:pPr>
+            <a:r>
+              <a:t>Abrir web-zabbix.negociocontigo.com.</a:t>
+            </a:r>
+          </a:p>
+          <a:p>
+            <a:pPr>
+              <a:spcAft>
+                <a:spcPts val="800"/>
+              </a:spcAft>
+              <a:defRPr sz="2000">
+                <a:solidFill>
+                  <a:srgbClr val="232D37"/>
+                </a:solidFill>
+              </a:defRPr>
+            </a:pPr>
+            <a:r>
+              <a:t>Ejecutar: artillery run tests/artillery-live-demo.yml.</a:t>
+            </a:r>
+          </a:p>
+          <a:p>
+            <a:pPr>
+              <a:spcAft>
+                <a:spcPts val="800"/>
+              </a:spcAft>
+              <a:defRPr sz="2000">
+                <a:solidFill>
+                  <a:srgbClr val="232D37"/>
+                </a:solidFill>
+              </a:defRPr>
+            </a:pPr>
+            <a:r>
+              <a:t>Simular caida: docker compose -f docker-compose.vps.yml stop web-service.</a:t>
+            </a:r>
+          </a:p>
+          <a:p>
+            <a:pPr>
+              <a:spcAft>
+                <a:spcPts val="800"/>
+              </a:spcAft>
+              <a:defRPr sz="2000">
+                <a:solidFill>
+                  <a:srgbClr val="232D37"/>
+                </a:solidFill>
+              </a:defRPr>
+            </a:pPr>
+            <a:r>
+              <a:t>Cerrar con: bash scripts/audit-project.sh.</a:t>
+            </a:r>
+          </a:p>
+        </p:txBody>
+      </p:sp>
+      <p:sp>
+        <p:nvSpPr>
+          <p:cNvPr id="4" name="TextBox 3"/>
+          <p:cNvSpPr txBox="1"/>
+          <p:nvPr/>
+        </p:nvSpPr>
+        <p:spPr>
+          <a:xfrm>
+            <a:off x="411480" y="6510528"/>
+            <a:ext cx="3657600" cy="228600"/>
+          </a:xfrm>
+          <a:prstGeom prst="rect">
+            <a:avLst/>
+          </a:prstGeom>
+          <a:noFill/>
+        </p:spPr>
+        <p:txBody>
+          <a:bodyPr wrap="none" anchor="t">
+            <a:spAutoFit/>
+          </a:bodyPr>
+          <a:lstStyle/>
+          <a:p>
+            <a:pPr algn="l"/>
+            <a:r>
+              <a:rPr sz="800" b="0">
+                <a:solidFill>
+                  <a:srgbClr val="5D6B7A"/>
+                </a:solidFill>
+              </a:rPr>
+              <a:t>Proyecto 7 - Zabbix | 14</a:t>
             </a:r>
           </a:p>
         </p:txBody>
@@ -4035,6 +4391,21 @@
               <a:t>Validar triggers, dashboards, historicos y alertas por correo.</a:t>
             </a:r>
           </a:p>
+          <a:p>
+            <a:pPr>
+              <a:spcAft>
+                <a:spcPts val="800"/>
+              </a:spcAft>
+              <a:defRPr sz="2000">
+                <a:solidFill>
+                  <a:srgbClr val="232D37"/>
+                </a:solidFill>
+              </a:defRPr>
+            </a:pPr>
+            <a:r>
+              <a:t>Agregar portal HTTPS con backend, graficas, SLO y carga Artillery.</a:t>
+            </a:r>
+          </a:p>
         </p:txBody>
       </p:sp>
       <p:sp>
@@ -4197,6 +4568,21 @@
               <a:t>Red interna proyecto7-monitoring para resolucion por nombre.</a:t>
             </a:r>
           </a:p>
+          <a:p>
+            <a:pPr>
+              <a:spcAft>
+                <a:spcPts val="800"/>
+              </a:spcAft>
+              <a:defRPr sz="2000">
+                <a:solidFill>
+                  <a:srgbClr val="232D37"/>
+                </a:solidFill>
+              </a:defRPr>
+            </a:pPr>
+            <a:r>
+              <a:t>Caddy publica subdominios HTTPS en la VPS.</a:t>
+            </a:r>
+          </a:p>
         </p:txBody>
       </p:sp>
       <p:pic>
@@ -4350,7 +4736,7 @@
               </a:defRPr>
             </a:pPr>
             <a:r>
-              <a:t>web-host: HTTP sobre Nginx.</a:t>
+              <a:t>web-host: portal Node.js HTTP.</a:t>
             </a:r>
           </a:p>
           <a:p>
@@ -4596,7 +4982,7 @@
               </a:defRPr>
             </a:pPr>
             <a:r>
-              <a:t>provision_zabbix.py registra hosts, items y triggers por API.</a:t>
+              <a:t>provision_zabbix.py registra hosts, items, triggers y web scenario por API.</a:t>
             </a:r>
           </a:p>
         </p:txBody>
@@ -4743,7 +5129,7 @@
               </a:defRPr>
             </a:pPr>
             <a:r>
-              <a:t>Los checks de servicio entregan 1 cuando responden.</a:t>
+              <a:t>Centro de graficas muestra CPU, memoria, disco, rutas y carga.</a:t>
             </a:r>
           </a:p>
           <a:p>
@@ -4758,7 +5144,7 @@
               </a:defRPr>
             </a:pPr>
             <a:r>
-              <a:t>Los graficos permiten revisar comportamiento historico.</a:t>
+              <a:t>La matriz de cumplimiento /api/compliance cruza requisitos contra evidencia.</a:t>
             </a:r>
           </a:p>
         </p:txBody>
@@ -5115,7 +5501,7 @@
               </a:defRPr>
             </a:pPr>
             <a:r>
-              <a:t>No se usan cuentas reales ni servidores externos.</a:t>
+              <a:t>El portal mailhog-zabbix tiene login propio.</a:t>
             </a:r>
           </a:p>
           <a:p>
@@ -5130,7 +5516,7 @@
               </a:defRPr>
             </a:pPr>
             <a:r>
-              <a:t>La evidencia valida el flujo completo de notificacion.</a:t>
+              <a:t>Tambien existe canal SMTP real del dominio para escalamiento.</a:t>
             </a:r>
           </a:p>
         </p:txBody>

--- a/entrega-final/Presentacion_Proyecto7_Zabbix.pptx
+++ b/entrega-final/Presentacion_Proyecto7_Zabbix.pptx
@@ -3209,8 +3209,8 @@
               </a:rPr>
               <a:t>Juan Camilo Ballesteros Sierra
 Luis Felipe Murillo Matallana
-Juan Sebastian Delgado
-Daniela Castro Quinones</a:t>
+Juan Sebastián Delgado
+Daniela Castro Quiñones</a:t>
             </a:r>
           </a:p>
         </p:txBody>
@@ -3332,7 +3332,7 @@
               </a:defRPr>
             </a:pPr>
             <a:r>
-              <a:t>Artillery genera trafico real contra frontend y API.</a:t>
+              <a:t>Artillery genera tráfico real contra frontend y API.</a:t>
             </a:r>
           </a:p>
           <a:p>
@@ -3347,7 +3347,7 @@
               </a:defRPr>
             </a:pPr>
             <a:r>
-              <a:t>El backend registra telemetria e incidentes en MariaDB.</a:t>
+              <a:t>El backend registra telemetría e incidentes en MariaDB.</a:t>
             </a:r>
           </a:p>
           <a:p>
@@ -3362,7 +3362,7 @@
               </a:defRPr>
             </a:pPr>
             <a:r>
-              <a:t>Zabbix observa /metrics, DB status y web scenario publico.</a:t>
+              <a:t>Zabbix observa /metrics, DB status y web scenario público.</a:t>
             </a:r>
           </a:p>
         </p:txBody>
@@ -3539,7 +3539,7 @@
               </a:defRPr>
             </a:pPr>
             <a:r>
-              <a:t>Auditoria automatica con 0 fallas esperadas.</a:t>
+              <a:t>Auditoría automática con 0 fallas esperadas.</a:t>
             </a:r>
           </a:p>
         </p:txBody>
@@ -3887,7 +3887,7 @@
               </a:defRPr>
             </a:pPr>
             <a:r>
-              <a:t>El portal publico, Artillery y /api/compliance elevan la solucion sobre el minimo.</a:t>
+              <a:t>El portal público, Artillery y /api/compliance elevan la solución sobre el mínimo.</a:t>
             </a:r>
           </a:p>
         </p:txBody>
@@ -4049,7 +4049,7 @@
               </a:defRPr>
             </a:pPr>
             <a:r>
-              <a:t>Simular caida: docker compose -f docker-compose.vps.yml stop web-service.</a:t>
+              <a:t>Simular caída: docker compose -f docker-compose.vps.yml stop web-service.</a:t>
             </a:r>
           </a:p>
           <a:p>
@@ -4211,7 +4211,7 @@
               </a:defRPr>
             </a:pPr>
             <a:r>
-              <a:t>La revision manual tarda y no deja historial.</a:t>
+              <a:t>La revisión manual tarda y no deja historial.</a:t>
             </a:r>
           </a:p>
           <a:p>
@@ -4226,7 +4226,7 @@
               </a:defRPr>
             </a:pPr>
             <a:r>
-              <a:t>Se necesita visibilidad, alertas y evidencia para sustentacion.</a:t>
+              <a:t>Se necesita visibilidad, alertas y evidencia para sustentación.</a:t>
             </a:r>
           </a:p>
         </p:txBody>
@@ -4388,7 +4388,7 @@
               </a:defRPr>
             </a:pPr>
             <a:r>
-              <a:t>Validar triggers, dashboards, historicos y alertas por correo.</a:t>
+              <a:t>Validar triggers, dashboards, históricos y alertas por correo.</a:t>
             </a:r>
           </a:p>
           <a:p>
@@ -4403,7 +4403,7 @@
               </a:defRPr>
             </a:pPr>
             <a:r>
-              <a:t>Agregar portal HTTPS con backend, graficas, SLO y carga Artillery.</a:t>
+              <a:t>Agregar portal HTTPS con backend, gráficas, SLO y carga Artillery.</a:t>
             </a:r>
           </a:p>
         </p:txBody>
@@ -4565,7 +4565,7 @@
               </a:defRPr>
             </a:pPr>
             <a:r>
-              <a:t>Red interna proyecto7-monitoring para resolucion por nombre.</a:t>
+              <a:t>Red interna proyecto7-monitoring para resolución por nombre.</a:t>
             </a:r>
           </a:p>
           <a:p>
@@ -4899,7 +4899,7 @@
                   <a:srgbClr val="11323D"/>
                 </a:solidFill>
               </a:rPr>
-              <a:t>Implementacion</a:t>
+              <a:t>Implementación</a:t>
             </a:r>
           </a:p>
         </p:txBody>
@@ -4967,7 +4967,7 @@
               </a:defRPr>
             </a:pPr>
             <a:r>
-              <a:t>Configuraciones Zabbix se montan como volumen.</a:t>
+              <a:t>Las configuraciones Zabbix se montan como volumen.</a:t>
             </a:r>
           </a:p>
           <a:p>
@@ -5114,7 +5114,7 @@
               </a:defRPr>
             </a:pPr>
             <a:r>
-              <a:t>Latest data muestra disponibilidad y metricas.</a:t>
+              <a:t>Latest data muestra disponibilidad y métricas.</a:t>
             </a:r>
           </a:p>
           <a:p>
@@ -5129,7 +5129,7 @@
               </a:defRPr>
             </a:pPr>
             <a:r>
-              <a:t>Centro de graficas muestra CPU, memoria, disco, rutas y carga.</a:t>
+              <a:t>Centro de gráficas muestra CPU, memoria, disco, rutas y carga.</a:t>
             </a:r>
           </a:p>
           <a:p>
@@ -5262,7 +5262,7 @@
                   <a:srgbClr val="11323D"/>
                 </a:solidFill>
               </a:rPr>
-              <a:t>Prueba de caida</a:t>
+              <a:t>Prueba de caída</a:t>
             </a:r>
           </a:p>
         </p:txBody>
@@ -5300,7 +5300,7 @@
               </a:defRPr>
             </a:pPr>
             <a:r>
-              <a:t>Se detiene web-service durante la demostracion.</a:t>
+              <a:t>Se detiene web-service durante la demostración.</a:t>
             </a:r>
           </a:p>
           <a:p>
@@ -5486,7 +5486,7 @@
               </a:defRPr>
             </a:pPr>
             <a:r>
-              <a:t>MailHog recibe correos de problema y recuperacion.</a:t>
+              <a:t>MailHog recibe correos de problema y recuperación.</a:t>
             </a:r>
           </a:p>
           <a:p>
@@ -5516,7 +5516,7 @@
               </a:defRPr>
             </a:pPr>
             <a:r>
-              <a:t>Tambien existe canal SMTP real del dominio para escalamiento.</a:t>
+              <a:t>También existe canal SMTP real del dominio para escalamiento.</a:t>
             </a:r>
           </a:p>
         </p:txBody>

--- a/entrega-final/Presentacion_Proyecto7_Zabbix.pptx
+++ b/entrega-final/Presentacion_Proyecto7_Zabbix.pptx
@@ -3322,7 +3322,7 @@
                 </a:solidFill>
                 <a:latin typeface="Aptos"/>
               </a:rPr>
-              <a:t>Una plataforma dockerizada con Zabbix 6.x, alertas, backend real, métricas, SLO y pruebas de carga en vivo.</a:t>
+              <a:t>Zabbix 6.x monitoreando servicios Docker, alertas, backend real, métricas, SLO y pruebas de carga en vivo.</a:t>
             </a:r>
           </a:p>
         </p:txBody>
@@ -4136,7 +4136,7 @@
                 </a:solidFill>
                 <a:latin typeface="Aptos Display"/>
               </a:rPr>
-              <a:t>MailHog evidencia las alertas.</a:t>
+              <a:t>MailHog captura alertas.</a:t>
             </a:r>
           </a:p>
         </p:txBody>
@@ -4747,7 +4747,7 @@
                 </a:solidFill>
                 <a:latin typeface="Aptos Display"/>
               </a:rPr>
-              <a:t>Artillery convierte la demo en una prueba de carga.</a:t>
+              <a:t>Artillery mete presión real a la demo.</a:t>
             </a:r>
           </a:p>
         </p:txBody>
@@ -5279,7 +5279,7 @@
                 </a:solidFill>
                 <a:latin typeface="Aptos"/>
               </a:rPr>
-              <a:t>El backend registra telemetría e incidentes en MariaDB mientras Zabbix observa endpoints públicos, DB status y /metrics.</a:t>
+              <a:t>La app no solo responde: guarda telemetría, registra incidentes y expone métricas para Zabbix.</a:t>
             </a:r>
           </a:p>
         </p:txBody>
@@ -5437,7 +5437,7 @@
                 </a:solidFill>
                 <a:latin typeface="Aptos"/>
               </a:rPr>
-              <a:t>Durante la sustentación suben requests, rutas golpeadas, cargas recientes y SLO en el portal.</a:t>
+              <a:t>Mientras corre Artillery suben requests, rutas golpeadas, cargas recientes y SLO en el portal.</a:t>
             </a:r>
           </a:p>
         </p:txBody>
@@ -5753,7 +5753,7 @@
                 </a:solidFill>
                 <a:latin typeface="Aptos Display"/>
               </a:rPr>
-              <a:t>La evaluación queda cubierta con evidencia y verificación reproducible.</a:t>
+              <a:t>El cierre se defiende con métricas y auditoría.</a:t>
             </a:r>
           </a:p>
         </p:txBody>
@@ -6861,7 +6861,7 @@
                 </a:solidFill>
                 <a:latin typeface="Aptos Display"/>
               </a:rPr>
-              <a:t>El proyecto se entrega como repositorio, informe, deck y demo pública.</a:t>
+              <a:t>Queda repo, informe, deck y demo pública.</a:t>
             </a:r>
           </a:p>
         </p:txBody>
@@ -7844,7 +7844,7 @@
                 </a:solidFill>
                 <a:latin typeface="Aptos Display"/>
               </a:rPr>
-              <a:t>La demo cierra con tráfico, caída, alerta y auditoría.</a:t>
+              <a:t>La demo debe cerrar viendo tráfico, caída y alerta.</a:t>
             </a:r>
           </a:p>
         </p:txBody>
@@ -8495,7 +8495,7 @@
                 </a:solidFill>
                 <a:latin typeface="Aptos"/>
               </a:rPr>
-              <a:t>Cierre: Zabbix detecta, MailHog evidencia, Artillery presiona y la auditoría confirma cumplimiento.</a:t>
+              <a:t>Cierre: Zabbix detecta, MailHog muestra, Artillery presiona y la auditoría confirma.</a:t>
             </a:r>
           </a:p>
         </p:txBody>
@@ -8766,7 +8766,7 @@
                 </a:solidFill>
                 <a:latin typeface="Aptos Display"/>
               </a:rPr>
-              <a:t>Sin observabilidad, la falla se detecta tarde y sin evidencia.</a:t>
+              <a:t>El riesgo real es enterarse tarde de una caída.</a:t>
             </a:r>
           </a:p>
         </p:txBody>
@@ -10093,7 +10093,7 @@
                 </a:solidFill>
                 <a:latin typeface="Aptos Display"/>
               </a:rPr>
-              <a:t>La entrega es una plataforma observable, no una maqueta.</a:t>
+              <a:t>Montamos algo que se puede medir, presionar y recuperar.</a:t>
             </a:r>
           </a:p>
         </p:txBody>
@@ -10637,7 +10637,7 @@
                 </a:solidFill>
                 <a:latin typeface="Aptos"/>
               </a:rPr>
-              <a:t>Zabbix observa una infraestructura real, detecta fallas y permite explicar el comportamiento del sistema bajo carga.</a:t>
+              <a:t>La gracia del proyecto está en mostrar operación: salud, carga, incidentes, alertas y recuperación.</a:t>
             </a:r>
           </a:p>
         </p:txBody>
@@ -10908,7 +10908,7 @@
                 </a:solidFill>
                 <a:latin typeface="Aptos Display"/>
               </a:rPr>
-              <a:t>Compose conecta monitoreo, servicios y HTTPS.</a:t>
+              <a:t>Zabbix observa servicios Docker.</a:t>
             </a:r>
           </a:p>
         </p:txBody>
@@ -13164,7 +13164,7 @@
                 </a:solidFill>
                 <a:latin typeface="Aptos Display"/>
               </a:rPr>
-              <a:t>Cuatro servicios distintos quedan medidos como hosts operativos.</a:t>
+              <a:t>El inventario cubre web, base de datos, DNS y FTP.</a:t>
             </a:r>
           </a:p>
         </p:txBody>
@@ -15086,7 +15086,7 @@
                 </a:solidFill>
                 <a:latin typeface="Aptos Display"/>
               </a:rPr>
-              <a:t>El despliegue se puede reconstruir desde archivos, no desde pasos manuales.</a:t>
+              <a:t>Todo se puede levantar de nuevo desde el repo.</a:t>
             </a:r>
           </a:p>
         </p:txBody>
@@ -16524,7 +16524,7 @@
                 </a:solidFill>
                 <a:latin typeface="Aptos"/>
               </a:rPr>
-              <a:t>La solución queda trazable: archivo -&gt; contenedor -&gt; objeto Zabbix -&gt; evidencia -&gt; auditoría.</a:t>
+              <a:t>Cada cosa que se muestra sale de un archivo, un contenedor, un item de Zabbix o una evidencia.</a:t>
             </a:r>
           </a:p>
         </p:txBody>
@@ -16840,7 +16840,7 @@
                 </a:solidFill>
                 <a:latin typeface="Aptos Display"/>
               </a:rPr>
-              <a:t>El dashboard resume la operación.</a:t>
+              <a:t>El dashboard muestra el pulso del sistema.</a:t>
             </a:r>
           </a:p>
         </p:txBody>
@@ -17640,7 +17640,7 @@
                 </a:solidFill>
                 <a:latin typeface="Aptos Display"/>
               </a:rPr>
-              <a:t>Latest data prueba que Zabbix recibe señales de hosts y servicios.</a:t>
+              <a:t>Latest data separa sano de caído.</a:t>
             </a:r>
           </a:p>
         </p:txBody>
@@ -18454,7 +18454,7 @@
                 </a:solidFill>
                 <a:latin typeface="Aptos Display"/>
               </a:rPr>
-              <a:t>La prueba clave recorre falla, problema, alerta y recuperación.</a:t>
+              <a:t>La caída controlada prueba el flujo completo.</a:t>
             </a:r>
           </a:p>
         </p:txBody>

--- a/entrega-final/Presentacion_Proyecto7_Zabbix.pptx
+++ b/entrega-final/Presentacion_Proyecto7_Zabbix.pptx
@@ -19,6 +19,9 @@
     <p:sldId id="267" r:id="rId18"/>
     <p:sldId id="268" r:id="rId19"/>
     <p:sldId id="269" r:id="rId20"/>
+    <p:sldId id="270" r:id="rId21"/>
+    <p:sldId id="271" r:id="rId22"/>
+    <p:sldId id="272" r:id="rId23"/>
   </p:sldIdLst>
   <p:sldSz cx="12191695" cy="6858000" type="screen4x3"/>
   <p:notesSz cx="6858000" cy="9144000"/>
@@ -3925,7 +3928,7 @@
                 </a:solidFill>
                 <a:latin typeface="Aptos"/>
               </a:rPr>
-              <a:t>01/14</a:t>
+              <a:t>01/17</a:t>
             </a:r>
           </a:p>
         </p:txBody>
@@ -4581,7 +4584,7 @@
                 </a:solidFill>
                 <a:latin typeface="Aptos"/>
               </a:rPr>
-              <a:t>10/14</a:t>
+              <a:t>10/17</a:t>
             </a:r>
           </a:p>
         </p:txBody>
@@ -5542,7 +5545,7 @@
                 </a:solidFill>
                 <a:latin typeface="Aptos"/>
               </a:rPr>
-              <a:t>11/14</a:t>
+              <a:t>11/17</a:t>
             </a:r>
           </a:p>
         </p:txBody>
@@ -6695,7 +6698,7 @@
                 </a:solidFill>
                 <a:latin typeface="Aptos"/>
               </a:rPr>
-              <a:t>12/14</a:t>
+              <a:t>12/17</a:t>
             </a:r>
           </a:p>
         </p:txBody>
@@ -7633,7 +7636,7 @@
                 </a:solidFill>
                 <a:latin typeface="Aptos"/>
               </a:rPr>
-              <a:t>13/14</a:t>
+              <a:t>13/17</a:t>
             </a:r>
           </a:p>
         </p:txBody>
@@ -8600,7 +8603,3207 @@
                 </a:solidFill>
                 <a:latin typeface="Aptos"/>
               </a:rPr>
-              <a:t>14/14</a:t>
+              <a:t>14/17</a:t>
+            </a:r>
+          </a:p>
+        </p:txBody>
+      </p:sp>
+    </p:spTree>
+  </p:cSld>
+  <p:clrMapOvr>
+    <a:masterClrMapping/>
+  </p:clrMapOvr>
+</p:sld>
+</file>
+
+<file path=ppt/slides/slide15.xml><?xml version="1.0" encoding="utf-8"?>
+<p:sld xmlns:a="http://schemas.openxmlformats.org/drawingml/2006/main" xmlns:p="http://schemas.openxmlformats.org/presentationml/2006/main" xmlns:r="http://schemas.openxmlformats.org/officeDocument/2006/relationships">
+  <p:cSld>
+    <p:bg>
+      <p:bgPr>
+        <a:solidFill>
+          <a:srgbClr val="F7FAF7"/>
+        </a:solidFill>
+        <a:effectLst/>
+      </p:bgPr>
+    </p:bg>
+    <p:spTree>
+      <p:nvGrpSpPr>
+        <p:cNvPr id="1" name=""/>
+        <p:cNvGrpSpPr/>
+        <p:nvPr/>
+      </p:nvGrpSpPr>
+      <p:grpSpPr/>
+      <p:sp>
+        <p:nvSpPr>
+          <p:cNvPr id="2" name="TextBox 1"/>
+          <p:cNvSpPr txBox="1"/>
+          <p:nvPr/>
+        </p:nvSpPr>
+        <p:spPr>
+          <a:xfrm>
+            <a:off x="502920" y="384048"/>
+            <a:ext cx="384048" cy="201168"/>
+          </a:xfrm>
+          <a:prstGeom prst="rect">
+            <a:avLst/>
+          </a:prstGeom>
+          <a:noFill/>
+        </p:spPr>
+        <p:txBody>
+          <a:bodyPr wrap="square" lIns="0" rIns="0" tIns="0" bIns="0" anchor="t">
+            <a:spAutoFit/>
+          </a:bodyPr>
+          <a:lstStyle/>
+          <a:p>
+            <a:pPr algn="l"/>
+            <a:r>
+              <a:rPr sz="800" b="1">
+                <a:solidFill>
+                  <a:srgbClr val="0A1820"/>
+                </a:solidFill>
+                <a:latin typeface="Aptos"/>
+              </a:rPr>
+              <a:t>15</a:t>
+            </a:r>
+          </a:p>
+        </p:txBody>
+      </p:sp>
+      <p:cxnSp>
+        <p:nvCxnSpPr>
+          <p:cNvPr id="3" name="Connector 2"/>
+          <p:cNvCxnSpPr/>
+          <p:nvPr/>
+        </p:nvCxnSpPr>
+        <p:spPr>
+          <a:xfrm>
+            <a:off x="941832" y="475488"/>
+            <a:ext cx="685800" cy="0"/>
+          </a:xfrm>
+          <a:prstGeom prst="line">
+            <a:avLst/>
+          </a:prstGeom>
+          <a:ln w="13970">
+            <a:solidFill>
+              <a:srgbClr val="0A1820"/>
+            </a:solidFill>
+          </a:ln>
+        </p:spPr>
+        <p:style>
+          <a:lnRef idx="2">
+            <a:schemeClr val="accent1"/>
+          </a:lnRef>
+          <a:fillRef idx="0">
+            <a:schemeClr val="accent1"/>
+          </a:fillRef>
+          <a:effectRef idx="1">
+            <a:schemeClr val="accent1"/>
+          </a:effectRef>
+          <a:fontRef idx="minor">
+            <a:schemeClr val="tx1"/>
+          </a:fontRef>
+        </p:style>
+      </p:cxnSp>
+      <p:sp>
+        <p:nvSpPr>
+          <p:cNvPr id="4" name="TextBox 3"/>
+          <p:cNvSpPr txBox="1"/>
+          <p:nvPr/>
+        </p:nvSpPr>
+        <p:spPr>
+          <a:xfrm>
+            <a:off x="1737360" y="356616"/>
+            <a:ext cx="3108960" cy="274320"/>
+          </a:xfrm>
+          <a:prstGeom prst="rect">
+            <a:avLst/>
+          </a:prstGeom>
+          <a:noFill/>
+        </p:spPr>
+        <p:txBody>
+          <a:bodyPr wrap="square" lIns="0" rIns="0" tIns="0" bIns="0" anchor="t">
+            <a:spAutoFit/>
+          </a:bodyPr>
+          <a:lstStyle/>
+          <a:p>
+            <a:pPr algn="l"/>
+            <a:r>
+              <a:rPr sz="800" b="1">
+                <a:solidFill>
+                  <a:srgbClr val="0A1820"/>
+                </a:solidFill>
+                <a:latin typeface="Aptos"/>
+              </a:rPr>
+              <a:t>ALTERNATIVAS</a:t>
+            </a:r>
+          </a:p>
+        </p:txBody>
+      </p:sp>
+      <p:sp>
+        <p:nvSpPr>
+          <p:cNvPr id="5" name="TextBox 4"/>
+          <p:cNvSpPr txBox="1"/>
+          <p:nvPr/>
+        </p:nvSpPr>
+        <p:spPr>
+          <a:xfrm>
+            <a:off x="502920" y="713232"/>
+            <a:ext cx="7498079" cy="868680"/>
+          </a:xfrm>
+          <a:prstGeom prst="rect">
+            <a:avLst/>
+          </a:prstGeom>
+          <a:noFill/>
+        </p:spPr>
+        <p:txBody>
+          <a:bodyPr wrap="square" lIns="0" rIns="0" tIns="0" bIns="0" anchor="t">
+            <a:spAutoFit/>
+          </a:bodyPr>
+          <a:lstStyle/>
+          <a:p>
+            <a:pPr algn="l"/>
+            <a:r>
+              <a:rPr sz="3000" b="1">
+                <a:solidFill>
+                  <a:srgbClr val="0A1820"/>
+                </a:solidFill>
+                <a:latin typeface="Aptos Display"/>
+              </a:rPr>
+              <a:t>Zabbix se eligió por equilibrio entre control, alertas y despliegue local.</a:t>
+            </a:r>
+          </a:p>
+        </p:txBody>
+      </p:sp>
+      <p:sp>
+        <p:nvSpPr>
+          <p:cNvPr id="6" name="Rounded Rectangle 5"/>
+          <p:cNvSpPr/>
+          <p:nvPr/>
+        </p:nvSpPr>
+        <p:spPr>
+          <a:xfrm>
+            <a:off x="749808" y="1572768"/>
+            <a:ext cx="2148840" cy="658368"/>
+          </a:xfrm>
+          <a:prstGeom prst="roundRect">
+            <a:avLst/>
+          </a:prstGeom>
+          <a:solidFill>
+            <a:srgbClr val="FFFFFF"/>
+          </a:solidFill>
+          <a:ln w="10160">
+            <a:solidFill>
+              <a:srgbClr val="BFCCD6"/>
+            </a:solidFill>
+          </a:ln>
+        </p:spPr>
+        <p:style>
+          <a:lnRef idx="1">
+            <a:schemeClr val="accent1"/>
+          </a:lnRef>
+          <a:fillRef idx="3">
+            <a:schemeClr val="accent1"/>
+          </a:fillRef>
+          <a:effectRef idx="2">
+            <a:schemeClr val="accent1"/>
+          </a:effectRef>
+          <a:fontRef idx="minor">
+            <a:schemeClr val="lt1"/>
+          </a:fontRef>
+        </p:style>
+        <p:txBody>
+          <a:bodyPr rtlCol="0" anchor="ctr"/>
+          <a:lstStyle/>
+          <a:p>
+            <a:pPr algn="ctr"/>
+          </a:p>
+        </p:txBody>
+      </p:sp>
+      <p:sp>
+        <p:nvSpPr>
+          <p:cNvPr id="7" name="TextBox 6"/>
+          <p:cNvSpPr txBox="1"/>
+          <p:nvPr/>
+        </p:nvSpPr>
+        <p:spPr>
+          <a:xfrm>
+            <a:off x="932688" y="1719072"/>
+            <a:ext cx="1755648" cy="210312"/>
+          </a:xfrm>
+          <a:prstGeom prst="rect">
+            <a:avLst/>
+          </a:prstGeom>
+          <a:noFill/>
+        </p:spPr>
+        <p:txBody>
+          <a:bodyPr wrap="square" lIns="0" rIns="0" tIns="0" bIns="0" anchor="t">
+            <a:spAutoFit/>
+          </a:bodyPr>
+          <a:lstStyle/>
+          <a:p>
+            <a:pPr algn="l"/>
+            <a:r>
+              <a:rPr sz="1200" b="1">
+                <a:solidFill>
+                  <a:srgbClr val="F59E0B"/>
+                </a:solidFill>
+                <a:latin typeface="Aptos"/>
+              </a:rPr>
+              <a:t>Nagios Core</a:t>
+            </a:r>
+          </a:p>
+        </p:txBody>
+      </p:sp>
+      <p:sp>
+        <p:nvSpPr>
+          <p:cNvPr id="8" name="Rounded Rectangle 7"/>
+          <p:cNvSpPr/>
+          <p:nvPr/>
+        </p:nvSpPr>
+        <p:spPr>
+          <a:xfrm>
+            <a:off x="3090672" y="1572768"/>
+            <a:ext cx="3566160" cy="658368"/>
+          </a:xfrm>
+          <a:prstGeom prst="roundRect">
+            <a:avLst/>
+          </a:prstGeom>
+          <a:solidFill>
+            <a:srgbClr val="F5F8FA"/>
+          </a:solidFill>
+          <a:ln w="10160">
+            <a:solidFill>
+              <a:srgbClr val="BFCCD6"/>
+            </a:solidFill>
+          </a:ln>
+        </p:spPr>
+        <p:style>
+          <a:lnRef idx="1">
+            <a:schemeClr val="accent1"/>
+          </a:lnRef>
+          <a:fillRef idx="3">
+            <a:schemeClr val="accent1"/>
+          </a:fillRef>
+          <a:effectRef idx="2">
+            <a:schemeClr val="accent1"/>
+          </a:effectRef>
+          <a:fontRef idx="minor">
+            <a:schemeClr val="lt1"/>
+          </a:fontRef>
+        </p:style>
+        <p:txBody>
+          <a:bodyPr rtlCol="0" anchor="ctr"/>
+          <a:lstStyle/>
+          <a:p>
+            <a:pPr algn="ctr"/>
+          </a:p>
+        </p:txBody>
+      </p:sp>
+      <p:sp>
+        <p:nvSpPr>
+          <p:cNvPr id="9" name="TextBox 8"/>
+          <p:cNvSpPr txBox="1"/>
+          <p:nvPr/>
+        </p:nvSpPr>
+        <p:spPr>
+          <a:xfrm>
+            <a:off x="3273552" y="1700784"/>
+            <a:ext cx="3154680" cy="256032"/>
+          </a:xfrm>
+          <a:prstGeom prst="rect">
+            <a:avLst/>
+          </a:prstGeom>
+          <a:noFill/>
+        </p:spPr>
+        <p:txBody>
+          <a:bodyPr wrap="square" lIns="0" rIns="0" tIns="0" bIns="0" anchor="t">
+            <a:spAutoFit/>
+          </a:bodyPr>
+          <a:lstStyle/>
+          <a:p>
+            <a:pPr algn="l"/>
+            <a:r>
+              <a:rPr sz="1050" b="0">
+                <a:solidFill>
+                  <a:srgbClr val="0A1820"/>
+                </a:solidFill>
+                <a:latin typeface="Aptos"/>
+              </a:rPr>
+              <a:t>Checks maduros y muchos plugins.</a:t>
+            </a:r>
+          </a:p>
+        </p:txBody>
+      </p:sp>
+      <p:sp>
+        <p:nvSpPr>
+          <p:cNvPr id="10" name="Rounded Rectangle 9"/>
+          <p:cNvSpPr/>
+          <p:nvPr/>
+        </p:nvSpPr>
+        <p:spPr>
+          <a:xfrm>
+            <a:off x="6903720" y="1572768"/>
+            <a:ext cx="4160520" cy="658368"/>
+          </a:xfrm>
+          <a:prstGeom prst="roundRect">
+            <a:avLst/>
+          </a:prstGeom>
+          <a:solidFill>
+            <a:srgbClr val="FAF7F4"/>
+          </a:solidFill>
+          <a:ln w="10160">
+            <a:solidFill>
+              <a:srgbClr val="BFCCD6"/>
+            </a:solidFill>
+          </a:ln>
+        </p:spPr>
+        <p:style>
+          <a:lnRef idx="1">
+            <a:schemeClr val="accent1"/>
+          </a:lnRef>
+          <a:fillRef idx="3">
+            <a:schemeClr val="accent1"/>
+          </a:fillRef>
+          <a:effectRef idx="2">
+            <a:schemeClr val="accent1"/>
+          </a:effectRef>
+          <a:fontRef idx="minor">
+            <a:schemeClr val="lt1"/>
+          </a:fontRef>
+        </p:style>
+        <p:txBody>
+          <a:bodyPr rtlCol="0" anchor="ctr"/>
+          <a:lstStyle/>
+          <a:p>
+            <a:pPr algn="ctr"/>
+          </a:p>
+        </p:txBody>
+      </p:sp>
+      <p:sp>
+        <p:nvSpPr>
+          <p:cNvPr id="11" name="TextBox 10"/>
+          <p:cNvSpPr txBox="1"/>
+          <p:nvPr/>
+        </p:nvSpPr>
+        <p:spPr>
+          <a:xfrm>
+            <a:off x="7086600" y="1700784"/>
+            <a:ext cx="3703320" cy="256032"/>
+          </a:xfrm>
+          <a:prstGeom prst="rect">
+            <a:avLst/>
+          </a:prstGeom>
+          <a:noFill/>
+        </p:spPr>
+        <p:txBody>
+          <a:bodyPr wrap="square" lIns="0" rIns="0" tIns="0" bIns="0" anchor="t">
+            <a:spAutoFit/>
+          </a:bodyPr>
+          <a:lstStyle/>
+          <a:p>
+            <a:pPr algn="l"/>
+            <a:r>
+              <a:rPr sz="1050" b="0">
+                <a:solidFill>
+                  <a:srgbClr val="0A1820"/>
+                </a:solidFill>
+                <a:latin typeface="Aptos"/>
+              </a:rPr>
+              <a:t>UI y dashboards limitados; menor automatización moderna.</a:t>
+            </a:r>
+          </a:p>
+        </p:txBody>
+      </p:sp>
+      <p:sp>
+        <p:nvSpPr>
+          <p:cNvPr id="12" name="Rounded Rectangle 11"/>
+          <p:cNvSpPr/>
+          <p:nvPr/>
+        </p:nvSpPr>
+        <p:spPr>
+          <a:xfrm>
+            <a:off x="749808" y="2532888"/>
+            <a:ext cx="2148840" cy="658368"/>
+          </a:xfrm>
+          <a:prstGeom prst="roundRect">
+            <a:avLst/>
+          </a:prstGeom>
+          <a:solidFill>
+            <a:srgbClr val="FFFFFF"/>
+          </a:solidFill>
+          <a:ln w="10160">
+            <a:solidFill>
+              <a:srgbClr val="BFCCD6"/>
+            </a:solidFill>
+          </a:ln>
+        </p:spPr>
+        <p:style>
+          <a:lnRef idx="1">
+            <a:schemeClr val="accent1"/>
+          </a:lnRef>
+          <a:fillRef idx="3">
+            <a:schemeClr val="accent1"/>
+          </a:fillRef>
+          <a:effectRef idx="2">
+            <a:schemeClr val="accent1"/>
+          </a:effectRef>
+          <a:fontRef idx="minor">
+            <a:schemeClr val="lt1"/>
+          </a:fontRef>
+        </p:style>
+        <p:txBody>
+          <a:bodyPr rtlCol="0" anchor="ctr"/>
+          <a:lstStyle/>
+          <a:p>
+            <a:pPr algn="ctr"/>
+          </a:p>
+        </p:txBody>
+      </p:sp>
+      <p:sp>
+        <p:nvSpPr>
+          <p:cNvPr id="13" name="TextBox 12"/>
+          <p:cNvSpPr txBox="1"/>
+          <p:nvPr/>
+        </p:nvSpPr>
+        <p:spPr>
+          <a:xfrm>
+            <a:off x="932688" y="2679192"/>
+            <a:ext cx="1755648" cy="210312"/>
+          </a:xfrm>
+          <a:prstGeom prst="rect">
+            <a:avLst/>
+          </a:prstGeom>
+          <a:noFill/>
+        </p:spPr>
+        <p:txBody>
+          <a:bodyPr wrap="square" lIns="0" rIns="0" tIns="0" bIns="0" anchor="t">
+            <a:spAutoFit/>
+          </a:bodyPr>
+          <a:lstStyle/>
+          <a:p>
+            <a:pPr algn="l"/>
+            <a:r>
+              <a:rPr sz="1200" b="1">
+                <a:solidFill>
+                  <a:srgbClr val="38BDF8"/>
+                </a:solidFill>
+                <a:latin typeface="Aptos"/>
+              </a:rPr>
+              <a:t>Prometheus + Grafana</a:t>
+            </a:r>
+          </a:p>
+        </p:txBody>
+      </p:sp>
+      <p:sp>
+        <p:nvSpPr>
+          <p:cNvPr id="14" name="Rounded Rectangle 13"/>
+          <p:cNvSpPr/>
+          <p:nvPr/>
+        </p:nvSpPr>
+        <p:spPr>
+          <a:xfrm>
+            <a:off x="3090672" y="2532888"/>
+            <a:ext cx="3566160" cy="658368"/>
+          </a:xfrm>
+          <a:prstGeom prst="roundRect">
+            <a:avLst/>
+          </a:prstGeom>
+          <a:solidFill>
+            <a:srgbClr val="F5F8FA"/>
+          </a:solidFill>
+          <a:ln w="10160">
+            <a:solidFill>
+              <a:srgbClr val="BFCCD6"/>
+            </a:solidFill>
+          </a:ln>
+        </p:spPr>
+        <p:style>
+          <a:lnRef idx="1">
+            <a:schemeClr val="accent1"/>
+          </a:lnRef>
+          <a:fillRef idx="3">
+            <a:schemeClr val="accent1"/>
+          </a:fillRef>
+          <a:effectRef idx="2">
+            <a:schemeClr val="accent1"/>
+          </a:effectRef>
+          <a:fontRef idx="minor">
+            <a:schemeClr val="lt1"/>
+          </a:fontRef>
+        </p:style>
+        <p:txBody>
+          <a:bodyPr rtlCol="0" anchor="ctr"/>
+          <a:lstStyle/>
+          <a:p>
+            <a:pPr algn="ctr"/>
+          </a:p>
+        </p:txBody>
+      </p:sp>
+      <p:sp>
+        <p:nvSpPr>
+          <p:cNvPr id="15" name="TextBox 14"/>
+          <p:cNvSpPr txBox="1"/>
+          <p:nvPr/>
+        </p:nvSpPr>
+        <p:spPr>
+          <a:xfrm>
+            <a:off x="3273552" y="2660904"/>
+            <a:ext cx="3154680" cy="256032"/>
+          </a:xfrm>
+          <a:prstGeom prst="rect">
+            <a:avLst/>
+          </a:prstGeom>
+          <a:noFill/>
+        </p:spPr>
+        <p:txBody>
+          <a:bodyPr wrap="square" lIns="0" rIns="0" tIns="0" bIns="0" anchor="t">
+            <a:spAutoFit/>
+          </a:bodyPr>
+          <a:lstStyle/>
+          <a:p>
+            <a:pPr algn="l"/>
+            <a:r>
+              <a:rPr sz="1050" b="0">
+                <a:solidFill>
+                  <a:srgbClr val="0A1820"/>
+                </a:solidFill>
+                <a:latin typeface="Aptos"/>
+              </a:rPr>
+              <a:t>Métricas modernas y visualización fuerte.</a:t>
+            </a:r>
+          </a:p>
+        </p:txBody>
+      </p:sp>
+      <p:sp>
+        <p:nvSpPr>
+          <p:cNvPr id="16" name="Rounded Rectangle 15"/>
+          <p:cNvSpPr/>
+          <p:nvPr/>
+        </p:nvSpPr>
+        <p:spPr>
+          <a:xfrm>
+            <a:off x="6903720" y="2532888"/>
+            <a:ext cx="4160520" cy="658368"/>
+          </a:xfrm>
+          <a:prstGeom prst="roundRect">
+            <a:avLst/>
+          </a:prstGeom>
+          <a:solidFill>
+            <a:srgbClr val="FAF7F4"/>
+          </a:solidFill>
+          <a:ln w="10160">
+            <a:solidFill>
+              <a:srgbClr val="BFCCD6"/>
+            </a:solidFill>
+          </a:ln>
+        </p:spPr>
+        <p:style>
+          <a:lnRef idx="1">
+            <a:schemeClr val="accent1"/>
+          </a:lnRef>
+          <a:fillRef idx="3">
+            <a:schemeClr val="accent1"/>
+          </a:fillRef>
+          <a:effectRef idx="2">
+            <a:schemeClr val="accent1"/>
+          </a:effectRef>
+          <a:fontRef idx="minor">
+            <a:schemeClr val="lt1"/>
+          </a:fontRef>
+        </p:style>
+        <p:txBody>
+          <a:bodyPr rtlCol="0" anchor="ctr"/>
+          <a:lstStyle/>
+          <a:p>
+            <a:pPr algn="ctr"/>
+          </a:p>
+        </p:txBody>
+      </p:sp>
+      <p:sp>
+        <p:nvSpPr>
+          <p:cNvPr id="17" name="TextBox 16"/>
+          <p:cNvSpPr txBox="1"/>
+          <p:nvPr/>
+        </p:nvSpPr>
+        <p:spPr>
+          <a:xfrm>
+            <a:off x="7086600" y="2660904"/>
+            <a:ext cx="3703320" cy="256032"/>
+          </a:xfrm>
+          <a:prstGeom prst="rect">
+            <a:avLst/>
+          </a:prstGeom>
+          <a:noFill/>
+        </p:spPr>
+        <p:txBody>
+          <a:bodyPr wrap="square" lIns="0" rIns="0" tIns="0" bIns="0" anchor="t">
+            <a:spAutoFit/>
+          </a:bodyPr>
+          <a:lstStyle/>
+          <a:p>
+            <a:pPr algn="l"/>
+            <a:r>
+              <a:rPr sz="1050" b="0">
+                <a:solidFill>
+                  <a:srgbClr val="0A1820"/>
+                </a:solidFill>
+                <a:latin typeface="Aptos"/>
+              </a:rPr>
+              <a:t>Requiere Alertmanager, exporters y más integración.</a:t>
+            </a:r>
+          </a:p>
+        </p:txBody>
+      </p:sp>
+      <p:sp>
+        <p:nvSpPr>
+          <p:cNvPr id="18" name="Rounded Rectangle 17"/>
+          <p:cNvSpPr/>
+          <p:nvPr/>
+        </p:nvSpPr>
+        <p:spPr>
+          <a:xfrm>
+            <a:off x="749808" y="3493008"/>
+            <a:ext cx="2148840" cy="658368"/>
+          </a:xfrm>
+          <a:prstGeom prst="roundRect">
+            <a:avLst/>
+          </a:prstGeom>
+          <a:solidFill>
+            <a:srgbClr val="FFFFFF"/>
+          </a:solidFill>
+          <a:ln w="10160">
+            <a:solidFill>
+              <a:srgbClr val="BFCCD6"/>
+            </a:solidFill>
+          </a:ln>
+        </p:spPr>
+        <p:style>
+          <a:lnRef idx="1">
+            <a:schemeClr val="accent1"/>
+          </a:lnRef>
+          <a:fillRef idx="3">
+            <a:schemeClr val="accent1"/>
+          </a:fillRef>
+          <a:effectRef idx="2">
+            <a:schemeClr val="accent1"/>
+          </a:effectRef>
+          <a:fontRef idx="minor">
+            <a:schemeClr val="lt1"/>
+          </a:fontRef>
+        </p:style>
+        <p:txBody>
+          <a:bodyPr rtlCol="0" anchor="ctr"/>
+          <a:lstStyle/>
+          <a:p>
+            <a:pPr algn="ctr"/>
+          </a:p>
+        </p:txBody>
+      </p:sp>
+      <p:sp>
+        <p:nvSpPr>
+          <p:cNvPr id="19" name="TextBox 18"/>
+          <p:cNvSpPr txBox="1"/>
+          <p:nvPr/>
+        </p:nvSpPr>
+        <p:spPr>
+          <a:xfrm>
+            <a:off x="932688" y="3639312"/>
+            <a:ext cx="1755648" cy="210312"/>
+          </a:xfrm>
+          <a:prstGeom prst="rect">
+            <a:avLst/>
+          </a:prstGeom>
+          <a:noFill/>
+        </p:spPr>
+        <p:txBody>
+          <a:bodyPr wrap="square" lIns="0" rIns="0" tIns="0" bIns="0" anchor="t">
+            <a:spAutoFit/>
+          </a:bodyPr>
+          <a:lstStyle/>
+          <a:p>
+            <a:pPr algn="l"/>
+            <a:r>
+              <a:rPr sz="1200" b="1">
+                <a:solidFill>
+                  <a:srgbClr val="EF4444"/>
+                </a:solidFill>
+                <a:latin typeface="Aptos"/>
+              </a:rPr>
+              <a:t>Datadog</a:t>
+            </a:r>
+          </a:p>
+        </p:txBody>
+      </p:sp>
+      <p:sp>
+        <p:nvSpPr>
+          <p:cNvPr id="20" name="Rounded Rectangle 19"/>
+          <p:cNvSpPr/>
+          <p:nvPr/>
+        </p:nvSpPr>
+        <p:spPr>
+          <a:xfrm>
+            <a:off x="3090672" y="3493008"/>
+            <a:ext cx="3566160" cy="658368"/>
+          </a:xfrm>
+          <a:prstGeom prst="roundRect">
+            <a:avLst/>
+          </a:prstGeom>
+          <a:solidFill>
+            <a:srgbClr val="F5F8FA"/>
+          </a:solidFill>
+          <a:ln w="10160">
+            <a:solidFill>
+              <a:srgbClr val="BFCCD6"/>
+            </a:solidFill>
+          </a:ln>
+        </p:spPr>
+        <p:style>
+          <a:lnRef idx="1">
+            <a:schemeClr val="accent1"/>
+          </a:lnRef>
+          <a:fillRef idx="3">
+            <a:schemeClr val="accent1"/>
+          </a:fillRef>
+          <a:effectRef idx="2">
+            <a:schemeClr val="accent1"/>
+          </a:effectRef>
+          <a:fontRef idx="minor">
+            <a:schemeClr val="lt1"/>
+          </a:fontRef>
+        </p:style>
+        <p:txBody>
+          <a:bodyPr rtlCol="0" anchor="ctr"/>
+          <a:lstStyle/>
+          <a:p>
+            <a:pPr algn="ctr"/>
+          </a:p>
+        </p:txBody>
+      </p:sp>
+      <p:sp>
+        <p:nvSpPr>
+          <p:cNvPr id="21" name="TextBox 20"/>
+          <p:cNvSpPr txBox="1"/>
+          <p:nvPr/>
+        </p:nvSpPr>
+        <p:spPr>
+          <a:xfrm>
+            <a:off x="3273552" y="3621024"/>
+            <a:ext cx="3154680" cy="256032"/>
+          </a:xfrm>
+          <a:prstGeom prst="rect">
+            <a:avLst/>
+          </a:prstGeom>
+          <a:noFill/>
+        </p:spPr>
+        <p:txBody>
+          <a:bodyPr wrap="square" lIns="0" rIns="0" tIns="0" bIns="0" anchor="t">
+            <a:spAutoFit/>
+          </a:bodyPr>
+          <a:lstStyle/>
+          <a:p>
+            <a:pPr algn="l"/>
+            <a:r>
+              <a:rPr sz="1050" b="0">
+                <a:solidFill>
+                  <a:srgbClr val="0A1820"/>
+                </a:solidFill>
+                <a:latin typeface="Aptos"/>
+              </a:rPr>
+              <a:t>Suite SaaS completa con APM y logs.</a:t>
+            </a:r>
+          </a:p>
+        </p:txBody>
+      </p:sp>
+      <p:sp>
+        <p:nvSpPr>
+          <p:cNvPr id="22" name="Rounded Rectangle 21"/>
+          <p:cNvSpPr/>
+          <p:nvPr/>
+        </p:nvSpPr>
+        <p:spPr>
+          <a:xfrm>
+            <a:off x="6903720" y="3493008"/>
+            <a:ext cx="4160520" cy="658368"/>
+          </a:xfrm>
+          <a:prstGeom prst="roundRect">
+            <a:avLst/>
+          </a:prstGeom>
+          <a:solidFill>
+            <a:srgbClr val="FAF7F4"/>
+          </a:solidFill>
+          <a:ln w="10160">
+            <a:solidFill>
+              <a:srgbClr val="BFCCD6"/>
+            </a:solidFill>
+          </a:ln>
+        </p:spPr>
+        <p:style>
+          <a:lnRef idx="1">
+            <a:schemeClr val="accent1"/>
+          </a:lnRef>
+          <a:fillRef idx="3">
+            <a:schemeClr val="accent1"/>
+          </a:fillRef>
+          <a:effectRef idx="2">
+            <a:schemeClr val="accent1"/>
+          </a:effectRef>
+          <a:fontRef idx="minor">
+            <a:schemeClr val="lt1"/>
+          </a:fontRef>
+        </p:style>
+        <p:txBody>
+          <a:bodyPr rtlCol="0" anchor="ctr"/>
+          <a:lstStyle/>
+          <a:p>
+            <a:pPr algn="ctr"/>
+          </a:p>
+        </p:txBody>
+      </p:sp>
+      <p:sp>
+        <p:nvSpPr>
+          <p:cNvPr id="23" name="TextBox 22"/>
+          <p:cNvSpPr txBox="1"/>
+          <p:nvPr/>
+        </p:nvSpPr>
+        <p:spPr>
+          <a:xfrm>
+            <a:off x="7086600" y="3621024"/>
+            <a:ext cx="3703320" cy="256032"/>
+          </a:xfrm>
+          <a:prstGeom prst="rect">
+            <a:avLst/>
+          </a:prstGeom>
+          <a:noFill/>
+        </p:spPr>
+        <p:txBody>
+          <a:bodyPr wrap="square" lIns="0" rIns="0" tIns="0" bIns="0" anchor="t">
+            <a:spAutoFit/>
+          </a:bodyPr>
+          <a:lstStyle/>
+          <a:p>
+            <a:pPr algn="l"/>
+            <a:r>
+              <a:rPr sz="1050" b="0">
+                <a:solidFill>
+                  <a:srgbClr val="0A1820"/>
+                </a:solidFill>
+                <a:latin typeface="Aptos"/>
+              </a:rPr>
+              <a:t>Costo, dependencia externa y datos fuera del laboratorio.</a:t>
+            </a:r>
+          </a:p>
+        </p:txBody>
+      </p:sp>
+      <p:sp>
+        <p:nvSpPr>
+          <p:cNvPr id="24" name="Rounded Rectangle 23"/>
+          <p:cNvSpPr/>
+          <p:nvPr/>
+        </p:nvSpPr>
+        <p:spPr>
+          <a:xfrm>
+            <a:off x="749808" y="4453128"/>
+            <a:ext cx="2148840" cy="658368"/>
+          </a:xfrm>
+          <a:prstGeom prst="roundRect">
+            <a:avLst/>
+          </a:prstGeom>
+          <a:solidFill>
+            <a:srgbClr val="FFFFFF"/>
+          </a:solidFill>
+          <a:ln w="10160">
+            <a:solidFill>
+              <a:srgbClr val="BFCCD6"/>
+            </a:solidFill>
+          </a:ln>
+        </p:spPr>
+        <p:style>
+          <a:lnRef idx="1">
+            <a:schemeClr val="accent1"/>
+          </a:lnRef>
+          <a:fillRef idx="3">
+            <a:schemeClr val="accent1"/>
+          </a:fillRef>
+          <a:effectRef idx="2">
+            <a:schemeClr val="accent1"/>
+          </a:effectRef>
+          <a:fontRef idx="minor">
+            <a:schemeClr val="lt1"/>
+          </a:fontRef>
+        </p:style>
+        <p:txBody>
+          <a:bodyPr rtlCol="0" anchor="ctr"/>
+          <a:lstStyle/>
+          <a:p>
+            <a:pPr algn="ctr"/>
+          </a:p>
+        </p:txBody>
+      </p:sp>
+      <p:sp>
+        <p:nvSpPr>
+          <p:cNvPr id="25" name="TextBox 24"/>
+          <p:cNvSpPr txBox="1"/>
+          <p:nvPr/>
+        </p:nvSpPr>
+        <p:spPr>
+          <a:xfrm>
+            <a:off x="932688" y="4599432"/>
+            <a:ext cx="1755648" cy="210312"/>
+          </a:xfrm>
+          <a:prstGeom prst="rect">
+            <a:avLst/>
+          </a:prstGeom>
+          <a:noFill/>
+        </p:spPr>
+        <p:txBody>
+          <a:bodyPr wrap="square" lIns="0" rIns="0" tIns="0" bIns="0" anchor="t">
+            <a:spAutoFit/>
+          </a:bodyPr>
+          <a:lstStyle/>
+          <a:p>
+            <a:pPr algn="l"/>
+            <a:r>
+              <a:rPr sz="1200" b="1">
+                <a:solidFill>
+                  <a:srgbClr val="22C5AA"/>
+                </a:solidFill>
+                <a:latin typeface="Aptos"/>
+              </a:rPr>
+              <a:t>Zabbix 6.x</a:t>
+            </a:r>
+          </a:p>
+        </p:txBody>
+      </p:sp>
+      <p:sp>
+        <p:nvSpPr>
+          <p:cNvPr id="26" name="Rounded Rectangle 25"/>
+          <p:cNvSpPr/>
+          <p:nvPr/>
+        </p:nvSpPr>
+        <p:spPr>
+          <a:xfrm>
+            <a:off x="3090672" y="4453128"/>
+            <a:ext cx="3566160" cy="658368"/>
+          </a:xfrm>
+          <a:prstGeom prst="roundRect">
+            <a:avLst/>
+          </a:prstGeom>
+          <a:solidFill>
+            <a:srgbClr val="F5F8FA"/>
+          </a:solidFill>
+          <a:ln w="10160">
+            <a:solidFill>
+              <a:srgbClr val="BFCCD6"/>
+            </a:solidFill>
+          </a:ln>
+        </p:spPr>
+        <p:style>
+          <a:lnRef idx="1">
+            <a:schemeClr val="accent1"/>
+          </a:lnRef>
+          <a:fillRef idx="3">
+            <a:schemeClr val="accent1"/>
+          </a:fillRef>
+          <a:effectRef idx="2">
+            <a:schemeClr val="accent1"/>
+          </a:effectRef>
+          <a:fontRef idx="minor">
+            <a:schemeClr val="lt1"/>
+          </a:fontRef>
+        </p:style>
+        <p:txBody>
+          <a:bodyPr rtlCol="0" anchor="ctr"/>
+          <a:lstStyle/>
+          <a:p>
+            <a:pPr algn="ctr"/>
+          </a:p>
+        </p:txBody>
+      </p:sp>
+      <p:sp>
+        <p:nvSpPr>
+          <p:cNvPr id="27" name="TextBox 26"/>
+          <p:cNvSpPr txBox="1"/>
+          <p:nvPr/>
+        </p:nvSpPr>
+        <p:spPr>
+          <a:xfrm>
+            <a:off x="3273552" y="4581144"/>
+            <a:ext cx="3154680" cy="256032"/>
+          </a:xfrm>
+          <a:prstGeom prst="rect">
+            <a:avLst/>
+          </a:prstGeom>
+          <a:noFill/>
+        </p:spPr>
+        <p:txBody>
+          <a:bodyPr wrap="square" lIns="0" rIns="0" tIns="0" bIns="0" anchor="t">
+            <a:spAutoFit/>
+          </a:bodyPr>
+          <a:lstStyle/>
+          <a:p>
+            <a:pPr algn="l"/>
+            <a:r>
+              <a:rPr sz="1050" b="0">
+                <a:solidFill>
+                  <a:srgbClr val="0A1820"/>
+                </a:solidFill>
+                <a:latin typeface="Aptos"/>
+              </a:rPr>
+              <a:t>Agentes, API, triggers, dashboards, histórico y correo integrados.</a:t>
+            </a:r>
+          </a:p>
+        </p:txBody>
+      </p:sp>
+      <p:sp>
+        <p:nvSpPr>
+          <p:cNvPr id="28" name="Rounded Rectangle 27"/>
+          <p:cNvSpPr/>
+          <p:nvPr/>
+        </p:nvSpPr>
+        <p:spPr>
+          <a:xfrm>
+            <a:off x="6903720" y="4453128"/>
+            <a:ext cx="4160520" cy="658368"/>
+          </a:xfrm>
+          <a:prstGeom prst="roundRect">
+            <a:avLst/>
+          </a:prstGeom>
+          <a:solidFill>
+            <a:srgbClr val="FAF7F4"/>
+          </a:solidFill>
+          <a:ln w="10160">
+            <a:solidFill>
+              <a:srgbClr val="BFCCD6"/>
+            </a:solidFill>
+          </a:ln>
+        </p:spPr>
+        <p:style>
+          <a:lnRef idx="1">
+            <a:schemeClr val="accent1"/>
+          </a:lnRef>
+          <a:fillRef idx="3">
+            <a:schemeClr val="accent1"/>
+          </a:fillRef>
+          <a:effectRef idx="2">
+            <a:schemeClr val="accent1"/>
+          </a:effectRef>
+          <a:fontRef idx="minor">
+            <a:schemeClr val="lt1"/>
+          </a:fontRef>
+        </p:style>
+        <p:txBody>
+          <a:bodyPr rtlCol="0" anchor="ctr"/>
+          <a:lstStyle/>
+          <a:p>
+            <a:pPr algn="ctr"/>
+          </a:p>
+        </p:txBody>
+      </p:sp>
+      <p:sp>
+        <p:nvSpPr>
+          <p:cNvPr id="29" name="TextBox 28"/>
+          <p:cNvSpPr txBox="1"/>
+          <p:nvPr/>
+        </p:nvSpPr>
+        <p:spPr>
+          <a:xfrm>
+            <a:off x="7086600" y="4581144"/>
+            <a:ext cx="3703320" cy="256032"/>
+          </a:xfrm>
+          <a:prstGeom prst="rect">
+            <a:avLst/>
+          </a:prstGeom>
+          <a:noFill/>
+        </p:spPr>
+        <p:txBody>
+          <a:bodyPr wrap="square" lIns="0" rIns="0" tIns="0" bIns="0" anchor="t">
+            <a:spAutoFit/>
+          </a:bodyPr>
+          <a:lstStyle/>
+          <a:p>
+            <a:pPr algn="l"/>
+            <a:r>
+              <a:rPr sz="1050" b="0">
+                <a:solidFill>
+                  <a:srgbClr val="0A1820"/>
+                </a:solidFill>
+                <a:latin typeface="Aptos"/>
+              </a:rPr>
+              <a:t>Más configuración inicial, pero reproducible con scripts.</a:t>
+            </a:r>
+          </a:p>
+        </p:txBody>
+      </p:sp>
+      <p:sp>
+        <p:nvSpPr>
+          <p:cNvPr id="30" name="Rounded Rectangle 29"/>
+          <p:cNvSpPr/>
+          <p:nvPr/>
+        </p:nvSpPr>
+        <p:spPr>
+          <a:xfrm>
+            <a:off x="777240" y="5513832"/>
+            <a:ext cx="10287000" cy="713232"/>
+          </a:xfrm>
+          <a:prstGeom prst="roundRect">
+            <a:avLst/>
+          </a:prstGeom>
+          <a:solidFill>
+            <a:srgbClr val="FFFFFF"/>
+          </a:solidFill>
+          <a:ln w="10160">
+            <a:solidFill>
+              <a:srgbClr val="BFCCD6"/>
+            </a:solidFill>
+          </a:ln>
+        </p:spPr>
+        <p:style>
+          <a:lnRef idx="1">
+            <a:schemeClr val="accent1"/>
+          </a:lnRef>
+          <a:fillRef idx="3">
+            <a:schemeClr val="accent1"/>
+          </a:fillRef>
+          <a:effectRef idx="2">
+            <a:schemeClr val="accent1"/>
+          </a:effectRef>
+          <a:fontRef idx="minor">
+            <a:schemeClr val="lt1"/>
+          </a:fontRef>
+        </p:style>
+        <p:txBody>
+          <a:bodyPr rtlCol="0" anchor="ctr"/>
+          <a:lstStyle/>
+          <a:p>
+            <a:pPr algn="ctr"/>
+          </a:p>
+        </p:txBody>
+      </p:sp>
+      <p:sp>
+        <p:nvSpPr>
+          <p:cNvPr id="31" name="Rectangle 30"/>
+          <p:cNvSpPr/>
+          <p:nvPr/>
+        </p:nvSpPr>
+        <p:spPr>
+          <a:xfrm>
+            <a:off x="777240" y="5513832"/>
+            <a:ext cx="73152" cy="713232"/>
+          </a:xfrm>
+          <a:prstGeom prst="rect">
+            <a:avLst/>
+          </a:prstGeom>
+          <a:solidFill>
+            <a:srgbClr val="22C5AA"/>
+          </a:solidFill>
+          <a:ln>
+            <a:noFill/>
+          </a:ln>
+        </p:spPr>
+        <p:style>
+          <a:lnRef idx="1">
+            <a:schemeClr val="accent1"/>
+          </a:lnRef>
+          <a:fillRef idx="3">
+            <a:schemeClr val="accent1"/>
+          </a:fillRef>
+          <a:effectRef idx="2">
+            <a:schemeClr val="accent1"/>
+          </a:effectRef>
+          <a:fontRef idx="minor">
+            <a:schemeClr val="lt1"/>
+          </a:fontRef>
+        </p:style>
+        <p:txBody>
+          <a:bodyPr rtlCol="0" anchor="ctr"/>
+          <a:lstStyle/>
+          <a:p>
+            <a:pPr algn="ctr"/>
+          </a:p>
+        </p:txBody>
+      </p:sp>
+      <p:sp>
+        <p:nvSpPr>
+          <p:cNvPr id="32" name="TextBox 31"/>
+          <p:cNvSpPr txBox="1"/>
+          <p:nvPr/>
+        </p:nvSpPr>
+        <p:spPr>
+          <a:xfrm>
+            <a:off x="1005840" y="5660136"/>
+            <a:ext cx="9902952" cy="219456"/>
+          </a:xfrm>
+          <a:prstGeom prst="rect">
+            <a:avLst/>
+          </a:prstGeom>
+          <a:noFill/>
+        </p:spPr>
+        <p:txBody>
+          <a:bodyPr wrap="square" lIns="0" rIns="0" tIns="0" bIns="0" anchor="t">
+            <a:spAutoFit/>
+          </a:bodyPr>
+          <a:lstStyle/>
+          <a:p>
+            <a:pPr algn="l"/>
+            <a:r>
+              <a:rPr sz="1200" b="1">
+                <a:solidFill>
+                  <a:srgbClr val="22C5AA"/>
+                </a:solidFill>
+                <a:latin typeface="Aptos"/>
+              </a:rPr>
+              <a:t>Decisión</a:t>
+            </a:r>
+          </a:p>
+        </p:txBody>
+      </p:sp>
+      <p:sp>
+        <p:nvSpPr>
+          <p:cNvPr id="33" name="TextBox 32"/>
+          <p:cNvSpPr txBox="1"/>
+          <p:nvPr/>
+        </p:nvSpPr>
+        <p:spPr>
+          <a:xfrm>
+            <a:off x="1005840" y="5943600"/>
+            <a:ext cx="9902952" cy="201167"/>
+          </a:xfrm>
+          <a:prstGeom prst="rect">
+            <a:avLst/>
+          </a:prstGeom>
+          <a:noFill/>
+        </p:spPr>
+        <p:txBody>
+          <a:bodyPr wrap="square" lIns="0" rIns="0" tIns="0" bIns="0" anchor="t">
+            <a:spAutoFit/>
+          </a:bodyPr>
+          <a:lstStyle/>
+          <a:p>
+            <a:pPr algn="l"/>
+            <a:r>
+              <a:rPr sz="1100" b="0">
+                <a:solidFill>
+                  <a:srgbClr val="0A1820"/>
+                </a:solidFill>
+                <a:latin typeface="Aptos"/>
+              </a:rPr>
+              <a:t>Zabbix permite cumplir el enunciado sin SaaS pago: monitoreo de hosts, servicios, triggers, dashboards, histórico, alertas y API en Docker Compose.</a:t>
+            </a:r>
+          </a:p>
+        </p:txBody>
+      </p:sp>
+      <p:cxnSp>
+        <p:nvCxnSpPr>
+          <p:cNvPr id="34" name="Connector 33"/>
+          <p:cNvCxnSpPr/>
+          <p:nvPr/>
+        </p:nvCxnSpPr>
+        <p:spPr>
+          <a:xfrm>
+            <a:off x="502920" y="6428232"/>
+            <a:ext cx="11155680" cy="0"/>
+          </a:xfrm>
+          <a:prstGeom prst="line">
+            <a:avLst/>
+          </a:prstGeom>
+          <a:ln w="8890">
+            <a:solidFill>
+              <a:srgbClr val="BFCCD6"/>
+            </a:solidFill>
+          </a:ln>
+        </p:spPr>
+        <p:style>
+          <a:lnRef idx="2">
+            <a:schemeClr val="accent1"/>
+          </a:lnRef>
+          <a:fillRef idx="0">
+            <a:schemeClr val="accent1"/>
+          </a:fillRef>
+          <a:effectRef idx="1">
+            <a:schemeClr val="accent1"/>
+          </a:effectRef>
+          <a:fontRef idx="minor">
+            <a:schemeClr val="tx1"/>
+          </a:fontRef>
+        </p:style>
+      </p:cxnSp>
+      <p:sp>
+        <p:nvSpPr>
+          <p:cNvPr id="35" name="TextBox 34"/>
+          <p:cNvSpPr txBox="1"/>
+          <p:nvPr/>
+        </p:nvSpPr>
+        <p:spPr>
+          <a:xfrm>
+            <a:off x="502920" y="6519672"/>
+            <a:ext cx="4754880" cy="164592"/>
+          </a:xfrm>
+          <a:prstGeom prst="rect">
+            <a:avLst/>
+          </a:prstGeom>
+          <a:noFill/>
+        </p:spPr>
+        <p:txBody>
+          <a:bodyPr wrap="square" lIns="0" rIns="0" tIns="0" bIns="0" anchor="t">
+            <a:spAutoFit/>
+          </a:bodyPr>
+          <a:lstStyle/>
+          <a:p>
+            <a:pPr algn="l"/>
+            <a:r>
+              <a:rPr sz="750" b="0">
+                <a:solidFill>
+                  <a:srgbClr val="5C6975"/>
+                </a:solidFill>
+                <a:latin typeface="Aptos"/>
+              </a:rPr>
+              <a:t>Proyecto 7 - Monitoreo de infraestructura con Zabbix</a:t>
+            </a:r>
+          </a:p>
+        </p:txBody>
+      </p:sp>
+      <p:sp>
+        <p:nvSpPr>
+          <p:cNvPr id="36" name="TextBox 35"/>
+          <p:cNvSpPr txBox="1"/>
+          <p:nvPr/>
+        </p:nvSpPr>
+        <p:spPr>
+          <a:xfrm>
+            <a:off x="10972800" y="6519672"/>
+            <a:ext cx="640080" cy="164592"/>
+          </a:xfrm>
+          <a:prstGeom prst="rect">
+            <a:avLst/>
+          </a:prstGeom>
+          <a:noFill/>
+        </p:spPr>
+        <p:txBody>
+          <a:bodyPr wrap="square" lIns="0" rIns="0" tIns="0" bIns="0" anchor="t">
+            <a:spAutoFit/>
+          </a:bodyPr>
+          <a:lstStyle/>
+          <a:p>
+            <a:pPr algn="r"/>
+            <a:r>
+              <a:rPr sz="750" b="0">
+                <a:solidFill>
+                  <a:srgbClr val="5C6975"/>
+                </a:solidFill>
+                <a:latin typeface="Aptos"/>
+              </a:rPr>
+              <a:t>15/17</a:t>
+            </a:r>
+          </a:p>
+        </p:txBody>
+      </p:sp>
+    </p:spTree>
+  </p:cSld>
+  <p:clrMapOvr>
+    <a:masterClrMapping/>
+  </p:clrMapOvr>
+</p:sld>
+</file>
+
+<file path=ppt/slides/slide16.xml><?xml version="1.0" encoding="utf-8"?>
+<p:sld xmlns:a="http://schemas.openxmlformats.org/drawingml/2006/main" xmlns:p="http://schemas.openxmlformats.org/presentationml/2006/main" xmlns:r="http://schemas.openxmlformats.org/officeDocument/2006/relationships">
+  <p:cSld>
+    <p:bg>
+      <p:bgPr>
+        <a:solidFill>
+          <a:srgbClr val="F2F7F9"/>
+        </a:solidFill>
+        <a:effectLst/>
+      </p:bgPr>
+    </p:bg>
+    <p:spTree>
+      <p:nvGrpSpPr>
+        <p:cNvPr id="1" name=""/>
+        <p:cNvGrpSpPr/>
+        <p:nvPr/>
+      </p:nvGrpSpPr>
+      <p:grpSpPr/>
+      <p:sp>
+        <p:nvSpPr>
+          <p:cNvPr id="2" name="TextBox 1"/>
+          <p:cNvSpPr txBox="1"/>
+          <p:nvPr/>
+        </p:nvSpPr>
+        <p:spPr>
+          <a:xfrm>
+            <a:off x="502920" y="384048"/>
+            <a:ext cx="384048" cy="201168"/>
+          </a:xfrm>
+          <a:prstGeom prst="rect">
+            <a:avLst/>
+          </a:prstGeom>
+          <a:noFill/>
+        </p:spPr>
+        <p:txBody>
+          <a:bodyPr wrap="square" lIns="0" rIns="0" tIns="0" bIns="0" anchor="t">
+            <a:spAutoFit/>
+          </a:bodyPr>
+          <a:lstStyle/>
+          <a:p>
+            <a:pPr algn="l"/>
+            <a:r>
+              <a:rPr sz="800" b="1">
+                <a:solidFill>
+                  <a:srgbClr val="0A1820"/>
+                </a:solidFill>
+                <a:latin typeface="Aptos"/>
+              </a:rPr>
+              <a:t>16</a:t>
+            </a:r>
+          </a:p>
+        </p:txBody>
+      </p:sp>
+      <p:cxnSp>
+        <p:nvCxnSpPr>
+          <p:cNvPr id="3" name="Connector 2"/>
+          <p:cNvCxnSpPr/>
+          <p:nvPr/>
+        </p:nvCxnSpPr>
+        <p:spPr>
+          <a:xfrm>
+            <a:off x="941832" y="475488"/>
+            <a:ext cx="685800" cy="0"/>
+          </a:xfrm>
+          <a:prstGeom prst="line">
+            <a:avLst/>
+          </a:prstGeom>
+          <a:ln w="13970">
+            <a:solidFill>
+              <a:srgbClr val="0A1820"/>
+            </a:solidFill>
+          </a:ln>
+        </p:spPr>
+        <p:style>
+          <a:lnRef idx="2">
+            <a:schemeClr val="accent1"/>
+          </a:lnRef>
+          <a:fillRef idx="0">
+            <a:schemeClr val="accent1"/>
+          </a:fillRef>
+          <a:effectRef idx="1">
+            <a:schemeClr val="accent1"/>
+          </a:effectRef>
+          <a:fontRef idx="minor">
+            <a:schemeClr val="tx1"/>
+          </a:fontRef>
+        </p:style>
+      </p:cxnSp>
+      <p:sp>
+        <p:nvSpPr>
+          <p:cNvPr id="4" name="TextBox 3"/>
+          <p:cNvSpPr txBox="1"/>
+          <p:nvPr/>
+        </p:nvSpPr>
+        <p:spPr>
+          <a:xfrm>
+            <a:off x="1737360" y="356616"/>
+            <a:ext cx="3108960" cy="274320"/>
+          </a:xfrm>
+          <a:prstGeom prst="rect">
+            <a:avLst/>
+          </a:prstGeom>
+          <a:noFill/>
+        </p:spPr>
+        <p:txBody>
+          <a:bodyPr wrap="square" lIns="0" rIns="0" tIns="0" bIns="0" anchor="t">
+            <a:spAutoFit/>
+          </a:bodyPr>
+          <a:lstStyle/>
+          <a:p>
+            <a:pPr algn="l"/>
+            <a:r>
+              <a:rPr sz="800" b="1">
+                <a:solidFill>
+                  <a:srgbClr val="0A1820"/>
+                </a:solidFill>
+                <a:latin typeface="Aptos"/>
+              </a:rPr>
+              <a:t>DISCUSIÓN</a:t>
+            </a:r>
+          </a:p>
+        </p:txBody>
+      </p:sp>
+      <p:sp>
+        <p:nvSpPr>
+          <p:cNvPr id="5" name="TextBox 4"/>
+          <p:cNvSpPr txBox="1"/>
+          <p:nvPr/>
+        </p:nvSpPr>
+        <p:spPr>
+          <a:xfrm>
+            <a:off x="502920" y="713232"/>
+            <a:ext cx="7498079" cy="868680"/>
+          </a:xfrm>
+          <a:prstGeom prst="rect">
+            <a:avLst/>
+          </a:prstGeom>
+          <a:noFill/>
+        </p:spPr>
+        <p:txBody>
+          <a:bodyPr wrap="square" lIns="0" rIns="0" tIns="0" bIns="0" anchor="t">
+            <a:spAutoFit/>
+          </a:bodyPr>
+          <a:lstStyle/>
+          <a:p>
+            <a:pPr algn="l"/>
+            <a:r>
+              <a:rPr sz="3000" b="1">
+                <a:solidFill>
+                  <a:srgbClr val="0A1820"/>
+                </a:solidFill>
+                <a:latin typeface="Aptos Display"/>
+              </a:rPr>
+              <a:t>La prueba importante no es instalar Zabbix; es cerrar el ciclo operativo.</a:t>
+            </a:r>
+          </a:p>
+        </p:txBody>
+      </p:sp>
+      <p:sp>
+        <p:nvSpPr>
+          <p:cNvPr id="6" name="Rounded Rectangle 5"/>
+          <p:cNvSpPr/>
+          <p:nvPr/>
+        </p:nvSpPr>
+        <p:spPr>
+          <a:xfrm>
+            <a:off x="777240" y="1737360"/>
+            <a:ext cx="3246120" cy="1298448"/>
+          </a:xfrm>
+          <a:prstGeom prst="roundRect">
+            <a:avLst/>
+          </a:prstGeom>
+          <a:solidFill>
+            <a:srgbClr val="FFFFFF"/>
+          </a:solidFill>
+          <a:ln w="10160">
+            <a:solidFill>
+              <a:srgbClr val="BFCCD6"/>
+            </a:solidFill>
+          </a:ln>
+        </p:spPr>
+        <p:style>
+          <a:lnRef idx="1">
+            <a:schemeClr val="accent1"/>
+          </a:lnRef>
+          <a:fillRef idx="3">
+            <a:schemeClr val="accent1"/>
+          </a:fillRef>
+          <a:effectRef idx="2">
+            <a:schemeClr val="accent1"/>
+          </a:effectRef>
+          <a:fontRef idx="minor">
+            <a:schemeClr val="lt1"/>
+          </a:fontRef>
+        </p:style>
+        <p:txBody>
+          <a:bodyPr rtlCol="0" anchor="ctr"/>
+          <a:lstStyle/>
+          <a:p>
+            <a:pPr algn="ctr"/>
+          </a:p>
+        </p:txBody>
+      </p:sp>
+      <p:sp>
+        <p:nvSpPr>
+          <p:cNvPr id="7" name="Rectangle 6"/>
+          <p:cNvSpPr/>
+          <p:nvPr/>
+        </p:nvSpPr>
+        <p:spPr>
+          <a:xfrm>
+            <a:off x="777240" y="1737360"/>
+            <a:ext cx="73152" cy="1298448"/>
+          </a:xfrm>
+          <a:prstGeom prst="rect">
+            <a:avLst/>
+          </a:prstGeom>
+          <a:solidFill>
+            <a:srgbClr val="22C5AA"/>
+          </a:solidFill>
+          <a:ln>
+            <a:noFill/>
+          </a:ln>
+        </p:spPr>
+        <p:style>
+          <a:lnRef idx="1">
+            <a:schemeClr val="accent1"/>
+          </a:lnRef>
+          <a:fillRef idx="3">
+            <a:schemeClr val="accent1"/>
+          </a:fillRef>
+          <a:effectRef idx="2">
+            <a:schemeClr val="accent1"/>
+          </a:effectRef>
+          <a:fontRef idx="minor">
+            <a:schemeClr val="lt1"/>
+          </a:fontRef>
+        </p:style>
+        <p:txBody>
+          <a:bodyPr rtlCol="0" anchor="ctr"/>
+          <a:lstStyle/>
+          <a:p>
+            <a:pPr algn="ctr"/>
+          </a:p>
+        </p:txBody>
+      </p:sp>
+      <p:sp>
+        <p:nvSpPr>
+          <p:cNvPr id="8" name="TextBox 7"/>
+          <p:cNvSpPr txBox="1"/>
+          <p:nvPr/>
+        </p:nvSpPr>
+        <p:spPr>
+          <a:xfrm>
+            <a:off x="1005840" y="1883664"/>
+            <a:ext cx="2862072" cy="219456"/>
+          </a:xfrm>
+          <a:prstGeom prst="rect">
+            <a:avLst/>
+          </a:prstGeom>
+          <a:noFill/>
+        </p:spPr>
+        <p:txBody>
+          <a:bodyPr wrap="square" lIns="0" rIns="0" tIns="0" bIns="0" anchor="t">
+            <a:spAutoFit/>
+          </a:bodyPr>
+          <a:lstStyle/>
+          <a:p>
+            <a:pPr algn="l"/>
+            <a:r>
+              <a:rPr sz="1200" b="1">
+                <a:solidFill>
+                  <a:srgbClr val="22C5AA"/>
+                </a:solidFill>
+                <a:latin typeface="Aptos"/>
+              </a:rPr>
+              <a:t>Qué probamos</a:t>
+            </a:r>
+          </a:p>
+        </p:txBody>
+      </p:sp>
+      <p:sp>
+        <p:nvSpPr>
+          <p:cNvPr id="9" name="TextBox 8"/>
+          <p:cNvSpPr txBox="1"/>
+          <p:nvPr/>
+        </p:nvSpPr>
+        <p:spPr>
+          <a:xfrm>
+            <a:off x="1005840" y="2167128"/>
+            <a:ext cx="2862072" cy="786383"/>
+          </a:xfrm>
+          <a:prstGeom prst="rect">
+            <a:avLst/>
+          </a:prstGeom>
+          <a:noFill/>
+        </p:spPr>
+        <p:txBody>
+          <a:bodyPr wrap="square" lIns="0" rIns="0" tIns="0" bIns="0" anchor="t">
+            <a:spAutoFit/>
+          </a:bodyPr>
+          <a:lstStyle/>
+          <a:p>
+            <a:pPr algn="l"/>
+            <a:r>
+              <a:rPr sz="1100" b="0">
+                <a:solidFill>
+                  <a:srgbClr val="0A1820"/>
+                </a:solidFill>
+                <a:latin typeface="Aptos"/>
+              </a:rPr>
+              <a:t>Carga real con Artillery, caída controlada, detección en Zabbix, correo MailHog, recuperación y métricas históricas.</a:t>
+            </a:r>
+          </a:p>
+        </p:txBody>
+      </p:sp>
+      <p:sp>
+        <p:nvSpPr>
+          <p:cNvPr id="10" name="Rounded Rectangle 9"/>
+          <p:cNvSpPr/>
+          <p:nvPr/>
+        </p:nvSpPr>
+        <p:spPr>
+          <a:xfrm>
+            <a:off x="4434840" y="1737360"/>
+            <a:ext cx="3246120" cy="1298448"/>
+          </a:xfrm>
+          <a:prstGeom prst="roundRect">
+            <a:avLst/>
+          </a:prstGeom>
+          <a:solidFill>
+            <a:srgbClr val="FFFFFF"/>
+          </a:solidFill>
+          <a:ln w="10160">
+            <a:solidFill>
+              <a:srgbClr val="BFCCD6"/>
+            </a:solidFill>
+          </a:ln>
+        </p:spPr>
+        <p:style>
+          <a:lnRef idx="1">
+            <a:schemeClr val="accent1"/>
+          </a:lnRef>
+          <a:fillRef idx="3">
+            <a:schemeClr val="accent1"/>
+          </a:fillRef>
+          <a:effectRef idx="2">
+            <a:schemeClr val="accent1"/>
+          </a:effectRef>
+          <a:fontRef idx="minor">
+            <a:schemeClr val="lt1"/>
+          </a:fontRef>
+        </p:style>
+        <p:txBody>
+          <a:bodyPr rtlCol="0" anchor="ctr"/>
+          <a:lstStyle/>
+          <a:p>
+            <a:pPr algn="ctr"/>
+          </a:p>
+        </p:txBody>
+      </p:sp>
+      <p:sp>
+        <p:nvSpPr>
+          <p:cNvPr id="11" name="Rectangle 10"/>
+          <p:cNvSpPr/>
+          <p:nvPr/>
+        </p:nvSpPr>
+        <p:spPr>
+          <a:xfrm>
+            <a:off x="4434840" y="1737360"/>
+            <a:ext cx="73152" cy="1298448"/>
+          </a:xfrm>
+          <a:prstGeom prst="rect">
+            <a:avLst/>
+          </a:prstGeom>
+          <a:solidFill>
+            <a:srgbClr val="38BDF8"/>
+          </a:solidFill>
+          <a:ln>
+            <a:noFill/>
+          </a:ln>
+        </p:spPr>
+        <p:style>
+          <a:lnRef idx="1">
+            <a:schemeClr val="accent1"/>
+          </a:lnRef>
+          <a:fillRef idx="3">
+            <a:schemeClr val="accent1"/>
+          </a:fillRef>
+          <a:effectRef idx="2">
+            <a:schemeClr val="accent1"/>
+          </a:effectRef>
+          <a:fontRef idx="minor">
+            <a:schemeClr val="lt1"/>
+          </a:fontRef>
+        </p:style>
+        <p:txBody>
+          <a:bodyPr rtlCol="0" anchor="ctr"/>
+          <a:lstStyle/>
+          <a:p>
+            <a:pPr algn="ctr"/>
+          </a:p>
+        </p:txBody>
+      </p:sp>
+      <p:sp>
+        <p:nvSpPr>
+          <p:cNvPr id="12" name="TextBox 11"/>
+          <p:cNvSpPr txBox="1"/>
+          <p:nvPr/>
+        </p:nvSpPr>
+        <p:spPr>
+          <a:xfrm>
+            <a:off x="4663440" y="1883664"/>
+            <a:ext cx="2862072" cy="219456"/>
+          </a:xfrm>
+          <a:prstGeom prst="rect">
+            <a:avLst/>
+          </a:prstGeom>
+          <a:noFill/>
+        </p:spPr>
+        <p:txBody>
+          <a:bodyPr wrap="square" lIns="0" rIns="0" tIns="0" bIns="0" anchor="t">
+            <a:spAutoFit/>
+          </a:bodyPr>
+          <a:lstStyle/>
+          <a:p>
+            <a:pPr algn="l"/>
+            <a:r>
+              <a:rPr sz="1200" b="1">
+                <a:solidFill>
+                  <a:srgbClr val="38BDF8"/>
+                </a:solidFill>
+                <a:latin typeface="Aptos"/>
+              </a:rPr>
+              <a:t>Qué aprendimos</a:t>
+            </a:r>
+          </a:p>
+        </p:txBody>
+      </p:sp>
+      <p:sp>
+        <p:nvSpPr>
+          <p:cNvPr id="13" name="TextBox 12"/>
+          <p:cNvSpPr txBox="1"/>
+          <p:nvPr/>
+        </p:nvSpPr>
+        <p:spPr>
+          <a:xfrm>
+            <a:off x="4663440" y="2167128"/>
+            <a:ext cx="2862072" cy="786383"/>
+          </a:xfrm>
+          <a:prstGeom prst="rect">
+            <a:avLst/>
+          </a:prstGeom>
+          <a:noFill/>
+        </p:spPr>
+        <p:txBody>
+          <a:bodyPr wrap="square" lIns="0" rIns="0" tIns="0" bIns="0" anchor="t">
+            <a:spAutoFit/>
+          </a:bodyPr>
+          <a:lstStyle/>
+          <a:p>
+            <a:pPr algn="l"/>
+            <a:r>
+              <a:rPr sz="1100" b="0">
+                <a:solidFill>
+                  <a:srgbClr val="0A1820"/>
+                </a:solidFill>
+                <a:latin typeface="Aptos"/>
+              </a:rPr>
+              <a:t>Monitorear no es solo saber si un contenedor vive: también hay que medir servicio, backend, DB, SLO y rutas bajo presión.</a:t>
+            </a:r>
+          </a:p>
+        </p:txBody>
+      </p:sp>
+      <p:sp>
+        <p:nvSpPr>
+          <p:cNvPr id="14" name="Rounded Rectangle 13"/>
+          <p:cNvSpPr/>
+          <p:nvPr/>
+        </p:nvSpPr>
+        <p:spPr>
+          <a:xfrm>
+            <a:off x="8092440" y="1737360"/>
+            <a:ext cx="3246120" cy="1298448"/>
+          </a:xfrm>
+          <a:prstGeom prst="roundRect">
+            <a:avLst/>
+          </a:prstGeom>
+          <a:solidFill>
+            <a:srgbClr val="FFFFFF"/>
+          </a:solidFill>
+          <a:ln w="10160">
+            <a:solidFill>
+              <a:srgbClr val="BFCCD6"/>
+            </a:solidFill>
+          </a:ln>
+        </p:spPr>
+        <p:style>
+          <a:lnRef idx="1">
+            <a:schemeClr val="accent1"/>
+          </a:lnRef>
+          <a:fillRef idx="3">
+            <a:schemeClr val="accent1"/>
+          </a:fillRef>
+          <a:effectRef idx="2">
+            <a:schemeClr val="accent1"/>
+          </a:effectRef>
+          <a:fontRef idx="minor">
+            <a:schemeClr val="lt1"/>
+          </a:fontRef>
+        </p:style>
+        <p:txBody>
+          <a:bodyPr rtlCol="0" anchor="ctr"/>
+          <a:lstStyle/>
+          <a:p>
+            <a:pPr algn="ctr"/>
+          </a:p>
+        </p:txBody>
+      </p:sp>
+      <p:sp>
+        <p:nvSpPr>
+          <p:cNvPr id="15" name="Rectangle 14"/>
+          <p:cNvSpPr/>
+          <p:nvPr/>
+        </p:nvSpPr>
+        <p:spPr>
+          <a:xfrm>
+            <a:off x="8092440" y="1737360"/>
+            <a:ext cx="73152" cy="1298448"/>
+          </a:xfrm>
+          <a:prstGeom prst="rect">
+            <a:avLst/>
+          </a:prstGeom>
+          <a:solidFill>
+            <a:srgbClr val="F59E0B"/>
+          </a:solidFill>
+          <a:ln>
+            <a:noFill/>
+          </a:ln>
+        </p:spPr>
+        <p:style>
+          <a:lnRef idx="1">
+            <a:schemeClr val="accent1"/>
+          </a:lnRef>
+          <a:fillRef idx="3">
+            <a:schemeClr val="accent1"/>
+          </a:fillRef>
+          <a:effectRef idx="2">
+            <a:schemeClr val="accent1"/>
+          </a:effectRef>
+          <a:fontRef idx="minor">
+            <a:schemeClr val="lt1"/>
+          </a:fontRef>
+        </p:style>
+        <p:txBody>
+          <a:bodyPr rtlCol="0" anchor="ctr"/>
+          <a:lstStyle/>
+          <a:p>
+            <a:pPr algn="ctr"/>
+          </a:p>
+        </p:txBody>
+      </p:sp>
+      <p:sp>
+        <p:nvSpPr>
+          <p:cNvPr id="16" name="TextBox 15"/>
+          <p:cNvSpPr txBox="1"/>
+          <p:nvPr/>
+        </p:nvSpPr>
+        <p:spPr>
+          <a:xfrm>
+            <a:off x="8321040" y="1883664"/>
+            <a:ext cx="2862072" cy="219456"/>
+          </a:xfrm>
+          <a:prstGeom prst="rect">
+            <a:avLst/>
+          </a:prstGeom>
+          <a:noFill/>
+        </p:spPr>
+        <p:txBody>
+          <a:bodyPr wrap="square" lIns="0" rIns="0" tIns="0" bIns="0" anchor="t">
+            <a:spAutoFit/>
+          </a:bodyPr>
+          <a:lstStyle/>
+          <a:p>
+            <a:pPr algn="l"/>
+            <a:r>
+              <a:rPr sz="1200" b="1">
+                <a:solidFill>
+                  <a:srgbClr val="F59E0B"/>
+                </a:solidFill>
+                <a:latin typeface="Aptos"/>
+              </a:rPr>
+              <a:t>Limitación honesta</a:t>
+            </a:r>
+          </a:p>
+        </p:txBody>
+      </p:sp>
+      <p:sp>
+        <p:nvSpPr>
+          <p:cNvPr id="17" name="TextBox 16"/>
+          <p:cNvSpPr txBox="1"/>
+          <p:nvPr/>
+        </p:nvSpPr>
+        <p:spPr>
+          <a:xfrm>
+            <a:off x="8321040" y="2167128"/>
+            <a:ext cx="2862072" cy="786383"/>
+          </a:xfrm>
+          <a:prstGeom prst="rect">
+            <a:avLst/>
+          </a:prstGeom>
+          <a:noFill/>
+        </p:spPr>
+        <p:txBody>
+          <a:bodyPr wrap="square" lIns="0" rIns="0" tIns="0" bIns="0" anchor="t">
+            <a:spAutoFit/>
+          </a:bodyPr>
+          <a:lstStyle/>
+          <a:p>
+            <a:pPr algn="l"/>
+            <a:r>
+              <a:rPr sz="1100" b="0">
+                <a:solidFill>
+                  <a:srgbClr val="0A1820"/>
+                </a:solidFill>
+                <a:latin typeface="Aptos"/>
+              </a:rPr>
+              <a:t>El SLO del portal es de laboratorio y vive en memoria del proceso; Zabbix conserva el histórico real de eventos e items.</a:t>
+            </a:r>
+          </a:p>
+        </p:txBody>
+      </p:sp>
+      <p:sp>
+        <p:nvSpPr>
+          <p:cNvPr id="18" name="TextBox 17"/>
+          <p:cNvSpPr txBox="1"/>
+          <p:nvPr/>
+        </p:nvSpPr>
+        <p:spPr>
+          <a:xfrm>
+            <a:off x="822960" y="3822191"/>
+            <a:ext cx="1828800" cy="228600"/>
+          </a:xfrm>
+          <a:prstGeom prst="rect">
+            <a:avLst/>
+          </a:prstGeom>
+          <a:noFill/>
+        </p:spPr>
+        <p:txBody>
+          <a:bodyPr wrap="square" lIns="0" rIns="0" tIns="0" bIns="0" anchor="t">
+            <a:spAutoFit/>
+          </a:bodyPr>
+          <a:lstStyle/>
+          <a:p>
+            <a:pPr algn="l"/>
+            <a:r>
+              <a:rPr sz="1100" b="1">
+                <a:solidFill>
+                  <a:srgbClr val="5C6975"/>
+                </a:solidFill>
+                <a:latin typeface="Aptos"/>
+              </a:rPr>
+              <a:t>Conclusión</a:t>
+            </a:r>
+          </a:p>
+        </p:txBody>
+      </p:sp>
+      <p:sp>
+        <p:nvSpPr>
+          <p:cNvPr id="19" name="TextBox 18"/>
+          <p:cNvSpPr txBox="1"/>
+          <p:nvPr/>
+        </p:nvSpPr>
+        <p:spPr>
+          <a:xfrm>
+            <a:off x="822960" y="4224528"/>
+            <a:ext cx="9875520" cy="749808"/>
+          </a:xfrm>
+          <a:prstGeom prst="rect">
+            <a:avLst/>
+          </a:prstGeom>
+          <a:noFill/>
+        </p:spPr>
+        <p:txBody>
+          <a:bodyPr wrap="square" lIns="0" rIns="0" tIns="0" bIns="0" anchor="t">
+            <a:spAutoFit/>
+          </a:bodyPr>
+          <a:lstStyle/>
+          <a:p>
+            <a:pPr algn="l"/>
+            <a:r>
+              <a:rPr sz="2400" b="1">
+                <a:solidFill>
+                  <a:srgbClr val="0A1820"/>
+                </a:solidFill>
+                <a:latin typeface="Aptos"/>
+              </a:rPr>
+              <a:t>El proyecto cumple los requisitos base y los amplía con una aplicación real observable: frontend, backend, MariaDB, /metrics, SLO, analíticas, Artillery y matriz 13/13.</a:t>
+            </a:r>
+          </a:p>
+        </p:txBody>
+      </p:sp>
+      <p:cxnSp>
+        <p:nvCxnSpPr>
+          <p:cNvPr id="20" name="Connector 19"/>
+          <p:cNvCxnSpPr/>
+          <p:nvPr/>
+        </p:nvCxnSpPr>
+        <p:spPr>
+          <a:xfrm>
+            <a:off x="502920" y="6428232"/>
+            <a:ext cx="11155680" cy="0"/>
+          </a:xfrm>
+          <a:prstGeom prst="line">
+            <a:avLst/>
+          </a:prstGeom>
+          <a:ln w="8890">
+            <a:solidFill>
+              <a:srgbClr val="BFCCD6"/>
+            </a:solidFill>
+          </a:ln>
+        </p:spPr>
+        <p:style>
+          <a:lnRef idx="2">
+            <a:schemeClr val="accent1"/>
+          </a:lnRef>
+          <a:fillRef idx="0">
+            <a:schemeClr val="accent1"/>
+          </a:fillRef>
+          <a:effectRef idx="1">
+            <a:schemeClr val="accent1"/>
+          </a:effectRef>
+          <a:fontRef idx="minor">
+            <a:schemeClr val="tx1"/>
+          </a:fontRef>
+        </p:style>
+      </p:cxnSp>
+      <p:sp>
+        <p:nvSpPr>
+          <p:cNvPr id="21" name="TextBox 20"/>
+          <p:cNvSpPr txBox="1"/>
+          <p:nvPr/>
+        </p:nvSpPr>
+        <p:spPr>
+          <a:xfrm>
+            <a:off x="502920" y="6519672"/>
+            <a:ext cx="4754880" cy="164592"/>
+          </a:xfrm>
+          <a:prstGeom prst="rect">
+            <a:avLst/>
+          </a:prstGeom>
+          <a:noFill/>
+        </p:spPr>
+        <p:txBody>
+          <a:bodyPr wrap="square" lIns="0" rIns="0" tIns="0" bIns="0" anchor="t">
+            <a:spAutoFit/>
+          </a:bodyPr>
+          <a:lstStyle/>
+          <a:p>
+            <a:pPr algn="l"/>
+            <a:r>
+              <a:rPr sz="750" b="0">
+                <a:solidFill>
+                  <a:srgbClr val="5C6975"/>
+                </a:solidFill>
+                <a:latin typeface="Aptos"/>
+              </a:rPr>
+              <a:t>Proyecto 7 - Monitoreo de infraestructura con Zabbix</a:t>
+            </a:r>
+          </a:p>
+        </p:txBody>
+      </p:sp>
+      <p:sp>
+        <p:nvSpPr>
+          <p:cNvPr id="22" name="TextBox 21"/>
+          <p:cNvSpPr txBox="1"/>
+          <p:nvPr/>
+        </p:nvSpPr>
+        <p:spPr>
+          <a:xfrm>
+            <a:off x="10972800" y="6519672"/>
+            <a:ext cx="640080" cy="164592"/>
+          </a:xfrm>
+          <a:prstGeom prst="rect">
+            <a:avLst/>
+          </a:prstGeom>
+          <a:noFill/>
+        </p:spPr>
+        <p:txBody>
+          <a:bodyPr wrap="square" lIns="0" rIns="0" tIns="0" bIns="0" anchor="t">
+            <a:spAutoFit/>
+          </a:bodyPr>
+          <a:lstStyle/>
+          <a:p>
+            <a:pPr algn="r"/>
+            <a:r>
+              <a:rPr sz="750" b="0">
+                <a:solidFill>
+                  <a:srgbClr val="5C6975"/>
+                </a:solidFill>
+                <a:latin typeface="Aptos"/>
+              </a:rPr>
+              <a:t>16/17</a:t>
+            </a:r>
+          </a:p>
+        </p:txBody>
+      </p:sp>
+    </p:spTree>
+  </p:cSld>
+  <p:clrMapOvr>
+    <a:masterClrMapping/>
+  </p:clrMapOvr>
+</p:sld>
+</file>
+
+<file path=ppt/slides/slide17.xml><?xml version="1.0" encoding="utf-8"?>
+<p:sld xmlns:a="http://schemas.openxmlformats.org/drawingml/2006/main" xmlns:p="http://schemas.openxmlformats.org/presentationml/2006/main" xmlns:r="http://schemas.openxmlformats.org/officeDocument/2006/relationships">
+  <p:cSld>
+    <p:bg>
+      <p:bgPr>
+        <a:solidFill>
+          <a:srgbClr val="0A1820"/>
+        </a:solidFill>
+        <a:effectLst/>
+      </p:bgPr>
+    </p:bg>
+    <p:spTree>
+      <p:nvGrpSpPr>
+        <p:cNvPr id="1" name=""/>
+        <p:cNvGrpSpPr/>
+        <p:nvPr/>
+      </p:nvGrpSpPr>
+      <p:grpSpPr/>
+      <p:sp>
+        <p:nvSpPr>
+          <p:cNvPr id="2" name="TextBox 1"/>
+          <p:cNvSpPr txBox="1"/>
+          <p:nvPr/>
+        </p:nvSpPr>
+        <p:spPr>
+          <a:xfrm>
+            <a:off x="502920" y="384048"/>
+            <a:ext cx="384048" cy="201168"/>
+          </a:xfrm>
+          <a:prstGeom prst="rect">
+            <a:avLst/>
+          </a:prstGeom>
+          <a:noFill/>
+        </p:spPr>
+        <p:txBody>
+          <a:bodyPr wrap="square" lIns="0" rIns="0" tIns="0" bIns="0" anchor="t">
+            <a:spAutoFit/>
+          </a:bodyPr>
+          <a:lstStyle/>
+          <a:p>
+            <a:pPr algn="l"/>
+            <a:r>
+              <a:rPr sz="800" b="1">
+                <a:solidFill>
+                  <a:srgbClr val="22C5AA"/>
+                </a:solidFill>
+                <a:latin typeface="Aptos"/>
+              </a:rPr>
+              <a:t>17</a:t>
+            </a:r>
+          </a:p>
+        </p:txBody>
+      </p:sp>
+      <p:cxnSp>
+        <p:nvCxnSpPr>
+          <p:cNvPr id="3" name="Connector 2"/>
+          <p:cNvCxnSpPr/>
+          <p:nvPr/>
+        </p:nvCxnSpPr>
+        <p:spPr>
+          <a:xfrm>
+            <a:off x="941832" y="475488"/>
+            <a:ext cx="685800" cy="0"/>
+          </a:xfrm>
+          <a:prstGeom prst="line">
+            <a:avLst/>
+          </a:prstGeom>
+          <a:ln w="13970">
+            <a:solidFill>
+              <a:srgbClr val="22C5AA"/>
+            </a:solidFill>
+          </a:ln>
+        </p:spPr>
+        <p:style>
+          <a:lnRef idx="2">
+            <a:schemeClr val="accent1"/>
+          </a:lnRef>
+          <a:fillRef idx="0">
+            <a:schemeClr val="accent1"/>
+          </a:fillRef>
+          <a:effectRef idx="1">
+            <a:schemeClr val="accent1"/>
+          </a:effectRef>
+          <a:fontRef idx="minor">
+            <a:schemeClr val="tx1"/>
+          </a:fontRef>
+        </p:style>
+      </p:cxnSp>
+      <p:sp>
+        <p:nvSpPr>
+          <p:cNvPr id="4" name="TextBox 3"/>
+          <p:cNvSpPr txBox="1"/>
+          <p:nvPr/>
+        </p:nvSpPr>
+        <p:spPr>
+          <a:xfrm>
+            <a:off x="1737360" y="356616"/>
+            <a:ext cx="3108960" cy="274320"/>
+          </a:xfrm>
+          <a:prstGeom prst="rect">
+            <a:avLst/>
+          </a:prstGeom>
+          <a:noFill/>
+        </p:spPr>
+        <p:txBody>
+          <a:bodyPr wrap="square" lIns="0" rIns="0" tIns="0" bIns="0" anchor="t">
+            <a:spAutoFit/>
+          </a:bodyPr>
+          <a:lstStyle/>
+          <a:p>
+            <a:pPr algn="l"/>
+            <a:r>
+              <a:rPr sz="800" b="1">
+                <a:solidFill>
+                  <a:srgbClr val="22C5AA"/>
+                </a:solidFill>
+                <a:latin typeface="Aptos"/>
+              </a:rPr>
+              <a:t>REFERENCIAS</a:t>
+            </a:r>
+          </a:p>
+        </p:txBody>
+      </p:sp>
+      <p:sp>
+        <p:nvSpPr>
+          <p:cNvPr id="5" name="TextBox 4"/>
+          <p:cNvSpPr txBox="1"/>
+          <p:nvPr/>
+        </p:nvSpPr>
+        <p:spPr>
+          <a:xfrm>
+            <a:off x="502920" y="713232"/>
+            <a:ext cx="7498079" cy="868680"/>
+          </a:xfrm>
+          <a:prstGeom prst="rect">
+            <a:avLst/>
+          </a:prstGeom>
+          <a:noFill/>
+        </p:spPr>
+        <p:txBody>
+          <a:bodyPr wrap="square" lIns="0" rIns="0" tIns="0" bIns="0" anchor="t">
+            <a:spAutoFit/>
+          </a:bodyPr>
+          <a:lstStyle/>
+          <a:p>
+            <a:pPr algn="l"/>
+            <a:r>
+              <a:rPr sz="3000" b="1">
+                <a:solidFill>
+                  <a:srgbClr val="FFFFFF"/>
+                </a:solidFill>
+                <a:latin typeface="Aptos Display"/>
+              </a:rPr>
+              <a:t>Las decisiones se apoyan en documentación oficial y herramientas reproducibles.</a:t>
+            </a:r>
+          </a:p>
+        </p:txBody>
+      </p:sp>
+      <p:sp>
+        <p:nvSpPr>
+          <p:cNvPr id="6" name="Rounded Rectangle 5"/>
+          <p:cNvSpPr/>
+          <p:nvPr/>
+        </p:nvSpPr>
+        <p:spPr>
+          <a:xfrm>
+            <a:off x="822960" y="1691640"/>
+            <a:ext cx="4617720" cy="694944"/>
+          </a:xfrm>
+          <a:prstGeom prst="roundRect">
+            <a:avLst/>
+          </a:prstGeom>
+          <a:solidFill>
+            <a:srgbClr val="102833"/>
+          </a:solidFill>
+          <a:ln w="10160">
+            <a:solidFill>
+              <a:srgbClr val="304954"/>
+            </a:solidFill>
+          </a:ln>
+        </p:spPr>
+        <p:style>
+          <a:lnRef idx="1">
+            <a:schemeClr val="accent1"/>
+          </a:lnRef>
+          <a:fillRef idx="3">
+            <a:schemeClr val="accent1"/>
+          </a:fillRef>
+          <a:effectRef idx="2">
+            <a:schemeClr val="accent1"/>
+          </a:effectRef>
+          <a:fontRef idx="minor">
+            <a:schemeClr val="lt1"/>
+          </a:fontRef>
+        </p:style>
+        <p:txBody>
+          <a:bodyPr rtlCol="0" anchor="ctr"/>
+          <a:lstStyle/>
+          <a:p>
+            <a:pPr algn="ctr"/>
+          </a:p>
+        </p:txBody>
+      </p:sp>
+      <p:sp>
+        <p:nvSpPr>
+          <p:cNvPr id="7" name="TextBox 6"/>
+          <p:cNvSpPr txBox="1"/>
+          <p:nvPr/>
+        </p:nvSpPr>
+        <p:spPr>
+          <a:xfrm>
+            <a:off x="1005840" y="1819656"/>
+            <a:ext cx="2834640" cy="201168"/>
+          </a:xfrm>
+          <a:prstGeom prst="rect">
+            <a:avLst/>
+          </a:prstGeom>
+          <a:noFill/>
+        </p:spPr>
+        <p:txBody>
+          <a:bodyPr wrap="square" lIns="0" rIns="0" tIns="0" bIns="0" anchor="t">
+            <a:spAutoFit/>
+          </a:bodyPr>
+          <a:lstStyle/>
+          <a:p>
+            <a:pPr algn="l"/>
+            <a:r>
+              <a:rPr sz="1150" b="1">
+                <a:solidFill>
+                  <a:srgbClr val="22C5AA"/>
+                </a:solidFill>
+                <a:latin typeface="Aptos"/>
+              </a:rPr>
+              <a:t>Zabbix Documentation 6.0</a:t>
+            </a:r>
+          </a:p>
+        </p:txBody>
+      </p:sp>
+      <p:sp>
+        <p:nvSpPr>
+          <p:cNvPr id="8" name="TextBox 7"/>
+          <p:cNvSpPr txBox="1"/>
+          <p:nvPr/>
+        </p:nvSpPr>
+        <p:spPr>
+          <a:xfrm>
+            <a:off x="1005840" y="2084832"/>
+            <a:ext cx="4160520" cy="164592"/>
+          </a:xfrm>
+          <a:prstGeom prst="rect">
+            <a:avLst/>
+          </a:prstGeom>
+          <a:noFill/>
+        </p:spPr>
+        <p:txBody>
+          <a:bodyPr wrap="square" lIns="0" rIns="0" tIns="0" bIns="0" anchor="t">
+            <a:spAutoFit/>
+          </a:bodyPr>
+          <a:lstStyle/>
+          <a:p>
+            <a:pPr algn="l"/>
+            <a:r>
+              <a:rPr sz="850" b="0">
+                <a:solidFill>
+                  <a:srgbClr val="CAD5DB"/>
+                </a:solidFill>
+                <a:latin typeface="Aptos"/>
+              </a:rPr>
+              <a:t>zabbix.com/documentation/6.0</a:t>
+            </a:r>
+          </a:p>
+        </p:txBody>
+      </p:sp>
+      <p:sp>
+        <p:nvSpPr>
+          <p:cNvPr id="9" name="Rounded Rectangle 8"/>
+          <p:cNvSpPr/>
+          <p:nvPr/>
+        </p:nvSpPr>
+        <p:spPr>
+          <a:xfrm>
+            <a:off x="6080760" y="1691640"/>
+            <a:ext cx="4617720" cy="694944"/>
+          </a:xfrm>
+          <a:prstGeom prst="roundRect">
+            <a:avLst/>
+          </a:prstGeom>
+          <a:solidFill>
+            <a:srgbClr val="102833"/>
+          </a:solidFill>
+          <a:ln w="10160">
+            <a:solidFill>
+              <a:srgbClr val="304954"/>
+            </a:solidFill>
+          </a:ln>
+        </p:spPr>
+        <p:style>
+          <a:lnRef idx="1">
+            <a:schemeClr val="accent1"/>
+          </a:lnRef>
+          <a:fillRef idx="3">
+            <a:schemeClr val="accent1"/>
+          </a:fillRef>
+          <a:effectRef idx="2">
+            <a:schemeClr val="accent1"/>
+          </a:effectRef>
+          <a:fontRef idx="minor">
+            <a:schemeClr val="lt1"/>
+          </a:fontRef>
+        </p:style>
+        <p:txBody>
+          <a:bodyPr rtlCol="0" anchor="ctr"/>
+          <a:lstStyle/>
+          <a:p>
+            <a:pPr algn="ctr"/>
+          </a:p>
+        </p:txBody>
+      </p:sp>
+      <p:sp>
+        <p:nvSpPr>
+          <p:cNvPr id="10" name="TextBox 9"/>
+          <p:cNvSpPr txBox="1"/>
+          <p:nvPr/>
+        </p:nvSpPr>
+        <p:spPr>
+          <a:xfrm>
+            <a:off x="6263640" y="1819656"/>
+            <a:ext cx="2834640" cy="201168"/>
+          </a:xfrm>
+          <a:prstGeom prst="rect">
+            <a:avLst/>
+          </a:prstGeom>
+          <a:noFill/>
+        </p:spPr>
+        <p:txBody>
+          <a:bodyPr wrap="square" lIns="0" rIns="0" tIns="0" bIns="0" anchor="t">
+            <a:spAutoFit/>
+          </a:bodyPr>
+          <a:lstStyle/>
+          <a:p>
+            <a:pPr algn="l"/>
+            <a:r>
+              <a:rPr sz="1150" b="1">
+                <a:solidFill>
+                  <a:srgbClr val="38BDF8"/>
+                </a:solidFill>
+                <a:latin typeface="Aptos"/>
+              </a:rPr>
+              <a:t>Docker Compose</a:t>
+            </a:r>
+          </a:p>
+        </p:txBody>
+      </p:sp>
+      <p:sp>
+        <p:nvSpPr>
+          <p:cNvPr id="11" name="TextBox 10"/>
+          <p:cNvSpPr txBox="1"/>
+          <p:nvPr/>
+        </p:nvSpPr>
+        <p:spPr>
+          <a:xfrm>
+            <a:off x="6263640" y="2084832"/>
+            <a:ext cx="4160520" cy="164592"/>
+          </a:xfrm>
+          <a:prstGeom prst="rect">
+            <a:avLst/>
+          </a:prstGeom>
+          <a:noFill/>
+        </p:spPr>
+        <p:txBody>
+          <a:bodyPr wrap="square" lIns="0" rIns="0" tIns="0" bIns="0" anchor="t">
+            <a:spAutoFit/>
+          </a:bodyPr>
+          <a:lstStyle/>
+          <a:p>
+            <a:pPr algn="l"/>
+            <a:r>
+              <a:rPr sz="850" b="0">
+                <a:solidFill>
+                  <a:srgbClr val="CAD5DB"/>
+                </a:solidFill>
+                <a:latin typeface="Aptos"/>
+              </a:rPr>
+              <a:t>docs.docker.com/compose</a:t>
+            </a:r>
+          </a:p>
+        </p:txBody>
+      </p:sp>
+      <p:sp>
+        <p:nvSpPr>
+          <p:cNvPr id="12" name="Rounded Rectangle 11"/>
+          <p:cNvSpPr/>
+          <p:nvPr/>
+        </p:nvSpPr>
+        <p:spPr>
+          <a:xfrm>
+            <a:off x="822960" y="2770632"/>
+            <a:ext cx="4617720" cy="694944"/>
+          </a:xfrm>
+          <a:prstGeom prst="roundRect">
+            <a:avLst/>
+          </a:prstGeom>
+          <a:solidFill>
+            <a:srgbClr val="102833"/>
+          </a:solidFill>
+          <a:ln w="10160">
+            <a:solidFill>
+              <a:srgbClr val="304954"/>
+            </a:solidFill>
+          </a:ln>
+        </p:spPr>
+        <p:style>
+          <a:lnRef idx="1">
+            <a:schemeClr val="accent1"/>
+          </a:lnRef>
+          <a:fillRef idx="3">
+            <a:schemeClr val="accent1"/>
+          </a:fillRef>
+          <a:effectRef idx="2">
+            <a:schemeClr val="accent1"/>
+          </a:effectRef>
+          <a:fontRef idx="minor">
+            <a:schemeClr val="lt1"/>
+          </a:fontRef>
+        </p:style>
+        <p:txBody>
+          <a:bodyPr rtlCol="0" anchor="ctr"/>
+          <a:lstStyle/>
+          <a:p>
+            <a:pPr algn="ctr"/>
+          </a:p>
+        </p:txBody>
+      </p:sp>
+      <p:sp>
+        <p:nvSpPr>
+          <p:cNvPr id="13" name="TextBox 12"/>
+          <p:cNvSpPr txBox="1"/>
+          <p:nvPr/>
+        </p:nvSpPr>
+        <p:spPr>
+          <a:xfrm>
+            <a:off x="1005840" y="2898648"/>
+            <a:ext cx="2834640" cy="201168"/>
+          </a:xfrm>
+          <a:prstGeom prst="rect">
+            <a:avLst/>
+          </a:prstGeom>
+          <a:noFill/>
+        </p:spPr>
+        <p:txBody>
+          <a:bodyPr wrap="square" lIns="0" rIns="0" tIns="0" bIns="0" anchor="t">
+            <a:spAutoFit/>
+          </a:bodyPr>
+          <a:lstStyle/>
+          <a:p>
+            <a:pPr algn="l"/>
+            <a:r>
+              <a:rPr sz="1150" b="1">
+                <a:solidFill>
+                  <a:srgbClr val="F59E0B"/>
+                </a:solidFill>
+                <a:latin typeface="Aptos"/>
+              </a:rPr>
+              <a:t>MailHog</a:t>
+            </a:r>
+          </a:p>
+        </p:txBody>
+      </p:sp>
+      <p:sp>
+        <p:nvSpPr>
+          <p:cNvPr id="14" name="TextBox 13"/>
+          <p:cNvSpPr txBox="1"/>
+          <p:nvPr/>
+        </p:nvSpPr>
+        <p:spPr>
+          <a:xfrm>
+            <a:off x="1005840" y="3163824"/>
+            <a:ext cx="4160520" cy="164592"/>
+          </a:xfrm>
+          <a:prstGeom prst="rect">
+            <a:avLst/>
+          </a:prstGeom>
+          <a:noFill/>
+        </p:spPr>
+        <p:txBody>
+          <a:bodyPr wrap="square" lIns="0" rIns="0" tIns="0" bIns="0" anchor="t">
+            <a:spAutoFit/>
+          </a:bodyPr>
+          <a:lstStyle/>
+          <a:p>
+            <a:pPr algn="l"/>
+            <a:r>
+              <a:rPr sz="850" b="0">
+                <a:solidFill>
+                  <a:srgbClr val="CAD5DB"/>
+                </a:solidFill>
+                <a:latin typeface="Aptos"/>
+              </a:rPr>
+              <a:t>github.com/mailhog/MailHog</a:t>
+            </a:r>
+          </a:p>
+        </p:txBody>
+      </p:sp>
+      <p:sp>
+        <p:nvSpPr>
+          <p:cNvPr id="15" name="Rounded Rectangle 14"/>
+          <p:cNvSpPr/>
+          <p:nvPr/>
+        </p:nvSpPr>
+        <p:spPr>
+          <a:xfrm>
+            <a:off x="6080760" y="2770632"/>
+            <a:ext cx="4617720" cy="694944"/>
+          </a:xfrm>
+          <a:prstGeom prst="roundRect">
+            <a:avLst/>
+          </a:prstGeom>
+          <a:solidFill>
+            <a:srgbClr val="102833"/>
+          </a:solidFill>
+          <a:ln w="10160">
+            <a:solidFill>
+              <a:srgbClr val="304954"/>
+            </a:solidFill>
+          </a:ln>
+        </p:spPr>
+        <p:style>
+          <a:lnRef idx="1">
+            <a:schemeClr val="accent1"/>
+          </a:lnRef>
+          <a:fillRef idx="3">
+            <a:schemeClr val="accent1"/>
+          </a:fillRef>
+          <a:effectRef idx="2">
+            <a:schemeClr val="accent1"/>
+          </a:effectRef>
+          <a:fontRef idx="minor">
+            <a:schemeClr val="lt1"/>
+          </a:fontRef>
+        </p:style>
+        <p:txBody>
+          <a:bodyPr rtlCol="0" anchor="ctr"/>
+          <a:lstStyle/>
+          <a:p>
+            <a:pPr algn="ctr"/>
+          </a:p>
+        </p:txBody>
+      </p:sp>
+      <p:sp>
+        <p:nvSpPr>
+          <p:cNvPr id="16" name="TextBox 15"/>
+          <p:cNvSpPr txBox="1"/>
+          <p:nvPr/>
+        </p:nvSpPr>
+        <p:spPr>
+          <a:xfrm>
+            <a:off x="6263640" y="2898648"/>
+            <a:ext cx="2834640" cy="201168"/>
+          </a:xfrm>
+          <a:prstGeom prst="rect">
+            <a:avLst/>
+          </a:prstGeom>
+          <a:noFill/>
+        </p:spPr>
+        <p:txBody>
+          <a:bodyPr wrap="square" lIns="0" rIns="0" tIns="0" bIns="0" anchor="t">
+            <a:spAutoFit/>
+          </a:bodyPr>
+          <a:lstStyle/>
+          <a:p>
+            <a:pPr algn="l"/>
+            <a:r>
+              <a:rPr sz="1150" b="1">
+                <a:solidFill>
+                  <a:srgbClr val="A3E635"/>
+                </a:solidFill>
+                <a:latin typeface="Aptos"/>
+              </a:rPr>
+              <a:t>Artillery Docs</a:t>
+            </a:r>
+          </a:p>
+        </p:txBody>
+      </p:sp>
+      <p:sp>
+        <p:nvSpPr>
+          <p:cNvPr id="17" name="TextBox 16"/>
+          <p:cNvSpPr txBox="1"/>
+          <p:nvPr/>
+        </p:nvSpPr>
+        <p:spPr>
+          <a:xfrm>
+            <a:off x="6263640" y="3163824"/>
+            <a:ext cx="4160520" cy="164592"/>
+          </a:xfrm>
+          <a:prstGeom prst="rect">
+            <a:avLst/>
+          </a:prstGeom>
+          <a:noFill/>
+        </p:spPr>
+        <p:txBody>
+          <a:bodyPr wrap="square" lIns="0" rIns="0" tIns="0" bIns="0" anchor="t">
+            <a:spAutoFit/>
+          </a:bodyPr>
+          <a:lstStyle/>
+          <a:p>
+            <a:pPr algn="l"/>
+            <a:r>
+              <a:rPr sz="850" b="0">
+                <a:solidFill>
+                  <a:srgbClr val="CAD5DB"/>
+                </a:solidFill>
+                <a:latin typeface="Aptos"/>
+              </a:rPr>
+              <a:t>artillery.io/docs</a:t>
+            </a:r>
+          </a:p>
+        </p:txBody>
+      </p:sp>
+      <p:sp>
+        <p:nvSpPr>
+          <p:cNvPr id="18" name="Rounded Rectangle 17"/>
+          <p:cNvSpPr/>
+          <p:nvPr/>
+        </p:nvSpPr>
+        <p:spPr>
+          <a:xfrm>
+            <a:off x="822960" y="3849624"/>
+            <a:ext cx="4617720" cy="694944"/>
+          </a:xfrm>
+          <a:prstGeom prst="roundRect">
+            <a:avLst/>
+          </a:prstGeom>
+          <a:solidFill>
+            <a:srgbClr val="102833"/>
+          </a:solidFill>
+          <a:ln w="10160">
+            <a:solidFill>
+              <a:srgbClr val="304954"/>
+            </a:solidFill>
+          </a:ln>
+        </p:spPr>
+        <p:style>
+          <a:lnRef idx="1">
+            <a:schemeClr val="accent1"/>
+          </a:lnRef>
+          <a:fillRef idx="3">
+            <a:schemeClr val="accent1"/>
+          </a:fillRef>
+          <a:effectRef idx="2">
+            <a:schemeClr val="accent1"/>
+          </a:effectRef>
+          <a:fontRef idx="minor">
+            <a:schemeClr val="lt1"/>
+          </a:fontRef>
+        </p:style>
+        <p:txBody>
+          <a:bodyPr rtlCol="0" anchor="ctr"/>
+          <a:lstStyle/>
+          <a:p>
+            <a:pPr algn="ctr"/>
+          </a:p>
+        </p:txBody>
+      </p:sp>
+      <p:sp>
+        <p:nvSpPr>
+          <p:cNvPr id="19" name="TextBox 18"/>
+          <p:cNvSpPr txBox="1"/>
+          <p:nvPr/>
+        </p:nvSpPr>
+        <p:spPr>
+          <a:xfrm>
+            <a:off x="1005840" y="3977639"/>
+            <a:ext cx="2834640" cy="201168"/>
+          </a:xfrm>
+          <a:prstGeom prst="rect">
+            <a:avLst/>
+          </a:prstGeom>
+          <a:noFill/>
+        </p:spPr>
+        <p:txBody>
+          <a:bodyPr wrap="square" lIns="0" rIns="0" tIns="0" bIns="0" anchor="t">
+            <a:spAutoFit/>
+          </a:bodyPr>
+          <a:lstStyle/>
+          <a:p>
+            <a:pPr algn="l"/>
+            <a:r>
+              <a:rPr sz="1150" b="1">
+                <a:solidFill>
+                  <a:srgbClr val="38BDF8"/>
+                </a:solidFill>
+                <a:latin typeface="Aptos"/>
+              </a:rPr>
+              <a:t>PostgreSQL / MariaDB</a:t>
+            </a:r>
+          </a:p>
+        </p:txBody>
+      </p:sp>
+      <p:sp>
+        <p:nvSpPr>
+          <p:cNvPr id="20" name="TextBox 19"/>
+          <p:cNvSpPr txBox="1"/>
+          <p:nvPr/>
+        </p:nvSpPr>
+        <p:spPr>
+          <a:xfrm>
+            <a:off x="1005840" y="4242816"/>
+            <a:ext cx="4160520" cy="164592"/>
+          </a:xfrm>
+          <a:prstGeom prst="rect">
+            <a:avLst/>
+          </a:prstGeom>
+          <a:noFill/>
+        </p:spPr>
+        <p:txBody>
+          <a:bodyPr wrap="square" lIns="0" rIns="0" tIns="0" bIns="0" anchor="t">
+            <a:spAutoFit/>
+          </a:bodyPr>
+          <a:lstStyle/>
+          <a:p>
+            <a:pPr algn="l"/>
+            <a:r>
+              <a:rPr sz="850" b="0">
+                <a:solidFill>
+                  <a:srgbClr val="CAD5DB"/>
+                </a:solidFill>
+                <a:latin typeface="Aptos"/>
+              </a:rPr>
+              <a:t>postgresql.org/docs + mariadb.org/documentation</a:t>
+            </a:r>
+          </a:p>
+        </p:txBody>
+      </p:sp>
+      <p:sp>
+        <p:nvSpPr>
+          <p:cNvPr id="21" name="Rounded Rectangle 20"/>
+          <p:cNvSpPr/>
+          <p:nvPr/>
+        </p:nvSpPr>
+        <p:spPr>
+          <a:xfrm>
+            <a:off x="6080760" y="3849624"/>
+            <a:ext cx="4617720" cy="694944"/>
+          </a:xfrm>
+          <a:prstGeom prst="roundRect">
+            <a:avLst/>
+          </a:prstGeom>
+          <a:solidFill>
+            <a:srgbClr val="102833"/>
+          </a:solidFill>
+          <a:ln w="10160">
+            <a:solidFill>
+              <a:srgbClr val="304954"/>
+            </a:solidFill>
+          </a:ln>
+        </p:spPr>
+        <p:style>
+          <a:lnRef idx="1">
+            <a:schemeClr val="accent1"/>
+          </a:lnRef>
+          <a:fillRef idx="3">
+            <a:schemeClr val="accent1"/>
+          </a:fillRef>
+          <a:effectRef idx="2">
+            <a:schemeClr val="accent1"/>
+          </a:effectRef>
+          <a:fontRef idx="minor">
+            <a:schemeClr val="lt1"/>
+          </a:fontRef>
+        </p:style>
+        <p:txBody>
+          <a:bodyPr rtlCol="0" anchor="ctr"/>
+          <a:lstStyle/>
+          <a:p>
+            <a:pPr algn="ctr"/>
+          </a:p>
+        </p:txBody>
+      </p:sp>
+      <p:sp>
+        <p:nvSpPr>
+          <p:cNvPr id="22" name="TextBox 21"/>
+          <p:cNvSpPr txBox="1"/>
+          <p:nvPr/>
+        </p:nvSpPr>
+        <p:spPr>
+          <a:xfrm>
+            <a:off x="6263640" y="3977639"/>
+            <a:ext cx="2834640" cy="201168"/>
+          </a:xfrm>
+          <a:prstGeom prst="rect">
+            <a:avLst/>
+          </a:prstGeom>
+          <a:noFill/>
+        </p:spPr>
+        <p:txBody>
+          <a:bodyPr wrap="square" lIns="0" rIns="0" tIns="0" bIns="0" anchor="t">
+            <a:spAutoFit/>
+          </a:bodyPr>
+          <a:lstStyle/>
+          <a:p>
+            <a:pPr algn="l"/>
+            <a:r>
+              <a:rPr sz="1150" b="1">
+                <a:solidFill>
+                  <a:srgbClr val="22C5AA"/>
+                </a:solidFill>
+                <a:latin typeface="Aptos"/>
+              </a:rPr>
+              <a:t>Caddy Automatic HTTPS</a:t>
+            </a:r>
+          </a:p>
+        </p:txBody>
+      </p:sp>
+      <p:sp>
+        <p:nvSpPr>
+          <p:cNvPr id="23" name="TextBox 22"/>
+          <p:cNvSpPr txBox="1"/>
+          <p:nvPr/>
+        </p:nvSpPr>
+        <p:spPr>
+          <a:xfrm>
+            <a:off x="6263640" y="4242816"/>
+            <a:ext cx="4160520" cy="164592"/>
+          </a:xfrm>
+          <a:prstGeom prst="rect">
+            <a:avLst/>
+          </a:prstGeom>
+          <a:noFill/>
+        </p:spPr>
+        <p:txBody>
+          <a:bodyPr wrap="square" lIns="0" rIns="0" tIns="0" bIns="0" anchor="t">
+            <a:spAutoFit/>
+          </a:bodyPr>
+          <a:lstStyle/>
+          <a:p>
+            <a:pPr algn="l"/>
+            <a:r>
+              <a:rPr sz="850" b="0">
+                <a:solidFill>
+                  <a:srgbClr val="CAD5DB"/>
+                </a:solidFill>
+                <a:latin typeface="Aptos"/>
+              </a:rPr>
+              <a:t>caddyserver.com/docs/automatic-https</a:t>
+            </a:r>
+          </a:p>
+        </p:txBody>
+      </p:sp>
+      <p:sp>
+        <p:nvSpPr>
+          <p:cNvPr id="24" name="TextBox 23"/>
+          <p:cNvSpPr txBox="1"/>
+          <p:nvPr/>
+        </p:nvSpPr>
+        <p:spPr>
+          <a:xfrm>
+            <a:off x="868680" y="5321808"/>
+            <a:ext cx="9966960" cy="457200"/>
+          </a:xfrm>
+          <a:prstGeom prst="rect">
+            <a:avLst/>
+          </a:prstGeom>
+          <a:noFill/>
+        </p:spPr>
+        <p:txBody>
+          <a:bodyPr wrap="square" lIns="0" rIns="0" tIns="0" bIns="0" anchor="t">
+            <a:spAutoFit/>
+          </a:bodyPr>
+          <a:lstStyle/>
+          <a:p>
+            <a:pPr algn="l"/>
+            <a:r>
+              <a:rPr sz="1700" b="1">
+                <a:solidFill>
+                  <a:srgbClr val="FFFFFF"/>
+                </a:solidFill>
+                <a:latin typeface="Aptos"/>
+              </a:rPr>
+              <a:t>Entregables: informe IEEE, presentación, repositorio GitHub, README, scripts de aprovisionamiento, Docker Compose, evidencias y demo pública HTTPS.</a:t>
+            </a:r>
+          </a:p>
+        </p:txBody>
+      </p:sp>
+      <p:cxnSp>
+        <p:nvCxnSpPr>
+          <p:cNvPr id="25" name="Connector 24"/>
+          <p:cNvCxnSpPr/>
+          <p:nvPr/>
+        </p:nvCxnSpPr>
+        <p:spPr>
+          <a:xfrm>
+            <a:off x="502920" y="6428232"/>
+            <a:ext cx="11155680" cy="0"/>
+          </a:xfrm>
+          <a:prstGeom prst="line">
+            <a:avLst/>
+          </a:prstGeom>
+          <a:ln w="8890">
+            <a:solidFill>
+              <a:srgbClr val="2A424D"/>
+            </a:solidFill>
+          </a:ln>
+        </p:spPr>
+        <p:style>
+          <a:lnRef idx="2">
+            <a:schemeClr val="accent1"/>
+          </a:lnRef>
+          <a:fillRef idx="0">
+            <a:schemeClr val="accent1"/>
+          </a:fillRef>
+          <a:effectRef idx="1">
+            <a:schemeClr val="accent1"/>
+          </a:effectRef>
+          <a:fontRef idx="minor">
+            <a:schemeClr val="tx1"/>
+          </a:fontRef>
+        </p:style>
+      </p:cxnSp>
+      <p:sp>
+        <p:nvSpPr>
+          <p:cNvPr id="26" name="TextBox 25"/>
+          <p:cNvSpPr txBox="1"/>
+          <p:nvPr/>
+        </p:nvSpPr>
+        <p:spPr>
+          <a:xfrm>
+            <a:off x="502920" y="6519672"/>
+            <a:ext cx="4754880" cy="164592"/>
+          </a:xfrm>
+          <a:prstGeom prst="rect">
+            <a:avLst/>
+          </a:prstGeom>
+          <a:noFill/>
+        </p:spPr>
+        <p:txBody>
+          <a:bodyPr wrap="square" lIns="0" rIns="0" tIns="0" bIns="0" anchor="t">
+            <a:spAutoFit/>
+          </a:bodyPr>
+          <a:lstStyle/>
+          <a:p>
+            <a:pPr algn="l"/>
+            <a:r>
+              <a:rPr sz="750" b="0">
+                <a:solidFill>
+                  <a:srgbClr val="8E9FAA"/>
+                </a:solidFill>
+                <a:latin typeface="Aptos"/>
+              </a:rPr>
+              <a:t>Proyecto 7 - Monitoreo de infraestructura con Zabbix</a:t>
+            </a:r>
+          </a:p>
+        </p:txBody>
+      </p:sp>
+      <p:sp>
+        <p:nvSpPr>
+          <p:cNvPr id="27" name="TextBox 26"/>
+          <p:cNvSpPr txBox="1"/>
+          <p:nvPr/>
+        </p:nvSpPr>
+        <p:spPr>
+          <a:xfrm>
+            <a:off x="10972800" y="6519672"/>
+            <a:ext cx="640080" cy="164592"/>
+          </a:xfrm>
+          <a:prstGeom prst="rect">
+            <a:avLst/>
+          </a:prstGeom>
+          <a:noFill/>
+        </p:spPr>
+        <p:txBody>
+          <a:bodyPr wrap="square" lIns="0" rIns="0" tIns="0" bIns="0" anchor="t">
+            <a:spAutoFit/>
+          </a:bodyPr>
+          <a:lstStyle/>
+          <a:p>
+            <a:pPr algn="r"/>
+            <a:r>
+              <a:rPr sz="750" b="0">
+                <a:solidFill>
+                  <a:srgbClr val="8E9FAA"/>
+                </a:solidFill>
+                <a:latin typeface="Aptos"/>
+              </a:rPr>
+              <a:t>17/17</a:t>
             </a:r>
           </a:p>
         </p:txBody>
@@ -9927,7 +13130,7 @@
                 </a:solidFill>
                 <a:latin typeface="Aptos"/>
               </a:rPr>
-              <a:t>02/14</a:t>
+              <a:t>02/17</a:t>
             </a:r>
           </a:p>
         </p:txBody>
@@ -10742,7 +13945,7 @@
                 </a:solidFill>
                 <a:latin typeface="Aptos"/>
               </a:rPr>
-              <a:t>03/14</a:t>
+              <a:t>03/17</a:t>
             </a:r>
           </a:p>
         </p:txBody>
@@ -12953,7 +16156,7 @@
                 </a:solidFill>
                 <a:latin typeface="Aptos"/>
               </a:rPr>
-              <a:t>04/14</a:t>
+              <a:t>04/17</a:t>
             </a:r>
           </a:p>
         </p:txBody>
@@ -14920,7 +18123,7 @@
                 </a:solidFill>
                 <a:latin typeface="Aptos"/>
               </a:rPr>
-              <a:t>05/14</a:t>
+              <a:t>05/17</a:t>
             </a:r>
           </a:p>
         </p:txBody>
@@ -16629,7 +19832,7 @@
                 </a:solidFill>
                 <a:latin typeface="Aptos"/>
               </a:rPr>
-              <a:t>06/14</a:t>
+              <a:t>06/17</a:t>
             </a:r>
           </a:p>
         </p:txBody>
@@ -17429,7 +20632,7 @@
                 </a:solidFill>
                 <a:latin typeface="Aptos"/>
               </a:rPr>
-              <a:t>07/14</a:t>
+              <a:t>07/17</a:t>
             </a:r>
           </a:p>
         </p:txBody>
@@ -18243,7 +21446,7 @@
                 </a:solidFill>
                 <a:latin typeface="Aptos"/>
               </a:rPr>
-              <a:t>08/14</a:t>
+              <a:t>08/17</a:t>
             </a:r>
           </a:p>
         </p:txBody>
@@ -19175,7 +22378,7 @@
                 </a:solidFill>
                 <a:latin typeface="Aptos"/>
               </a:rPr>
-              <a:t>09/14</a:t>
+              <a:t>09/17</a:t>
             </a:r>
           </a:p>
         </p:txBody>

--- a/entrega-final/Presentacion_Proyecto7_Zabbix.pptx
+++ b/entrega-final/Presentacion_Proyecto7_Zabbix.pptx
@@ -7,6 +7,7 @@
   <p:sldIdLst>
     <p:sldId id="256" r:id="rId7"/>
     <p:sldId id="257" r:id="rId8"/>
+    <p:sldId id="270" r:id="rId21"/>
     <p:sldId id="258" r:id="rId9"/>
     <p:sldId id="259" r:id="rId10"/>
     <p:sldId id="260" r:id="rId11"/>
@@ -17,10 +18,9 @@
     <p:sldId id="265" r:id="rId16"/>
     <p:sldId id="266" r:id="rId17"/>
     <p:sldId id="267" r:id="rId18"/>
+    <p:sldId id="271" r:id="rId22"/>
     <p:sldId id="268" r:id="rId19"/>
     <p:sldId id="269" r:id="rId20"/>
-    <p:sldId id="270" r:id="rId21"/>
-    <p:sldId id="271" r:id="rId22"/>
     <p:sldId id="272" r:id="rId23"/>
   </p:sldIdLst>
   <p:sldSz cx="12191695" cy="6858000" type="screen4x3"/>
@@ -3947,6 +3947,938 @@
     <p:bg>
       <p:bgPr>
         <a:solidFill>
+          <a:srgbClr val="FAF7F4"/>
+        </a:solidFill>
+        <a:effectLst/>
+      </p:bgPr>
+    </p:bg>
+    <p:spTree>
+      <p:nvGrpSpPr>
+        <p:cNvPr id="1" name=""/>
+        <p:cNvGrpSpPr/>
+        <p:nvPr/>
+      </p:nvGrpSpPr>
+      <p:grpSpPr/>
+      <p:sp>
+        <p:nvSpPr>
+          <p:cNvPr id="7" name="Rectangle 6"/>
+          <p:cNvSpPr/>
+          <p:nvPr/>
+        </p:nvSpPr>
+        <p:spPr>
+          <a:xfrm>
+            <a:off x="6236207" y="1527048"/>
+            <a:ext cx="5038344" cy="3300984"/>
+          </a:xfrm>
+          <a:prstGeom prst="rect">
+            <a:avLst/>
+          </a:prstGeom>
+          <a:solidFill>
+            <a:srgbClr val="FFFFFF"/>
+          </a:solidFill>
+          <a:ln w="10160">
+            <a:solidFill>
+              <a:srgbClr val="BFCCD6"/>
+            </a:solidFill>
+          </a:ln>
+        </p:spPr>
+        <p:style>
+          <a:lnRef idx="1">
+            <a:schemeClr val="accent1"/>
+          </a:lnRef>
+          <a:fillRef idx="3">
+            <a:schemeClr val="accent1"/>
+          </a:fillRef>
+          <a:effectRef idx="2">
+            <a:schemeClr val="accent1"/>
+          </a:effectRef>
+          <a:fontRef idx="minor">
+            <a:schemeClr val="lt1"/>
+          </a:fontRef>
+        </p:style>
+        <p:txBody>
+          <a:bodyPr rtlCol="0" anchor="ctr"/>
+          <a:lstStyle/>
+          <a:p>
+            <a:pPr algn="ctr"/>
+          </a:p>
+        </p:txBody>
+      </p:sp>
+      <p:sp>
+        <p:nvSpPr>
+          <p:cNvPr id="2" name="TextBox 1"/>
+          <p:cNvSpPr txBox="1"/>
+          <p:nvPr/>
+        </p:nvSpPr>
+        <p:spPr>
+          <a:xfrm>
+            <a:off x="502920" y="384048"/>
+            <a:ext cx="384048" cy="201168"/>
+          </a:xfrm>
+          <a:prstGeom prst="rect">
+            <a:avLst/>
+          </a:prstGeom>
+          <a:noFill/>
+        </p:spPr>
+        <p:txBody>
+          <a:bodyPr wrap="square" lIns="0" rIns="0" tIns="0" bIns="0" anchor="t">
+            <a:spAutoFit/>
+          </a:bodyPr>
+          <a:lstStyle/>
+          <a:p>
+            <a:pPr algn="l"/>
+            <a:r>
+              <a:rPr sz="800" b="1">
+                <a:solidFill>
+                  <a:srgbClr val="0A1820"/>
+                </a:solidFill>
+                <a:latin typeface="Aptos"/>
+              </a:rPr>
+              <a:t>10</a:t>
+            </a:r>
+          </a:p>
+        </p:txBody>
+      </p:sp>
+      <p:cxnSp>
+        <p:nvCxnSpPr>
+          <p:cNvPr id="3" name="Connector 2"/>
+          <p:cNvCxnSpPr/>
+          <p:nvPr/>
+        </p:nvCxnSpPr>
+        <p:spPr>
+          <a:xfrm>
+            <a:off x="941832" y="475488"/>
+            <a:ext cx="685800" cy="0"/>
+          </a:xfrm>
+          <a:prstGeom prst="line">
+            <a:avLst/>
+          </a:prstGeom>
+          <a:ln w="13970">
+            <a:solidFill>
+              <a:srgbClr val="0A1820"/>
+            </a:solidFill>
+          </a:ln>
+        </p:spPr>
+        <p:style>
+          <a:lnRef idx="2">
+            <a:schemeClr val="accent1"/>
+          </a:lnRef>
+          <a:fillRef idx="0">
+            <a:schemeClr val="accent1"/>
+          </a:fillRef>
+          <a:effectRef idx="1">
+            <a:schemeClr val="accent1"/>
+          </a:effectRef>
+          <a:fontRef idx="minor">
+            <a:schemeClr val="tx1"/>
+          </a:fontRef>
+        </p:style>
+      </p:cxnSp>
+      <p:sp>
+        <p:nvSpPr>
+          <p:cNvPr id="4" name="TextBox 3"/>
+          <p:cNvSpPr txBox="1"/>
+          <p:nvPr/>
+        </p:nvSpPr>
+        <p:spPr>
+          <a:xfrm>
+            <a:off x="1737360" y="356616"/>
+            <a:ext cx="3108960" cy="274320"/>
+          </a:xfrm>
+          <a:prstGeom prst="rect">
+            <a:avLst/>
+          </a:prstGeom>
+          <a:noFill/>
+        </p:spPr>
+        <p:txBody>
+          <a:bodyPr wrap="square" lIns="0" rIns="0" tIns="0" bIns="0" anchor="t">
+            <a:spAutoFit/>
+          </a:bodyPr>
+          <a:lstStyle/>
+          <a:p>
+            <a:pPr algn="l"/>
+            <a:r>
+              <a:rPr sz="800" b="1">
+                <a:solidFill>
+                  <a:srgbClr val="0A1820"/>
+                </a:solidFill>
+                <a:latin typeface="Aptos"/>
+              </a:rPr>
+              <a:t>CAÍDA CONTROLADA</a:t>
+            </a:r>
+          </a:p>
+        </p:txBody>
+      </p:sp>
+      <p:sp>
+        <p:nvSpPr>
+          <p:cNvPr id="5" name="TextBox 4"/>
+          <p:cNvSpPr txBox="1"/>
+          <p:nvPr/>
+        </p:nvSpPr>
+        <p:spPr>
+          <a:xfrm>
+            <a:off x="502920" y="713232"/>
+            <a:ext cx="7498079" cy="868680"/>
+          </a:xfrm>
+          <a:prstGeom prst="rect">
+            <a:avLst/>
+          </a:prstGeom>
+          <a:noFill/>
+        </p:spPr>
+        <p:txBody>
+          <a:bodyPr wrap="square" lIns="0" rIns="0" tIns="0" bIns="0" anchor="t">
+            <a:spAutoFit/>
+          </a:bodyPr>
+          <a:lstStyle/>
+          <a:p>
+            <a:pPr algn="l"/>
+            <a:r>
+              <a:rPr sz="3000" b="1">
+                <a:solidFill>
+                  <a:srgbClr val="0A1820"/>
+                </a:solidFill>
+                <a:latin typeface="Aptos Display"/>
+              </a:rPr>
+              <a:t>La caída controlada prueba el flujo completo.</a:t>
+            </a:r>
+          </a:p>
+        </p:txBody>
+      </p:sp>
+      <p:pic>
+        <p:nvPicPr>
+          <p:cNvPr id="6" name="Picture 5" descr="06_zabbix_falla_web_activa.png"/>
+          <p:cNvPicPr>
+            <a:picLocks noChangeAspect="1"/>
+          </p:cNvPicPr>
+          <p:nvPr/>
+        </p:nvPicPr>
+        <p:blipFill>
+          <a:blip r:embed="rId2"/>
+          <a:stretch>
+            <a:fillRect/>
+          </a:stretch>
+        </p:blipFill>
+        <p:spPr>
+          <a:xfrm>
+            <a:off x="6263640" y="1554480"/>
+            <a:ext cx="4983480" cy="3246120"/>
+          </a:xfrm>
+          <a:prstGeom prst="rect">
+            <a:avLst/>
+          </a:prstGeom>
+        </p:spPr>
+      </p:pic>
+      <p:sp>
+        <p:nvSpPr>
+          <p:cNvPr id="8" name="Rounded Rectangle 7"/>
+          <p:cNvSpPr/>
+          <p:nvPr/>
+        </p:nvSpPr>
+        <p:spPr>
+          <a:xfrm>
+            <a:off x="713232" y="2331720"/>
+            <a:ext cx="658368" cy="658368"/>
+          </a:xfrm>
+          <a:prstGeom prst="roundRect">
+            <a:avLst/>
+          </a:prstGeom>
+          <a:solidFill>
+            <a:srgbClr val="EF4444"/>
+          </a:solidFill>
+          <a:ln>
+            <a:noFill/>
+          </a:ln>
+        </p:spPr>
+        <p:style>
+          <a:lnRef idx="1">
+            <a:schemeClr val="accent1"/>
+          </a:lnRef>
+          <a:fillRef idx="3">
+            <a:schemeClr val="accent1"/>
+          </a:fillRef>
+          <a:effectRef idx="2">
+            <a:schemeClr val="accent1"/>
+          </a:effectRef>
+          <a:fontRef idx="minor">
+            <a:schemeClr val="lt1"/>
+          </a:fontRef>
+        </p:style>
+        <p:txBody>
+          <a:bodyPr rtlCol="0" anchor="ctr"/>
+          <a:lstStyle/>
+          <a:p>
+            <a:pPr algn="ctr"/>
+          </a:p>
+        </p:txBody>
+      </p:sp>
+      <p:sp>
+        <p:nvSpPr>
+          <p:cNvPr id="9" name="TextBox 8"/>
+          <p:cNvSpPr txBox="1"/>
+          <p:nvPr/>
+        </p:nvSpPr>
+        <p:spPr>
+          <a:xfrm>
+            <a:off x="932688" y="2505456"/>
+            <a:ext cx="228600" cy="219456"/>
+          </a:xfrm>
+          <a:prstGeom prst="rect">
+            <a:avLst/>
+          </a:prstGeom>
+          <a:noFill/>
+        </p:spPr>
+        <p:txBody>
+          <a:bodyPr wrap="square" lIns="0" rIns="0" tIns="0" bIns="0" anchor="t">
+            <a:spAutoFit/>
+          </a:bodyPr>
+          <a:lstStyle/>
+          <a:p>
+            <a:pPr algn="ctr"/>
+            <a:r>
+              <a:rPr sz="1600" b="1">
+                <a:solidFill>
+                  <a:srgbClr val="FFFFFF"/>
+                </a:solidFill>
+                <a:latin typeface="Aptos"/>
+              </a:rPr>
+              <a:t>1</a:t>
+            </a:r>
+          </a:p>
+        </p:txBody>
+      </p:sp>
+      <p:sp>
+        <p:nvSpPr>
+          <p:cNvPr id="10" name="TextBox 9"/>
+          <p:cNvSpPr txBox="1"/>
+          <p:nvPr/>
+        </p:nvSpPr>
+        <p:spPr>
+          <a:xfrm>
+            <a:off x="603504" y="3163824"/>
+            <a:ext cx="914400" cy="310896"/>
+          </a:xfrm>
+          <a:prstGeom prst="rect">
+            <a:avLst/>
+          </a:prstGeom>
+          <a:noFill/>
+        </p:spPr>
+        <p:txBody>
+          <a:bodyPr wrap="square" lIns="0" rIns="0" tIns="0" bIns="0" anchor="t">
+            <a:spAutoFit/>
+          </a:bodyPr>
+          <a:lstStyle/>
+          <a:p>
+            <a:pPr algn="ctr"/>
+            <a:r>
+              <a:rPr sz="830" b="1">
+                <a:solidFill>
+                  <a:srgbClr val="0A1820"/>
+                </a:solidFill>
+                <a:latin typeface="Aptos"/>
+              </a:rPr>
+              <a:t>stop web-service</a:t>
+            </a:r>
+          </a:p>
+        </p:txBody>
+      </p:sp>
+      <p:cxnSp>
+        <p:nvCxnSpPr>
+          <p:cNvPr id="11" name="Connector 10"/>
+          <p:cNvCxnSpPr/>
+          <p:nvPr/>
+        </p:nvCxnSpPr>
+        <p:spPr>
+          <a:xfrm>
+            <a:off x="1371600" y="2660904"/>
+            <a:ext cx="502919" cy="0"/>
+          </a:xfrm>
+          <a:prstGeom prst="line">
+            <a:avLst/>
+          </a:prstGeom>
+          <a:ln w="20320">
+            <a:solidFill>
+              <a:srgbClr val="BFCCD6"/>
+            </a:solidFill>
+          </a:ln>
+        </p:spPr>
+        <p:style>
+          <a:lnRef idx="2">
+            <a:schemeClr val="accent1"/>
+          </a:lnRef>
+          <a:fillRef idx="0">
+            <a:schemeClr val="accent1"/>
+          </a:fillRef>
+          <a:effectRef idx="1">
+            <a:schemeClr val="accent1"/>
+          </a:effectRef>
+          <a:fontRef idx="minor">
+            <a:schemeClr val="tx1"/>
+          </a:fontRef>
+        </p:style>
+      </p:cxnSp>
+      <p:sp>
+        <p:nvSpPr>
+          <p:cNvPr id="12" name="Rounded Rectangle 11"/>
+          <p:cNvSpPr/>
+          <p:nvPr/>
+        </p:nvSpPr>
+        <p:spPr>
+          <a:xfrm>
+            <a:off x="2011680" y="2331720"/>
+            <a:ext cx="658368" cy="658368"/>
+          </a:xfrm>
+          <a:prstGeom prst="roundRect">
+            <a:avLst/>
+          </a:prstGeom>
+          <a:solidFill>
+            <a:srgbClr val="F59E0B"/>
+          </a:solidFill>
+          <a:ln>
+            <a:noFill/>
+          </a:ln>
+        </p:spPr>
+        <p:style>
+          <a:lnRef idx="1">
+            <a:schemeClr val="accent1"/>
+          </a:lnRef>
+          <a:fillRef idx="3">
+            <a:schemeClr val="accent1"/>
+          </a:fillRef>
+          <a:effectRef idx="2">
+            <a:schemeClr val="accent1"/>
+          </a:effectRef>
+          <a:fontRef idx="minor">
+            <a:schemeClr val="lt1"/>
+          </a:fontRef>
+        </p:style>
+        <p:txBody>
+          <a:bodyPr rtlCol="0" anchor="ctr"/>
+          <a:lstStyle/>
+          <a:p>
+            <a:pPr algn="ctr"/>
+          </a:p>
+        </p:txBody>
+      </p:sp>
+      <p:sp>
+        <p:nvSpPr>
+          <p:cNvPr id="13" name="TextBox 12"/>
+          <p:cNvSpPr txBox="1"/>
+          <p:nvPr/>
+        </p:nvSpPr>
+        <p:spPr>
+          <a:xfrm>
+            <a:off x="2231136" y="2505456"/>
+            <a:ext cx="228600" cy="219456"/>
+          </a:xfrm>
+          <a:prstGeom prst="rect">
+            <a:avLst/>
+          </a:prstGeom>
+          <a:noFill/>
+        </p:spPr>
+        <p:txBody>
+          <a:bodyPr wrap="square" lIns="0" rIns="0" tIns="0" bIns="0" anchor="t">
+            <a:spAutoFit/>
+          </a:bodyPr>
+          <a:lstStyle/>
+          <a:p>
+            <a:pPr algn="ctr"/>
+            <a:r>
+              <a:rPr sz="1600" b="1">
+                <a:solidFill>
+                  <a:srgbClr val="FFFFFF"/>
+                </a:solidFill>
+                <a:latin typeface="Aptos"/>
+              </a:rPr>
+              <a:t>2</a:t>
+            </a:r>
+          </a:p>
+        </p:txBody>
+      </p:sp>
+      <p:sp>
+        <p:nvSpPr>
+          <p:cNvPr id="14" name="TextBox 13"/>
+          <p:cNvSpPr txBox="1"/>
+          <p:nvPr/>
+        </p:nvSpPr>
+        <p:spPr>
+          <a:xfrm>
+            <a:off x="1901952" y="3163824"/>
+            <a:ext cx="914400" cy="310896"/>
+          </a:xfrm>
+          <a:prstGeom prst="rect">
+            <a:avLst/>
+          </a:prstGeom>
+          <a:noFill/>
+        </p:spPr>
+        <p:txBody>
+          <a:bodyPr wrap="square" lIns="0" rIns="0" tIns="0" bIns="0" anchor="t">
+            <a:spAutoFit/>
+          </a:bodyPr>
+          <a:lstStyle/>
+          <a:p>
+            <a:pPr algn="ctr"/>
+            <a:r>
+              <a:rPr sz="830" b="1">
+                <a:solidFill>
+                  <a:srgbClr val="0A1820"/>
+                </a:solidFill>
+                <a:latin typeface="Aptos"/>
+              </a:rPr>
+              <a:t>trigger en Zabbix</a:t>
+            </a:r>
+          </a:p>
+        </p:txBody>
+      </p:sp>
+      <p:cxnSp>
+        <p:nvCxnSpPr>
+          <p:cNvPr id="15" name="Connector 14"/>
+          <p:cNvCxnSpPr/>
+          <p:nvPr/>
+        </p:nvCxnSpPr>
+        <p:spPr>
+          <a:xfrm>
+            <a:off x="2670048" y="2660904"/>
+            <a:ext cx="502920" cy="0"/>
+          </a:xfrm>
+          <a:prstGeom prst="line">
+            <a:avLst/>
+          </a:prstGeom>
+          <a:ln w="20320">
+            <a:solidFill>
+              <a:srgbClr val="BFCCD6"/>
+            </a:solidFill>
+          </a:ln>
+        </p:spPr>
+        <p:style>
+          <a:lnRef idx="2">
+            <a:schemeClr val="accent1"/>
+          </a:lnRef>
+          <a:fillRef idx="0">
+            <a:schemeClr val="accent1"/>
+          </a:fillRef>
+          <a:effectRef idx="1">
+            <a:schemeClr val="accent1"/>
+          </a:effectRef>
+          <a:fontRef idx="minor">
+            <a:schemeClr val="tx1"/>
+          </a:fontRef>
+        </p:style>
+      </p:cxnSp>
+      <p:sp>
+        <p:nvSpPr>
+          <p:cNvPr id="16" name="Rounded Rectangle 15"/>
+          <p:cNvSpPr/>
+          <p:nvPr/>
+        </p:nvSpPr>
+        <p:spPr>
+          <a:xfrm>
+            <a:off x="3310128" y="2331720"/>
+            <a:ext cx="658368" cy="658368"/>
+          </a:xfrm>
+          <a:prstGeom prst="roundRect">
+            <a:avLst/>
+          </a:prstGeom>
+          <a:solidFill>
+            <a:srgbClr val="38BDF8"/>
+          </a:solidFill>
+          <a:ln>
+            <a:noFill/>
+          </a:ln>
+        </p:spPr>
+        <p:style>
+          <a:lnRef idx="1">
+            <a:schemeClr val="accent1"/>
+          </a:lnRef>
+          <a:fillRef idx="3">
+            <a:schemeClr val="accent1"/>
+          </a:fillRef>
+          <a:effectRef idx="2">
+            <a:schemeClr val="accent1"/>
+          </a:effectRef>
+          <a:fontRef idx="minor">
+            <a:schemeClr val="lt1"/>
+          </a:fontRef>
+        </p:style>
+        <p:txBody>
+          <a:bodyPr rtlCol="0" anchor="ctr"/>
+          <a:lstStyle/>
+          <a:p>
+            <a:pPr algn="ctr"/>
+          </a:p>
+        </p:txBody>
+      </p:sp>
+      <p:sp>
+        <p:nvSpPr>
+          <p:cNvPr id="17" name="TextBox 16"/>
+          <p:cNvSpPr txBox="1"/>
+          <p:nvPr/>
+        </p:nvSpPr>
+        <p:spPr>
+          <a:xfrm>
+            <a:off x="3529584" y="2505456"/>
+            <a:ext cx="228600" cy="219456"/>
+          </a:xfrm>
+          <a:prstGeom prst="rect">
+            <a:avLst/>
+          </a:prstGeom>
+          <a:noFill/>
+        </p:spPr>
+        <p:txBody>
+          <a:bodyPr wrap="square" lIns="0" rIns="0" tIns="0" bIns="0" anchor="t">
+            <a:spAutoFit/>
+          </a:bodyPr>
+          <a:lstStyle/>
+          <a:p>
+            <a:pPr algn="ctr"/>
+            <a:r>
+              <a:rPr sz="1600" b="1">
+                <a:solidFill>
+                  <a:srgbClr val="FFFFFF"/>
+                </a:solidFill>
+                <a:latin typeface="Aptos"/>
+              </a:rPr>
+              <a:t>3</a:t>
+            </a:r>
+          </a:p>
+        </p:txBody>
+      </p:sp>
+      <p:sp>
+        <p:nvSpPr>
+          <p:cNvPr id="18" name="TextBox 17"/>
+          <p:cNvSpPr txBox="1"/>
+          <p:nvPr/>
+        </p:nvSpPr>
+        <p:spPr>
+          <a:xfrm>
+            <a:off x="3200400" y="3163824"/>
+            <a:ext cx="914400" cy="310896"/>
+          </a:xfrm>
+          <a:prstGeom prst="rect">
+            <a:avLst/>
+          </a:prstGeom>
+          <a:noFill/>
+        </p:spPr>
+        <p:txBody>
+          <a:bodyPr wrap="square" lIns="0" rIns="0" tIns="0" bIns="0" anchor="t">
+            <a:spAutoFit/>
+          </a:bodyPr>
+          <a:lstStyle/>
+          <a:p>
+            <a:pPr algn="ctr"/>
+            <a:r>
+              <a:rPr sz="830" b="1">
+                <a:solidFill>
+                  <a:srgbClr val="0A1820"/>
+                </a:solidFill>
+                <a:latin typeface="Aptos"/>
+              </a:rPr>
+              <a:t>correo MailHog</a:t>
+            </a:r>
+          </a:p>
+        </p:txBody>
+      </p:sp>
+      <p:cxnSp>
+        <p:nvCxnSpPr>
+          <p:cNvPr id="19" name="Connector 18"/>
+          <p:cNvCxnSpPr/>
+          <p:nvPr/>
+        </p:nvCxnSpPr>
+        <p:spPr>
+          <a:xfrm>
+            <a:off x="3968496" y="2660904"/>
+            <a:ext cx="502920" cy="0"/>
+          </a:xfrm>
+          <a:prstGeom prst="line">
+            <a:avLst/>
+          </a:prstGeom>
+          <a:ln w="20320">
+            <a:solidFill>
+              <a:srgbClr val="BFCCD6"/>
+            </a:solidFill>
+          </a:ln>
+        </p:spPr>
+        <p:style>
+          <a:lnRef idx="2">
+            <a:schemeClr val="accent1"/>
+          </a:lnRef>
+          <a:fillRef idx="0">
+            <a:schemeClr val="accent1"/>
+          </a:fillRef>
+          <a:effectRef idx="1">
+            <a:schemeClr val="accent1"/>
+          </a:effectRef>
+          <a:fontRef idx="minor">
+            <a:schemeClr val="tx1"/>
+          </a:fontRef>
+        </p:style>
+      </p:cxnSp>
+      <p:sp>
+        <p:nvSpPr>
+          <p:cNvPr id="20" name="Rounded Rectangle 19"/>
+          <p:cNvSpPr/>
+          <p:nvPr/>
+        </p:nvSpPr>
+        <p:spPr>
+          <a:xfrm>
+            <a:off x="4608576" y="2331720"/>
+            <a:ext cx="658368" cy="658368"/>
+          </a:xfrm>
+          <a:prstGeom prst="roundRect">
+            <a:avLst/>
+          </a:prstGeom>
+          <a:solidFill>
+            <a:srgbClr val="22C5AA"/>
+          </a:solidFill>
+          <a:ln>
+            <a:noFill/>
+          </a:ln>
+        </p:spPr>
+        <p:style>
+          <a:lnRef idx="1">
+            <a:schemeClr val="accent1"/>
+          </a:lnRef>
+          <a:fillRef idx="3">
+            <a:schemeClr val="accent1"/>
+          </a:fillRef>
+          <a:effectRef idx="2">
+            <a:schemeClr val="accent1"/>
+          </a:effectRef>
+          <a:fontRef idx="minor">
+            <a:schemeClr val="lt1"/>
+          </a:fontRef>
+        </p:style>
+        <p:txBody>
+          <a:bodyPr rtlCol="0" anchor="ctr"/>
+          <a:lstStyle/>
+          <a:p>
+            <a:pPr algn="ctr"/>
+          </a:p>
+        </p:txBody>
+      </p:sp>
+      <p:sp>
+        <p:nvSpPr>
+          <p:cNvPr id="21" name="TextBox 20"/>
+          <p:cNvSpPr txBox="1"/>
+          <p:nvPr/>
+        </p:nvSpPr>
+        <p:spPr>
+          <a:xfrm>
+            <a:off x="4828032" y="2505456"/>
+            <a:ext cx="228600" cy="219456"/>
+          </a:xfrm>
+          <a:prstGeom prst="rect">
+            <a:avLst/>
+          </a:prstGeom>
+          <a:noFill/>
+        </p:spPr>
+        <p:txBody>
+          <a:bodyPr wrap="square" lIns="0" rIns="0" tIns="0" bIns="0" anchor="t">
+            <a:spAutoFit/>
+          </a:bodyPr>
+          <a:lstStyle/>
+          <a:p>
+            <a:pPr algn="ctr"/>
+            <a:r>
+              <a:rPr sz="1600" b="1">
+                <a:solidFill>
+                  <a:srgbClr val="FFFFFF"/>
+                </a:solidFill>
+                <a:latin typeface="Aptos"/>
+              </a:rPr>
+              <a:t>4</a:t>
+            </a:r>
+          </a:p>
+        </p:txBody>
+      </p:sp>
+      <p:sp>
+        <p:nvSpPr>
+          <p:cNvPr id="22" name="TextBox 21"/>
+          <p:cNvSpPr txBox="1"/>
+          <p:nvPr/>
+        </p:nvSpPr>
+        <p:spPr>
+          <a:xfrm>
+            <a:off x="4498848" y="3163824"/>
+            <a:ext cx="914400" cy="310896"/>
+          </a:xfrm>
+          <a:prstGeom prst="rect">
+            <a:avLst/>
+          </a:prstGeom>
+          <a:noFill/>
+        </p:spPr>
+        <p:txBody>
+          <a:bodyPr wrap="square" lIns="0" rIns="0" tIns="0" bIns="0" anchor="t">
+            <a:spAutoFit/>
+          </a:bodyPr>
+          <a:lstStyle/>
+          <a:p>
+            <a:pPr algn="ctr"/>
+            <a:r>
+              <a:rPr sz="830" b="1">
+                <a:solidFill>
+                  <a:srgbClr val="0A1820"/>
+                </a:solidFill>
+                <a:latin typeface="Aptos"/>
+              </a:rPr>
+              <a:t>start + recovery</a:t>
+            </a:r>
+          </a:p>
+        </p:txBody>
+      </p:sp>
+      <p:sp>
+        <p:nvSpPr>
+          <p:cNvPr id="23" name="TextBox 22"/>
+          <p:cNvSpPr txBox="1"/>
+          <p:nvPr/>
+        </p:nvSpPr>
+        <p:spPr>
+          <a:xfrm>
+            <a:off x="713232" y="5074920"/>
+            <a:ext cx="5166360" cy="658368"/>
+          </a:xfrm>
+          <a:prstGeom prst="rect">
+            <a:avLst/>
+          </a:prstGeom>
+          <a:noFill/>
+        </p:spPr>
+        <p:txBody>
+          <a:bodyPr wrap="square" lIns="0" rIns="0" tIns="0" bIns="0" anchor="t">
+            <a:spAutoFit/>
+          </a:bodyPr>
+          <a:lstStyle/>
+          <a:p>
+            <a:pPr algn="l"/>
+            <a:r>
+              <a:rPr sz="1800" b="1">
+                <a:solidFill>
+                  <a:srgbClr val="0A1820"/>
+                </a:solidFill>
+                <a:latin typeface="Aptos"/>
+              </a:rPr>
+              <a:t>El valor de esta prueba está en el flujo completo: no solo aparece el problema, también queda histórico y evidencia de recuperación.</a:t>
+            </a:r>
+          </a:p>
+        </p:txBody>
+      </p:sp>
+      <p:cxnSp>
+        <p:nvCxnSpPr>
+          <p:cNvPr id="24" name="Connector 23"/>
+          <p:cNvCxnSpPr/>
+          <p:nvPr/>
+        </p:nvCxnSpPr>
+        <p:spPr>
+          <a:xfrm>
+            <a:off x="502920" y="6428232"/>
+            <a:ext cx="11155680" cy="0"/>
+          </a:xfrm>
+          <a:prstGeom prst="line">
+            <a:avLst/>
+          </a:prstGeom>
+          <a:ln w="8890">
+            <a:solidFill>
+              <a:srgbClr val="BFCCD6"/>
+            </a:solidFill>
+          </a:ln>
+        </p:spPr>
+        <p:style>
+          <a:lnRef idx="2">
+            <a:schemeClr val="accent1"/>
+          </a:lnRef>
+          <a:fillRef idx="0">
+            <a:schemeClr val="accent1"/>
+          </a:fillRef>
+          <a:effectRef idx="1">
+            <a:schemeClr val="accent1"/>
+          </a:effectRef>
+          <a:fontRef idx="minor">
+            <a:schemeClr val="tx1"/>
+          </a:fontRef>
+        </p:style>
+      </p:cxnSp>
+      <p:sp>
+        <p:nvSpPr>
+          <p:cNvPr id="25" name="TextBox 24"/>
+          <p:cNvSpPr txBox="1"/>
+          <p:nvPr/>
+        </p:nvSpPr>
+        <p:spPr>
+          <a:xfrm>
+            <a:off x="502920" y="6519672"/>
+            <a:ext cx="4754880" cy="164592"/>
+          </a:xfrm>
+          <a:prstGeom prst="rect">
+            <a:avLst/>
+          </a:prstGeom>
+          <a:noFill/>
+        </p:spPr>
+        <p:txBody>
+          <a:bodyPr wrap="square" lIns="0" rIns="0" tIns="0" bIns="0" anchor="t">
+            <a:spAutoFit/>
+          </a:bodyPr>
+          <a:lstStyle/>
+          <a:p>
+            <a:pPr algn="l"/>
+            <a:r>
+              <a:rPr sz="750" b="0">
+                <a:solidFill>
+                  <a:srgbClr val="5C6975"/>
+                </a:solidFill>
+                <a:latin typeface="Aptos"/>
+              </a:rPr>
+              <a:t>Proyecto 7 - Monitoreo de infraestructura con Zabbix</a:t>
+            </a:r>
+          </a:p>
+        </p:txBody>
+      </p:sp>
+      <p:sp>
+        <p:nvSpPr>
+          <p:cNvPr id="26" name="TextBox 25"/>
+          <p:cNvSpPr txBox="1"/>
+          <p:nvPr/>
+        </p:nvSpPr>
+        <p:spPr>
+          <a:xfrm>
+            <a:off x="10972800" y="6519672"/>
+            <a:ext cx="640080" cy="164592"/>
+          </a:xfrm>
+          <a:prstGeom prst="rect">
+            <a:avLst/>
+          </a:prstGeom>
+          <a:noFill/>
+        </p:spPr>
+        <p:txBody>
+          <a:bodyPr wrap="square" lIns="0" rIns="0" tIns="0" bIns="0" anchor="t">
+            <a:spAutoFit/>
+          </a:bodyPr>
+          <a:lstStyle/>
+          <a:p>
+            <a:pPr algn="r"/>
+            <a:r>
+              <a:rPr sz="750" b="0">
+                <a:solidFill>
+                  <a:srgbClr val="5C6975"/>
+                </a:solidFill>
+                <a:latin typeface="Aptos"/>
+              </a:rPr>
+              <a:t>10/17</a:t>
+            </a:r>
+          </a:p>
+        </p:txBody>
+      </p:sp>
+    </p:spTree>
+  </p:cSld>
+  <p:clrMapOvr>
+    <a:masterClrMapping/>
+  </p:clrMapOvr>
+</p:sld>
+</file>
+
+<file path=ppt/slides/slide11.xml><?xml version="1.0" encoding="utf-8"?>
+<p:sld xmlns:a="http://schemas.openxmlformats.org/drawingml/2006/main" xmlns:p="http://schemas.openxmlformats.org/presentationml/2006/main" xmlns:r="http://schemas.openxmlformats.org/officeDocument/2006/relationships">
+  <p:cSld>
+    <p:bg>
+      <p:bgPr>
+        <a:solidFill>
           <a:srgbClr val="0A1820"/>
         </a:solidFill>
         <a:effectLst/>
@@ -4034,7 +4966,7 @@
                 </a:solidFill>
                 <a:latin typeface="Aptos"/>
               </a:rPr>
-              <a:t>10</a:t>
+              <a:t>11</a:t>
             </a:r>
           </a:p>
         </p:txBody>
@@ -4584,7 +5516,7 @@
                 </a:solidFill>
                 <a:latin typeface="Aptos"/>
               </a:rPr>
-              <a:t>10/17</a:t>
+              <a:t>11/17</a:t>
             </a:r>
           </a:p>
         </p:txBody>
@@ -4597,7 +5529,7 @@
 </p:sld>
 </file>
 
-<file path=ppt/slides/slide11.xml><?xml version="1.0" encoding="utf-8"?>
+<file path=ppt/slides/slide12.xml><?xml version="1.0" encoding="utf-8"?>
 <p:sld xmlns:a="http://schemas.openxmlformats.org/drawingml/2006/main" xmlns:p="http://schemas.openxmlformats.org/presentationml/2006/main" xmlns:r="http://schemas.openxmlformats.org/officeDocument/2006/relationships">
   <p:cSld>
     <p:bg>
@@ -4645,7 +5577,7 @@
                 </a:solidFill>
                 <a:latin typeface="Aptos"/>
               </a:rPr>
-              <a:t>11</a:t>
+              <a:t>12</a:t>
             </a:r>
           </a:p>
         </p:txBody>
@@ -5545,7 +6477,7 @@
                 </a:solidFill>
                 <a:latin typeface="Aptos"/>
               </a:rPr>
-              <a:t>11/17</a:t>
+              <a:t>12/17</a:t>
             </a:r>
           </a:p>
         </p:txBody>
@@ -5558,7 +6490,7 @@
 </p:sld>
 </file>
 
-<file path=ppt/slides/slide12.xml><?xml version="1.0" encoding="utf-8"?>
+<file path=ppt/slides/slide13.xml><?xml version="1.0" encoding="utf-8"?>
 <p:sld xmlns:a="http://schemas.openxmlformats.org/drawingml/2006/main" xmlns:p="http://schemas.openxmlformats.org/presentationml/2006/main" xmlns:r="http://schemas.openxmlformats.org/officeDocument/2006/relationships">
   <p:cSld>
     <p:bg>
@@ -5651,7 +6583,7 @@
                 </a:solidFill>
                 <a:latin typeface="Aptos"/>
               </a:rPr>
-              <a:t>12</a:t>
+              <a:t>13</a:t>
             </a:r>
           </a:p>
         </p:txBody>
@@ -6671,944 +7603,6 @@
       <p:sp>
         <p:nvSpPr>
           <p:cNvPr id="31" name="TextBox 30"/>
-          <p:cNvSpPr txBox="1"/>
-          <p:nvPr/>
-        </p:nvSpPr>
-        <p:spPr>
-          <a:xfrm>
-            <a:off x="10972800" y="6519672"/>
-            <a:ext cx="640080" cy="164592"/>
-          </a:xfrm>
-          <a:prstGeom prst="rect">
-            <a:avLst/>
-          </a:prstGeom>
-          <a:noFill/>
-        </p:spPr>
-        <p:txBody>
-          <a:bodyPr wrap="square" lIns="0" rIns="0" tIns="0" bIns="0" anchor="t">
-            <a:spAutoFit/>
-          </a:bodyPr>
-          <a:lstStyle/>
-          <a:p>
-            <a:pPr algn="r"/>
-            <a:r>
-              <a:rPr sz="750" b="0">
-                <a:solidFill>
-                  <a:srgbClr val="5C6975"/>
-                </a:solidFill>
-                <a:latin typeface="Aptos"/>
-              </a:rPr>
-              <a:t>12/17</a:t>
-            </a:r>
-          </a:p>
-        </p:txBody>
-      </p:sp>
-    </p:spTree>
-  </p:cSld>
-  <p:clrMapOvr>
-    <a:masterClrMapping/>
-  </p:clrMapOvr>
-</p:sld>
-</file>
-
-<file path=ppt/slides/slide13.xml><?xml version="1.0" encoding="utf-8"?>
-<p:sld xmlns:a="http://schemas.openxmlformats.org/drawingml/2006/main" xmlns:p="http://schemas.openxmlformats.org/presentationml/2006/main" xmlns:r="http://schemas.openxmlformats.org/officeDocument/2006/relationships">
-  <p:cSld>
-    <p:bg>
-      <p:bgPr>
-        <a:solidFill>
-          <a:srgbClr val="F7FAF7"/>
-        </a:solidFill>
-        <a:effectLst/>
-      </p:bgPr>
-    </p:bg>
-    <p:spTree>
-      <p:nvGrpSpPr>
-        <p:cNvPr id="1" name=""/>
-        <p:cNvGrpSpPr/>
-        <p:nvPr/>
-      </p:nvGrpSpPr>
-      <p:grpSpPr/>
-      <p:sp>
-        <p:nvSpPr>
-          <p:cNvPr id="2" name="TextBox 1"/>
-          <p:cNvSpPr txBox="1"/>
-          <p:nvPr/>
-        </p:nvSpPr>
-        <p:spPr>
-          <a:xfrm>
-            <a:off x="502920" y="384048"/>
-            <a:ext cx="384048" cy="201168"/>
-          </a:xfrm>
-          <a:prstGeom prst="rect">
-            <a:avLst/>
-          </a:prstGeom>
-          <a:noFill/>
-        </p:spPr>
-        <p:txBody>
-          <a:bodyPr wrap="square" lIns="0" rIns="0" tIns="0" bIns="0" anchor="t">
-            <a:spAutoFit/>
-          </a:bodyPr>
-          <a:lstStyle/>
-          <a:p>
-            <a:pPr algn="l"/>
-            <a:r>
-              <a:rPr sz="800" b="1">
-                <a:solidFill>
-                  <a:srgbClr val="0A1820"/>
-                </a:solidFill>
-                <a:latin typeface="Aptos"/>
-              </a:rPr>
-              <a:t>13</a:t>
-            </a:r>
-          </a:p>
-        </p:txBody>
-      </p:sp>
-      <p:cxnSp>
-        <p:nvCxnSpPr>
-          <p:cNvPr id="3" name="Connector 2"/>
-          <p:cNvCxnSpPr/>
-          <p:nvPr/>
-        </p:nvCxnSpPr>
-        <p:spPr>
-          <a:xfrm>
-            <a:off x="941832" y="475488"/>
-            <a:ext cx="685800" cy="0"/>
-          </a:xfrm>
-          <a:prstGeom prst="line">
-            <a:avLst/>
-          </a:prstGeom>
-          <a:ln w="13970">
-            <a:solidFill>
-              <a:srgbClr val="0A1820"/>
-            </a:solidFill>
-          </a:ln>
-        </p:spPr>
-        <p:style>
-          <a:lnRef idx="2">
-            <a:schemeClr val="accent1"/>
-          </a:lnRef>
-          <a:fillRef idx="0">
-            <a:schemeClr val="accent1"/>
-          </a:fillRef>
-          <a:effectRef idx="1">
-            <a:schemeClr val="accent1"/>
-          </a:effectRef>
-          <a:fontRef idx="minor">
-            <a:schemeClr val="tx1"/>
-          </a:fontRef>
-        </p:style>
-      </p:cxnSp>
-      <p:sp>
-        <p:nvSpPr>
-          <p:cNvPr id="4" name="TextBox 3"/>
-          <p:cNvSpPr txBox="1"/>
-          <p:nvPr/>
-        </p:nvSpPr>
-        <p:spPr>
-          <a:xfrm>
-            <a:off x="1737360" y="356616"/>
-            <a:ext cx="3108960" cy="274320"/>
-          </a:xfrm>
-          <a:prstGeom prst="rect">
-            <a:avLst/>
-          </a:prstGeom>
-          <a:noFill/>
-        </p:spPr>
-        <p:txBody>
-          <a:bodyPr wrap="square" lIns="0" rIns="0" tIns="0" bIns="0" anchor="t">
-            <a:spAutoFit/>
-          </a:bodyPr>
-          <a:lstStyle/>
-          <a:p>
-            <a:pPr algn="l"/>
-            <a:r>
-              <a:rPr sz="800" b="1">
-                <a:solidFill>
-                  <a:srgbClr val="0A1820"/>
-                </a:solidFill>
-                <a:latin typeface="Aptos"/>
-              </a:rPr>
-              <a:t>ENTREGABLES</a:t>
-            </a:r>
-          </a:p>
-        </p:txBody>
-      </p:sp>
-      <p:sp>
-        <p:nvSpPr>
-          <p:cNvPr id="5" name="TextBox 4"/>
-          <p:cNvSpPr txBox="1"/>
-          <p:nvPr/>
-        </p:nvSpPr>
-        <p:spPr>
-          <a:xfrm>
-            <a:off x="502920" y="713232"/>
-            <a:ext cx="7498079" cy="868680"/>
-          </a:xfrm>
-          <a:prstGeom prst="rect">
-            <a:avLst/>
-          </a:prstGeom>
-          <a:noFill/>
-        </p:spPr>
-        <p:txBody>
-          <a:bodyPr wrap="square" lIns="0" rIns="0" tIns="0" bIns="0" anchor="t">
-            <a:spAutoFit/>
-          </a:bodyPr>
-          <a:lstStyle/>
-          <a:p>
-            <a:pPr algn="l"/>
-            <a:r>
-              <a:rPr sz="3000" b="1">
-                <a:solidFill>
-                  <a:srgbClr val="0A1820"/>
-                </a:solidFill>
-                <a:latin typeface="Aptos Display"/>
-              </a:rPr>
-              <a:t>Queda repo, informe, deck y demo pública.</a:t>
-            </a:r>
-          </a:p>
-        </p:txBody>
-      </p:sp>
-      <p:sp>
-        <p:nvSpPr>
-          <p:cNvPr id="6" name="Rounded Rectangle 5"/>
-          <p:cNvSpPr/>
-          <p:nvPr/>
-        </p:nvSpPr>
-        <p:spPr>
-          <a:xfrm>
-            <a:off x="777240" y="1874519"/>
-            <a:ext cx="4343400" cy="960120"/>
-          </a:xfrm>
-          <a:prstGeom prst="roundRect">
-            <a:avLst/>
-          </a:prstGeom>
-          <a:solidFill>
-            <a:srgbClr val="FFFFFF"/>
-          </a:solidFill>
-          <a:ln w="10160">
-            <a:solidFill>
-              <a:srgbClr val="BFCCD6"/>
-            </a:solidFill>
-          </a:ln>
-        </p:spPr>
-        <p:style>
-          <a:lnRef idx="1">
-            <a:schemeClr val="accent1"/>
-          </a:lnRef>
-          <a:fillRef idx="3">
-            <a:schemeClr val="accent1"/>
-          </a:fillRef>
-          <a:effectRef idx="2">
-            <a:schemeClr val="accent1"/>
-          </a:effectRef>
-          <a:fontRef idx="minor">
-            <a:schemeClr val="lt1"/>
-          </a:fontRef>
-        </p:style>
-        <p:txBody>
-          <a:bodyPr rtlCol="0" anchor="ctr"/>
-          <a:lstStyle/>
-          <a:p>
-            <a:pPr algn="ctr"/>
-          </a:p>
-        </p:txBody>
-      </p:sp>
-      <p:sp>
-        <p:nvSpPr>
-          <p:cNvPr id="7" name="Rectangle 6"/>
-          <p:cNvSpPr/>
-          <p:nvPr/>
-        </p:nvSpPr>
-        <p:spPr>
-          <a:xfrm>
-            <a:off x="777240" y="1874519"/>
-            <a:ext cx="73152" cy="960120"/>
-          </a:xfrm>
-          <a:prstGeom prst="rect">
-            <a:avLst/>
-          </a:prstGeom>
-          <a:solidFill>
-            <a:srgbClr val="22C5AA"/>
-          </a:solidFill>
-          <a:ln>
-            <a:noFill/>
-          </a:ln>
-        </p:spPr>
-        <p:style>
-          <a:lnRef idx="1">
-            <a:schemeClr val="accent1"/>
-          </a:lnRef>
-          <a:fillRef idx="3">
-            <a:schemeClr val="accent1"/>
-          </a:fillRef>
-          <a:effectRef idx="2">
-            <a:schemeClr val="accent1"/>
-          </a:effectRef>
-          <a:fontRef idx="minor">
-            <a:schemeClr val="lt1"/>
-          </a:fontRef>
-        </p:style>
-        <p:txBody>
-          <a:bodyPr rtlCol="0" anchor="ctr"/>
-          <a:lstStyle/>
-          <a:p>
-            <a:pPr algn="ctr"/>
-          </a:p>
-        </p:txBody>
-      </p:sp>
-      <p:sp>
-        <p:nvSpPr>
-          <p:cNvPr id="8" name="TextBox 7"/>
-          <p:cNvSpPr txBox="1"/>
-          <p:nvPr/>
-        </p:nvSpPr>
-        <p:spPr>
-          <a:xfrm>
-            <a:off x="1005840" y="2020824"/>
-            <a:ext cx="3959352" cy="219456"/>
-          </a:xfrm>
-          <a:prstGeom prst="rect">
-            <a:avLst/>
-          </a:prstGeom>
-          <a:noFill/>
-        </p:spPr>
-        <p:txBody>
-          <a:bodyPr wrap="square" lIns="0" rIns="0" tIns="0" bIns="0" anchor="t">
-            <a:spAutoFit/>
-          </a:bodyPr>
-          <a:lstStyle/>
-          <a:p>
-            <a:pPr algn="l"/>
-            <a:r>
-              <a:rPr sz="1200" b="1">
-                <a:solidFill>
-                  <a:srgbClr val="22C5AA"/>
-                </a:solidFill>
-                <a:latin typeface="Aptos"/>
-              </a:rPr>
-              <a:t>Informe IEEE</a:t>
-            </a:r>
-          </a:p>
-        </p:txBody>
-      </p:sp>
-      <p:sp>
-        <p:nvSpPr>
-          <p:cNvPr id="9" name="TextBox 8"/>
-          <p:cNvSpPr txBox="1"/>
-          <p:nvPr/>
-        </p:nvSpPr>
-        <p:spPr>
-          <a:xfrm>
-            <a:off x="1005840" y="2304287"/>
-            <a:ext cx="3959352" cy="448056"/>
-          </a:xfrm>
-          <a:prstGeom prst="rect">
-            <a:avLst/>
-          </a:prstGeom>
-          <a:noFill/>
-        </p:spPr>
-        <p:txBody>
-          <a:bodyPr wrap="square" lIns="0" rIns="0" tIns="0" bIns="0" anchor="t">
-            <a:spAutoFit/>
-          </a:bodyPr>
-          <a:lstStyle/>
-          <a:p>
-            <a:pPr algn="l"/>
-            <a:r>
-              <a:rPr sz="1100" b="0">
-                <a:solidFill>
-                  <a:srgbClr val="0A1820"/>
-                </a:solidFill>
-                <a:latin typeface="Aptos"/>
-              </a:rPr>
-              <a:t>entrega-final/Informe_IEEE_Proyecto7_Zabbix.pdf</a:t>
-            </a:r>
-          </a:p>
-        </p:txBody>
-      </p:sp>
-      <p:sp>
-        <p:nvSpPr>
-          <p:cNvPr id="10" name="Rounded Rectangle 9"/>
-          <p:cNvSpPr/>
-          <p:nvPr/>
-        </p:nvSpPr>
-        <p:spPr>
-          <a:xfrm>
-            <a:off x="5852159" y="1874519"/>
-            <a:ext cx="4343400" cy="960120"/>
-          </a:xfrm>
-          <a:prstGeom prst="roundRect">
-            <a:avLst/>
-          </a:prstGeom>
-          <a:solidFill>
-            <a:srgbClr val="FFFFFF"/>
-          </a:solidFill>
-          <a:ln w="10160">
-            <a:solidFill>
-              <a:srgbClr val="BFCCD6"/>
-            </a:solidFill>
-          </a:ln>
-        </p:spPr>
-        <p:style>
-          <a:lnRef idx="1">
-            <a:schemeClr val="accent1"/>
-          </a:lnRef>
-          <a:fillRef idx="3">
-            <a:schemeClr val="accent1"/>
-          </a:fillRef>
-          <a:effectRef idx="2">
-            <a:schemeClr val="accent1"/>
-          </a:effectRef>
-          <a:fontRef idx="minor">
-            <a:schemeClr val="lt1"/>
-          </a:fontRef>
-        </p:style>
-        <p:txBody>
-          <a:bodyPr rtlCol="0" anchor="ctr"/>
-          <a:lstStyle/>
-          <a:p>
-            <a:pPr algn="ctr"/>
-          </a:p>
-        </p:txBody>
-      </p:sp>
-      <p:sp>
-        <p:nvSpPr>
-          <p:cNvPr id="11" name="Rectangle 10"/>
-          <p:cNvSpPr/>
-          <p:nvPr/>
-        </p:nvSpPr>
-        <p:spPr>
-          <a:xfrm>
-            <a:off x="5852159" y="1874519"/>
-            <a:ext cx="73152" cy="960120"/>
-          </a:xfrm>
-          <a:prstGeom prst="rect">
-            <a:avLst/>
-          </a:prstGeom>
-          <a:solidFill>
-            <a:srgbClr val="38BDF8"/>
-          </a:solidFill>
-          <a:ln>
-            <a:noFill/>
-          </a:ln>
-        </p:spPr>
-        <p:style>
-          <a:lnRef idx="1">
-            <a:schemeClr val="accent1"/>
-          </a:lnRef>
-          <a:fillRef idx="3">
-            <a:schemeClr val="accent1"/>
-          </a:fillRef>
-          <a:effectRef idx="2">
-            <a:schemeClr val="accent1"/>
-          </a:effectRef>
-          <a:fontRef idx="minor">
-            <a:schemeClr val="lt1"/>
-          </a:fontRef>
-        </p:style>
-        <p:txBody>
-          <a:bodyPr rtlCol="0" anchor="ctr"/>
-          <a:lstStyle/>
-          <a:p>
-            <a:pPr algn="ctr"/>
-          </a:p>
-        </p:txBody>
-      </p:sp>
-      <p:sp>
-        <p:nvSpPr>
-          <p:cNvPr id="12" name="TextBox 11"/>
-          <p:cNvSpPr txBox="1"/>
-          <p:nvPr/>
-        </p:nvSpPr>
-        <p:spPr>
-          <a:xfrm>
-            <a:off x="6080759" y="2020824"/>
-            <a:ext cx="3959352" cy="219456"/>
-          </a:xfrm>
-          <a:prstGeom prst="rect">
-            <a:avLst/>
-          </a:prstGeom>
-          <a:noFill/>
-        </p:spPr>
-        <p:txBody>
-          <a:bodyPr wrap="square" lIns="0" rIns="0" tIns="0" bIns="0" anchor="t">
-            <a:spAutoFit/>
-          </a:bodyPr>
-          <a:lstStyle/>
-          <a:p>
-            <a:pPr algn="l"/>
-            <a:r>
-              <a:rPr sz="1200" b="1">
-                <a:solidFill>
-                  <a:srgbClr val="38BDF8"/>
-                </a:solidFill>
-                <a:latin typeface="Aptos"/>
-              </a:rPr>
-              <a:t>Diapositivas</a:t>
-            </a:r>
-          </a:p>
-        </p:txBody>
-      </p:sp>
-      <p:sp>
-        <p:nvSpPr>
-          <p:cNvPr id="13" name="TextBox 12"/>
-          <p:cNvSpPr txBox="1"/>
-          <p:nvPr/>
-        </p:nvSpPr>
-        <p:spPr>
-          <a:xfrm>
-            <a:off x="6080759" y="2304287"/>
-            <a:ext cx="3959352" cy="448056"/>
-          </a:xfrm>
-          <a:prstGeom prst="rect">
-            <a:avLst/>
-          </a:prstGeom>
-          <a:noFill/>
-        </p:spPr>
-        <p:txBody>
-          <a:bodyPr wrap="square" lIns="0" rIns="0" tIns="0" bIns="0" anchor="t">
-            <a:spAutoFit/>
-          </a:bodyPr>
-          <a:lstStyle/>
-          <a:p>
-            <a:pPr algn="l"/>
-            <a:r>
-              <a:rPr sz="1100" b="0">
-                <a:solidFill>
-                  <a:srgbClr val="0A1820"/>
-                </a:solidFill>
-                <a:latin typeface="Aptos"/>
-              </a:rPr>
-              <a:t>entrega-final/Presentacion_Proyecto7_Zabbix.pptx</a:t>
-            </a:r>
-          </a:p>
-        </p:txBody>
-      </p:sp>
-      <p:sp>
-        <p:nvSpPr>
-          <p:cNvPr id="14" name="Rounded Rectangle 13"/>
-          <p:cNvSpPr/>
-          <p:nvPr/>
-        </p:nvSpPr>
-        <p:spPr>
-          <a:xfrm>
-            <a:off x="777240" y="3291839"/>
-            <a:ext cx="4343400" cy="960120"/>
-          </a:xfrm>
-          <a:prstGeom prst="roundRect">
-            <a:avLst/>
-          </a:prstGeom>
-          <a:solidFill>
-            <a:srgbClr val="FFFFFF"/>
-          </a:solidFill>
-          <a:ln w="10160">
-            <a:solidFill>
-              <a:srgbClr val="BFCCD6"/>
-            </a:solidFill>
-          </a:ln>
-        </p:spPr>
-        <p:style>
-          <a:lnRef idx="1">
-            <a:schemeClr val="accent1"/>
-          </a:lnRef>
-          <a:fillRef idx="3">
-            <a:schemeClr val="accent1"/>
-          </a:fillRef>
-          <a:effectRef idx="2">
-            <a:schemeClr val="accent1"/>
-          </a:effectRef>
-          <a:fontRef idx="minor">
-            <a:schemeClr val="lt1"/>
-          </a:fontRef>
-        </p:style>
-        <p:txBody>
-          <a:bodyPr rtlCol="0" anchor="ctr"/>
-          <a:lstStyle/>
-          <a:p>
-            <a:pPr algn="ctr"/>
-          </a:p>
-        </p:txBody>
-      </p:sp>
-      <p:sp>
-        <p:nvSpPr>
-          <p:cNvPr id="15" name="Rectangle 14"/>
-          <p:cNvSpPr/>
-          <p:nvPr/>
-        </p:nvSpPr>
-        <p:spPr>
-          <a:xfrm>
-            <a:off x="777240" y="3291839"/>
-            <a:ext cx="73152" cy="960120"/>
-          </a:xfrm>
-          <a:prstGeom prst="rect">
-            <a:avLst/>
-          </a:prstGeom>
-          <a:solidFill>
-            <a:srgbClr val="A3E635"/>
-          </a:solidFill>
-          <a:ln>
-            <a:noFill/>
-          </a:ln>
-        </p:spPr>
-        <p:style>
-          <a:lnRef idx="1">
-            <a:schemeClr val="accent1"/>
-          </a:lnRef>
-          <a:fillRef idx="3">
-            <a:schemeClr val="accent1"/>
-          </a:fillRef>
-          <a:effectRef idx="2">
-            <a:schemeClr val="accent1"/>
-          </a:effectRef>
-          <a:fontRef idx="minor">
-            <a:schemeClr val="lt1"/>
-          </a:fontRef>
-        </p:style>
-        <p:txBody>
-          <a:bodyPr rtlCol="0" anchor="ctr"/>
-          <a:lstStyle/>
-          <a:p>
-            <a:pPr algn="ctr"/>
-          </a:p>
-        </p:txBody>
-      </p:sp>
-      <p:sp>
-        <p:nvSpPr>
-          <p:cNvPr id="16" name="TextBox 15"/>
-          <p:cNvSpPr txBox="1"/>
-          <p:nvPr/>
-        </p:nvSpPr>
-        <p:spPr>
-          <a:xfrm>
-            <a:off x="1005840" y="3438144"/>
-            <a:ext cx="3959352" cy="219456"/>
-          </a:xfrm>
-          <a:prstGeom prst="rect">
-            <a:avLst/>
-          </a:prstGeom>
-          <a:noFill/>
-        </p:spPr>
-        <p:txBody>
-          <a:bodyPr wrap="square" lIns="0" rIns="0" tIns="0" bIns="0" anchor="t">
-            <a:spAutoFit/>
-          </a:bodyPr>
-          <a:lstStyle/>
-          <a:p>
-            <a:pPr algn="l"/>
-            <a:r>
-              <a:rPr sz="1200" b="1">
-                <a:solidFill>
-                  <a:srgbClr val="A3E635"/>
-                </a:solidFill>
-                <a:latin typeface="Aptos"/>
-              </a:rPr>
-              <a:t>Repositorio</a:t>
-            </a:r>
-          </a:p>
-        </p:txBody>
-      </p:sp>
-      <p:sp>
-        <p:nvSpPr>
-          <p:cNvPr id="17" name="TextBox 16"/>
-          <p:cNvSpPr txBox="1"/>
-          <p:nvPr/>
-        </p:nvSpPr>
-        <p:spPr>
-          <a:xfrm>
-            <a:off x="1005840" y="3721607"/>
-            <a:ext cx="3959352" cy="448056"/>
-          </a:xfrm>
-          <a:prstGeom prst="rect">
-            <a:avLst/>
-          </a:prstGeom>
-          <a:noFill/>
-        </p:spPr>
-        <p:txBody>
-          <a:bodyPr wrap="square" lIns="0" rIns="0" tIns="0" bIns="0" anchor="t">
-            <a:spAutoFit/>
-          </a:bodyPr>
-          <a:lstStyle/>
-          <a:p>
-            <a:pPr algn="l"/>
-            <a:r>
-              <a:rPr sz="1100" b="0">
-                <a:solidFill>
-                  <a:srgbClr val="0A1820"/>
-                </a:solidFill>
-                <a:latin typeface="Aptos"/>
-              </a:rPr>
-              <a:t>github.com/ballesterossmartsolutionssas/Proyecto7-Zabbix</a:t>
-            </a:r>
-          </a:p>
-        </p:txBody>
-      </p:sp>
-      <p:sp>
-        <p:nvSpPr>
-          <p:cNvPr id="18" name="Rounded Rectangle 17"/>
-          <p:cNvSpPr/>
-          <p:nvPr/>
-        </p:nvSpPr>
-        <p:spPr>
-          <a:xfrm>
-            <a:off x="5852159" y="3291839"/>
-            <a:ext cx="4343400" cy="960120"/>
-          </a:xfrm>
-          <a:prstGeom prst="roundRect">
-            <a:avLst/>
-          </a:prstGeom>
-          <a:solidFill>
-            <a:srgbClr val="FFFFFF"/>
-          </a:solidFill>
-          <a:ln w="10160">
-            <a:solidFill>
-              <a:srgbClr val="BFCCD6"/>
-            </a:solidFill>
-          </a:ln>
-        </p:spPr>
-        <p:style>
-          <a:lnRef idx="1">
-            <a:schemeClr val="accent1"/>
-          </a:lnRef>
-          <a:fillRef idx="3">
-            <a:schemeClr val="accent1"/>
-          </a:fillRef>
-          <a:effectRef idx="2">
-            <a:schemeClr val="accent1"/>
-          </a:effectRef>
-          <a:fontRef idx="minor">
-            <a:schemeClr val="lt1"/>
-          </a:fontRef>
-        </p:style>
-        <p:txBody>
-          <a:bodyPr rtlCol="0" anchor="ctr"/>
-          <a:lstStyle/>
-          <a:p>
-            <a:pPr algn="ctr"/>
-          </a:p>
-        </p:txBody>
-      </p:sp>
-      <p:sp>
-        <p:nvSpPr>
-          <p:cNvPr id="19" name="Rectangle 18"/>
-          <p:cNvSpPr/>
-          <p:nvPr/>
-        </p:nvSpPr>
-        <p:spPr>
-          <a:xfrm>
-            <a:off x="5852159" y="3291839"/>
-            <a:ext cx="73152" cy="960120"/>
-          </a:xfrm>
-          <a:prstGeom prst="rect">
-            <a:avLst/>
-          </a:prstGeom>
-          <a:solidFill>
-            <a:srgbClr val="F59E0B"/>
-          </a:solidFill>
-          <a:ln>
-            <a:noFill/>
-          </a:ln>
-        </p:spPr>
-        <p:style>
-          <a:lnRef idx="1">
-            <a:schemeClr val="accent1"/>
-          </a:lnRef>
-          <a:fillRef idx="3">
-            <a:schemeClr val="accent1"/>
-          </a:fillRef>
-          <a:effectRef idx="2">
-            <a:schemeClr val="accent1"/>
-          </a:effectRef>
-          <a:fontRef idx="minor">
-            <a:schemeClr val="lt1"/>
-          </a:fontRef>
-        </p:style>
-        <p:txBody>
-          <a:bodyPr rtlCol="0" anchor="ctr"/>
-          <a:lstStyle/>
-          <a:p>
-            <a:pPr algn="ctr"/>
-          </a:p>
-        </p:txBody>
-      </p:sp>
-      <p:sp>
-        <p:nvSpPr>
-          <p:cNvPr id="20" name="TextBox 19"/>
-          <p:cNvSpPr txBox="1"/>
-          <p:nvPr/>
-        </p:nvSpPr>
-        <p:spPr>
-          <a:xfrm>
-            <a:off x="6080759" y="3438144"/>
-            <a:ext cx="3959352" cy="219456"/>
-          </a:xfrm>
-          <a:prstGeom prst="rect">
-            <a:avLst/>
-          </a:prstGeom>
-          <a:noFill/>
-        </p:spPr>
-        <p:txBody>
-          <a:bodyPr wrap="square" lIns="0" rIns="0" tIns="0" bIns="0" anchor="t">
-            <a:spAutoFit/>
-          </a:bodyPr>
-          <a:lstStyle/>
-          <a:p>
-            <a:pPr algn="l"/>
-            <a:r>
-              <a:rPr sz="1200" b="1">
-                <a:solidFill>
-                  <a:srgbClr val="F59E0B"/>
-                </a:solidFill>
-                <a:latin typeface="Aptos"/>
-              </a:rPr>
-              <a:t>Evidencias</a:t>
-            </a:r>
-          </a:p>
-        </p:txBody>
-      </p:sp>
-      <p:sp>
-        <p:nvSpPr>
-          <p:cNvPr id="21" name="TextBox 20"/>
-          <p:cNvSpPr txBox="1"/>
-          <p:nvPr/>
-        </p:nvSpPr>
-        <p:spPr>
-          <a:xfrm>
-            <a:off x="6080759" y="3721607"/>
-            <a:ext cx="3959352" cy="448056"/>
-          </a:xfrm>
-          <a:prstGeom prst="rect">
-            <a:avLst/>
-          </a:prstGeom>
-          <a:noFill/>
-        </p:spPr>
-        <p:txBody>
-          <a:bodyPr wrap="square" lIns="0" rIns="0" tIns="0" bIns="0" anchor="t">
-            <a:spAutoFit/>
-          </a:bodyPr>
-          <a:lstStyle/>
-          <a:p>
-            <a:pPr algn="l"/>
-            <a:r>
-              <a:rPr sz="1100" b="0">
-                <a:solidFill>
-                  <a:srgbClr val="0A1820"/>
-                </a:solidFill>
-                <a:latin typeface="Aptos"/>
-              </a:rPr>
-              <a:t>entrega-final/evidencias + auditoría</a:t>
-            </a:r>
-          </a:p>
-        </p:txBody>
-      </p:sp>
-      <p:sp>
-        <p:nvSpPr>
-          <p:cNvPr id="22" name="TextBox 21"/>
-          <p:cNvSpPr txBox="1"/>
-          <p:nvPr/>
-        </p:nvSpPr>
-        <p:spPr>
-          <a:xfrm>
-            <a:off x="822960" y="5349240"/>
-            <a:ext cx="9784080" cy="438912"/>
-          </a:xfrm>
-          <a:prstGeom prst="rect">
-            <a:avLst/>
-          </a:prstGeom>
-          <a:noFill/>
-        </p:spPr>
-        <p:txBody>
-          <a:bodyPr wrap="square" lIns="0" rIns="0" tIns="0" bIns="0" anchor="t">
-            <a:spAutoFit/>
-          </a:bodyPr>
-          <a:lstStyle/>
-          <a:p>
-            <a:pPr algn="l"/>
-            <a:r>
-              <a:rPr sz="1700" b="1">
-                <a:solidFill>
-                  <a:srgbClr val="0A1820"/>
-                </a:solidFill>
-                <a:latin typeface="Aptos"/>
-              </a:rPr>
-              <a:t>Reparto: Luis Felipe abre, Juan Sebastián explica arquitectura, Daniela muestra Zabbix y Juan Camilo cierra con pruebas en vivo.</a:t>
-            </a:r>
-          </a:p>
-        </p:txBody>
-      </p:sp>
-      <p:cxnSp>
-        <p:nvCxnSpPr>
-          <p:cNvPr id="23" name="Connector 22"/>
-          <p:cNvCxnSpPr/>
-          <p:nvPr/>
-        </p:nvCxnSpPr>
-        <p:spPr>
-          <a:xfrm>
-            <a:off x="502920" y="6428232"/>
-            <a:ext cx="11155680" cy="0"/>
-          </a:xfrm>
-          <a:prstGeom prst="line">
-            <a:avLst/>
-          </a:prstGeom>
-          <a:ln w="8890">
-            <a:solidFill>
-              <a:srgbClr val="BFCCD6"/>
-            </a:solidFill>
-          </a:ln>
-        </p:spPr>
-        <p:style>
-          <a:lnRef idx="2">
-            <a:schemeClr val="accent1"/>
-          </a:lnRef>
-          <a:fillRef idx="0">
-            <a:schemeClr val="accent1"/>
-          </a:fillRef>
-          <a:effectRef idx="1">
-            <a:schemeClr val="accent1"/>
-          </a:effectRef>
-          <a:fontRef idx="minor">
-            <a:schemeClr val="tx1"/>
-          </a:fontRef>
-        </p:style>
-      </p:cxnSp>
-      <p:sp>
-        <p:nvSpPr>
-          <p:cNvPr id="24" name="TextBox 23"/>
-          <p:cNvSpPr txBox="1"/>
-          <p:nvPr/>
-        </p:nvSpPr>
-        <p:spPr>
-          <a:xfrm>
-            <a:off x="502920" y="6519672"/>
-            <a:ext cx="4754880" cy="164592"/>
-          </a:xfrm>
-          <a:prstGeom prst="rect">
-            <a:avLst/>
-          </a:prstGeom>
-          <a:noFill/>
-        </p:spPr>
-        <p:txBody>
-          <a:bodyPr wrap="square" lIns="0" rIns="0" tIns="0" bIns="0" anchor="t">
-            <a:spAutoFit/>
-          </a:bodyPr>
-          <a:lstStyle/>
-          <a:p>
-            <a:pPr algn="l"/>
-            <a:r>
-              <a:rPr sz="750" b="0">
-                <a:solidFill>
-                  <a:srgbClr val="5C6975"/>
-                </a:solidFill>
-                <a:latin typeface="Aptos"/>
-              </a:rPr>
-              <a:t>Proyecto 7 - Monitoreo de infraestructura con Zabbix</a:t>
-            </a:r>
-          </a:p>
-        </p:txBody>
-      </p:sp>
-      <p:sp>
-        <p:nvSpPr>
-          <p:cNvPr id="25" name="TextBox 24"/>
           <p:cNvSpPr txBox="1"/>
           <p:nvPr/>
         </p:nvSpPr>
@@ -7655,7 +7649,7 @@
     <p:bg>
       <p:bgPr>
         <a:solidFill>
-          <a:srgbClr val="0A1820"/>
+          <a:srgbClr val="F2F7F9"/>
         </a:solidFill>
         <a:effectLst/>
       </p:bgPr>
@@ -7669,16 +7663,156 @@
       <p:grpSpPr/>
       <p:sp>
         <p:nvSpPr>
-          <p:cNvPr id="23" name="Rectangle 22"/>
+          <p:cNvPr id="2" name="TextBox 1"/>
+          <p:cNvSpPr txBox="1"/>
+          <p:nvPr/>
+        </p:nvSpPr>
+        <p:spPr>
+          <a:xfrm>
+            <a:off x="502920" y="384048"/>
+            <a:ext cx="384048" cy="201168"/>
+          </a:xfrm>
+          <a:prstGeom prst="rect">
+            <a:avLst/>
+          </a:prstGeom>
+          <a:noFill/>
+        </p:spPr>
+        <p:txBody>
+          <a:bodyPr wrap="square" lIns="0" rIns="0" tIns="0" bIns="0" anchor="t">
+            <a:spAutoFit/>
+          </a:bodyPr>
+          <a:lstStyle/>
+          <a:p>
+            <a:pPr algn="l"/>
+            <a:r>
+              <a:rPr sz="800" b="1">
+                <a:solidFill>
+                  <a:srgbClr val="0A1820"/>
+                </a:solidFill>
+                <a:latin typeface="Aptos"/>
+              </a:rPr>
+              <a:t>14</a:t>
+            </a:r>
+          </a:p>
+        </p:txBody>
+      </p:sp>
+      <p:cxnSp>
+        <p:nvCxnSpPr>
+          <p:cNvPr id="3" name="Connector 2"/>
+          <p:cNvCxnSpPr/>
+          <p:nvPr/>
+        </p:nvCxnSpPr>
+        <p:spPr>
+          <a:xfrm>
+            <a:off x="941832" y="475488"/>
+            <a:ext cx="685800" cy="0"/>
+          </a:xfrm>
+          <a:prstGeom prst="line">
+            <a:avLst/>
+          </a:prstGeom>
+          <a:ln w="13970">
+            <a:solidFill>
+              <a:srgbClr val="0A1820"/>
+            </a:solidFill>
+          </a:ln>
+        </p:spPr>
+        <p:style>
+          <a:lnRef idx="2">
+            <a:schemeClr val="accent1"/>
+          </a:lnRef>
+          <a:fillRef idx="0">
+            <a:schemeClr val="accent1"/>
+          </a:fillRef>
+          <a:effectRef idx="1">
+            <a:schemeClr val="accent1"/>
+          </a:effectRef>
+          <a:fontRef idx="minor">
+            <a:schemeClr val="tx1"/>
+          </a:fontRef>
+        </p:style>
+      </p:cxnSp>
+      <p:sp>
+        <p:nvSpPr>
+          <p:cNvPr id="4" name="TextBox 3"/>
+          <p:cNvSpPr txBox="1"/>
+          <p:nvPr/>
+        </p:nvSpPr>
+        <p:spPr>
+          <a:xfrm>
+            <a:off x="1737360" y="356616"/>
+            <a:ext cx="3108960" cy="274320"/>
+          </a:xfrm>
+          <a:prstGeom prst="rect">
+            <a:avLst/>
+          </a:prstGeom>
+          <a:noFill/>
+        </p:spPr>
+        <p:txBody>
+          <a:bodyPr wrap="square" lIns="0" rIns="0" tIns="0" bIns="0" anchor="t">
+            <a:spAutoFit/>
+          </a:bodyPr>
+          <a:lstStyle/>
+          <a:p>
+            <a:pPr algn="l"/>
+            <a:r>
+              <a:rPr sz="800" b="1">
+                <a:solidFill>
+                  <a:srgbClr val="0A1820"/>
+                </a:solidFill>
+                <a:latin typeface="Aptos"/>
+              </a:rPr>
+              <a:t>DISCUSIÓN</a:t>
+            </a:r>
+          </a:p>
+        </p:txBody>
+      </p:sp>
+      <p:sp>
+        <p:nvSpPr>
+          <p:cNvPr id="5" name="TextBox 4"/>
+          <p:cNvSpPr txBox="1"/>
+          <p:nvPr/>
+        </p:nvSpPr>
+        <p:spPr>
+          <a:xfrm>
+            <a:off x="502920" y="713232"/>
+            <a:ext cx="7498079" cy="868680"/>
+          </a:xfrm>
+          <a:prstGeom prst="rect">
+            <a:avLst/>
+          </a:prstGeom>
+          <a:noFill/>
+        </p:spPr>
+        <p:txBody>
+          <a:bodyPr wrap="square" lIns="0" rIns="0" tIns="0" bIns="0" anchor="t">
+            <a:spAutoFit/>
+          </a:bodyPr>
+          <a:lstStyle/>
+          <a:p>
+            <a:pPr algn="l"/>
+            <a:r>
+              <a:rPr sz="3000" b="1">
+                <a:solidFill>
+                  <a:srgbClr val="0A1820"/>
+                </a:solidFill>
+                <a:latin typeface="Aptos Display"/>
+              </a:rPr>
+              <a:t>La prueba importante no es instalar Zabbix; es cerrar el ciclo operativo.</a:t>
+            </a:r>
+          </a:p>
+        </p:txBody>
+      </p:sp>
+      <p:sp>
+        <p:nvSpPr>
+          <p:cNvPr id="6" name="Rounded Rectangle 5"/>
           <p:cNvSpPr/>
           <p:nvPr/>
         </p:nvSpPr>
         <p:spPr>
           <a:xfrm>
-            <a:off x="7744968" y="4041648"/>
-            <a:ext cx="3392424" cy="1517904"/>
-          </a:xfrm>
-          <a:prstGeom prst="rect">
+            <a:off x="777240" y="1737360"/>
+            <a:ext cx="3246120" cy="1298448"/>
+          </a:xfrm>
+          <a:prstGeom prst="roundRect">
             <a:avLst/>
           </a:prstGeom>
           <a:solidFill>
@@ -7714,14 +7848,57 @@
       </p:sp>
       <p:sp>
         <p:nvSpPr>
-          <p:cNvPr id="2" name="TextBox 1"/>
-          <p:cNvSpPr txBox="1"/>
-          <p:nvPr/>
-        </p:nvSpPr>
-        <p:spPr>
-          <a:xfrm>
-            <a:off x="502920" y="384048"/>
-            <a:ext cx="384048" cy="201168"/>
+          <p:cNvPr id="7" name="Rectangle 6"/>
+          <p:cNvSpPr/>
+          <p:nvPr/>
+        </p:nvSpPr>
+        <p:spPr>
+          <a:xfrm>
+            <a:off x="777240" y="1737360"/>
+            <a:ext cx="73152" cy="1298448"/>
+          </a:xfrm>
+          <a:prstGeom prst="rect">
+            <a:avLst/>
+          </a:prstGeom>
+          <a:solidFill>
+            <a:srgbClr val="22C5AA"/>
+          </a:solidFill>
+          <a:ln>
+            <a:noFill/>
+          </a:ln>
+        </p:spPr>
+        <p:style>
+          <a:lnRef idx="1">
+            <a:schemeClr val="accent1"/>
+          </a:lnRef>
+          <a:fillRef idx="3">
+            <a:schemeClr val="accent1"/>
+          </a:fillRef>
+          <a:effectRef idx="2">
+            <a:schemeClr val="accent1"/>
+          </a:effectRef>
+          <a:fontRef idx="minor">
+            <a:schemeClr val="lt1"/>
+          </a:fontRef>
+        </p:style>
+        <p:txBody>
+          <a:bodyPr rtlCol="0" anchor="ctr"/>
+          <a:lstStyle/>
+          <a:p>
+            <a:pPr algn="ctr"/>
+          </a:p>
+        </p:txBody>
+      </p:sp>
+      <p:sp>
+        <p:nvSpPr>
+          <p:cNvPr id="8" name="TextBox 7"/>
+          <p:cNvSpPr txBox="1"/>
+          <p:nvPr/>
+        </p:nvSpPr>
+        <p:spPr>
+          <a:xfrm>
+            <a:off x="1005840" y="1883664"/>
+            <a:ext cx="2862072" cy="219456"/>
           </a:xfrm>
           <a:prstGeom prst="rect">
             <a:avLst/>
@@ -7736,34 +7913,455 @@
           <a:p>
             <a:pPr algn="l"/>
             <a:r>
-              <a:rPr sz="800" b="1">
+              <a:rPr sz="1200" b="1">
                 <a:solidFill>
                   <a:srgbClr val="22C5AA"/>
                 </a:solidFill>
                 <a:latin typeface="Aptos"/>
               </a:rPr>
-              <a:t>14</a:t>
+              <a:t>Qué probamos</a:t>
+            </a:r>
+          </a:p>
+        </p:txBody>
+      </p:sp>
+      <p:sp>
+        <p:nvSpPr>
+          <p:cNvPr id="9" name="TextBox 8"/>
+          <p:cNvSpPr txBox="1"/>
+          <p:nvPr/>
+        </p:nvSpPr>
+        <p:spPr>
+          <a:xfrm>
+            <a:off x="1005840" y="2167128"/>
+            <a:ext cx="2862072" cy="786383"/>
+          </a:xfrm>
+          <a:prstGeom prst="rect">
+            <a:avLst/>
+          </a:prstGeom>
+          <a:noFill/>
+        </p:spPr>
+        <p:txBody>
+          <a:bodyPr wrap="square" lIns="0" rIns="0" tIns="0" bIns="0" anchor="t">
+            <a:spAutoFit/>
+          </a:bodyPr>
+          <a:lstStyle/>
+          <a:p>
+            <a:pPr algn="l"/>
+            <a:r>
+              <a:rPr sz="1100" b="0">
+                <a:solidFill>
+                  <a:srgbClr val="0A1820"/>
+                </a:solidFill>
+                <a:latin typeface="Aptos"/>
+              </a:rPr>
+              <a:t>Carga real con Artillery, caída controlada, detección en Zabbix, correo MailHog, recuperación y métricas históricas.</a:t>
+            </a:r>
+          </a:p>
+        </p:txBody>
+      </p:sp>
+      <p:sp>
+        <p:nvSpPr>
+          <p:cNvPr id="10" name="Rounded Rectangle 9"/>
+          <p:cNvSpPr/>
+          <p:nvPr/>
+        </p:nvSpPr>
+        <p:spPr>
+          <a:xfrm>
+            <a:off x="4434840" y="1737360"/>
+            <a:ext cx="3246120" cy="1298448"/>
+          </a:xfrm>
+          <a:prstGeom prst="roundRect">
+            <a:avLst/>
+          </a:prstGeom>
+          <a:solidFill>
+            <a:srgbClr val="FFFFFF"/>
+          </a:solidFill>
+          <a:ln w="10160">
+            <a:solidFill>
+              <a:srgbClr val="BFCCD6"/>
+            </a:solidFill>
+          </a:ln>
+        </p:spPr>
+        <p:style>
+          <a:lnRef idx="1">
+            <a:schemeClr val="accent1"/>
+          </a:lnRef>
+          <a:fillRef idx="3">
+            <a:schemeClr val="accent1"/>
+          </a:fillRef>
+          <a:effectRef idx="2">
+            <a:schemeClr val="accent1"/>
+          </a:effectRef>
+          <a:fontRef idx="minor">
+            <a:schemeClr val="lt1"/>
+          </a:fontRef>
+        </p:style>
+        <p:txBody>
+          <a:bodyPr rtlCol="0" anchor="ctr"/>
+          <a:lstStyle/>
+          <a:p>
+            <a:pPr algn="ctr"/>
+          </a:p>
+        </p:txBody>
+      </p:sp>
+      <p:sp>
+        <p:nvSpPr>
+          <p:cNvPr id="11" name="Rectangle 10"/>
+          <p:cNvSpPr/>
+          <p:nvPr/>
+        </p:nvSpPr>
+        <p:spPr>
+          <a:xfrm>
+            <a:off x="4434840" y="1737360"/>
+            <a:ext cx="73152" cy="1298448"/>
+          </a:xfrm>
+          <a:prstGeom prst="rect">
+            <a:avLst/>
+          </a:prstGeom>
+          <a:solidFill>
+            <a:srgbClr val="38BDF8"/>
+          </a:solidFill>
+          <a:ln>
+            <a:noFill/>
+          </a:ln>
+        </p:spPr>
+        <p:style>
+          <a:lnRef idx="1">
+            <a:schemeClr val="accent1"/>
+          </a:lnRef>
+          <a:fillRef idx="3">
+            <a:schemeClr val="accent1"/>
+          </a:fillRef>
+          <a:effectRef idx="2">
+            <a:schemeClr val="accent1"/>
+          </a:effectRef>
+          <a:fontRef idx="minor">
+            <a:schemeClr val="lt1"/>
+          </a:fontRef>
+        </p:style>
+        <p:txBody>
+          <a:bodyPr rtlCol="0" anchor="ctr"/>
+          <a:lstStyle/>
+          <a:p>
+            <a:pPr algn="ctr"/>
+          </a:p>
+        </p:txBody>
+      </p:sp>
+      <p:sp>
+        <p:nvSpPr>
+          <p:cNvPr id="12" name="TextBox 11"/>
+          <p:cNvSpPr txBox="1"/>
+          <p:nvPr/>
+        </p:nvSpPr>
+        <p:spPr>
+          <a:xfrm>
+            <a:off x="4663440" y="1883664"/>
+            <a:ext cx="2862072" cy="219456"/>
+          </a:xfrm>
+          <a:prstGeom prst="rect">
+            <a:avLst/>
+          </a:prstGeom>
+          <a:noFill/>
+        </p:spPr>
+        <p:txBody>
+          <a:bodyPr wrap="square" lIns="0" rIns="0" tIns="0" bIns="0" anchor="t">
+            <a:spAutoFit/>
+          </a:bodyPr>
+          <a:lstStyle/>
+          <a:p>
+            <a:pPr algn="l"/>
+            <a:r>
+              <a:rPr sz="1200" b="1">
+                <a:solidFill>
+                  <a:srgbClr val="38BDF8"/>
+                </a:solidFill>
+                <a:latin typeface="Aptos"/>
+              </a:rPr>
+              <a:t>Qué aprendimos</a:t>
+            </a:r>
+          </a:p>
+        </p:txBody>
+      </p:sp>
+      <p:sp>
+        <p:nvSpPr>
+          <p:cNvPr id="13" name="TextBox 12"/>
+          <p:cNvSpPr txBox="1"/>
+          <p:nvPr/>
+        </p:nvSpPr>
+        <p:spPr>
+          <a:xfrm>
+            <a:off x="4663440" y="2167128"/>
+            <a:ext cx="2862072" cy="786383"/>
+          </a:xfrm>
+          <a:prstGeom prst="rect">
+            <a:avLst/>
+          </a:prstGeom>
+          <a:noFill/>
+        </p:spPr>
+        <p:txBody>
+          <a:bodyPr wrap="square" lIns="0" rIns="0" tIns="0" bIns="0" anchor="t">
+            <a:spAutoFit/>
+          </a:bodyPr>
+          <a:lstStyle/>
+          <a:p>
+            <a:pPr algn="l"/>
+            <a:r>
+              <a:rPr sz="1100" b="0">
+                <a:solidFill>
+                  <a:srgbClr val="0A1820"/>
+                </a:solidFill>
+                <a:latin typeface="Aptos"/>
+              </a:rPr>
+              <a:t>Monitorear no es solo saber si un contenedor vive: también hay que medir servicio, backend, DB, SLO y rutas bajo presión.</a:t>
+            </a:r>
+          </a:p>
+        </p:txBody>
+      </p:sp>
+      <p:sp>
+        <p:nvSpPr>
+          <p:cNvPr id="14" name="Rounded Rectangle 13"/>
+          <p:cNvSpPr/>
+          <p:nvPr/>
+        </p:nvSpPr>
+        <p:spPr>
+          <a:xfrm>
+            <a:off x="8092440" y="1737360"/>
+            <a:ext cx="3246120" cy="1298448"/>
+          </a:xfrm>
+          <a:prstGeom prst="roundRect">
+            <a:avLst/>
+          </a:prstGeom>
+          <a:solidFill>
+            <a:srgbClr val="FFFFFF"/>
+          </a:solidFill>
+          <a:ln w="10160">
+            <a:solidFill>
+              <a:srgbClr val="BFCCD6"/>
+            </a:solidFill>
+          </a:ln>
+        </p:spPr>
+        <p:style>
+          <a:lnRef idx="1">
+            <a:schemeClr val="accent1"/>
+          </a:lnRef>
+          <a:fillRef idx="3">
+            <a:schemeClr val="accent1"/>
+          </a:fillRef>
+          <a:effectRef idx="2">
+            <a:schemeClr val="accent1"/>
+          </a:effectRef>
+          <a:fontRef idx="minor">
+            <a:schemeClr val="lt1"/>
+          </a:fontRef>
+        </p:style>
+        <p:txBody>
+          <a:bodyPr rtlCol="0" anchor="ctr"/>
+          <a:lstStyle/>
+          <a:p>
+            <a:pPr algn="ctr"/>
+          </a:p>
+        </p:txBody>
+      </p:sp>
+      <p:sp>
+        <p:nvSpPr>
+          <p:cNvPr id="15" name="Rectangle 14"/>
+          <p:cNvSpPr/>
+          <p:nvPr/>
+        </p:nvSpPr>
+        <p:spPr>
+          <a:xfrm>
+            <a:off x="8092440" y="1737360"/>
+            <a:ext cx="73152" cy="1298448"/>
+          </a:xfrm>
+          <a:prstGeom prst="rect">
+            <a:avLst/>
+          </a:prstGeom>
+          <a:solidFill>
+            <a:srgbClr val="F59E0B"/>
+          </a:solidFill>
+          <a:ln>
+            <a:noFill/>
+          </a:ln>
+        </p:spPr>
+        <p:style>
+          <a:lnRef idx="1">
+            <a:schemeClr val="accent1"/>
+          </a:lnRef>
+          <a:fillRef idx="3">
+            <a:schemeClr val="accent1"/>
+          </a:fillRef>
+          <a:effectRef idx="2">
+            <a:schemeClr val="accent1"/>
+          </a:effectRef>
+          <a:fontRef idx="minor">
+            <a:schemeClr val="lt1"/>
+          </a:fontRef>
+        </p:style>
+        <p:txBody>
+          <a:bodyPr rtlCol="0" anchor="ctr"/>
+          <a:lstStyle/>
+          <a:p>
+            <a:pPr algn="ctr"/>
+          </a:p>
+        </p:txBody>
+      </p:sp>
+      <p:sp>
+        <p:nvSpPr>
+          <p:cNvPr id="16" name="TextBox 15"/>
+          <p:cNvSpPr txBox="1"/>
+          <p:nvPr/>
+        </p:nvSpPr>
+        <p:spPr>
+          <a:xfrm>
+            <a:off x="8321040" y="1883664"/>
+            <a:ext cx="2862072" cy="219456"/>
+          </a:xfrm>
+          <a:prstGeom prst="rect">
+            <a:avLst/>
+          </a:prstGeom>
+          <a:noFill/>
+        </p:spPr>
+        <p:txBody>
+          <a:bodyPr wrap="square" lIns="0" rIns="0" tIns="0" bIns="0" anchor="t">
+            <a:spAutoFit/>
+          </a:bodyPr>
+          <a:lstStyle/>
+          <a:p>
+            <a:pPr algn="l"/>
+            <a:r>
+              <a:rPr sz="1200" b="1">
+                <a:solidFill>
+                  <a:srgbClr val="F59E0B"/>
+                </a:solidFill>
+                <a:latin typeface="Aptos"/>
+              </a:rPr>
+              <a:t>Limitación honesta</a:t>
+            </a:r>
+          </a:p>
+        </p:txBody>
+      </p:sp>
+      <p:sp>
+        <p:nvSpPr>
+          <p:cNvPr id="17" name="TextBox 16"/>
+          <p:cNvSpPr txBox="1"/>
+          <p:nvPr/>
+        </p:nvSpPr>
+        <p:spPr>
+          <a:xfrm>
+            <a:off x="8321040" y="2167128"/>
+            <a:ext cx="2862072" cy="786383"/>
+          </a:xfrm>
+          <a:prstGeom prst="rect">
+            <a:avLst/>
+          </a:prstGeom>
+          <a:noFill/>
+        </p:spPr>
+        <p:txBody>
+          <a:bodyPr wrap="square" lIns="0" rIns="0" tIns="0" bIns="0" anchor="t">
+            <a:spAutoFit/>
+          </a:bodyPr>
+          <a:lstStyle/>
+          <a:p>
+            <a:pPr algn="l"/>
+            <a:r>
+              <a:rPr sz="1100" b="0">
+                <a:solidFill>
+                  <a:srgbClr val="0A1820"/>
+                </a:solidFill>
+                <a:latin typeface="Aptos"/>
+              </a:rPr>
+              <a:t>El SLO del portal es de laboratorio y vive en memoria del proceso; Zabbix conserva el histórico real de eventos e items.</a:t>
+            </a:r>
+          </a:p>
+        </p:txBody>
+      </p:sp>
+      <p:sp>
+        <p:nvSpPr>
+          <p:cNvPr id="18" name="TextBox 17"/>
+          <p:cNvSpPr txBox="1"/>
+          <p:nvPr/>
+        </p:nvSpPr>
+        <p:spPr>
+          <a:xfrm>
+            <a:off x="822960" y="3822191"/>
+            <a:ext cx="1828800" cy="228600"/>
+          </a:xfrm>
+          <a:prstGeom prst="rect">
+            <a:avLst/>
+          </a:prstGeom>
+          <a:noFill/>
+        </p:spPr>
+        <p:txBody>
+          <a:bodyPr wrap="square" lIns="0" rIns="0" tIns="0" bIns="0" anchor="t">
+            <a:spAutoFit/>
+          </a:bodyPr>
+          <a:lstStyle/>
+          <a:p>
+            <a:pPr algn="l"/>
+            <a:r>
+              <a:rPr sz="1100" b="1">
+                <a:solidFill>
+                  <a:srgbClr val="5C6975"/>
+                </a:solidFill>
+                <a:latin typeface="Aptos"/>
+              </a:rPr>
+              <a:t>Conclusión</a:t>
+            </a:r>
+          </a:p>
+        </p:txBody>
+      </p:sp>
+      <p:sp>
+        <p:nvSpPr>
+          <p:cNvPr id="19" name="TextBox 18"/>
+          <p:cNvSpPr txBox="1"/>
+          <p:nvPr/>
+        </p:nvSpPr>
+        <p:spPr>
+          <a:xfrm>
+            <a:off x="822960" y="4224528"/>
+            <a:ext cx="9875520" cy="749808"/>
+          </a:xfrm>
+          <a:prstGeom prst="rect">
+            <a:avLst/>
+          </a:prstGeom>
+          <a:noFill/>
+        </p:spPr>
+        <p:txBody>
+          <a:bodyPr wrap="square" lIns="0" rIns="0" tIns="0" bIns="0" anchor="t">
+            <a:spAutoFit/>
+          </a:bodyPr>
+          <a:lstStyle/>
+          <a:p>
+            <a:pPr algn="l"/>
+            <a:r>
+              <a:rPr sz="2400" b="1">
+                <a:solidFill>
+                  <a:srgbClr val="0A1820"/>
+                </a:solidFill>
+                <a:latin typeface="Aptos"/>
+              </a:rPr>
+              <a:t>El proyecto cumple los requisitos base y los amplía con una aplicación real observable: frontend, backend, MariaDB, /metrics, SLO, analíticas, Artillery y matriz 13/13.</a:t>
             </a:r>
           </a:p>
         </p:txBody>
       </p:sp>
       <p:cxnSp>
         <p:nvCxnSpPr>
-          <p:cNvPr id="3" name="Connector 2"/>
+          <p:cNvPr id="20" name="Connector 19"/>
           <p:cNvCxnSpPr/>
           <p:nvPr/>
         </p:nvCxnSpPr>
         <p:spPr>
           <a:xfrm>
-            <a:off x="941832" y="475488"/>
-            <a:ext cx="685800" cy="0"/>
+            <a:off x="502920" y="6428232"/>
+            <a:ext cx="11155680" cy="0"/>
           </a:xfrm>
           <a:prstGeom prst="line">
             <a:avLst/>
           </a:prstGeom>
-          <a:ln w="13970">
+          <a:ln w="8890">
             <a:solidFill>
-              <a:srgbClr val="22C5AA"/>
+              <a:srgbClr val="BFCCD6"/>
             </a:solidFill>
           </a:ln>
         </p:spPr>
@@ -7784,763 +8382,7 @@
       </p:cxnSp>
       <p:sp>
         <p:nvSpPr>
-          <p:cNvPr id="4" name="TextBox 3"/>
-          <p:cNvSpPr txBox="1"/>
-          <p:nvPr/>
-        </p:nvSpPr>
-        <p:spPr>
-          <a:xfrm>
-            <a:off x="1737360" y="356616"/>
-            <a:ext cx="3108960" cy="274320"/>
-          </a:xfrm>
-          <a:prstGeom prst="rect">
-            <a:avLst/>
-          </a:prstGeom>
-          <a:noFill/>
-        </p:spPr>
-        <p:txBody>
-          <a:bodyPr wrap="square" lIns="0" rIns="0" tIns="0" bIns="0" anchor="t">
-            <a:spAutoFit/>
-          </a:bodyPr>
-          <a:lstStyle/>
-          <a:p>
-            <a:pPr algn="l"/>
-            <a:r>
-              <a:rPr sz="800" b="1">
-                <a:solidFill>
-                  <a:srgbClr val="22C5AA"/>
-                </a:solidFill>
-                <a:latin typeface="Aptos"/>
-              </a:rPr>
-              <a:t>DEMO EN VIVO</a:t>
-            </a:r>
-          </a:p>
-        </p:txBody>
-      </p:sp>
-      <p:sp>
-        <p:nvSpPr>
-          <p:cNvPr id="5" name="TextBox 4"/>
-          <p:cNvSpPr txBox="1"/>
-          <p:nvPr/>
-        </p:nvSpPr>
-        <p:spPr>
-          <a:xfrm>
-            <a:off x="502920" y="713232"/>
-            <a:ext cx="7498079" cy="868680"/>
-          </a:xfrm>
-          <a:prstGeom prst="rect">
-            <a:avLst/>
-          </a:prstGeom>
-          <a:noFill/>
-        </p:spPr>
-        <p:txBody>
-          <a:bodyPr wrap="square" lIns="0" rIns="0" tIns="0" bIns="0" anchor="t">
-            <a:spAutoFit/>
-          </a:bodyPr>
-          <a:lstStyle/>
-          <a:p>
-            <a:pPr algn="l"/>
-            <a:r>
-              <a:rPr sz="3000" b="1">
-                <a:solidFill>
-                  <a:srgbClr val="FFFFFF"/>
-                </a:solidFill>
-                <a:latin typeface="Aptos Display"/>
-              </a:rPr>
-              <a:t>La demo debe cerrar viendo tráfico, caída y alerta.</a:t>
-            </a:r>
-          </a:p>
-        </p:txBody>
-      </p:sp>
-      <p:sp>
-        <p:nvSpPr>
-          <p:cNvPr id="6" name="Rounded Rectangle 5"/>
-          <p:cNvSpPr/>
-          <p:nvPr/>
-        </p:nvSpPr>
-        <p:spPr>
-          <a:xfrm>
-            <a:off x="777240" y="1874519"/>
-            <a:ext cx="438912" cy="438912"/>
-          </a:xfrm>
-          <a:prstGeom prst="roundRect">
-            <a:avLst/>
-          </a:prstGeom>
-          <a:solidFill>
-            <a:srgbClr val="22C5AA"/>
-          </a:solidFill>
-          <a:ln>
-            <a:noFill/>
-          </a:ln>
-        </p:spPr>
-        <p:style>
-          <a:lnRef idx="1">
-            <a:schemeClr val="accent1"/>
-          </a:lnRef>
-          <a:fillRef idx="3">
-            <a:schemeClr val="accent1"/>
-          </a:fillRef>
-          <a:effectRef idx="2">
-            <a:schemeClr val="accent1"/>
-          </a:effectRef>
-          <a:fontRef idx="minor">
-            <a:schemeClr val="lt1"/>
-          </a:fontRef>
-        </p:style>
-        <p:txBody>
-          <a:bodyPr rtlCol="0" anchor="ctr"/>
-          <a:lstStyle/>
-          <a:p>
-            <a:pPr algn="ctr"/>
-          </a:p>
-        </p:txBody>
-      </p:sp>
-      <p:sp>
-        <p:nvSpPr>
-          <p:cNvPr id="7" name="TextBox 6"/>
-          <p:cNvSpPr txBox="1"/>
-          <p:nvPr/>
-        </p:nvSpPr>
-        <p:spPr>
-          <a:xfrm>
-            <a:off x="932688" y="1984248"/>
-            <a:ext cx="118872" cy="118872"/>
-          </a:xfrm>
-          <a:prstGeom prst="rect">
-            <a:avLst/>
-          </a:prstGeom>
-          <a:noFill/>
-        </p:spPr>
-        <p:txBody>
-          <a:bodyPr wrap="square" lIns="0" rIns="0" tIns="0" bIns="0" anchor="t">
-            <a:spAutoFit/>
-          </a:bodyPr>
-          <a:lstStyle/>
-          <a:p>
-            <a:pPr algn="ctr"/>
-            <a:r>
-              <a:rPr sz="1100" b="1">
-                <a:solidFill>
-                  <a:srgbClr val="0A1820"/>
-                </a:solidFill>
-                <a:latin typeface="Aptos"/>
-              </a:rPr>
-              <a:t>1</a:t>
-            </a:r>
-          </a:p>
-        </p:txBody>
-      </p:sp>
-      <p:sp>
-        <p:nvSpPr>
-          <p:cNvPr id="8" name="TextBox 7"/>
-          <p:cNvSpPr txBox="1"/>
-          <p:nvPr/>
-        </p:nvSpPr>
-        <p:spPr>
-          <a:xfrm>
-            <a:off x="1417320" y="1911095"/>
-            <a:ext cx="1920240" cy="201168"/>
-          </a:xfrm>
-          <a:prstGeom prst="rect">
-            <a:avLst/>
-          </a:prstGeom>
-          <a:noFill/>
-        </p:spPr>
-        <p:txBody>
-          <a:bodyPr wrap="square" lIns="0" rIns="0" tIns="0" bIns="0" anchor="t">
-            <a:spAutoFit/>
-          </a:bodyPr>
-          <a:lstStyle/>
-          <a:p>
-            <a:pPr algn="l"/>
-            <a:r>
-              <a:rPr sz="1200" b="1">
-                <a:solidFill>
-                  <a:srgbClr val="FFFFFF"/>
-                </a:solidFill>
-                <a:latin typeface="Aptos"/>
-              </a:rPr>
-              <a:t>Abrir portal</a:t>
-            </a:r>
-          </a:p>
-        </p:txBody>
-      </p:sp>
-      <p:sp>
-        <p:nvSpPr>
-          <p:cNvPr id="9" name="TextBox 8"/>
-          <p:cNvSpPr txBox="1"/>
-          <p:nvPr/>
-        </p:nvSpPr>
-        <p:spPr>
-          <a:xfrm>
-            <a:off x="3246120" y="1938527"/>
-            <a:ext cx="6766560" cy="164592"/>
-          </a:xfrm>
-          <a:prstGeom prst="rect">
-            <a:avLst/>
-          </a:prstGeom>
-          <a:noFill/>
-        </p:spPr>
-        <p:txBody>
-          <a:bodyPr wrap="square" lIns="0" rIns="0" tIns="0" bIns="0" anchor="t">
-            <a:spAutoFit/>
-          </a:bodyPr>
-          <a:lstStyle/>
-          <a:p>
-            <a:pPr algn="l"/>
-            <a:r>
-              <a:rPr sz="1050" b="0">
-                <a:solidFill>
-                  <a:srgbClr val="C8D8E1"/>
-                </a:solidFill>
-                <a:latin typeface="Aptos"/>
-              </a:rPr>
-              <a:t>https://web-zabbix.negociocontigo.com</a:t>
-            </a:r>
-          </a:p>
-        </p:txBody>
-      </p:sp>
-      <p:sp>
-        <p:nvSpPr>
-          <p:cNvPr id="10" name="Rounded Rectangle 9"/>
-          <p:cNvSpPr/>
-          <p:nvPr/>
-        </p:nvSpPr>
-        <p:spPr>
-          <a:xfrm>
-            <a:off x="777240" y="2743200"/>
-            <a:ext cx="438912" cy="438912"/>
-          </a:xfrm>
-          <a:prstGeom prst="roundRect">
-            <a:avLst/>
-          </a:prstGeom>
-          <a:solidFill>
-            <a:srgbClr val="38BDF8"/>
-          </a:solidFill>
-          <a:ln>
-            <a:noFill/>
-          </a:ln>
-        </p:spPr>
-        <p:style>
-          <a:lnRef idx="1">
-            <a:schemeClr val="accent1"/>
-          </a:lnRef>
-          <a:fillRef idx="3">
-            <a:schemeClr val="accent1"/>
-          </a:fillRef>
-          <a:effectRef idx="2">
-            <a:schemeClr val="accent1"/>
-          </a:effectRef>
-          <a:fontRef idx="minor">
-            <a:schemeClr val="lt1"/>
-          </a:fontRef>
-        </p:style>
-        <p:txBody>
-          <a:bodyPr rtlCol="0" anchor="ctr"/>
-          <a:lstStyle/>
-          <a:p>
-            <a:pPr algn="ctr"/>
-          </a:p>
-        </p:txBody>
-      </p:sp>
-      <p:sp>
-        <p:nvSpPr>
-          <p:cNvPr id="11" name="TextBox 10"/>
-          <p:cNvSpPr txBox="1"/>
-          <p:nvPr/>
-        </p:nvSpPr>
-        <p:spPr>
-          <a:xfrm>
-            <a:off x="932688" y="2852928"/>
-            <a:ext cx="118872" cy="118872"/>
-          </a:xfrm>
-          <a:prstGeom prst="rect">
-            <a:avLst/>
-          </a:prstGeom>
-          <a:noFill/>
-        </p:spPr>
-        <p:txBody>
-          <a:bodyPr wrap="square" lIns="0" rIns="0" tIns="0" bIns="0" anchor="t">
-            <a:spAutoFit/>
-          </a:bodyPr>
-          <a:lstStyle/>
-          <a:p>
-            <a:pPr algn="ctr"/>
-            <a:r>
-              <a:rPr sz="1100" b="1">
-                <a:solidFill>
-                  <a:srgbClr val="0A1820"/>
-                </a:solidFill>
-                <a:latin typeface="Aptos"/>
-              </a:rPr>
-              <a:t>2</a:t>
-            </a:r>
-          </a:p>
-        </p:txBody>
-      </p:sp>
-      <p:sp>
-        <p:nvSpPr>
-          <p:cNvPr id="12" name="TextBox 11"/>
-          <p:cNvSpPr txBox="1"/>
-          <p:nvPr/>
-        </p:nvSpPr>
-        <p:spPr>
-          <a:xfrm>
-            <a:off x="1417320" y="2779776"/>
-            <a:ext cx="1920240" cy="201168"/>
-          </a:xfrm>
-          <a:prstGeom prst="rect">
-            <a:avLst/>
-          </a:prstGeom>
-          <a:noFill/>
-        </p:spPr>
-        <p:txBody>
-          <a:bodyPr wrap="square" lIns="0" rIns="0" tIns="0" bIns="0" anchor="t">
-            <a:spAutoFit/>
-          </a:bodyPr>
-          <a:lstStyle/>
-          <a:p>
-            <a:pPr algn="l"/>
-            <a:r>
-              <a:rPr sz="1200" b="1">
-                <a:solidFill>
-                  <a:srgbClr val="FFFFFF"/>
-                </a:solidFill>
-                <a:latin typeface="Aptos"/>
-              </a:rPr>
-              <a:t>Generar carga</a:t>
-            </a:r>
-          </a:p>
-        </p:txBody>
-      </p:sp>
-      <p:sp>
-        <p:nvSpPr>
-          <p:cNvPr id="13" name="TextBox 12"/>
-          <p:cNvSpPr txBox="1"/>
-          <p:nvPr/>
-        </p:nvSpPr>
-        <p:spPr>
-          <a:xfrm>
-            <a:off x="3246120" y="2807208"/>
-            <a:ext cx="6766560" cy="164592"/>
-          </a:xfrm>
-          <a:prstGeom prst="rect">
-            <a:avLst/>
-          </a:prstGeom>
-          <a:noFill/>
-        </p:spPr>
-        <p:txBody>
-          <a:bodyPr wrap="square" lIns="0" rIns="0" tIns="0" bIns="0" anchor="t">
-            <a:spAutoFit/>
-          </a:bodyPr>
-          <a:lstStyle/>
-          <a:p>
-            <a:pPr algn="l"/>
-            <a:r>
-              <a:rPr sz="1050" b="0">
-                <a:solidFill>
-                  <a:srgbClr val="C8D8E1"/>
-                </a:solidFill>
-                <a:latin typeface="Aptos"/>
-              </a:rPr>
-              <a:t>artillery run tests/artillery-live-demo.yml</a:t>
-            </a:r>
-          </a:p>
-        </p:txBody>
-      </p:sp>
-      <p:sp>
-        <p:nvSpPr>
-          <p:cNvPr id="14" name="Rounded Rectangle 13"/>
-          <p:cNvSpPr/>
-          <p:nvPr/>
-        </p:nvSpPr>
-        <p:spPr>
-          <a:xfrm>
-            <a:off x="777240" y="3611879"/>
-            <a:ext cx="438912" cy="438912"/>
-          </a:xfrm>
-          <a:prstGeom prst="roundRect">
-            <a:avLst/>
-          </a:prstGeom>
-          <a:solidFill>
-            <a:srgbClr val="F59E0B"/>
-          </a:solidFill>
-          <a:ln>
-            <a:noFill/>
-          </a:ln>
-        </p:spPr>
-        <p:style>
-          <a:lnRef idx="1">
-            <a:schemeClr val="accent1"/>
-          </a:lnRef>
-          <a:fillRef idx="3">
-            <a:schemeClr val="accent1"/>
-          </a:fillRef>
-          <a:effectRef idx="2">
-            <a:schemeClr val="accent1"/>
-          </a:effectRef>
-          <a:fontRef idx="minor">
-            <a:schemeClr val="lt1"/>
-          </a:fontRef>
-        </p:style>
-        <p:txBody>
-          <a:bodyPr rtlCol="0" anchor="ctr"/>
-          <a:lstStyle/>
-          <a:p>
-            <a:pPr algn="ctr"/>
-          </a:p>
-        </p:txBody>
-      </p:sp>
-      <p:sp>
-        <p:nvSpPr>
-          <p:cNvPr id="15" name="TextBox 14"/>
-          <p:cNvSpPr txBox="1"/>
-          <p:nvPr/>
-        </p:nvSpPr>
-        <p:spPr>
-          <a:xfrm>
-            <a:off x="932688" y="3721607"/>
-            <a:ext cx="118872" cy="118872"/>
-          </a:xfrm>
-          <a:prstGeom prst="rect">
-            <a:avLst/>
-          </a:prstGeom>
-          <a:noFill/>
-        </p:spPr>
-        <p:txBody>
-          <a:bodyPr wrap="square" lIns="0" rIns="0" tIns="0" bIns="0" anchor="t">
-            <a:spAutoFit/>
-          </a:bodyPr>
-          <a:lstStyle/>
-          <a:p>
-            <a:pPr algn="ctr"/>
-            <a:r>
-              <a:rPr sz="1100" b="1">
-                <a:solidFill>
-                  <a:srgbClr val="0A1820"/>
-                </a:solidFill>
-                <a:latin typeface="Aptos"/>
-              </a:rPr>
-              <a:t>3</a:t>
-            </a:r>
-          </a:p>
-        </p:txBody>
-      </p:sp>
-      <p:sp>
-        <p:nvSpPr>
-          <p:cNvPr id="16" name="TextBox 15"/>
-          <p:cNvSpPr txBox="1"/>
-          <p:nvPr/>
-        </p:nvSpPr>
-        <p:spPr>
-          <a:xfrm>
-            <a:off x="1417320" y="3648456"/>
-            <a:ext cx="1920240" cy="201168"/>
-          </a:xfrm>
-          <a:prstGeom prst="rect">
-            <a:avLst/>
-          </a:prstGeom>
-          <a:noFill/>
-        </p:spPr>
-        <p:txBody>
-          <a:bodyPr wrap="square" lIns="0" rIns="0" tIns="0" bIns="0" anchor="t">
-            <a:spAutoFit/>
-          </a:bodyPr>
-          <a:lstStyle/>
-          <a:p>
-            <a:pPr algn="l"/>
-            <a:r>
-              <a:rPr sz="1200" b="1">
-                <a:solidFill>
-                  <a:srgbClr val="FFFFFF"/>
-                </a:solidFill>
-                <a:latin typeface="Aptos"/>
-              </a:rPr>
-              <a:t>Simular caída</a:t>
-            </a:r>
-          </a:p>
-        </p:txBody>
-      </p:sp>
-      <p:sp>
-        <p:nvSpPr>
-          <p:cNvPr id="17" name="TextBox 16"/>
-          <p:cNvSpPr txBox="1"/>
-          <p:nvPr/>
-        </p:nvSpPr>
-        <p:spPr>
-          <a:xfrm>
-            <a:off x="3246120" y="3675887"/>
-            <a:ext cx="6766560" cy="164592"/>
-          </a:xfrm>
-          <a:prstGeom prst="rect">
-            <a:avLst/>
-          </a:prstGeom>
-          <a:noFill/>
-        </p:spPr>
-        <p:txBody>
-          <a:bodyPr wrap="square" lIns="0" rIns="0" tIns="0" bIns="0" anchor="t">
-            <a:spAutoFit/>
-          </a:bodyPr>
-          <a:lstStyle/>
-          <a:p>
-            <a:pPr algn="l"/>
-            <a:r>
-              <a:rPr sz="1050" b="0">
-                <a:solidFill>
-                  <a:srgbClr val="C8D8E1"/>
-                </a:solidFill>
-                <a:latin typeface="Aptos"/>
-              </a:rPr>
-              <a:t>docker compose -f docker-compose.vps.yml stop web-service</a:t>
-            </a:r>
-          </a:p>
-        </p:txBody>
-      </p:sp>
-      <p:sp>
-        <p:nvSpPr>
-          <p:cNvPr id="18" name="Rounded Rectangle 17"/>
-          <p:cNvSpPr/>
-          <p:nvPr/>
-        </p:nvSpPr>
-        <p:spPr>
-          <a:xfrm>
-            <a:off x="777240" y="4480559"/>
-            <a:ext cx="438912" cy="438912"/>
-          </a:xfrm>
-          <a:prstGeom prst="roundRect">
-            <a:avLst/>
-          </a:prstGeom>
-          <a:solidFill>
-            <a:srgbClr val="A3E635"/>
-          </a:solidFill>
-          <a:ln>
-            <a:noFill/>
-          </a:ln>
-        </p:spPr>
-        <p:style>
-          <a:lnRef idx="1">
-            <a:schemeClr val="accent1"/>
-          </a:lnRef>
-          <a:fillRef idx="3">
-            <a:schemeClr val="accent1"/>
-          </a:fillRef>
-          <a:effectRef idx="2">
-            <a:schemeClr val="accent1"/>
-          </a:effectRef>
-          <a:fontRef idx="minor">
-            <a:schemeClr val="lt1"/>
-          </a:fontRef>
-        </p:style>
-        <p:txBody>
-          <a:bodyPr rtlCol="0" anchor="ctr"/>
-          <a:lstStyle/>
-          <a:p>
-            <a:pPr algn="ctr"/>
-          </a:p>
-        </p:txBody>
-      </p:sp>
-      <p:sp>
-        <p:nvSpPr>
-          <p:cNvPr id="19" name="TextBox 18"/>
-          <p:cNvSpPr txBox="1"/>
-          <p:nvPr/>
-        </p:nvSpPr>
-        <p:spPr>
-          <a:xfrm>
-            <a:off x="932688" y="4590288"/>
-            <a:ext cx="118872" cy="118872"/>
-          </a:xfrm>
-          <a:prstGeom prst="rect">
-            <a:avLst/>
-          </a:prstGeom>
-          <a:noFill/>
-        </p:spPr>
-        <p:txBody>
-          <a:bodyPr wrap="square" lIns="0" rIns="0" tIns="0" bIns="0" anchor="t">
-            <a:spAutoFit/>
-          </a:bodyPr>
-          <a:lstStyle/>
-          <a:p>
-            <a:pPr algn="ctr"/>
-            <a:r>
-              <a:rPr sz="1100" b="1">
-                <a:solidFill>
-                  <a:srgbClr val="0A1820"/>
-                </a:solidFill>
-                <a:latin typeface="Aptos"/>
-              </a:rPr>
-              <a:t>4</a:t>
-            </a:r>
-          </a:p>
-        </p:txBody>
-      </p:sp>
-      <p:sp>
-        <p:nvSpPr>
-          <p:cNvPr id="20" name="TextBox 19"/>
-          <p:cNvSpPr txBox="1"/>
-          <p:nvPr/>
-        </p:nvSpPr>
-        <p:spPr>
-          <a:xfrm>
-            <a:off x="1417320" y="4517136"/>
-            <a:ext cx="1920240" cy="201168"/>
-          </a:xfrm>
-          <a:prstGeom prst="rect">
-            <a:avLst/>
-          </a:prstGeom>
-          <a:noFill/>
-        </p:spPr>
-        <p:txBody>
-          <a:bodyPr wrap="square" lIns="0" rIns="0" tIns="0" bIns="0" anchor="t">
-            <a:spAutoFit/>
-          </a:bodyPr>
-          <a:lstStyle/>
-          <a:p>
-            <a:pPr algn="l"/>
-            <a:r>
-              <a:rPr sz="1200" b="1">
-                <a:solidFill>
-                  <a:srgbClr val="FFFFFF"/>
-                </a:solidFill>
-                <a:latin typeface="Aptos"/>
-              </a:rPr>
-              <a:t>Validar cierre</a:t>
-            </a:r>
-          </a:p>
-        </p:txBody>
-      </p:sp>
-      <p:sp>
-        <p:nvSpPr>
           <p:cNvPr id="21" name="TextBox 20"/>
-          <p:cNvSpPr txBox="1"/>
-          <p:nvPr/>
-        </p:nvSpPr>
-        <p:spPr>
-          <a:xfrm>
-            <a:off x="3246120" y="4544568"/>
-            <a:ext cx="6766560" cy="164592"/>
-          </a:xfrm>
-          <a:prstGeom prst="rect">
-            <a:avLst/>
-          </a:prstGeom>
-          <a:noFill/>
-        </p:spPr>
-        <p:txBody>
-          <a:bodyPr wrap="square" lIns="0" rIns="0" tIns="0" bIns="0" anchor="t">
-            <a:spAutoFit/>
-          </a:bodyPr>
-          <a:lstStyle/>
-          <a:p>
-            <a:pPr algn="l"/>
-            <a:r>
-              <a:rPr sz="1050" b="0">
-                <a:solidFill>
-                  <a:srgbClr val="C8D8E1"/>
-                </a:solidFill>
-                <a:latin typeface="Aptos"/>
-              </a:rPr>
-              <a:t>bash scripts/audit-project.sh</a:t>
-            </a:r>
-          </a:p>
-        </p:txBody>
-      </p:sp>
-      <p:pic>
-        <p:nvPicPr>
-          <p:cNvPr id="22" name="Picture 21" descr="05_mailhog_alertas.png"/>
-          <p:cNvPicPr>
-            <a:picLocks noChangeAspect="1"/>
-          </p:cNvPicPr>
-          <p:nvPr/>
-        </p:nvPicPr>
-        <p:blipFill>
-          <a:blip r:embed="rId2"/>
-          <a:stretch>
-            <a:fillRect/>
-          </a:stretch>
-        </p:blipFill>
-        <p:spPr>
-          <a:xfrm>
-            <a:off x="7772400" y="4069080"/>
-            <a:ext cx="3337560" cy="1463040"/>
-          </a:xfrm>
-          <a:prstGeom prst="rect">
-            <a:avLst/>
-          </a:prstGeom>
-        </p:spPr>
-      </p:pic>
-      <p:sp>
-        <p:nvSpPr>
-          <p:cNvPr id="24" name="TextBox 23"/>
-          <p:cNvSpPr txBox="1"/>
-          <p:nvPr/>
-        </p:nvSpPr>
-        <p:spPr>
-          <a:xfrm>
-            <a:off x="822960" y="5715000"/>
-            <a:ext cx="6583680" cy="384048"/>
-          </a:xfrm>
-          <a:prstGeom prst="rect">
-            <a:avLst/>
-          </a:prstGeom>
-          <a:noFill/>
-        </p:spPr>
-        <p:txBody>
-          <a:bodyPr wrap="square" lIns="0" rIns="0" tIns="0" bIns="0" anchor="t">
-            <a:spAutoFit/>
-          </a:bodyPr>
-          <a:lstStyle/>
-          <a:p>
-            <a:pPr algn="l"/>
-            <a:r>
-              <a:rPr sz="1800" b="1">
-                <a:solidFill>
-                  <a:srgbClr val="22C5AA"/>
-                </a:solidFill>
-                <a:latin typeface="Aptos"/>
-              </a:rPr>
-              <a:t>Cierre: Zabbix detecta, MailHog muestra, Artillery presiona y la auditoría confirma.</a:t>
-            </a:r>
-          </a:p>
-        </p:txBody>
-      </p:sp>
-      <p:cxnSp>
-        <p:nvCxnSpPr>
-          <p:cNvPr id="25" name="Connector 24"/>
-          <p:cNvCxnSpPr/>
-          <p:nvPr/>
-        </p:nvCxnSpPr>
-        <p:spPr>
-          <a:xfrm>
-            <a:off x="502920" y="6428232"/>
-            <a:ext cx="11155680" cy="0"/>
-          </a:xfrm>
-          <a:prstGeom prst="line">
-            <a:avLst/>
-          </a:prstGeom>
-          <a:ln w="8890">
-            <a:solidFill>
-              <a:srgbClr val="2A424D"/>
-            </a:solidFill>
-          </a:ln>
-        </p:spPr>
-        <p:style>
-          <a:lnRef idx="2">
-            <a:schemeClr val="accent1"/>
-          </a:lnRef>
-          <a:fillRef idx="0">
-            <a:schemeClr val="accent1"/>
-          </a:fillRef>
-          <a:effectRef idx="1">
-            <a:schemeClr val="accent1"/>
-          </a:effectRef>
-          <a:fontRef idx="minor">
-            <a:schemeClr val="tx1"/>
-          </a:fontRef>
-        </p:style>
-      </p:cxnSp>
-      <p:sp>
-        <p:nvSpPr>
-          <p:cNvPr id="26" name="TextBox 25"/>
           <p:cNvSpPr txBox="1"/>
           <p:nvPr/>
         </p:nvSpPr>
@@ -8564,7 +8406,7 @@
             <a:r>
               <a:rPr sz="750" b="0">
                 <a:solidFill>
-                  <a:srgbClr val="8E9FAA"/>
+                  <a:srgbClr val="5C6975"/>
                 </a:solidFill>
                 <a:latin typeface="Aptos"/>
               </a:rPr>
@@ -8575,7 +8417,7 @@
       </p:sp>
       <p:sp>
         <p:nvSpPr>
-          <p:cNvPr id="27" name="TextBox 26"/>
+          <p:cNvPr id="22" name="TextBox 21"/>
           <p:cNvSpPr txBox="1"/>
           <p:nvPr/>
         </p:nvSpPr>
@@ -8599,7 +8441,7 @@
             <a:r>
               <a:rPr sz="750" b="0">
                 <a:solidFill>
-                  <a:srgbClr val="8E9FAA"/>
+                  <a:srgbClr val="5C6975"/>
                 </a:solidFill>
                 <a:latin typeface="Aptos"/>
               </a:rPr>
@@ -8734,7 +8576,7 @@
                 </a:solidFill>
                 <a:latin typeface="Aptos"/>
               </a:rPr>
-              <a:t>ALTERNATIVAS</a:t>
+              <a:t>ENTREGABLES</a:t>
             </a:r>
           </a:p>
         </p:txBody>
@@ -8769,7 +8611,7 @@
                 </a:solidFill>
                 <a:latin typeface="Aptos Display"/>
               </a:rPr>
-              <a:t>Zabbix se eligió por equilibrio entre control, alertas y despliegue local.</a:t>
+              <a:t>Queda repo, informe, deck y demo pública.</a:t>
             </a:r>
           </a:p>
         </p:txBody>
@@ -8782,8 +8624,8 @@
         </p:nvSpPr>
         <p:spPr>
           <a:xfrm>
-            <a:off x="749808" y="1572768"/>
-            <a:ext cx="2148840" cy="658368"/>
+            <a:off x="777240" y="1874519"/>
+            <a:ext cx="4343400" cy="960120"/>
           </a:xfrm>
           <a:prstGeom prst="roundRect">
             <a:avLst/>
@@ -8821,60 +8663,23 @@
       </p:sp>
       <p:sp>
         <p:nvSpPr>
-          <p:cNvPr id="7" name="TextBox 6"/>
-          <p:cNvSpPr txBox="1"/>
-          <p:nvPr/>
-        </p:nvSpPr>
-        <p:spPr>
-          <a:xfrm>
-            <a:off x="932688" y="1719072"/>
-            <a:ext cx="1755648" cy="210312"/>
-          </a:xfrm>
-          <a:prstGeom prst="rect">
-            <a:avLst/>
-          </a:prstGeom>
-          <a:noFill/>
-        </p:spPr>
-        <p:txBody>
-          <a:bodyPr wrap="square" lIns="0" rIns="0" tIns="0" bIns="0" anchor="t">
-            <a:spAutoFit/>
-          </a:bodyPr>
-          <a:lstStyle/>
-          <a:p>
-            <a:pPr algn="l"/>
-            <a:r>
-              <a:rPr sz="1200" b="1">
-                <a:solidFill>
-                  <a:srgbClr val="F59E0B"/>
-                </a:solidFill>
-                <a:latin typeface="Aptos"/>
-              </a:rPr>
-              <a:t>Nagios Core</a:t>
-            </a:r>
-          </a:p>
-        </p:txBody>
-      </p:sp>
-      <p:sp>
-        <p:nvSpPr>
-          <p:cNvPr id="8" name="Rounded Rectangle 7"/>
+          <p:cNvPr id="7" name="Rectangle 6"/>
           <p:cNvSpPr/>
           <p:nvPr/>
         </p:nvSpPr>
         <p:spPr>
           <a:xfrm>
-            <a:off x="3090672" y="1572768"/>
-            <a:ext cx="3566160" cy="658368"/>
-          </a:xfrm>
-          <a:prstGeom prst="roundRect">
+            <a:off x="777240" y="1874519"/>
+            <a:ext cx="73152" cy="960120"/>
+          </a:xfrm>
+          <a:prstGeom prst="rect">
             <a:avLst/>
           </a:prstGeom>
           <a:solidFill>
-            <a:srgbClr val="F5F8FA"/>
+            <a:srgbClr val="22C5AA"/>
           </a:solidFill>
-          <a:ln w="10160">
-            <a:solidFill>
-              <a:srgbClr val="BFCCD6"/>
-            </a:solidFill>
+          <a:ln>
+            <a:noFill/>
           </a:ln>
         </p:spPr>
         <p:style>
@@ -8901,14 +8706,49 @@
       </p:sp>
       <p:sp>
         <p:nvSpPr>
+          <p:cNvPr id="8" name="TextBox 7"/>
+          <p:cNvSpPr txBox="1"/>
+          <p:nvPr/>
+        </p:nvSpPr>
+        <p:spPr>
+          <a:xfrm>
+            <a:off x="1005840" y="2020824"/>
+            <a:ext cx="3959352" cy="219456"/>
+          </a:xfrm>
+          <a:prstGeom prst="rect">
+            <a:avLst/>
+          </a:prstGeom>
+          <a:noFill/>
+        </p:spPr>
+        <p:txBody>
+          <a:bodyPr wrap="square" lIns="0" rIns="0" tIns="0" bIns="0" anchor="t">
+            <a:spAutoFit/>
+          </a:bodyPr>
+          <a:lstStyle/>
+          <a:p>
+            <a:pPr algn="l"/>
+            <a:r>
+              <a:rPr sz="1200" b="1">
+                <a:solidFill>
+                  <a:srgbClr val="22C5AA"/>
+                </a:solidFill>
+                <a:latin typeface="Aptos"/>
+              </a:rPr>
+              <a:t>Informe IEEE</a:t>
+            </a:r>
+          </a:p>
+        </p:txBody>
+      </p:sp>
+      <p:sp>
+        <p:nvSpPr>
           <p:cNvPr id="9" name="TextBox 8"/>
           <p:cNvSpPr txBox="1"/>
           <p:nvPr/>
         </p:nvSpPr>
         <p:spPr>
           <a:xfrm>
-            <a:off x="3273552" y="1700784"/>
-            <a:ext cx="3154680" cy="256032"/>
+            <a:off x="1005840" y="2304287"/>
+            <a:ext cx="3959352" cy="448056"/>
           </a:xfrm>
           <a:prstGeom prst="rect">
             <a:avLst/>
@@ -8923,13 +8763,13 @@
           <a:p>
             <a:pPr algn="l"/>
             <a:r>
-              <a:rPr sz="1050" b="0">
+              <a:rPr sz="1100" b="0">
                 <a:solidFill>
                   <a:srgbClr val="0A1820"/>
                 </a:solidFill>
                 <a:latin typeface="Aptos"/>
               </a:rPr>
-              <a:t>Checks maduros y muchos plugins.</a:t>
+              <a:t>entrega-final/Informe_IEEE_Proyecto7_Zabbix.pdf</a:t>
             </a:r>
           </a:p>
         </p:txBody>
@@ -8942,88 +8782,8 @@
         </p:nvSpPr>
         <p:spPr>
           <a:xfrm>
-            <a:off x="6903720" y="1572768"/>
-            <a:ext cx="4160520" cy="658368"/>
-          </a:xfrm>
-          <a:prstGeom prst="roundRect">
-            <a:avLst/>
-          </a:prstGeom>
-          <a:solidFill>
-            <a:srgbClr val="FAF7F4"/>
-          </a:solidFill>
-          <a:ln w="10160">
-            <a:solidFill>
-              <a:srgbClr val="BFCCD6"/>
-            </a:solidFill>
-          </a:ln>
-        </p:spPr>
-        <p:style>
-          <a:lnRef idx="1">
-            <a:schemeClr val="accent1"/>
-          </a:lnRef>
-          <a:fillRef idx="3">
-            <a:schemeClr val="accent1"/>
-          </a:fillRef>
-          <a:effectRef idx="2">
-            <a:schemeClr val="accent1"/>
-          </a:effectRef>
-          <a:fontRef idx="minor">
-            <a:schemeClr val="lt1"/>
-          </a:fontRef>
-        </p:style>
-        <p:txBody>
-          <a:bodyPr rtlCol="0" anchor="ctr"/>
-          <a:lstStyle/>
-          <a:p>
-            <a:pPr algn="ctr"/>
-          </a:p>
-        </p:txBody>
-      </p:sp>
-      <p:sp>
-        <p:nvSpPr>
-          <p:cNvPr id="11" name="TextBox 10"/>
-          <p:cNvSpPr txBox="1"/>
-          <p:nvPr/>
-        </p:nvSpPr>
-        <p:spPr>
-          <a:xfrm>
-            <a:off x="7086600" y="1700784"/>
-            <a:ext cx="3703320" cy="256032"/>
-          </a:xfrm>
-          <a:prstGeom prst="rect">
-            <a:avLst/>
-          </a:prstGeom>
-          <a:noFill/>
-        </p:spPr>
-        <p:txBody>
-          <a:bodyPr wrap="square" lIns="0" rIns="0" tIns="0" bIns="0" anchor="t">
-            <a:spAutoFit/>
-          </a:bodyPr>
-          <a:lstStyle/>
-          <a:p>
-            <a:pPr algn="l"/>
-            <a:r>
-              <a:rPr sz="1050" b="0">
-                <a:solidFill>
-                  <a:srgbClr val="0A1820"/>
-                </a:solidFill>
-                <a:latin typeface="Aptos"/>
-              </a:rPr>
-              <a:t>UI y dashboards limitados; menor automatización moderna.</a:t>
-            </a:r>
-          </a:p>
-        </p:txBody>
-      </p:sp>
-      <p:sp>
-        <p:nvSpPr>
-          <p:cNvPr id="12" name="Rounded Rectangle 11"/>
-          <p:cNvSpPr/>
-          <p:nvPr/>
-        </p:nvSpPr>
-        <p:spPr>
-          <a:xfrm>
-            <a:off x="749808" y="2532888"/>
-            <a:ext cx="2148840" cy="658368"/>
+            <a:off x="5852159" y="1874519"/>
+            <a:ext cx="4343400" cy="960120"/>
           </a:xfrm>
           <a:prstGeom prst="roundRect">
             <a:avLst/>
@@ -9061,60 +8821,23 @@
       </p:sp>
       <p:sp>
         <p:nvSpPr>
-          <p:cNvPr id="13" name="TextBox 12"/>
-          <p:cNvSpPr txBox="1"/>
-          <p:nvPr/>
-        </p:nvSpPr>
-        <p:spPr>
-          <a:xfrm>
-            <a:off x="932688" y="2679192"/>
-            <a:ext cx="1755648" cy="210312"/>
-          </a:xfrm>
-          <a:prstGeom prst="rect">
-            <a:avLst/>
-          </a:prstGeom>
-          <a:noFill/>
-        </p:spPr>
-        <p:txBody>
-          <a:bodyPr wrap="square" lIns="0" rIns="0" tIns="0" bIns="0" anchor="t">
-            <a:spAutoFit/>
-          </a:bodyPr>
-          <a:lstStyle/>
-          <a:p>
-            <a:pPr algn="l"/>
-            <a:r>
-              <a:rPr sz="1200" b="1">
-                <a:solidFill>
-                  <a:srgbClr val="38BDF8"/>
-                </a:solidFill>
-                <a:latin typeface="Aptos"/>
-              </a:rPr>
-              <a:t>Prometheus + Grafana</a:t>
-            </a:r>
-          </a:p>
-        </p:txBody>
-      </p:sp>
-      <p:sp>
-        <p:nvSpPr>
-          <p:cNvPr id="14" name="Rounded Rectangle 13"/>
+          <p:cNvPr id="11" name="Rectangle 10"/>
           <p:cNvSpPr/>
           <p:nvPr/>
         </p:nvSpPr>
         <p:spPr>
           <a:xfrm>
-            <a:off x="3090672" y="2532888"/>
-            <a:ext cx="3566160" cy="658368"/>
-          </a:xfrm>
-          <a:prstGeom prst="roundRect">
+            <a:off x="5852159" y="1874519"/>
+            <a:ext cx="73152" cy="960120"/>
+          </a:xfrm>
+          <a:prstGeom prst="rect">
             <a:avLst/>
           </a:prstGeom>
           <a:solidFill>
-            <a:srgbClr val="F5F8FA"/>
+            <a:srgbClr val="38BDF8"/>
           </a:solidFill>
-          <a:ln w="10160">
-            <a:solidFill>
-              <a:srgbClr val="BFCCD6"/>
-            </a:solidFill>
+          <a:ln>
+            <a:noFill/>
           </a:ln>
         </p:spPr>
         <p:style>
@@ -9141,14 +8864,14 @@
       </p:sp>
       <p:sp>
         <p:nvSpPr>
-          <p:cNvPr id="15" name="TextBox 14"/>
-          <p:cNvSpPr txBox="1"/>
-          <p:nvPr/>
-        </p:nvSpPr>
-        <p:spPr>
-          <a:xfrm>
-            <a:off x="3273552" y="2660904"/>
-            <a:ext cx="3154680" cy="256032"/>
+          <p:cNvPr id="12" name="TextBox 11"/>
+          <p:cNvSpPr txBox="1"/>
+          <p:nvPr/>
+        </p:nvSpPr>
+        <p:spPr>
+          <a:xfrm>
+            <a:off x="6080759" y="2020824"/>
+            <a:ext cx="3959352" cy="219456"/>
           </a:xfrm>
           <a:prstGeom prst="rect">
             <a:avLst/>
@@ -9163,107 +8886,62 @@
           <a:p>
             <a:pPr algn="l"/>
             <a:r>
-              <a:rPr sz="1050" b="0">
+              <a:rPr sz="1200" b="1">
+                <a:solidFill>
+                  <a:srgbClr val="38BDF8"/>
+                </a:solidFill>
+                <a:latin typeface="Aptos"/>
+              </a:rPr>
+              <a:t>Diapositivas</a:t>
+            </a:r>
+          </a:p>
+        </p:txBody>
+      </p:sp>
+      <p:sp>
+        <p:nvSpPr>
+          <p:cNvPr id="13" name="TextBox 12"/>
+          <p:cNvSpPr txBox="1"/>
+          <p:nvPr/>
+        </p:nvSpPr>
+        <p:spPr>
+          <a:xfrm>
+            <a:off x="6080759" y="2304287"/>
+            <a:ext cx="3959352" cy="448056"/>
+          </a:xfrm>
+          <a:prstGeom prst="rect">
+            <a:avLst/>
+          </a:prstGeom>
+          <a:noFill/>
+        </p:spPr>
+        <p:txBody>
+          <a:bodyPr wrap="square" lIns="0" rIns="0" tIns="0" bIns="0" anchor="t">
+            <a:spAutoFit/>
+          </a:bodyPr>
+          <a:lstStyle/>
+          <a:p>
+            <a:pPr algn="l"/>
+            <a:r>
+              <a:rPr sz="1100" b="0">
                 <a:solidFill>
                   <a:srgbClr val="0A1820"/>
                 </a:solidFill>
                 <a:latin typeface="Aptos"/>
               </a:rPr>
-              <a:t>Métricas modernas y visualización fuerte.</a:t>
-            </a:r>
-          </a:p>
-        </p:txBody>
-      </p:sp>
-      <p:sp>
-        <p:nvSpPr>
-          <p:cNvPr id="16" name="Rounded Rectangle 15"/>
+              <a:t>entrega-final/Presentacion_Proyecto7_Zabbix.pptx</a:t>
+            </a:r>
+          </a:p>
+        </p:txBody>
+      </p:sp>
+      <p:sp>
+        <p:nvSpPr>
+          <p:cNvPr id="14" name="Rounded Rectangle 13"/>
           <p:cNvSpPr/>
           <p:nvPr/>
         </p:nvSpPr>
         <p:spPr>
           <a:xfrm>
-            <a:off x="6903720" y="2532888"/>
-            <a:ext cx="4160520" cy="658368"/>
-          </a:xfrm>
-          <a:prstGeom prst="roundRect">
-            <a:avLst/>
-          </a:prstGeom>
-          <a:solidFill>
-            <a:srgbClr val="FAF7F4"/>
-          </a:solidFill>
-          <a:ln w="10160">
-            <a:solidFill>
-              <a:srgbClr val="BFCCD6"/>
-            </a:solidFill>
-          </a:ln>
-        </p:spPr>
-        <p:style>
-          <a:lnRef idx="1">
-            <a:schemeClr val="accent1"/>
-          </a:lnRef>
-          <a:fillRef idx="3">
-            <a:schemeClr val="accent1"/>
-          </a:fillRef>
-          <a:effectRef idx="2">
-            <a:schemeClr val="accent1"/>
-          </a:effectRef>
-          <a:fontRef idx="minor">
-            <a:schemeClr val="lt1"/>
-          </a:fontRef>
-        </p:style>
-        <p:txBody>
-          <a:bodyPr rtlCol="0" anchor="ctr"/>
-          <a:lstStyle/>
-          <a:p>
-            <a:pPr algn="ctr"/>
-          </a:p>
-        </p:txBody>
-      </p:sp>
-      <p:sp>
-        <p:nvSpPr>
-          <p:cNvPr id="17" name="TextBox 16"/>
-          <p:cNvSpPr txBox="1"/>
-          <p:nvPr/>
-        </p:nvSpPr>
-        <p:spPr>
-          <a:xfrm>
-            <a:off x="7086600" y="2660904"/>
-            <a:ext cx="3703320" cy="256032"/>
-          </a:xfrm>
-          <a:prstGeom prst="rect">
-            <a:avLst/>
-          </a:prstGeom>
-          <a:noFill/>
-        </p:spPr>
-        <p:txBody>
-          <a:bodyPr wrap="square" lIns="0" rIns="0" tIns="0" bIns="0" anchor="t">
-            <a:spAutoFit/>
-          </a:bodyPr>
-          <a:lstStyle/>
-          <a:p>
-            <a:pPr algn="l"/>
-            <a:r>
-              <a:rPr sz="1050" b="0">
-                <a:solidFill>
-                  <a:srgbClr val="0A1820"/>
-                </a:solidFill>
-                <a:latin typeface="Aptos"/>
-              </a:rPr>
-              <a:t>Requiere Alertmanager, exporters y más integración.</a:t>
-            </a:r>
-          </a:p>
-        </p:txBody>
-      </p:sp>
-      <p:sp>
-        <p:nvSpPr>
-          <p:cNvPr id="18" name="Rounded Rectangle 17"/>
-          <p:cNvSpPr/>
-          <p:nvPr/>
-        </p:nvSpPr>
-        <p:spPr>
-          <a:xfrm>
-            <a:off x="749808" y="3493008"/>
-            <a:ext cx="2148840" cy="658368"/>
+            <a:off x="777240" y="3291839"/>
+            <a:ext cx="4343400" cy="960120"/>
           </a:xfrm>
           <a:prstGeom prst="roundRect">
             <a:avLst/>
@@ -9301,60 +8979,23 @@
       </p:sp>
       <p:sp>
         <p:nvSpPr>
-          <p:cNvPr id="19" name="TextBox 18"/>
-          <p:cNvSpPr txBox="1"/>
-          <p:nvPr/>
-        </p:nvSpPr>
-        <p:spPr>
-          <a:xfrm>
-            <a:off x="932688" y="3639312"/>
-            <a:ext cx="1755648" cy="210312"/>
-          </a:xfrm>
-          <a:prstGeom prst="rect">
-            <a:avLst/>
-          </a:prstGeom>
-          <a:noFill/>
-        </p:spPr>
-        <p:txBody>
-          <a:bodyPr wrap="square" lIns="0" rIns="0" tIns="0" bIns="0" anchor="t">
-            <a:spAutoFit/>
-          </a:bodyPr>
-          <a:lstStyle/>
-          <a:p>
-            <a:pPr algn="l"/>
-            <a:r>
-              <a:rPr sz="1200" b="1">
-                <a:solidFill>
-                  <a:srgbClr val="EF4444"/>
-                </a:solidFill>
-                <a:latin typeface="Aptos"/>
-              </a:rPr>
-              <a:t>Datadog</a:t>
-            </a:r>
-          </a:p>
-        </p:txBody>
-      </p:sp>
-      <p:sp>
-        <p:nvSpPr>
-          <p:cNvPr id="20" name="Rounded Rectangle 19"/>
+          <p:cNvPr id="15" name="Rectangle 14"/>
           <p:cNvSpPr/>
           <p:nvPr/>
         </p:nvSpPr>
         <p:spPr>
           <a:xfrm>
-            <a:off x="3090672" y="3493008"/>
-            <a:ext cx="3566160" cy="658368"/>
-          </a:xfrm>
-          <a:prstGeom prst="roundRect">
+            <a:off x="777240" y="3291839"/>
+            <a:ext cx="73152" cy="960120"/>
+          </a:xfrm>
+          <a:prstGeom prst="rect">
             <a:avLst/>
           </a:prstGeom>
           <a:solidFill>
-            <a:srgbClr val="F5F8FA"/>
+            <a:srgbClr val="A3E635"/>
           </a:solidFill>
-          <a:ln w="10160">
-            <a:solidFill>
-              <a:srgbClr val="BFCCD6"/>
-            </a:solidFill>
+          <a:ln>
+            <a:noFill/>
           </a:ln>
         </p:spPr>
         <p:style>
@@ -9381,14 +9022,14 @@
       </p:sp>
       <p:sp>
         <p:nvSpPr>
-          <p:cNvPr id="21" name="TextBox 20"/>
-          <p:cNvSpPr txBox="1"/>
-          <p:nvPr/>
-        </p:nvSpPr>
-        <p:spPr>
-          <a:xfrm>
-            <a:off x="3273552" y="3621024"/>
-            <a:ext cx="3154680" cy="256032"/>
+          <p:cNvPr id="16" name="TextBox 15"/>
+          <p:cNvSpPr txBox="1"/>
+          <p:nvPr/>
+        </p:nvSpPr>
+        <p:spPr>
+          <a:xfrm>
+            <a:off x="1005840" y="3438144"/>
+            <a:ext cx="3959352" cy="219456"/>
           </a:xfrm>
           <a:prstGeom prst="rect">
             <a:avLst/>
@@ -9403,107 +9044,62 @@
           <a:p>
             <a:pPr algn="l"/>
             <a:r>
-              <a:rPr sz="1050" b="0">
+              <a:rPr sz="1200" b="1">
+                <a:solidFill>
+                  <a:srgbClr val="A3E635"/>
+                </a:solidFill>
+                <a:latin typeface="Aptos"/>
+              </a:rPr>
+              <a:t>Repositorio</a:t>
+            </a:r>
+          </a:p>
+        </p:txBody>
+      </p:sp>
+      <p:sp>
+        <p:nvSpPr>
+          <p:cNvPr id="17" name="TextBox 16"/>
+          <p:cNvSpPr txBox="1"/>
+          <p:nvPr/>
+        </p:nvSpPr>
+        <p:spPr>
+          <a:xfrm>
+            <a:off x="1005840" y="3721607"/>
+            <a:ext cx="3959352" cy="448056"/>
+          </a:xfrm>
+          <a:prstGeom prst="rect">
+            <a:avLst/>
+          </a:prstGeom>
+          <a:noFill/>
+        </p:spPr>
+        <p:txBody>
+          <a:bodyPr wrap="square" lIns="0" rIns="0" tIns="0" bIns="0" anchor="t">
+            <a:spAutoFit/>
+          </a:bodyPr>
+          <a:lstStyle/>
+          <a:p>
+            <a:pPr algn="l"/>
+            <a:r>
+              <a:rPr sz="1100" b="0">
                 <a:solidFill>
                   <a:srgbClr val="0A1820"/>
                 </a:solidFill>
                 <a:latin typeface="Aptos"/>
               </a:rPr>
-              <a:t>Suite SaaS completa con APM y logs.</a:t>
-            </a:r>
-          </a:p>
-        </p:txBody>
-      </p:sp>
-      <p:sp>
-        <p:nvSpPr>
-          <p:cNvPr id="22" name="Rounded Rectangle 21"/>
+              <a:t>github.com/ballesterossmartsolutionssas/Proyecto7-Zabbix</a:t>
+            </a:r>
+          </a:p>
+        </p:txBody>
+      </p:sp>
+      <p:sp>
+        <p:nvSpPr>
+          <p:cNvPr id="18" name="Rounded Rectangle 17"/>
           <p:cNvSpPr/>
           <p:nvPr/>
         </p:nvSpPr>
         <p:spPr>
           <a:xfrm>
-            <a:off x="6903720" y="3493008"/>
-            <a:ext cx="4160520" cy="658368"/>
-          </a:xfrm>
-          <a:prstGeom prst="roundRect">
-            <a:avLst/>
-          </a:prstGeom>
-          <a:solidFill>
-            <a:srgbClr val="FAF7F4"/>
-          </a:solidFill>
-          <a:ln w="10160">
-            <a:solidFill>
-              <a:srgbClr val="BFCCD6"/>
-            </a:solidFill>
-          </a:ln>
-        </p:spPr>
-        <p:style>
-          <a:lnRef idx="1">
-            <a:schemeClr val="accent1"/>
-          </a:lnRef>
-          <a:fillRef idx="3">
-            <a:schemeClr val="accent1"/>
-          </a:fillRef>
-          <a:effectRef idx="2">
-            <a:schemeClr val="accent1"/>
-          </a:effectRef>
-          <a:fontRef idx="minor">
-            <a:schemeClr val="lt1"/>
-          </a:fontRef>
-        </p:style>
-        <p:txBody>
-          <a:bodyPr rtlCol="0" anchor="ctr"/>
-          <a:lstStyle/>
-          <a:p>
-            <a:pPr algn="ctr"/>
-          </a:p>
-        </p:txBody>
-      </p:sp>
-      <p:sp>
-        <p:nvSpPr>
-          <p:cNvPr id="23" name="TextBox 22"/>
-          <p:cNvSpPr txBox="1"/>
-          <p:nvPr/>
-        </p:nvSpPr>
-        <p:spPr>
-          <a:xfrm>
-            <a:off x="7086600" y="3621024"/>
-            <a:ext cx="3703320" cy="256032"/>
-          </a:xfrm>
-          <a:prstGeom prst="rect">
-            <a:avLst/>
-          </a:prstGeom>
-          <a:noFill/>
-        </p:spPr>
-        <p:txBody>
-          <a:bodyPr wrap="square" lIns="0" rIns="0" tIns="0" bIns="0" anchor="t">
-            <a:spAutoFit/>
-          </a:bodyPr>
-          <a:lstStyle/>
-          <a:p>
-            <a:pPr algn="l"/>
-            <a:r>
-              <a:rPr sz="1050" b="0">
-                <a:solidFill>
-                  <a:srgbClr val="0A1820"/>
-                </a:solidFill>
-                <a:latin typeface="Aptos"/>
-              </a:rPr>
-              <a:t>Costo, dependencia externa y datos fuera del laboratorio.</a:t>
-            </a:r>
-          </a:p>
-        </p:txBody>
-      </p:sp>
-      <p:sp>
-        <p:nvSpPr>
-          <p:cNvPr id="24" name="Rounded Rectangle 23"/>
-          <p:cNvSpPr/>
-          <p:nvPr/>
-        </p:nvSpPr>
-        <p:spPr>
-          <a:xfrm>
-            <a:off x="749808" y="4453128"/>
-            <a:ext cx="2148840" cy="658368"/>
+            <a:off x="5852159" y="3291839"/>
+            <a:ext cx="4343400" cy="960120"/>
           </a:xfrm>
           <a:prstGeom prst="roundRect">
             <a:avLst/>
@@ -9541,60 +9137,23 @@
       </p:sp>
       <p:sp>
         <p:nvSpPr>
-          <p:cNvPr id="25" name="TextBox 24"/>
-          <p:cNvSpPr txBox="1"/>
-          <p:nvPr/>
-        </p:nvSpPr>
-        <p:spPr>
-          <a:xfrm>
-            <a:off x="932688" y="4599432"/>
-            <a:ext cx="1755648" cy="210312"/>
-          </a:xfrm>
-          <a:prstGeom prst="rect">
-            <a:avLst/>
-          </a:prstGeom>
-          <a:noFill/>
-        </p:spPr>
-        <p:txBody>
-          <a:bodyPr wrap="square" lIns="0" rIns="0" tIns="0" bIns="0" anchor="t">
-            <a:spAutoFit/>
-          </a:bodyPr>
-          <a:lstStyle/>
-          <a:p>
-            <a:pPr algn="l"/>
-            <a:r>
-              <a:rPr sz="1200" b="1">
-                <a:solidFill>
-                  <a:srgbClr val="22C5AA"/>
-                </a:solidFill>
-                <a:latin typeface="Aptos"/>
-              </a:rPr>
-              <a:t>Zabbix 6.x</a:t>
-            </a:r>
-          </a:p>
-        </p:txBody>
-      </p:sp>
-      <p:sp>
-        <p:nvSpPr>
-          <p:cNvPr id="26" name="Rounded Rectangle 25"/>
+          <p:cNvPr id="19" name="Rectangle 18"/>
           <p:cNvSpPr/>
           <p:nvPr/>
         </p:nvSpPr>
         <p:spPr>
           <a:xfrm>
-            <a:off x="3090672" y="4453128"/>
-            <a:ext cx="3566160" cy="658368"/>
-          </a:xfrm>
-          <a:prstGeom prst="roundRect">
+            <a:off x="5852159" y="3291839"/>
+            <a:ext cx="73152" cy="960120"/>
+          </a:xfrm>
+          <a:prstGeom prst="rect">
             <a:avLst/>
           </a:prstGeom>
           <a:solidFill>
-            <a:srgbClr val="F5F8FA"/>
+            <a:srgbClr val="F59E0B"/>
           </a:solidFill>
-          <a:ln w="10160">
-            <a:solidFill>
-              <a:srgbClr val="BFCCD6"/>
-            </a:solidFill>
+          <a:ln>
+            <a:noFill/>
           </a:ln>
         </p:spPr>
         <p:style>
@@ -9621,14 +9180,14 @@
       </p:sp>
       <p:sp>
         <p:nvSpPr>
-          <p:cNvPr id="27" name="TextBox 26"/>
-          <p:cNvSpPr txBox="1"/>
-          <p:nvPr/>
-        </p:nvSpPr>
-        <p:spPr>
-          <a:xfrm>
-            <a:off x="3273552" y="4581144"/>
-            <a:ext cx="3154680" cy="256032"/>
+          <p:cNvPr id="20" name="TextBox 19"/>
+          <p:cNvSpPr txBox="1"/>
+          <p:nvPr/>
+        </p:nvSpPr>
+        <p:spPr>
+          <a:xfrm>
+            <a:off x="6080759" y="3438144"/>
+            <a:ext cx="3959352" cy="219456"/>
           </a:xfrm>
           <a:prstGeom prst="rect">
             <a:avLst/>
@@ -9643,72 +9202,62 @@
           <a:p>
             <a:pPr algn="l"/>
             <a:r>
-              <a:rPr sz="1050" b="0">
+              <a:rPr sz="1200" b="1">
+                <a:solidFill>
+                  <a:srgbClr val="F59E0B"/>
+                </a:solidFill>
+                <a:latin typeface="Aptos"/>
+              </a:rPr>
+              <a:t>Evidencias</a:t>
+            </a:r>
+          </a:p>
+        </p:txBody>
+      </p:sp>
+      <p:sp>
+        <p:nvSpPr>
+          <p:cNvPr id="21" name="TextBox 20"/>
+          <p:cNvSpPr txBox="1"/>
+          <p:nvPr/>
+        </p:nvSpPr>
+        <p:spPr>
+          <a:xfrm>
+            <a:off x="6080759" y="3721607"/>
+            <a:ext cx="3959352" cy="448056"/>
+          </a:xfrm>
+          <a:prstGeom prst="rect">
+            <a:avLst/>
+          </a:prstGeom>
+          <a:noFill/>
+        </p:spPr>
+        <p:txBody>
+          <a:bodyPr wrap="square" lIns="0" rIns="0" tIns="0" bIns="0" anchor="t">
+            <a:spAutoFit/>
+          </a:bodyPr>
+          <a:lstStyle/>
+          <a:p>
+            <a:pPr algn="l"/>
+            <a:r>
+              <a:rPr sz="1100" b="0">
                 <a:solidFill>
                   <a:srgbClr val="0A1820"/>
                 </a:solidFill>
                 <a:latin typeface="Aptos"/>
               </a:rPr>
-              <a:t>Agentes, API, triggers, dashboards, histórico y correo integrados.</a:t>
-            </a:r>
-          </a:p>
-        </p:txBody>
-      </p:sp>
-      <p:sp>
-        <p:nvSpPr>
-          <p:cNvPr id="28" name="Rounded Rectangle 27"/>
-          <p:cNvSpPr/>
-          <p:nvPr/>
-        </p:nvSpPr>
-        <p:spPr>
-          <a:xfrm>
-            <a:off x="6903720" y="4453128"/>
-            <a:ext cx="4160520" cy="658368"/>
-          </a:xfrm>
-          <a:prstGeom prst="roundRect">
-            <a:avLst/>
-          </a:prstGeom>
-          <a:solidFill>
-            <a:srgbClr val="FAF7F4"/>
-          </a:solidFill>
-          <a:ln w="10160">
-            <a:solidFill>
-              <a:srgbClr val="BFCCD6"/>
-            </a:solidFill>
-          </a:ln>
-        </p:spPr>
-        <p:style>
-          <a:lnRef idx="1">
-            <a:schemeClr val="accent1"/>
-          </a:lnRef>
-          <a:fillRef idx="3">
-            <a:schemeClr val="accent1"/>
-          </a:fillRef>
-          <a:effectRef idx="2">
-            <a:schemeClr val="accent1"/>
-          </a:effectRef>
-          <a:fontRef idx="minor">
-            <a:schemeClr val="lt1"/>
-          </a:fontRef>
-        </p:style>
-        <p:txBody>
-          <a:bodyPr rtlCol="0" anchor="ctr"/>
-          <a:lstStyle/>
-          <a:p>
-            <a:pPr algn="ctr"/>
-          </a:p>
-        </p:txBody>
-      </p:sp>
-      <p:sp>
-        <p:nvSpPr>
-          <p:cNvPr id="29" name="TextBox 28"/>
-          <p:cNvSpPr txBox="1"/>
-          <p:nvPr/>
-        </p:nvSpPr>
-        <p:spPr>
-          <a:xfrm>
-            <a:off x="7086600" y="4581144"/>
-            <a:ext cx="3703320" cy="256032"/>
+              <a:t>entrega-final/evidencias + auditoría</a:t>
+            </a:r>
+          </a:p>
+        </p:txBody>
+      </p:sp>
+      <p:sp>
+        <p:nvSpPr>
+          <p:cNvPr id="22" name="TextBox 21"/>
+          <p:cNvSpPr txBox="1"/>
+          <p:nvPr/>
+        </p:nvSpPr>
+        <p:spPr>
+          <a:xfrm>
+            <a:off x="822960" y="5349240"/>
+            <a:ext cx="9784080" cy="438912"/>
           </a:xfrm>
           <a:prstGeom prst="rect">
             <a:avLst/>
@@ -9723,178 +9272,20 @@
           <a:p>
             <a:pPr algn="l"/>
             <a:r>
-              <a:rPr sz="1050" b="0">
+              <a:rPr sz="1700" b="1">
                 <a:solidFill>
                   <a:srgbClr val="0A1820"/>
                 </a:solidFill>
                 <a:latin typeface="Aptos"/>
               </a:rPr>
-              <a:t>Más configuración inicial, pero reproducible con scripts.</a:t>
-            </a:r>
-          </a:p>
-        </p:txBody>
-      </p:sp>
-      <p:sp>
-        <p:nvSpPr>
-          <p:cNvPr id="30" name="Rounded Rectangle 29"/>
-          <p:cNvSpPr/>
-          <p:nvPr/>
-        </p:nvSpPr>
-        <p:spPr>
-          <a:xfrm>
-            <a:off x="777240" y="5513832"/>
-            <a:ext cx="10287000" cy="713232"/>
-          </a:xfrm>
-          <a:prstGeom prst="roundRect">
-            <a:avLst/>
-          </a:prstGeom>
-          <a:solidFill>
-            <a:srgbClr val="FFFFFF"/>
-          </a:solidFill>
-          <a:ln w="10160">
-            <a:solidFill>
-              <a:srgbClr val="BFCCD6"/>
-            </a:solidFill>
-          </a:ln>
-        </p:spPr>
-        <p:style>
-          <a:lnRef idx="1">
-            <a:schemeClr val="accent1"/>
-          </a:lnRef>
-          <a:fillRef idx="3">
-            <a:schemeClr val="accent1"/>
-          </a:fillRef>
-          <a:effectRef idx="2">
-            <a:schemeClr val="accent1"/>
-          </a:effectRef>
-          <a:fontRef idx="minor">
-            <a:schemeClr val="lt1"/>
-          </a:fontRef>
-        </p:style>
-        <p:txBody>
-          <a:bodyPr rtlCol="0" anchor="ctr"/>
-          <a:lstStyle/>
-          <a:p>
-            <a:pPr algn="ctr"/>
-          </a:p>
-        </p:txBody>
-      </p:sp>
-      <p:sp>
-        <p:nvSpPr>
-          <p:cNvPr id="31" name="Rectangle 30"/>
-          <p:cNvSpPr/>
-          <p:nvPr/>
-        </p:nvSpPr>
-        <p:spPr>
-          <a:xfrm>
-            <a:off x="777240" y="5513832"/>
-            <a:ext cx="73152" cy="713232"/>
-          </a:xfrm>
-          <a:prstGeom prst="rect">
-            <a:avLst/>
-          </a:prstGeom>
-          <a:solidFill>
-            <a:srgbClr val="22C5AA"/>
-          </a:solidFill>
-          <a:ln>
-            <a:noFill/>
-          </a:ln>
-        </p:spPr>
-        <p:style>
-          <a:lnRef idx="1">
-            <a:schemeClr val="accent1"/>
-          </a:lnRef>
-          <a:fillRef idx="3">
-            <a:schemeClr val="accent1"/>
-          </a:fillRef>
-          <a:effectRef idx="2">
-            <a:schemeClr val="accent1"/>
-          </a:effectRef>
-          <a:fontRef idx="minor">
-            <a:schemeClr val="lt1"/>
-          </a:fontRef>
-        </p:style>
-        <p:txBody>
-          <a:bodyPr rtlCol="0" anchor="ctr"/>
-          <a:lstStyle/>
-          <a:p>
-            <a:pPr algn="ctr"/>
-          </a:p>
-        </p:txBody>
-      </p:sp>
-      <p:sp>
-        <p:nvSpPr>
-          <p:cNvPr id="32" name="TextBox 31"/>
-          <p:cNvSpPr txBox="1"/>
-          <p:nvPr/>
-        </p:nvSpPr>
-        <p:spPr>
-          <a:xfrm>
-            <a:off x="1005840" y="5660136"/>
-            <a:ext cx="9902952" cy="219456"/>
-          </a:xfrm>
-          <a:prstGeom prst="rect">
-            <a:avLst/>
-          </a:prstGeom>
-          <a:noFill/>
-        </p:spPr>
-        <p:txBody>
-          <a:bodyPr wrap="square" lIns="0" rIns="0" tIns="0" bIns="0" anchor="t">
-            <a:spAutoFit/>
-          </a:bodyPr>
-          <a:lstStyle/>
-          <a:p>
-            <a:pPr algn="l"/>
-            <a:r>
-              <a:rPr sz="1200" b="1">
-                <a:solidFill>
-                  <a:srgbClr val="22C5AA"/>
-                </a:solidFill>
-                <a:latin typeface="Aptos"/>
-              </a:rPr>
-              <a:t>Decisión</a:t>
-            </a:r>
-          </a:p>
-        </p:txBody>
-      </p:sp>
-      <p:sp>
-        <p:nvSpPr>
-          <p:cNvPr id="33" name="TextBox 32"/>
-          <p:cNvSpPr txBox="1"/>
-          <p:nvPr/>
-        </p:nvSpPr>
-        <p:spPr>
-          <a:xfrm>
-            <a:off x="1005840" y="5943600"/>
-            <a:ext cx="9902952" cy="201167"/>
-          </a:xfrm>
-          <a:prstGeom prst="rect">
-            <a:avLst/>
-          </a:prstGeom>
-          <a:noFill/>
-        </p:spPr>
-        <p:txBody>
-          <a:bodyPr wrap="square" lIns="0" rIns="0" tIns="0" bIns="0" anchor="t">
-            <a:spAutoFit/>
-          </a:bodyPr>
-          <a:lstStyle/>
-          <a:p>
-            <a:pPr algn="l"/>
-            <a:r>
-              <a:rPr sz="1100" b="0">
-                <a:solidFill>
-                  <a:srgbClr val="0A1820"/>
-                </a:solidFill>
-                <a:latin typeface="Aptos"/>
-              </a:rPr>
-              <a:t>Zabbix permite cumplir el enunciado sin SaaS pago: monitoreo de hosts, servicios, triggers, dashboards, histórico, alertas y API en Docker Compose.</a:t>
+              <a:t>Reparto: Luis Felipe abre, Juan Sebastián explica arquitectura, Daniela muestra Zabbix y Juan Camilo cierra con pruebas en vivo.</a:t>
             </a:r>
           </a:p>
         </p:txBody>
       </p:sp>
       <p:cxnSp>
         <p:nvCxnSpPr>
-          <p:cNvPr id="34" name="Connector 33"/>
+          <p:cNvPr id="23" name="Connector 22"/>
           <p:cNvCxnSpPr/>
           <p:nvPr/>
         </p:nvCxnSpPr>
@@ -9929,7 +9320,7 @@
       </p:cxnSp>
       <p:sp>
         <p:nvSpPr>
-          <p:cNvPr id="35" name="TextBox 34"/>
+          <p:cNvPr id="24" name="TextBox 23"/>
           <p:cNvSpPr txBox="1"/>
           <p:nvPr/>
         </p:nvSpPr>
@@ -9964,7 +9355,7 @@
       </p:sp>
       <p:sp>
         <p:nvSpPr>
-          <p:cNvPr id="36" name="TextBox 35"/>
+          <p:cNvPr id="25" name="TextBox 24"/>
           <p:cNvSpPr txBox="1"/>
           <p:nvPr/>
         </p:nvSpPr>
@@ -10011,7 +9402,7 @@
     <p:bg>
       <p:bgPr>
         <a:solidFill>
-          <a:srgbClr val="F2F7F9"/>
+          <a:srgbClr val="0A1820"/>
         </a:solidFill>
         <a:effectLst/>
       </p:bgPr>
@@ -10025,156 +9416,16 @@
       <p:grpSpPr/>
       <p:sp>
         <p:nvSpPr>
-          <p:cNvPr id="2" name="TextBox 1"/>
-          <p:cNvSpPr txBox="1"/>
-          <p:nvPr/>
-        </p:nvSpPr>
-        <p:spPr>
-          <a:xfrm>
-            <a:off x="502920" y="384048"/>
-            <a:ext cx="384048" cy="201168"/>
-          </a:xfrm>
-          <a:prstGeom prst="rect">
-            <a:avLst/>
-          </a:prstGeom>
-          <a:noFill/>
-        </p:spPr>
-        <p:txBody>
-          <a:bodyPr wrap="square" lIns="0" rIns="0" tIns="0" bIns="0" anchor="t">
-            <a:spAutoFit/>
-          </a:bodyPr>
-          <a:lstStyle/>
-          <a:p>
-            <a:pPr algn="l"/>
-            <a:r>
-              <a:rPr sz="800" b="1">
-                <a:solidFill>
-                  <a:srgbClr val="0A1820"/>
-                </a:solidFill>
-                <a:latin typeface="Aptos"/>
-              </a:rPr>
-              <a:t>16</a:t>
-            </a:r>
-          </a:p>
-        </p:txBody>
-      </p:sp>
-      <p:cxnSp>
-        <p:nvCxnSpPr>
-          <p:cNvPr id="3" name="Connector 2"/>
-          <p:cNvCxnSpPr/>
-          <p:nvPr/>
-        </p:nvCxnSpPr>
-        <p:spPr>
-          <a:xfrm>
-            <a:off x="941832" y="475488"/>
-            <a:ext cx="685800" cy="0"/>
-          </a:xfrm>
-          <a:prstGeom prst="line">
-            <a:avLst/>
-          </a:prstGeom>
-          <a:ln w="13970">
-            <a:solidFill>
-              <a:srgbClr val="0A1820"/>
-            </a:solidFill>
-          </a:ln>
-        </p:spPr>
-        <p:style>
-          <a:lnRef idx="2">
-            <a:schemeClr val="accent1"/>
-          </a:lnRef>
-          <a:fillRef idx="0">
-            <a:schemeClr val="accent1"/>
-          </a:fillRef>
-          <a:effectRef idx="1">
-            <a:schemeClr val="accent1"/>
-          </a:effectRef>
-          <a:fontRef idx="minor">
-            <a:schemeClr val="tx1"/>
-          </a:fontRef>
-        </p:style>
-      </p:cxnSp>
-      <p:sp>
-        <p:nvSpPr>
-          <p:cNvPr id="4" name="TextBox 3"/>
-          <p:cNvSpPr txBox="1"/>
-          <p:nvPr/>
-        </p:nvSpPr>
-        <p:spPr>
-          <a:xfrm>
-            <a:off x="1737360" y="356616"/>
-            <a:ext cx="3108960" cy="274320"/>
-          </a:xfrm>
-          <a:prstGeom prst="rect">
-            <a:avLst/>
-          </a:prstGeom>
-          <a:noFill/>
-        </p:spPr>
-        <p:txBody>
-          <a:bodyPr wrap="square" lIns="0" rIns="0" tIns="0" bIns="0" anchor="t">
-            <a:spAutoFit/>
-          </a:bodyPr>
-          <a:lstStyle/>
-          <a:p>
-            <a:pPr algn="l"/>
-            <a:r>
-              <a:rPr sz="800" b="1">
-                <a:solidFill>
-                  <a:srgbClr val="0A1820"/>
-                </a:solidFill>
-                <a:latin typeface="Aptos"/>
-              </a:rPr>
-              <a:t>DISCUSIÓN</a:t>
-            </a:r>
-          </a:p>
-        </p:txBody>
-      </p:sp>
-      <p:sp>
-        <p:nvSpPr>
-          <p:cNvPr id="5" name="TextBox 4"/>
-          <p:cNvSpPr txBox="1"/>
-          <p:nvPr/>
-        </p:nvSpPr>
-        <p:spPr>
-          <a:xfrm>
-            <a:off x="502920" y="713232"/>
-            <a:ext cx="7498079" cy="868680"/>
-          </a:xfrm>
-          <a:prstGeom prst="rect">
-            <a:avLst/>
-          </a:prstGeom>
-          <a:noFill/>
-        </p:spPr>
-        <p:txBody>
-          <a:bodyPr wrap="square" lIns="0" rIns="0" tIns="0" bIns="0" anchor="t">
-            <a:spAutoFit/>
-          </a:bodyPr>
-          <a:lstStyle/>
-          <a:p>
-            <a:pPr algn="l"/>
-            <a:r>
-              <a:rPr sz="3000" b="1">
-                <a:solidFill>
-                  <a:srgbClr val="0A1820"/>
-                </a:solidFill>
-                <a:latin typeface="Aptos Display"/>
-              </a:rPr>
-              <a:t>La prueba importante no es instalar Zabbix; es cerrar el ciclo operativo.</a:t>
-            </a:r>
-          </a:p>
-        </p:txBody>
-      </p:sp>
-      <p:sp>
-        <p:nvSpPr>
-          <p:cNvPr id="6" name="Rounded Rectangle 5"/>
+          <p:cNvPr id="23" name="Rectangle 22"/>
           <p:cNvSpPr/>
           <p:nvPr/>
         </p:nvSpPr>
         <p:spPr>
           <a:xfrm>
-            <a:off x="777240" y="1737360"/>
-            <a:ext cx="3246120" cy="1298448"/>
-          </a:xfrm>
-          <a:prstGeom prst="roundRect">
+            <a:off x="7744968" y="4041648"/>
+            <a:ext cx="3392424" cy="1517904"/>
+          </a:xfrm>
+          <a:prstGeom prst="rect">
             <a:avLst/>
           </a:prstGeom>
           <a:solidFill>
@@ -10210,16 +9461,156 @@
       </p:sp>
       <p:sp>
         <p:nvSpPr>
-          <p:cNvPr id="7" name="Rectangle 6"/>
+          <p:cNvPr id="2" name="TextBox 1"/>
+          <p:cNvSpPr txBox="1"/>
+          <p:nvPr/>
+        </p:nvSpPr>
+        <p:spPr>
+          <a:xfrm>
+            <a:off x="502920" y="384048"/>
+            <a:ext cx="384048" cy="201168"/>
+          </a:xfrm>
+          <a:prstGeom prst="rect">
+            <a:avLst/>
+          </a:prstGeom>
+          <a:noFill/>
+        </p:spPr>
+        <p:txBody>
+          <a:bodyPr wrap="square" lIns="0" rIns="0" tIns="0" bIns="0" anchor="t">
+            <a:spAutoFit/>
+          </a:bodyPr>
+          <a:lstStyle/>
+          <a:p>
+            <a:pPr algn="l"/>
+            <a:r>
+              <a:rPr sz="800" b="1">
+                <a:solidFill>
+                  <a:srgbClr val="22C5AA"/>
+                </a:solidFill>
+                <a:latin typeface="Aptos"/>
+              </a:rPr>
+              <a:t>16</a:t>
+            </a:r>
+          </a:p>
+        </p:txBody>
+      </p:sp>
+      <p:cxnSp>
+        <p:nvCxnSpPr>
+          <p:cNvPr id="3" name="Connector 2"/>
+          <p:cNvCxnSpPr/>
+          <p:nvPr/>
+        </p:nvCxnSpPr>
+        <p:spPr>
+          <a:xfrm>
+            <a:off x="941832" y="475488"/>
+            <a:ext cx="685800" cy="0"/>
+          </a:xfrm>
+          <a:prstGeom prst="line">
+            <a:avLst/>
+          </a:prstGeom>
+          <a:ln w="13970">
+            <a:solidFill>
+              <a:srgbClr val="22C5AA"/>
+            </a:solidFill>
+          </a:ln>
+        </p:spPr>
+        <p:style>
+          <a:lnRef idx="2">
+            <a:schemeClr val="accent1"/>
+          </a:lnRef>
+          <a:fillRef idx="0">
+            <a:schemeClr val="accent1"/>
+          </a:fillRef>
+          <a:effectRef idx="1">
+            <a:schemeClr val="accent1"/>
+          </a:effectRef>
+          <a:fontRef idx="minor">
+            <a:schemeClr val="tx1"/>
+          </a:fontRef>
+        </p:style>
+      </p:cxnSp>
+      <p:sp>
+        <p:nvSpPr>
+          <p:cNvPr id="4" name="TextBox 3"/>
+          <p:cNvSpPr txBox="1"/>
+          <p:nvPr/>
+        </p:nvSpPr>
+        <p:spPr>
+          <a:xfrm>
+            <a:off x="1737360" y="356616"/>
+            <a:ext cx="3108960" cy="274320"/>
+          </a:xfrm>
+          <a:prstGeom prst="rect">
+            <a:avLst/>
+          </a:prstGeom>
+          <a:noFill/>
+        </p:spPr>
+        <p:txBody>
+          <a:bodyPr wrap="square" lIns="0" rIns="0" tIns="0" bIns="0" anchor="t">
+            <a:spAutoFit/>
+          </a:bodyPr>
+          <a:lstStyle/>
+          <a:p>
+            <a:pPr algn="l"/>
+            <a:r>
+              <a:rPr sz="800" b="1">
+                <a:solidFill>
+                  <a:srgbClr val="22C5AA"/>
+                </a:solidFill>
+                <a:latin typeface="Aptos"/>
+              </a:rPr>
+              <a:t>DEMO EN VIVO</a:t>
+            </a:r>
+          </a:p>
+        </p:txBody>
+      </p:sp>
+      <p:sp>
+        <p:nvSpPr>
+          <p:cNvPr id="5" name="TextBox 4"/>
+          <p:cNvSpPr txBox="1"/>
+          <p:nvPr/>
+        </p:nvSpPr>
+        <p:spPr>
+          <a:xfrm>
+            <a:off x="502920" y="713232"/>
+            <a:ext cx="7498079" cy="868680"/>
+          </a:xfrm>
+          <a:prstGeom prst="rect">
+            <a:avLst/>
+          </a:prstGeom>
+          <a:noFill/>
+        </p:spPr>
+        <p:txBody>
+          <a:bodyPr wrap="square" lIns="0" rIns="0" tIns="0" bIns="0" anchor="t">
+            <a:spAutoFit/>
+          </a:bodyPr>
+          <a:lstStyle/>
+          <a:p>
+            <a:pPr algn="l"/>
+            <a:r>
+              <a:rPr sz="3000" b="1">
+                <a:solidFill>
+                  <a:srgbClr val="FFFFFF"/>
+                </a:solidFill>
+                <a:latin typeface="Aptos Display"/>
+              </a:rPr>
+              <a:t>La demo debe cerrar viendo tráfico, caída y alerta.</a:t>
+            </a:r>
+          </a:p>
+        </p:txBody>
+      </p:sp>
+      <p:sp>
+        <p:nvSpPr>
+          <p:cNvPr id="6" name="Rounded Rectangle 5"/>
           <p:cNvSpPr/>
           <p:nvPr/>
         </p:nvSpPr>
         <p:spPr>
           <a:xfrm>
-            <a:off x="777240" y="1737360"/>
-            <a:ext cx="73152" cy="1298448"/>
-          </a:xfrm>
-          <a:prstGeom prst="rect">
+            <a:off x="777240" y="1874519"/>
+            <a:ext cx="438912" cy="438912"/>
+          </a:xfrm>
+          <a:prstGeom prst="roundRect">
             <a:avLst/>
           </a:prstGeom>
           <a:solidFill>
@@ -10253,14 +9644,49 @@
       </p:sp>
       <p:sp>
         <p:nvSpPr>
+          <p:cNvPr id="7" name="TextBox 6"/>
+          <p:cNvSpPr txBox="1"/>
+          <p:nvPr/>
+        </p:nvSpPr>
+        <p:spPr>
+          <a:xfrm>
+            <a:off x="932688" y="1984248"/>
+            <a:ext cx="118872" cy="118872"/>
+          </a:xfrm>
+          <a:prstGeom prst="rect">
+            <a:avLst/>
+          </a:prstGeom>
+          <a:noFill/>
+        </p:spPr>
+        <p:txBody>
+          <a:bodyPr wrap="square" lIns="0" rIns="0" tIns="0" bIns="0" anchor="t">
+            <a:spAutoFit/>
+          </a:bodyPr>
+          <a:lstStyle/>
+          <a:p>
+            <a:pPr algn="ctr"/>
+            <a:r>
+              <a:rPr sz="1100" b="1">
+                <a:solidFill>
+                  <a:srgbClr val="0A1820"/>
+                </a:solidFill>
+                <a:latin typeface="Aptos"/>
+              </a:rPr>
+              <a:t>1</a:t>
+            </a:r>
+          </a:p>
+        </p:txBody>
+      </p:sp>
+      <p:sp>
+        <p:nvSpPr>
           <p:cNvPr id="8" name="TextBox 7"/>
           <p:cNvSpPr txBox="1"/>
           <p:nvPr/>
         </p:nvSpPr>
         <p:spPr>
           <a:xfrm>
-            <a:off x="1005840" y="1883664"/>
-            <a:ext cx="2862072" cy="219456"/>
+            <a:off x="1417320" y="1911095"/>
+            <a:ext cx="1920240" cy="201168"/>
           </a:xfrm>
           <a:prstGeom prst="rect">
             <a:avLst/>
@@ -10277,11 +9703,11 @@
             <a:r>
               <a:rPr sz="1200" b="1">
                 <a:solidFill>
-                  <a:srgbClr val="22C5AA"/>
-                </a:solidFill>
-                <a:latin typeface="Aptos"/>
-              </a:rPr>
-              <a:t>Qué probamos</a:t>
+                  <a:srgbClr val="FFFFFF"/>
+                </a:solidFill>
+                <a:latin typeface="Aptos"/>
+              </a:rPr>
+              <a:t>Abrir portal</a:t>
             </a:r>
           </a:p>
         </p:txBody>
@@ -10294,8 +9720,8 @@
         </p:nvSpPr>
         <p:spPr>
           <a:xfrm>
-            <a:off x="1005840" y="2167128"/>
-            <a:ext cx="2862072" cy="786383"/>
+            <a:off x="3246120" y="1938527"/>
+            <a:ext cx="6766560" cy="164592"/>
           </a:xfrm>
           <a:prstGeom prst="rect">
             <a:avLst/>
@@ -10310,13 +9736,13 @@
           <a:p>
             <a:pPr algn="l"/>
             <a:r>
-              <a:rPr sz="1100" b="0">
-                <a:solidFill>
-                  <a:srgbClr val="0A1820"/>
-                </a:solidFill>
-                <a:latin typeface="Aptos"/>
-              </a:rPr>
-              <a:t>Carga real con Artillery, caída controlada, detección en Zabbix, correo MailHog, recuperación y métricas históricas.</a:t>
+              <a:rPr sz="1050" b="0">
+                <a:solidFill>
+                  <a:srgbClr val="C8D8E1"/>
+                </a:solidFill>
+                <a:latin typeface="Aptos"/>
+              </a:rPr>
+              <a:t>https://web-zabbix.negociocontigo.com</a:t>
             </a:r>
           </a:p>
         </p:txBody>
@@ -10329,55 +9755,10 @@
         </p:nvSpPr>
         <p:spPr>
           <a:xfrm>
-            <a:off x="4434840" y="1737360"/>
-            <a:ext cx="3246120" cy="1298448"/>
+            <a:off x="777240" y="2743200"/>
+            <a:ext cx="438912" cy="438912"/>
           </a:xfrm>
           <a:prstGeom prst="roundRect">
-            <a:avLst/>
-          </a:prstGeom>
-          <a:solidFill>
-            <a:srgbClr val="FFFFFF"/>
-          </a:solidFill>
-          <a:ln w="10160">
-            <a:solidFill>
-              <a:srgbClr val="BFCCD6"/>
-            </a:solidFill>
-          </a:ln>
-        </p:spPr>
-        <p:style>
-          <a:lnRef idx="1">
-            <a:schemeClr val="accent1"/>
-          </a:lnRef>
-          <a:fillRef idx="3">
-            <a:schemeClr val="accent1"/>
-          </a:fillRef>
-          <a:effectRef idx="2">
-            <a:schemeClr val="accent1"/>
-          </a:effectRef>
-          <a:fontRef idx="minor">
-            <a:schemeClr val="lt1"/>
-          </a:fontRef>
-        </p:style>
-        <p:txBody>
-          <a:bodyPr rtlCol="0" anchor="ctr"/>
-          <a:lstStyle/>
-          <a:p>
-            <a:pPr algn="ctr"/>
-          </a:p>
-        </p:txBody>
-      </p:sp>
-      <p:sp>
-        <p:nvSpPr>
-          <p:cNvPr id="11" name="Rectangle 10"/>
-          <p:cNvSpPr/>
-          <p:nvPr/>
-        </p:nvSpPr>
-        <p:spPr>
-          <a:xfrm>
-            <a:off x="4434840" y="1737360"/>
-            <a:ext cx="73152" cy="1298448"/>
-          </a:xfrm>
-          <a:prstGeom prst="rect">
             <a:avLst/>
           </a:prstGeom>
           <a:solidFill>
@@ -10411,14 +9792,49 @@
       </p:sp>
       <p:sp>
         <p:nvSpPr>
+          <p:cNvPr id="11" name="TextBox 10"/>
+          <p:cNvSpPr txBox="1"/>
+          <p:nvPr/>
+        </p:nvSpPr>
+        <p:spPr>
+          <a:xfrm>
+            <a:off x="932688" y="2852928"/>
+            <a:ext cx="118872" cy="118872"/>
+          </a:xfrm>
+          <a:prstGeom prst="rect">
+            <a:avLst/>
+          </a:prstGeom>
+          <a:noFill/>
+        </p:spPr>
+        <p:txBody>
+          <a:bodyPr wrap="square" lIns="0" rIns="0" tIns="0" bIns="0" anchor="t">
+            <a:spAutoFit/>
+          </a:bodyPr>
+          <a:lstStyle/>
+          <a:p>
+            <a:pPr algn="ctr"/>
+            <a:r>
+              <a:rPr sz="1100" b="1">
+                <a:solidFill>
+                  <a:srgbClr val="0A1820"/>
+                </a:solidFill>
+                <a:latin typeface="Aptos"/>
+              </a:rPr>
+              <a:t>2</a:t>
+            </a:r>
+          </a:p>
+        </p:txBody>
+      </p:sp>
+      <p:sp>
+        <p:nvSpPr>
           <p:cNvPr id="12" name="TextBox 11"/>
           <p:cNvSpPr txBox="1"/>
           <p:nvPr/>
         </p:nvSpPr>
         <p:spPr>
           <a:xfrm>
-            <a:off x="4663440" y="1883664"/>
-            <a:ext cx="2862072" cy="219456"/>
+            <a:off x="1417320" y="2779776"/>
+            <a:ext cx="1920240" cy="201168"/>
           </a:xfrm>
           <a:prstGeom prst="rect">
             <a:avLst/>
@@ -10435,11 +9851,11 @@
             <a:r>
               <a:rPr sz="1200" b="1">
                 <a:solidFill>
-                  <a:srgbClr val="38BDF8"/>
-                </a:solidFill>
-                <a:latin typeface="Aptos"/>
-              </a:rPr>
-              <a:t>Qué aprendimos</a:t>
+                  <a:srgbClr val="FFFFFF"/>
+                </a:solidFill>
+                <a:latin typeface="Aptos"/>
+              </a:rPr>
+              <a:t>Generar carga</a:t>
             </a:r>
           </a:p>
         </p:txBody>
@@ -10452,8 +9868,8 @@
         </p:nvSpPr>
         <p:spPr>
           <a:xfrm>
-            <a:off x="4663440" y="2167128"/>
-            <a:ext cx="2862072" cy="786383"/>
+            <a:off x="3246120" y="2807208"/>
+            <a:ext cx="6766560" cy="164592"/>
           </a:xfrm>
           <a:prstGeom prst="rect">
             <a:avLst/>
@@ -10468,13 +9884,13 @@
           <a:p>
             <a:pPr algn="l"/>
             <a:r>
-              <a:rPr sz="1100" b="0">
-                <a:solidFill>
-                  <a:srgbClr val="0A1820"/>
-                </a:solidFill>
-                <a:latin typeface="Aptos"/>
-              </a:rPr>
-              <a:t>Monitorear no es solo saber si un contenedor vive: también hay que medir servicio, backend, DB, SLO y rutas bajo presión.</a:t>
+              <a:rPr sz="1050" b="0">
+                <a:solidFill>
+                  <a:srgbClr val="C8D8E1"/>
+                </a:solidFill>
+                <a:latin typeface="Aptos"/>
+              </a:rPr>
+              <a:t>artillery run tests/artillery-live-demo.yml</a:t>
             </a:r>
           </a:p>
         </p:txBody>
@@ -10487,55 +9903,10 @@
         </p:nvSpPr>
         <p:spPr>
           <a:xfrm>
-            <a:off x="8092440" y="1737360"/>
-            <a:ext cx="3246120" cy="1298448"/>
+            <a:off x="777240" y="3611879"/>
+            <a:ext cx="438912" cy="438912"/>
           </a:xfrm>
           <a:prstGeom prst="roundRect">
-            <a:avLst/>
-          </a:prstGeom>
-          <a:solidFill>
-            <a:srgbClr val="FFFFFF"/>
-          </a:solidFill>
-          <a:ln w="10160">
-            <a:solidFill>
-              <a:srgbClr val="BFCCD6"/>
-            </a:solidFill>
-          </a:ln>
-        </p:spPr>
-        <p:style>
-          <a:lnRef idx="1">
-            <a:schemeClr val="accent1"/>
-          </a:lnRef>
-          <a:fillRef idx="3">
-            <a:schemeClr val="accent1"/>
-          </a:fillRef>
-          <a:effectRef idx="2">
-            <a:schemeClr val="accent1"/>
-          </a:effectRef>
-          <a:fontRef idx="minor">
-            <a:schemeClr val="lt1"/>
-          </a:fontRef>
-        </p:style>
-        <p:txBody>
-          <a:bodyPr rtlCol="0" anchor="ctr"/>
-          <a:lstStyle/>
-          <a:p>
-            <a:pPr algn="ctr"/>
-          </a:p>
-        </p:txBody>
-      </p:sp>
-      <p:sp>
-        <p:nvSpPr>
-          <p:cNvPr id="15" name="Rectangle 14"/>
-          <p:cNvSpPr/>
-          <p:nvPr/>
-        </p:nvSpPr>
-        <p:spPr>
-          <a:xfrm>
-            <a:off x="8092440" y="1737360"/>
-            <a:ext cx="73152" cy="1298448"/>
-          </a:xfrm>
-          <a:prstGeom prst="rect">
             <a:avLst/>
           </a:prstGeom>
           <a:solidFill>
@@ -10569,14 +9940,49 @@
       </p:sp>
       <p:sp>
         <p:nvSpPr>
+          <p:cNvPr id="15" name="TextBox 14"/>
+          <p:cNvSpPr txBox="1"/>
+          <p:nvPr/>
+        </p:nvSpPr>
+        <p:spPr>
+          <a:xfrm>
+            <a:off x="932688" y="3721607"/>
+            <a:ext cx="118872" cy="118872"/>
+          </a:xfrm>
+          <a:prstGeom prst="rect">
+            <a:avLst/>
+          </a:prstGeom>
+          <a:noFill/>
+        </p:spPr>
+        <p:txBody>
+          <a:bodyPr wrap="square" lIns="0" rIns="0" tIns="0" bIns="0" anchor="t">
+            <a:spAutoFit/>
+          </a:bodyPr>
+          <a:lstStyle/>
+          <a:p>
+            <a:pPr algn="ctr"/>
+            <a:r>
+              <a:rPr sz="1100" b="1">
+                <a:solidFill>
+                  <a:srgbClr val="0A1820"/>
+                </a:solidFill>
+                <a:latin typeface="Aptos"/>
+              </a:rPr>
+              <a:t>3</a:t>
+            </a:r>
+          </a:p>
+        </p:txBody>
+      </p:sp>
+      <p:sp>
+        <p:nvSpPr>
           <p:cNvPr id="16" name="TextBox 15"/>
           <p:cNvSpPr txBox="1"/>
           <p:nvPr/>
         </p:nvSpPr>
         <p:spPr>
           <a:xfrm>
-            <a:off x="8321040" y="1883664"/>
-            <a:ext cx="2862072" cy="219456"/>
+            <a:off x="1417320" y="3648456"/>
+            <a:ext cx="1920240" cy="201168"/>
           </a:xfrm>
           <a:prstGeom prst="rect">
             <a:avLst/>
@@ -10593,11 +9999,11 @@
             <a:r>
               <a:rPr sz="1200" b="1">
                 <a:solidFill>
-                  <a:srgbClr val="F59E0B"/>
-                </a:solidFill>
-                <a:latin typeface="Aptos"/>
-              </a:rPr>
-              <a:t>Limitación honesta</a:t>
+                  <a:srgbClr val="FFFFFF"/>
+                </a:solidFill>
+                <a:latin typeface="Aptos"/>
+              </a:rPr>
+              <a:t>Simular caída</a:t>
             </a:r>
           </a:p>
         </p:txBody>
@@ -10610,8 +10016,8 @@
         </p:nvSpPr>
         <p:spPr>
           <a:xfrm>
-            <a:off x="8321040" y="2167128"/>
-            <a:ext cx="2862072" cy="786383"/>
+            <a:off x="3246120" y="3675887"/>
+            <a:ext cx="6766560" cy="164592"/>
           </a:xfrm>
           <a:prstGeom prst="rect">
             <a:avLst/>
@@ -10626,27 +10032,105 @@
           <a:p>
             <a:pPr algn="l"/>
             <a:r>
-              <a:rPr sz="1100" b="0">
+              <a:rPr sz="1050" b="0">
+                <a:solidFill>
+                  <a:srgbClr val="C8D8E1"/>
+                </a:solidFill>
+                <a:latin typeface="Aptos"/>
+              </a:rPr>
+              <a:t>docker compose -f docker-compose.vps.yml stop web-service</a:t>
+            </a:r>
+          </a:p>
+        </p:txBody>
+      </p:sp>
+      <p:sp>
+        <p:nvSpPr>
+          <p:cNvPr id="18" name="Rounded Rectangle 17"/>
+          <p:cNvSpPr/>
+          <p:nvPr/>
+        </p:nvSpPr>
+        <p:spPr>
+          <a:xfrm>
+            <a:off x="777240" y="4480559"/>
+            <a:ext cx="438912" cy="438912"/>
+          </a:xfrm>
+          <a:prstGeom prst="roundRect">
+            <a:avLst/>
+          </a:prstGeom>
+          <a:solidFill>
+            <a:srgbClr val="A3E635"/>
+          </a:solidFill>
+          <a:ln>
+            <a:noFill/>
+          </a:ln>
+        </p:spPr>
+        <p:style>
+          <a:lnRef idx="1">
+            <a:schemeClr val="accent1"/>
+          </a:lnRef>
+          <a:fillRef idx="3">
+            <a:schemeClr val="accent1"/>
+          </a:fillRef>
+          <a:effectRef idx="2">
+            <a:schemeClr val="accent1"/>
+          </a:effectRef>
+          <a:fontRef idx="minor">
+            <a:schemeClr val="lt1"/>
+          </a:fontRef>
+        </p:style>
+        <p:txBody>
+          <a:bodyPr rtlCol="0" anchor="ctr"/>
+          <a:lstStyle/>
+          <a:p>
+            <a:pPr algn="ctr"/>
+          </a:p>
+        </p:txBody>
+      </p:sp>
+      <p:sp>
+        <p:nvSpPr>
+          <p:cNvPr id="19" name="TextBox 18"/>
+          <p:cNvSpPr txBox="1"/>
+          <p:nvPr/>
+        </p:nvSpPr>
+        <p:spPr>
+          <a:xfrm>
+            <a:off x="932688" y="4590288"/>
+            <a:ext cx="118872" cy="118872"/>
+          </a:xfrm>
+          <a:prstGeom prst="rect">
+            <a:avLst/>
+          </a:prstGeom>
+          <a:noFill/>
+        </p:spPr>
+        <p:txBody>
+          <a:bodyPr wrap="square" lIns="0" rIns="0" tIns="0" bIns="0" anchor="t">
+            <a:spAutoFit/>
+          </a:bodyPr>
+          <a:lstStyle/>
+          <a:p>
+            <a:pPr algn="ctr"/>
+            <a:r>
+              <a:rPr sz="1100" b="1">
                 <a:solidFill>
                   <a:srgbClr val="0A1820"/>
                 </a:solidFill>
                 <a:latin typeface="Aptos"/>
               </a:rPr>
-              <a:t>El SLO del portal es de laboratorio y vive en memoria del proceso; Zabbix conserva el histórico real de eventos e items.</a:t>
-            </a:r>
-          </a:p>
-        </p:txBody>
-      </p:sp>
-      <p:sp>
-        <p:nvSpPr>
-          <p:cNvPr id="18" name="TextBox 17"/>
-          <p:cNvSpPr txBox="1"/>
-          <p:nvPr/>
-        </p:nvSpPr>
-        <p:spPr>
-          <a:xfrm>
-            <a:off x="822960" y="3822191"/>
-            <a:ext cx="1828800" cy="228600"/>
+              <a:t>4</a:t>
+            </a:r>
+          </a:p>
+        </p:txBody>
+      </p:sp>
+      <p:sp>
+        <p:nvSpPr>
+          <p:cNvPr id="20" name="TextBox 19"/>
+          <p:cNvSpPr txBox="1"/>
+          <p:nvPr/>
+        </p:nvSpPr>
+        <p:spPr>
+          <a:xfrm>
+            <a:off x="1417320" y="4517136"/>
+            <a:ext cx="1920240" cy="201168"/>
           </a:xfrm>
           <a:prstGeom prst="rect">
             <a:avLst/>
@@ -10661,27 +10145,27 @@
           <a:p>
             <a:pPr algn="l"/>
             <a:r>
-              <a:rPr sz="1100" b="1">
-                <a:solidFill>
-                  <a:srgbClr val="5C6975"/>
-                </a:solidFill>
-                <a:latin typeface="Aptos"/>
-              </a:rPr>
-              <a:t>Conclusión</a:t>
-            </a:r>
-          </a:p>
-        </p:txBody>
-      </p:sp>
-      <p:sp>
-        <p:nvSpPr>
-          <p:cNvPr id="19" name="TextBox 18"/>
-          <p:cNvSpPr txBox="1"/>
-          <p:nvPr/>
-        </p:nvSpPr>
-        <p:spPr>
-          <a:xfrm>
-            <a:off x="822960" y="4224528"/>
-            <a:ext cx="9875520" cy="749808"/>
+              <a:rPr sz="1200" b="1">
+                <a:solidFill>
+                  <a:srgbClr val="FFFFFF"/>
+                </a:solidFill>
+                <a:latin typeface="Aptos"/>
+              </a:rPr>
+              <a:t>Validar cierre</a:t>
+            </a:r>
+          </a:p>
+        </p:txBody>
+      </p:sp>
+      <p:sp>
+        <p:nvSpPr>
+          <p:cNvPr id="21" name="TextBox 20"/>
+          <p:cNvSpPr txBox="1"/>
+          <p:nvPr/>
+        </p:nvSpPr>
+        <p:spPr>
+          <a:xfrm>
+            <a:off x="3246120" y="4544568"/>
+            <a:ext cx="6766560" cy="164592"/>
           </a:xfrm>
           <a:prstGeom prst="rect">
             <a:avLst/>
@@ -10696,20 +10180,79 @@
           <a:p>
             <a:pPr algn="l"/>
             <a:r>
-              <a:rPr sz="2400" b="1">
-                <a:solidFill>
-                  <a:srgbClr val="0A1820"/>
-                </a:solidFill>
-                <a:latin typeface="Aptos"/>
-              </a:rPr>
-              <a:t>El proyecto cumple los requisitos base y los amplía con una aplicación real observable: frontend, backend, MariaDB, /metrics, SLO, analíticas, Artillery y matriz 13/13.</a:t>
+              <a:rPr sz="1050" b="0">
+                <a:solidFill>
+                  <a:srgbClr val="C8D8E1"/>
+                </a:solidFill>
+                <a:latin typeface="Aptos"/>
+              </a:rPr>
+              <a:t>bash scripts/audit-project.sh</a:t>
+            </a:r>
+          </a:p>
+        </p:txBody>
+      </p:sp>
+      <p:pic>
+        <p:nvPicPr>
+          <p:cNvPr id="22" name="Picture 21" descr="05_mailhog_alertas.png"/>
+          <p:cNvPicPr>
+            <a:picLocks noChangeAspect="1"/>
+          </p:cNvPicPr>
+          <p:nvPr/>
+        </p:nvPicPr>
+        <p:blipFill>
+          <a:blip r:embed="rId2"/>
+          <a:stretch>
+            <a:fillRect/>
+          </a:stretch>
+        </p:blipFill>
+        <p:spPr>
+          <a:xfrm>
+            <a:off x="7772400" y="4069080"/>
+            <a:ext cx="3337560" cy="1463040"/>
+          </a:xfrm>
+          <a:prstGeom prst="rect">
+            <a:avLst/>
+          </a:prstGeom>
+        </p:spPr>
+      </p:pic>
+      <p:sp>
+        <p:nvSpPr>
+          <p:cNvPr id="24" name="TextBox 23"/>
+          <p:cNvSpPr txBox="1"/>
+          <p:nvPr/>
+        </p:nvSpPr>
+        <p:spPr>
+          <a:xfrm>
+            <a:off x="822960" y="5715000"/>
+            <a:ext cx="6583680" cy="384048"/>
+          </a:xfrm>
+          <a:prstGeom prst="rect">
+            <a:avLst/>
+          </a:prstGeom>
+          <a:noFill/>
+        </p:spPr>
+        <p:txBody>
+          <a:bodyPr wrap="square" lIns="0" rIns="0" tIns="0" bIns="0" anchor="t">
+            <a:spAutoFit/>
+          </a:bodyPr>
+          <a:lstStyle/>
+          <a:p>
+            <a:pPr algn="l"/>
+            <a:r>
+              <a:rPr sz="1800" b="1">
+                <a:solidFill>
+                  <a:srgbClr val="22C5AA"/>
+                </a:solidFill>
+                <a:latin typeface="Aptos"/>
+              </a:rPr>
+              <a:t>Cierre: Zabbix detecta, MailHog muestra, Artillery presiona y la auditoría confirma.</a:t>
             </a:r>
           </a:p>
         </p:txBody>
       </p:sp>
       <p:cxnSp>
         <p:nvCxnSpPr>
-          <p:cNvPr id="20" name="Connector 19"/>
+          <p:cNvPr id="25" name="Connector 24"/>
           <p:cNvCxnSpPr/>
           <p:nvPr/>
         </p:nvCxnSpPr>
@@ -10723,7 +10266,7 @@
           </a:prstGeom>
           <a:ln w="8890">
             <a:solidFill>
-              <a:srgbClr val="BFCCD6"/>
+              <a:srgbClr val="2A424D"/>
             </a:solidFill>
           </a:ln>
         </p:spPr>
@@ -10744,7 +10287,7 @@
       </p:cxnSp>
       <p:sp>
         <p:nvSpPr>
-          <p:cNvPr id="21" name="TextBox 20"/>
+          <p:cNvPr id="26" name="TextBox 25"/>
           <p:cNvSpPr txBox="1"/>
           <p:nvPr/>
         </p:nvSpPr>
@@ -10768,7 +10311,7 @@
             <a:r>
               <a:rPr sz="750" b="0">
                 <a:solidFill>
-                  <a:srgbClr val="5C6975"/>
+                  <a:srgbClr val="8E9FAA"/>
                 </a:solidFill>
                 <a:latin typeface="Aptos"/>
               </a:rPr>
@@ -10779,7 +10322,7 @@
       </p:sp>
       <p:sp>
         <p:nvSpPr>
-          <p:cNvPr id="22" name="TextBox 21"/>
+          <p:cNvPr id="27" name="TextBox 26"/>
           <p:cNvSpPr txBox="1"/>
           <p:nvPr/>
         </p:nvSpPr>
@@ -10803,7 +10346,7 @@
             <a:r>
               <a:rPr sz="750" b="0">
                 <a:solidFill>
-                  <a:srgbClr val="5C6975"/>
+                  <a:srgbClr val="8E9FAA"/>
                 </a:solidFill>
                 <a:latin typeface="Aptos"/>
               </a:rPr>
@@ -13149,6 +12692,1395 @@
     <p:bg>
       <p:bgPr>
         <a:solidFill>
+          <a:srgbClr val="F7FAF7"/>
+        </a:solidFill>
+        <a:effectLst/>
+      </p:bgPr>
+    </p:bg>
+    <p:spTree>
+      <p:nvGrpSpPr>
+        <p:cNvPr id="1" name=""/>
+        <p:cNvGrpSpPr/>
+        <p:nvPr/>
+      </p:nvGrpSpPr>
+      <p:grpSpPr/>
+      <p:sp>
+        <p:nvSpPr>
+          <p:cNvPr id="2" name="TextBox 1"/>
+          <p:cNvSpPr txBox="1"/>
+          <p:nvPr/>
+        </p:nvSpPr>
+        <p:spPr>
+          <a:xfrm>
+            <a:off x="502920" y="384048"/>
+            <a:ext cx="384048" cy="201168"/>
+          </a:xfrm>
+          <a:prstGeom prst="rect">
+            <a:avLst/>
+          </a:prstGeom>
+          <a:noFill/>
+        </p:spPr>
+        <p:txBody>
+          <a:bodyPr wrap="square" lIns="0" rIns="0" tIns="0" bIns="0" anchor="t">
+            <a:spAutoFit/>
+          </a:bodyPr>
+          <a:lstStyle/>
+          <a:p>
+            <a:pPr algn="l"/>
+            <a:r>
+              <a:rPr sz="800" b="1">
+                <a:solidFill>
+                  <a:srgbClr val="0A1820"/>
+                </a:solidFill>
+                <a:latin typeface="Aptos"/>
+              </a:rPr>
+              <a:t>03</a:t>
+            </a:r>
+          </a:p>
+        </p:txBody>
+      </p:sp>
+      <p:cxnSp>
+        <p:nvCxnSpPr>
+          <p:cNvPr id="3" name="Connector 2"/>
+          <p:cNvCxnSpPr/>
+          <p:nvPr/>
+        </p:nvCxnSpPr>
+        <p:spPr>
+          <a:xfrm>
+            <a:off x="941832" y="475488"/>
+            <a:ext cx="685800" cy="0"/>
+          </a:xfrm>
+          <a:prstGeom prst="line">
+            <a:avLst/>
+          </a:prstGeom>
+          <a:ln w="13970">
+            <a:solidFill>
+              <a:srgbClr val="0A1820"/>
+            </a:solidFill>
+          </a:ln>
+        </p:spPr>
+        <p:style>
+          <a:lnRef idx="2">
+            <a:schemeClr val="accent1"/>
+          </a:lnRef>
+          <a:fillRef idx="0">
+            <a:schemeClr val="accent1"/>
+          </a:fillRef>
+          <a:effectRef idx="1">
+            <a:schemeClr val="accent1"/>
+          </a:effectRef>
+          <a:fontRef idx="minor">
+            <a:schemeClr val="tx1"/>
+          </a:fontRef>
+        </p:style>
+      </p:cxnSp>
+      <p:sp>
+        <p:nvSpPr>
+          <p:cNvPr id="4" name="TextBox 3"/>
+          <p:cNvSpPr txBox="1"/>
+          <p:nvPr/>
+        </p:nvSpPr>
+        <p:spPr>
+          <a:xfrm>
+            <a:off x="1737360" y="356616"/>
+            <a:ext cx="3108960" cy="274320"/>
+          </a:xfrm>
+          <a:prstGeom prst="rect">
+            <a:avLst/>
+          </a:prstGeom>
+          <a:noFill/>
+        </p:spPr>
+        <p:txBody>
+          <a:bodyPr wrap="square" lIns="0" rIns="0" tIns="0" bIns="0" anchor="t">
+            <a:spAutoFit/>
+          </a:bodyPr>
+          <a:lstStyle/>
+          <a:p>
+            <a:pPr algn="l"/>
+            <a:r>
+              <a:rPr sz="800" b="1">
+                <a:solidFill>
+                  <a:srgbClr val="0A1820"/>
+                </a:solidFill>
+                <a:latin typeface="Aptos"/>
+              </a:rPr>
+              <a:t>ALTERNATIVAS</a:t>
+            </a:r>
+          </a:p>
+        </p:txBody>
+      </p:sp>
+      <p:sp>
+        <p:nvSpPr>
+          <p:cNvPr id="5" name="TextBox 4"/>
+          <p:cNvSpPr txBox="1"/>
+          <p:nvPr/>
+        </p:nvSpPr>
+        <p:spPr>
+          <a:xfrm>
+            <a:off x="502920" y="713232"/>
+            <a:ext cx="7498079" cy="868680"/>
+          </a:xfrm>
+          <a:prstGeom prst="rect">
+            <a:avLst/>
+          </a:prstGeom>
+          <a:noFill/>
+        </p:spPr>
+        <p:txBody>
+          <a:bodyPr wrap="square" lIns="0" rIns="0" tIns="0" bIns="0" anchor="t">
+            <a:spAutoFit/>
+          </a:bodyPr>
+          <a:lstStyle/>
+          <a:p>
+            <a:pPr algn="l"/>
+            <a:r>
+              <a:rPr sz="3000" b="1">
+                <a:solidFill>
+                  <a:srgbClr val="0A1820"/>
+                </a:solidFill>
+                <a:latin typeface="Aptos Display"/>
+              </a:rPr>
+              <a:t>Zabbix se eligió por equilibrio entre control, alertas y despliegue local.</a:t>
+            </a:r>
+          </a:p>
+        </p:txBody>
+      </p:sp>
+      <p:sp>
+        <p:nvSpPr>
+          <p:cNvPr id="6" name="Rounded Rectangle 5"/>
+          <p:cNvSpPr/>
+          <p:nvPr/>
+        </p:nvSpPr>
+        <p:spPr>
+          <a:xfrm>
+            <a:off x="749808" y="1572768"/>
+            <a:ext cx="2148840" cy="658368"/>
+          </a:xfrm>
+          <a:prstGeom prst="roundRect">
+            <a:avLst/>
+          </a:prstGeom>
+          <a:solidFill>
+            <a:srgbClr val="FFFFFF"/>
+          </a:solidFill>
+          <a:ln w="10160">
+            <a:solidFill>
+              <a:srgbClr val="BFCCD6"/>
+            </a:solidFill>
+          </a:ln>
+        </p:spPr>
+        <p:style>
+          <a:lnRef idx="1">
+            <a:schemeClr val="accent1"/>
+          </a:lnRef>
+          <a:fillRef idx="3">
+            <a:schemeClr val="accent1"/>
+          </a:fillRef>
+          <a:effectRef idx="2">
+            <a:schemeClr val="accent1"/>
+          </a:effectRef>
+          <a:fontRef idx="minor">
+            <a:schemeClr val="lt1"/>
+          </a:fontRef>
+        </p:style>
+        <p:txBody>
+          <a:bodyPr rtlCol="0" anchor="ctr"/>
+          <a:lstStyle/>
+          <a:p>
+            <a:pPr algn="ctr"/>
+          </a:p>
+        </p:txBody>
+      </p:sp>
+      <p:sp>
+        <p:nvSpPr>
+          <p:cNvPr id="7" name="TextBox 6"/>
+          <p:cNvSpPr txBox="1"/>
+          <p:nvPr/>
+        </p:nvSpPr>
+        <p:spPr>
+          <a:xfrm>
+            <a:off x="932688" y="1719072"/>
+            <a:ext cx="1755648" cy="210312"/>
+          </a:xfrm>
+          <a:prstGeom prst="rect">
+            <a:avLst/>
+          </a:prstGeom>
+          <a:noFill/>
+        </p:spPr>
+        <p:txBody>
+          <a:bodyPr wrap="square" lIns="0" rIns="0" tIns="0" bIns="0" anchor="t">
+            <a:spAutoFit/>
+          </a:bodyPr>
+          <a:lstStyle/>
+          <a:p>
+            <a:pPr algn="l"/>
+            <a:r>
+              <a:rPr sz="1200" b="1">
+                <a:solidFill>
+                  <a:srgbClr val="F59E0B"/>
+                </a:solidFill>
+                <a:latin typeface="Aptos"/>
+              </a:rPr>
+              <a:t>Nagios Core</a:t>
+            </a:r>
+          </a:p>
+        </p:txBody>
+      </p:sp>
+      <p:sp>
+        <p:nvSpPr>
+          <p:cNvPr id="8" name="Rounded Rectangle 7"/>
+          <p:cNvSpPr/>
+          <p:nvPr/>
+        </p:nvSpPr>
+        <p:spPr>
+          <a:xfrm>
+            <a:off x="3090672" y="1572768"/>
+            <a:ext cx="3566160" cy="658368"/>
+          </a:xfrm>
+          <a:prstGeom prst="roundRect">
+            <a:avLst/>
+          </a:prstGeom>
+          <a:solidFill>
+            <a:srgbClr val="F5F8FA"/>
+          </a:solidFill>
+          <a:ln w="10160">
+            <a:solidFill>
+              <a:srgbClr val="BFCCD6"/>
+            </a:solidFill>
+          </a:ln>
+        </p:spPr>
+        <p:style>
+          <a:lnRef idx="1">
+            <a:schemeClr val="accent1"/>
+          </a:lnRef>
+          <a:fillRef idx="3">
+            <a:schemeClr val="accent1"/>
+          </a:fillRef>
+          <a:effectRef idx="2">
+            <a:schemeClr val="accent1"/>
+          </a:effectRef>
+          <a:fontRef idx="minor">
+            <a:schemeClr val="lt1"/>
+          </a:fontRef>
+        </p:style>
+        <p:txBody>
+          <a:bodyPr rtlCol="0" anchor="ctr"/>
+          <a:lstStyle/>
+          <a:p>
+            <a:pPr algn="ctr"/>
+          </a:p>
+        </p:txBody>
+      </p:sp>
+      <p:sp>
+        <p:nvSpPr>
+          <p:cNvPr id="9" name="TextBox 8"/>
+          <p:cNvSpPr txBox="1"/>
+          <p:nvPr/>
+        </p:nvSpPr>
+        <p:spPr>
+          <a:xfrm>
+            <a:off x="3273552" y="1700784"/>
+            <a:ext cx="3154680" cy="256032"/>
+          </a:xfrm>
+          <a:prstGeom prst="rect">
+            <a:avLst/>
+          </a:prstGeom>
+          <a:noFill/>
+        </p:spPr>
+        <p:txBody>
+          <a:bodyPr wrap="square" lIns="0" rIns="0" tIns="0" bIns="0" anchor="t">
+            <a:spAutoFit/>
+          </a:bodyPr>
+          <a:lstStyle/>
+          <a:p>
+            <a:pPr algn="l"/>
+            <a:r>
+              <a:rPr sz="1050" b="0">
+                <a:solidFill>
+                  <a:srgbClr val="0A1820"/>
+                </a:solidFill>
+                <a:latin typeface="Aptos"/>
+              </a:rPr>
+              <a:t>Checks maduros y muchos plugins.</a:t>
+            </a:r>
+          </a:p>
+        </p:txBody>
+      </p:sp>
+      <p:sp>
+        <p:nvSpPr>
+          <p:cNvPr id="10" name="Rounded Rectangle 9"/>
+          <p:cNvSpPr/>
+          <p:nvPr/>
+        </p:nvSpPr>
+        <p:spPr>
+          <a:xfrm>
+            <a:off x="6903720" y="1572768"/>
+            <a:ext cx="4160520" cy="658368"/>
+          </a:xfrm>
+          <a:prstGeom prst="roundRect">
+            <a:avLst/>
+          </a:prstGeom>
+          <a:solidFill>
+            <a:srgbClr val="FAF7F4"/>
+          </a:solidFill>
+          <a:ln w="10160">
+            <a:solidFill>
+              <a:srgbClr val="BFCCD6"/>
+            </a:solidFill>
+          </a:ln>
+        </p:spPr>
+        <p:style>
+          <a:lnRef idx="1">
+            <a:schemeClr val="accent1"/>
+          </a:lnRef>
+          <a:fillRef idx="3">
+            <a:schemeClr val="accent1"/>
+          </a:fillRef>
+          <a:effectRef idx="2">
+            <a:schemeClr val="accent1"/>
+          </a:effectRef>
+          <a:fontRef idx="minor">
+            <a:schemeClr val="lt1"/>
+          </a:fontRef>
+        </p:style>
+        <p:txBody>
+          <a:bodyPr rtlCol="0" anchor="ctr"/>
+          <a:lstStyle/>
+          <a:p>
+            <a:pPr algn="ctr"/>
+          </a:p>
+        </p:txBody>
+      </p:sp>
+      <p:sp>
+        <p:nvSpPr>
+          <p:cNvPr id="11" name="TextBox 10"/>
+          <p:cNvSpPr txBox="1"/>
+          <p:nvPr/>
+        </p:nvSpPr>
+        <p:spPr>
+          <a:xfrm>
+            <a:off x="7086600" y="1700784"/>
+            <a:ext cx="3703320" cy="256032"/>
+          </a:xfrm>
+          <a:prstGeom prst="rect">
+            <a:avLst/>
+          </a:prstGeom>
+          <a:noFill/>
+        </p:spPr>
+        <p:txBody>
+          <a:bodyPr wrap="square" lIns="0" rIns="0" tIns="0" bIns="0" anchor="t">
+            <a:spAutoFit/>
+          </a:bodyPr>
+          <a:lstStyle/>
+          <a:p>
+            <a:pPr algn="l"/>
+            <a:r>
+              <a:rPr sz="1050" b="0">
+                <a:solidFill>
+                  <a:srgbClr val="0A1820"/>
+                </a:solidFill>
+                <a:latin typeface="Aptos"/>
+              </a:rPr>
+              <a:t>UI y dashboards limitados; menor automatización moderna.</a:t>
+            </a:r>
+          </a:p>
+        </p:txBody>
+      </p:sp>
+      <p:sp>
+        <p:nvSpPr>
+          <p:cNvPr id="12" name="Rounded Rectangle 11"/>
+          <p:cNvSpPr/>
+          <p:nvPr/>
+        </p:nvSpPr>
+        <p:spPr>
+          <a:xfrm>
+            <a:off x="749808" y="2532888"/>
+            <a:ext cx="2148840" cy="658368"/>
+          </a:xfrm>
+          <a:prstGeom prst="roundRect">
+            <a:avLst/>
+          </a:prstGeom>
+          <a:solidFill>
+            <a:srgbClr val="FFFFFF"/>
+          </a:solidFill>
+          <a:ln w="10160">
+            <a:solidFill>
+              <a:srgbClr val="BFCCD6"/>
+            </a:solidFill>
+          </a:ln>
+        </p:spPr>
+        <p:style>
+          <a:lnRef idx="1">
+            <a:schemeClr val="accent1"/>
+          </a:lnRef>
+          <a:fillRef idx="3">
+            <a:schemeClr val="accent1"/>
+          </a:fillRef>
+          <a:effectRef idx="2">
+            <a:schemeClr val="accent1"/>
+          </a:effectRef>
+          <a:fontRef idx="minor">
+            <a:schemeClr val="lt1"/>
+          </a:fontRef>
+        </p:style>
+        <p:txBody>
+          <a:bodyPr rtlCol="0" anchor="ctr"/>
+          <a:lstStyle/>
+          <a:p>
+            <a:pPr algn="ctr"/>
+          </a:p>
+        </p:txBody>
+      </p:sp>
+      <p:sp>
+        <p:nvSpPr>
+          <p:cNvPr id="13" name="TextBox 12"/>
+          <p:cNvSpPr txBox="1"/>
+          <p:nvPr/>
+        </p:nvSpPr>
+        <p:spPr>
+          <a:xfrm>
+            <a:off x="932688" y="2679192"/>
+            <a:ext cx="1755648" cy="210312"/>
+          </a:xfrm>
+          <a:prstGeom prst="rect">
+            <a:avLst/>
+          </a:prstGeom>
+          <a:noFill/>
+        </p:spPr>
+        <p:txBody>
+          <a:bodyPr wrap="square" lIns="0" rIns="0" tIns="0" bIns="0" anchor="t">
+            <a:spAutoFit/>
+          </a:bodyPr>
+          <a:lstStyle/>
+          <a:p>
+            <a:pPr algn="l"/>
+            <a:r>
+              <a:rPr sz="1200" b="1">
+                <a:solidFill>
+                  <a:srgbClr val="38BDF8"/>
+                </a:solidFill>
+                <a:latin typeface="Aptos"/>
+              </a:rPr>
+              <a:t>Prometheus + Grafana</a:t>
+            </a:r>
+          </a:p>
+        </p:txBody>
+      </p:sp>
+      <p:sp>
+        <p:nvSpPr>
+          <p:cNvPr id="14" name="Rounded Rectangle 13"/>
+          <p:cNvSpPr/>
+          <p:nvPr/>
+        </p:nvSpPr>
+        <p:spPr>
+          <a:xfrm>
+            <a:off x="3090672" y="2532888"/>
+            <a:ext cx="3566160" cy="658368"/>
+          </a:xfrm>
+          <a:prstGeom prst="roundRect">
+            <a:avLst/>
+          </a:prstGeom>
+          <a:solidFill>
+            <a:srgbClr val="F5F8FA"/>
+          </a:solidFill>
+          <a:ln w="10160">
+            <a:solidFill>
+              <a:srgbClr val="BFCCD6"/>
+            </a:solidFill>
+          </a:ln>
+        </p:spPr>
+        <p:style>
+          <a:lnRef idx="1">
+            <a:schemeClr val="accent1"/>
+          </a:lnRef>
+          <a:fillRef idx="3">
+            <a:schemeClr val="accent1"/>
+          </a:fillRef>
+          <a:effectRef idx="2">
+            <a:schemeClr val="accent1"/>
+          </a:effectRef>
+          <a:fontRef idx="minor">
+            <a:schemeClr val="lt1"/>
+          </a:fontRef>
+        </p:style>
+        <p:txBody>
+          <a:bodyPr rtlCol="0" anchor="ctr"/>
+          <a:lstStyle/>
+          <a:p>
+            <a:pPr algn="ctr"/>
+          </a:p>
+        </p:txBody>
+      </p:sp>
+      <p:sp>
+        <p:nvSpPr>
+          <p:cNvPr id="15" name="TextBox 14"/>
+          <p:cNvSpPr txBox="1"/>
+          <p:nvPr/>
+        </p:nvSpPr>
+        <p:spPr>
+          <a:xfrm>
+            <a:off x="3273552" y="2660904"/>
+            <a:ext cx="3154680" cy="256032"/>
+          </a:xfrm>
+          <a:prstGeom prst="rect">
+            <a:avLst/>
+          </a:prstGeom>
+          <a:noFill/>
+        </p:spPr>
+        <p:txBody>
+          <a:bodyPr wrap="square" lIns="0" rIns="0" tIns="0" bIns="0" anchor="t">
+            <a:spAutoFit/>
+          </a:bodyPr>
+          <a:lstStyle/>
+          <a:p>
+            <a:pPr algn="l"/>
+            <a:r>
+              <a:rPr sz="1050" b="0">
+                <a:solidFill>
+                  <a:srgbClr val="0A1820"/>
+                </a:solidFill>
+                <a:latin typeface="Aptos"/>
+              </a:rPr>
+              <a:t>Métricas modernas y visualización fuerte.</a:t>
+            </a:r>
+          </a:p>
+        </p:txBody>
+      </p:sp>
+      <p:sp>
+        <p:nvSpPr>
+          <p:cNvPr id="16" name="Rounded Rectangle 15"/>
+          <p:cNvSpPr/>
+          <p:nvPr/>
+        </p:nvSpPr>
+        <p:spPr>
+          <a:xfrm>
+            <a:off x="6903720" y="2532888"/>
+            <a:ext cx="4160520" cy="658368"/>
+          </a:xfrm>
+          <a:prstGeom prst="roundRect">
+            <a:avLst/>
+          </a:prstGeom>
+          <a:solidFill>
+            <a:srgbClr val="FAF7F4"/>
+          </a:solidFill>
+          <a:ln w="10160">
+            <a:solidFill>
+              <a:srgbClr val="BFCCD6"/>
+            </a:solidFill>
+          </a:ln>
+        </p:spPr>
+        <p:style>
+          <a:lnRef idx="1">
+            <a:schemeClr val="accent1"/>
+          </a:lnRef>
+          <a:fillRef idx="3">
+            <a:schemeClr val="accent1"/>
+          </a:fillRef>
+          <a:effectRef idx="2">
+            <a:schemeClr val="accent1"/>
+          </a:effectRef>
+          <a:fontRef idx="minor">
+            <a:schemeClr val="lt1"/>
+          </a:fontRef>
+        </p:style>
+        <p:txBody>
+          <a:bodyPr rtlCol="0" anchor="ctr"/>
+          <a:lstStyle/>
+          <a:p>
+            <a:pPr algn="ctr"/>
+          </a:p>
+        </p:txBody>
+      </p:sp>
+      <p:sp>
+        <p:nvSpPr>
+          <p:cNvPr id="17" name="TextBox 16"/>
+          <p:cNvSpPr txBox="1"/>
+          <p:nvPr/>
+        </p:nvSpPr>
+        <p:spPr>
+          <a:xfrm>
+            <a:off x="7086600" y="2660904"/>
+            <a:ext cx="3703320" cy="256032"/>
+          </a:xfrm>
+          <a:prstGeom prst="rect">
+            <a:avLst/>
+          </a:prstGeom>
+          <a:noFill/>
+        </p:spPr>
+        <p:txBody>
+          <a:bodyPr wrap="square" lIns="0" rIns="0" tIns="0" bIns="0" anchor="t">
+            <a:spAutoFit/>
+          </a:bodyPr>
+          <a:lstStyle/>
+          <a:p>
+            <a:pPr algn="l"/>
+            <a:r>
+              <a:rPr sz="1050" b="0">
+                <a:solidFill>
+                  <a:srgbClr val="0A1820"/>
+                </a:solidFill>
+                <a:latin typeface="Aptos"/>
+              </a:rPr>
+              <a:t>Requiere Alertmanager, exporters y más integración.</a:t>
+            </a:r>
+          </a:p>
+        </p:txBody>
+      </p:sp>
+      <p:sp>
+        <p:nvSpPr>
+          <p:cNvPr id="18" name="Rounded Rectangle 17"/>
+          <p:cNvSpPr/>
+          <p:nvPr/>
+        </p:nvSpPr>
+        <p:spPr>
+          <a:xfrm>
+            <a:off x="749808" y="3493008"/>
+            <a:ext cx="2148840" cy="658368"/>
+          </a:xfrm>
+          <a:prstGeom prst="roundRect">
+            <a:avLst/>
+          </a:prstGeom>
+          <a:solidFill>
+            <a:srgbClr val="FFFFFF"/>
+          </a:solidFill>
+          <a:ln w="10160">
+            <a:solidFill>
+              <a:srgbClr val="BFCCD6"/>
+            </a:solidFill>
+          </a:ln>
+        </p:spPr>
+        <p:style>
+          <a:lnRef idx="1">
+            <a:schemeClr val="accent1"/>
+          </a:lnRef>
+          <a:fillRef idx="3">
+            <a:schemeClr val="accent1"/>
+          </a:fillRef>
+          <a:effectRef idx="2">
+            <a:schemeClr val="accent1"/>
+          </a:effectRef>
+          <a:fontRef idx="minor">
+            <a:schemeClr val="lt1"/>
+          </a:fontRef>
+        </p:style>
+        <p:txBody>
+          <a:bodyPr rtlCol="0" anchor="ctr"/>
+          <a:lstStyle/>
+          <a:p>
+            <a:pPr algn="ctr"/>
+          </a:p>
+        </p:txBody>
+      </p:sp>
+      <p:sp>
+        <p:nvSpPr>
+          <p:cNvPr id="19" name="TextBox 18"/>
+          <p:cNvSpPr txBox="1"/>
+          <p:nvPr/>
+        </p:nvSpPr>
+        <p:spPr>
+          <a:xfrm>
+            <a:off x="932688" y="3639312"/>
+            <a:ext cx="1755648" cy="210312"/>
+          </a:xfrm>
+          <a:prstGeom prst="rect">
+            <a:avLst/>
+          </a:prstGeom>
+          <a:noFill/>
+        </p:spPr>
+        <p:txBody>
+          <a:bodyPr wrap="square" lIns="0" rIns="0" tIns="0" bIns="0" anchor="t">
+            <a:spAutoFit/>
+          </a:bodyPr>
+          <a:lstStyle/>
+          <a:p>
+            <a:pPr algn="l"/>
+            <a:r>
+              <a:rPr sz="1200" b="1">
+                <a:solidFill>
+                  <a:srgbClr val="EF4444"/>
+                </a:solidFill>
+                <a:latin typeface="Aptos"/>
+              </a:rPr>
+              <a:t>Datadog</a:t>
+            </a:r>
+          </a:p>
+        </p:txBody>
+      </p:sp>
+      <p:sp>
+        <p:nvSpPr>
+          <p:cNvPr id="20" name="Rounded Rectangle 19"/>
+          <p:cNvSpPr/>
+          <p:nvPr/>
+        </p:nvSpPr>
+        <p:spPr>
+          <a:xfrm>
+            <a:off x="3090672" y="3493008"/>
+            <a:ext cx="3566160" cy="658368"/>
+          </a:xfrm>
+          <a:prstGeom prst="roundRect">
+            <a:avLst/>
+          </a:prstGeom>
+          <a:solidFill>
+            <a:srgbClr val="F5F8FA"/>
+          </a:solidFill>
+          <a:ln w="10160">
+            <a:solidFill>
+              <a:srgbClr val="BFCCD6"/>
+            </a:solidFill>
+          </a:ln>
+        </p:spPr>
+        <p:style>
+          <a:lnRef idx="1">
+            <a:schemeClr val="accent1"/>
+          </a:lnRef>
+          <a:fillRef idx="3">
+            <a:schemeClr val="accent1"/>
+          </a:fillRef>
+          <a:effectRef idx="2">
+            <a:schemeClr val="accent1"/>
+          </a:effectRef>
+          <a:fontRef idx="minor">
+            <a:schemeClr val="lt1"/>
+          </a:fontRef>
+        </p:style>
+        <p:txBody>
+          <a:bodyPr rtlCol="0" anchor="ctr"/>
+          <a:lstStyle/>
+          <a:p>
+            <a:pPr algn="ctr"/>
+          </a:p>
+        </p:txBody>
+      </p:sp>
+      <p:sp>
+        <p:nvSpPr>
+          <p:cNvPr id="21" name="TextBox 20"/>
+          <p:cNvSpPr txBox="1"/>
+          <p:nvPr/>
+        </p:nvSpPr>
+        <p:spPr>
+          <a:xfrm>
+            <a:off x="3273552" y="3621024"/>
+            <a:ext cx="3154680" cy="256032"/>
+          </a:xfrm>
+          <a:prstGeom prst="rect">
+            <a:avLst/>
+          </a:prstGeom>
+          <a:noFill/>
+        </p:spPr>
+        <p:txBody>
+          <a:bodyPr wrap="square" lIns="0" rIns="0" tIns="0" bIns="0" anchor="t">
+            <a:spAutoFit/>
+          </a:bodyPr>
+          <a:lstStyle/>
+          <a:p>
+            <a:pPr algn="l"/>
+            <a:r>
+              <a:rPr sz="1050" b="0">
+                <a:solidFill>
+                  <a:srgbClr val="0A1820"/>
+                </a:solidFill>
+                <a:latin typeface="Aptos"/>
+              </a:rPr>
+              <a:t>Suite SaaS completa con APM y logs.</a:t>
+            </a:r>
+          </a:p>
+        </p:txBody>
+      </p:sp>
+      <p:sp>
+        <p:nvSpPr>
+          <p:cNvPr id="22" name="Rounded Rectangle 21"/>
+          <p:cNvSpPr/>
+          <p:nvPr/>
+        </p:nvSpPr>
+        <p:spPr>
+          <a:xfrm>
+            <a:off x="6903720" y="3493008"/>
+            <a:ext cx="4160520" cy="658368"/>
+          </a:xfrm>
+          <a:prstGeom prst="roundRect">
+            <a:avLst/>
+          </a:prstGeom>
+          <a:solidFill>
+            <a:srgbClr val="FAF7F4"/>
+          </a:solidFill>
+          <a:ln w="10160">
+            <a:solidFill>
+              <a:srgbClr val="BFCCD6"/>
+            </a:solidFill>
+          </a:ln>
+        </p:spPr>
+        <p:style>
+          <a:lnRef idx="1">
+            <a:schemeClr val="accent1"/>
+          </a:lnRef>
+          <a:fillRef idx="3">
+            <a:schemeClr val="accent1"/>
+          </a:fillRef>
+          <a:effectRef idx="2">
+            <a:schemeClr val="accent1"/>
+          </a:effectRef>
+          <a:fontRef idx="minor">
+            <a:schemeClr val="lt1"/>
+          </a:fontRef>
+        </p:style>
+        <p:txBody>
+          <a:bodyPr rtlCol="0" anchor="ctr"/>
+          <a:lstStyle/>
+          <a:p>
+            <a:pPr algn="ctr"/>
+          </a:p>
+        </p:txBody>
+      </p:sp>
+      <p:sp>
+        <p:nvSpPr>
+          <p:cNvPr id="23" name="TextBox 22"/>
+          <p:cNvSpPr txBox="1"/>
+          <p:nvPr/>
+        </p:nvSpPr>
+        <p:spPr>
+          <a:xfrm>
+            <a:off x="7086600" y="3621024"/>
+            <a:ext cx="3703320" cy="256032"/>
+          </a:xfrm>
+          <a:prstGeom prst="rect">
+            <a:avLst/>
+          </a:prstGeom>
+          <a:noFill/>
+        </p:spPr>
+        <p:txBody>
+          <a:bodyPr wrap="square" lIns="0" rIns="0" tIns="0" bIns="0" anchor="t">
+            <a:spAutoFit/>
+          </a:bodyPr>
+          <a:lstStyle/>
+          <a:p>
+            <a:pPr algn="l"/>
+            <a:r>
+              <a:rPr sz="1050" b="0">
+                <a:solidFill>
+                  <a:srgbClr val="0A1820"/>
+                </a:solidFill>
+                <a:latin typeface="Aptos"/>
+              </a:rPr>
+              <a:t>Costo, dependencia externa y datos fuera del laboratorio.</a:t>
+            </a:r>
+          </a:p>
+        </p:txBody>
+      </p:sp>
+      <p:sp>
+        <p:nvSpPr>
+          <p:cNvPr id="24" name="Rounded Rectangle 23"/>
+          <p:cNvSpPr/>
+          <p:nvPr/>
+        </p:nvSpPr>
+        <p:spPr>
+          <a:xfrm>
+            <a:off x="749808" y="4453128"/>
+            <a:ext cx="2148840" cy="658368"/>
+          </a:xfrm>
+          <a:prstGeom prst="roundRect">
+            <a:avLst/>
+          </a:prstGeom>
+          <a:solidFill>
+            <a:srgbClr val="FFFFFF"/>
+          </a:solidFill>
+          <a:ln w="10160">
+            <a:solidFill>
+              <a:srgbClr val="BFCCD6"/>
+            </a:solidFill>
+          </a:ln>
+        </p:spPr>
+        <p:style>
+          <a:lnRef idx="1">
+            <a:schemeClr val="accent1"/>
+          </a:lnRef>
+          <a:fillRef idx="3">
+            <a:schemeClr val="accent1"/>
+          </a:fillRef>
+          <a:effectRef idx="2">
+            <a:schemeClr val="accent1"/>
+          </a:effectRef>
+          <a:fontRef idx="minor">
+            <a:schemeClr val="lt1"/>
+          </a:fontRef>
+        </p:style>
+        <p:txBody>
+          <a:bodyPr rtlCol="0" anchor="ctr"/>
+          <a:lstStyle/>
+          <a:p>
+            <a:pPr algn="ctr"/>
+          </a:p>
+        </p:txBody>
+      </p:sp>
+      <p:sp>
+        <p:nvSpPr>
+          <p:cNvPr id="25" name="TextBox 24"/>
+          <p:cNvSpPr txBox="1"/>
+          <p:nvPr/>
+        </p:nvSpPr>
+        <p:spPr>
+          <a:xfrm>
+            <a:off x="932688" y="4599432"/>
+            <a:ext cx="1755648" cy="210312"/>
+          </a:xfrm>
+          <a:prstGeom prst="rect">
+            <a:avLst/>
+          </a:prstGeom>
+          <a:noFill/>
+        </p:spPr>
+        <p:txBody>
+          <a:bodyPr wrap="square" lIns="0" rIns="0" tIns="0" bIns="0" anchor="t">
+            <a:spAutoFit/>
+          </a:bodyPr>
+          <a:lstStyle/>
+          <a:p>
+            <a:pPr algn="l"/>
+            <a:r>
+              <a:rPr sz="1200" b="1">
+                <a:solidFill>
+                  <a:srgbClr val="22C5AA"/>
+                </a:solidFill>
+                <a:latin typeface="Aptos"/>
+              </a:rPr>
+              <a:t>Zabbix 6.x</a:t>
+            </a:r>
+          </a:p>
+        </p:txBody>
+      </p:sp>
+      <p:sp>
+        <p:nvSpPr>
+          <p:cNvPr id="26" name="Rounded Rectangle 25"/>
+          <p:cNvSpPr/>
+          <p:nvPr/>
+        </p:nvSpPr>
+        <p:spPr>
+          <a:xfrm>
+            <a:off x="3090672" y="4453128"/>
+            <a:ext cx="3566160" cy="658368"/>
+          </a:xfrm>
+          <a:prstGeom prst="roundRect">
+            <a:avLst/>
+          </a:prstGeom>
+          <a:solidFill>
+            <a:srgbClr val="F5F8FA"/>
+          </a:solidFill>
+          <a:ln w="10160">
+            <a:solidFill>
+              <a:srgbClr val="BFCCD6"/>
+            </a:solidFill>
+          </a:ln>
+        </p:spPr>
+        <p:style>
+          <a:lnRef idx="1">
+            <a:schemeClr val="accent1"/>
+          </a:lnRef>
+          <a:fillRef idx="3">
+            <a:schemeClr val="accent1"/>
+          </a:fillRef>
+          <a:effectRef idx="2">
+            <a:schemeClr val="accent1"/>
+          </a:effectRef>
+          <a:fontRef idx="minor">
+            <a:schemeClr val="lt1"/>
+          </a:fontRef>
+        </p:style>
+        <p:txBody>
+          <a:bodyPr rtlCol="0" anchor="ctr"/>
+          <a:lstStyle/>
+          <a:p>
+            <a:pPr algn="ctr"/>
+          </a:p>
+        </p:txBody>
+      </p:sp>
+      <p:sp>
+        <p:nvSpPr>
+          <p:cNvPr id="27" name="TextBox 26"/>
+          <p:cNvSpPr txBox="1"/>
+          <p:nvPr/>
+        </p:nvSpPr>
+        <p:spPr>
+          <a:xfrm>
+            <a:off x="3273552" y="4581144"/>
+            <a:ext cx="3154680" cy="256032"/>
+          </a:xfrm>
+          <a:prstGeom prst="rect">
+            <a:avLst/>
+          </a:prstGeom>
+          <a:noFill/>
+        </p:spPr>
+        <p:txBody>
+          <a:bodyPr wrap="square" lIns="0" rIns="0" tIns="0" bIns="0" anchor="t">
+            <a:spAutoFit/>
+          </a:bodyPr>
+          <a:lstStyle/>
+          <a:p>
+            <a:pPr algn="l"/>
+            <a:r>
+              <a:rPr sz="1050" b="0">
+                <a:solidFill>
+                  <a:srgbClr val="0A1820"/>
+                </a:solidFill>
+                <a:latin typeface="Aptos"/>
+              </a:rPr>
+              <a:t>Agentes, API, triggers, dashboards, histórico y correo integrados.</a:t>
+            </a:r>
+          </a:p>
+        </p:txBody>
+      </p:sp>
+      <p:sp>
+        <p:nvSpPr>
+          <p:cNvPr id="28" name="Rounded Rectangle 27"/>
+          <p:cNvSpPr/>
+          <p:nvPr/>
+        </p:nvSpPr>
+        <p:spPr>
+          <a:xfrm>
+            <a:off x="6903720" y="4453128"/>
+            <a:ext cx="4160520" cy="658368"/>
+          </a:xfrm>
+          <a:prstGeom prst="roundRect">
+            <a:avLst/>
+          </a:prstGeom>
+          <a:solidFill>
+            <a:srgbClr val="FAF7F4"/>
+          </a:solidFill>
+          <a:ln w="10160">
+            <a:solidFill>
+              <a:srgbClr val="BFCCD6"/>
+            </a:solidFill>
+          </a:ln>
+        </p:spPr>
+        <p:style>
+          <a:lnRef idx="1">
+            <a:schemeClr val="accent1"/>
+          </a:lnRef>
+          <a:fillRef idx="3">
+            <a:schemeClr val="accent1"/>
+          </a:fillRef>
+          <a:effectRef idx="2">
+            <a:schemeClr val="accent1"/>
+          </a:effectRef>
+          <a:fontRef idx="minor">
+            <a:schemeClr val="lt1"/>
+          </a:fontRef>
+        </p:style>
+        <p:txBody>
+          <a:bodyPr rtlCol="0" anchor="ctr"/>
+          <a:lstStyle/>
+          <a:p>
+            <a:pPr algn="ctr"/>
+          </a:p>
+        </p:txBody>
+      </p:sp>
+      <p:sp>
+        <p:nvSpPr>
+          <p:cNvPr id="29" name="TextBox 28"/>
+          <p:cNvSpPr txBox="1"/>
+          <p:nvPr/>
+        </p:nvSpPr>
+        <p:spPr>
+          <a:xfrm>
+            <a:off x="7086600" y="4581144"/>
+            <a:ext cx="3703320" cy="256032"/>
+          </a:xfrm>
+          <a:prstGeom prst="rect">
+            <a:avLst/>
+          </a:prstGeom>
+          <a:noFill/>
+        </p:spPr>
+        <p:txBody>
+          <a:bodyPr wrap="square" lIns="0" rIns="0" tIns="0" bIns="0" anchor="t">
+            <a:spAutoFit/>
+          </a:bodyPr>
+          <a:lstStyle/>
+          <a:p>
+            <a:pPr algn="l"/>
+            <a:r>
+              <a:rPr sz="1050" b="0">
+                <a:solidFill>
+                  <a:srgbClr val="0A1820"/>
+                </a:solidFill>
+                <a:latin typeface="Aptos"/>
+              </a:rPr>
+              <a:t>Más configuración inicial, pero reproducible con scripts.</a:t>
+            </a:r>
+          </a:p>
+        </p:txBody>
+      </p:sp>
+      <p:sp>
+        <p:nvSpPr>
+          <p:cNvPr id="30" name="Rounded Rectangle 29"/>
+          <p:cNvSpPr/>
+          <p:nvPr/>
+        </p:nvSpPr>
+        <p:spPr>
+          <a:xfrm>
+            <a:off x="777240" y="5513832"/>
+            <a:ext cx="10287000" cy="713232"/>
+          </a:xfrm>
+          <a:prstGeom prst="roundRect">
+            <a:avLst/>
+          </a:prstGeom>
+          <a:solidFill>
+            <a:srgbClr val="FFFFFF"/>
+          </a:solidFill>
+          <a:ln w="10160">
+            <a:solidFill>
+              <a:srgbClr val="BFCCD6"/>
+            </a:solidFill>
+          </a:ln>
+        </p:spPr>
+        <p:style>
+          <a:lnRef idx="1">
+            <a:schemeClr val="accent1"/>
+          </a:lnRef>
+          <a:fillRef idx="3">
+            <a:schemeClr val="accent1"/>
+          </a:fillRef>
+          <a:effectRef idx="2">
+            <a:schemeClr val="accent1"/>
+          </a:effectRef>
+          <a:fontRef idx="minor">
+            <a:schemeClr val="lt1"/>
+          </a:fontRef>
+        </p:style>
+        <p:txBody>
+          <a:bodyPr rtlCol="0" anchor="ctr"/>
+          <a:lstStyle/>
+          <a:p>
+            <a:pPr algn="ctr"/>
+          </a:p>
+        </p:txBody>
+      </p:sp>
+      <p:sp>
+        <p:nvSpPr>
+          <p:cNvPr id="31" name="Rectangle 30"/>
+          <p:cNvSpPr/>
+          <p:nvPr/>
+        </p:nvSpPr>
+        <p:spPr>
+          <a:xfrm>
+            <a:off x="777240" y="5513832"/>
+            <a:ext cx="73152" cy="713232"/>
+          </a:xfrm>
+          <a:prstGeom prst="rect">
+            <a:avLst/>
+          </a:prstGeom>
+          <a:solidFill>
+            <a:srgbClr val="22C5AA"/>
+          </a:solidFill>
+          <a:ln>
+            <a:noFill/>
+          </a:ln>
+        </p:spPr>
+        <p:style>
+          <a:lnRef idx="1">
+            <a:schemeClr val="accent1"/>
+          </a:lnRef>
+          <a:fillRef idx="3">
+            <a:schemeClr val="accent1"/>
+          </a:fillRef>
+          <a:effectRef idx="2">
+            <a:schemeClr val="accent1"/>
+          </a:effectRef>
+          <a:fontRef idx="minor">
+            <a:schemeClr val="lt1"/>
+          </a:fontRef>
+        </p:style>
+        <p:txBody>
+          <a:bodyPr rtlCol="0" anchor="ctr"/>
+          <a:lstStyle/>
+          <a:p>
+            <a:pPr algn="ctr"/>
+          </a:p>
+        </p:txBody>
+      </p:sp>
+      <p:sp>
+        <p:nvSpPr>
+          <p:cNvPr id="32" name="TextBox 31"/>
+          <p:cNvSpPr txBox="1"/>
+          <p:nvPr/>
+        </p:nvSpPr>
+        <p:spPr>
+          <a:xfrm>
+            <a:off x="1005840" y="5660136"/>
+            <a:ext cx="9902952" cy="219456"/>
+          </a:xfrm>
+          <a:prstGeom prst="rect">
+            <a:avLst/>
+          </a:prstGeom>
+          <a:noFill/>
+        </p:spPr>
+        <p:txBody>
+          <a:bodyPr wrap="square" lIns="0" rIns="0" tIns="0" bIns="0" anchor="t">
+            <a:spAutoFit/>
+          </a:bodyPr>
+          <a:lstStyle/>
+          <a:p>
+            <a:pPr algn="l"/>
+            <a:r>
+              <a:rPr sz="1200" b="1">
+                <a:solidFill>
+                  <a:srgbClr val="22C5AA"/>
+                </a:solidFill>
+                <a:latin typeface="Aptos"/>
+              </a:rPr>
+              <a:t>Decisión</a:t>
+            </a:r>
+          </a:p>
+        </p:txBody>
+      </p:sp>
+      <p:sp>
+        <p:nvSpPr>
+          <p:cNvPr id="33" name="TextBox 32"/>
+          <p:cNvSpPr txBox="1"/>
+          <p:nvPr/>
+        </p:nvSpPr>
+        <p:spPr>
+          <a:xfrm>
+            <a:off x="1005840" y="5943600"/>
+            <a:ext cx="9902952" cy="201167"/>
+          </a:xfrm>
+          <a:prstGeom prst="rect">
+            <a:avLst/>
+          </a:prstGeom>
+          <a:noFill/>
+        </p:spPr>
+        <p:txBody>
+          <a:bodyPr wrap="square" lIns="0" rIns="0" tIns="0" bIns="0" anchor="t">
+            <a:spAutoFit/>
+          </a:bodyPr>
+          <a:lstStyle/>
+          <a:p>
+            <a:pPr algn="l"/>
+            <a:r>
+              <a:rPr sz="1100" b="0">
+                <a:solidFill>
+                  <a:srgbClr val="0A1820"/>
+                </a:solidFill>
+                <a:latin typeface="Aptos"/>
+              </a:rPr>
+              <a:t>Zabbix permite cumplir el enunciado sin SaaS pago: monitoreo de hosts, servicios, triggers, dashboards, histórico, alertas y API en Docker Compose.</a:t>
+            </a:r>
+          </a:p>
+        </p:txBody>
+      </p:sp>
+      <p:cxnSp>
+        <p:nvCxnSpPr>
+          <p:cNvPr id="34" name="Connector 33"/>
+          <p:cNvCxnSpPr/>
+          <p:nvPr/>
+        </p:nvCxnSpPr>
+        <p:spPr>
+          <a:xfrm>
+            <a:off x="502920" y="6428232"/>
+            <a:ext cx="11155680" cy="0"/>
+          </a:xfrm>
+          <a:prstGeom prst="line">
+            <a:avLst/>
+          </a:prstGeom>
+          <a:ln w="8890">
+            <a:solidFill>
+              <a:srgbClr val="BFCCD6"/>
+            </a:solidFill>
+          </a:ln>
+        </p:spPr>
+        <p:style>
+          <a:lnRef idx="2">
+            <a:schemeClr val="accent1"/>
+          </a:lnRef>
+          <a:fillRef idx="0">
+            <a:schemeClr val="accent1"/>
+          </a:fillRef>
+          <a:effectRef idx="1">
+            <a:schemeClr val="accent1"/>
+          </a:effectRef>
+          <a:fontRef idx="minor">
+            <a:schemeClr val="tx1"/>
+          </a:fontRef>
+        </p:style>
+      </p:cxnSp>
+      <p:sp>
+        <p:nvSpPr>
+          <p:cNvPr id="35" name="TextBox 34"/>
+          <p:cNvSpPr txBox="1"/>
+          <p:nvPr/>
+        </p:nvSpPr>
+        <p:spPr>
+          <a:xfrm>
+            <a:off x="502920" y="6519672"/>
+            <a:ext cx="4754880" cy="164592"/>
+          </a:xfrm>
+          <a:prstGeom prst="rect">
+            <a:avLst/>
+          </a:prstGeom>
+          <a:noFill/>
+        </p:spPr>
+        <p:txBody>
+          <a:bodyPr wrap="square" lIns="0" rIns="0" tIns="0" bIns="0" anchor="t">
+            <a:spAutoFit/>
+          </a:bodyPr>
+          <a:lstStyle/>
+          <a:p>
+            <a:pPr algn="l"/>
+            <a:r>
+              <a:rPr sz="750" b="0">
+                <a:solidFill>
+                  <a:srgbClr val="5C6975"/>
+                </a:solidFill>
+                <a:latin typeface="Aptos"/>
+              </a:rPr>
+              <a:t>Proyecto 7 - Monitoreo de infraestructura con Zabbix</a:t>
+            </a:r>
+          </a:p>
+        </p:txBody>
+      </p:sp>
+      <p:sp>
+        <p:nvSpPr>
+          <p:cNvPr id="36" name="TextBox 35"/>
+          <p:cNvSpPr txBox="1"/>
+          <p:nvPr/>
+        </p:nvSpPr>
+        <p:spPr>
+          <a:xfrm>
+            <a:off x="10972800" y="6519672"/>
+            <a:ext cx="640080" cy="164592"/>
+          </a:xfrm>
+          <a:prstGeom prst="rect">
+            <a:avLst/>
+          </a:prstGeom>
+          <a:noFill/>
+        </p:spPr>
+        <p:txBody>
+          <a:bodyPr wrap="square" lIns="0" rIns="0" tIns="0" bIns="0" anchor="t">
+            <a:spAutoFit/>
+          </a:bodyPr>
+          <a:lstStyle/>
+          <a:p>
+            <a:pPr algn="r"/>
+            <a:r>
+              <a:rPr sz="750" b="0">
+                <a:solidFill>
+                  <a:srgbClr val="5C6975"/>
+                </a:solidFill>
+                <a:latin typeface="Aptos"/>
+              </a:rPr>
+              <a:t>03/17</a:t>
+            </a:r>
+          </a:p>
+        </p:txBody>
+      </p:sp>
+    </p:spTree>
+  </p:cSld>
+  <p:clrMapOvr>
+    <a:masterClrMapping/>
+  </p:clrMapOvr>
+</p:sld>
+</file>
+
+<file path=ppt/slides/slide4.xml><?xml version="1.0" encoding="utf-8"?>
+<p:sld xmlns:a="http://schemas.openxmlformats.org/drawingml/2006/main" xmlns:p="http://schemas.openxmlformats.org/presentationml/2006/main" xmlns:r="http://schemas.openxmlformats.org/officeDocument/2006/relationships">
+  <p:cSld>
+    <p:bg>
+      <p:bgPr>
+        <a:solidFill>
           <a:srgbClr val="EFF6F2"/>
         </a:solidFill>
         <a:effectLst/>
@@ -13191,7 +14123,7 @@
                 </a:solidFill>
                 <a:latin typeface="Aptos"/>
               </a:rPr>
-              <a:t>03</a:t>
+              <a:t>04</a:t>
             </a:r>
           </a:p>
         </p:txBody>
@@ -13945,7 +14877,7 @@
                 </a:solidFill>
                 <a:latin typeface="Aptos"/>
               </a:rPr>
-              <a:t>03/17</a:t>
+              <a:t>04/17</a:t>
             </a:r>
           </a:p>
         </p:txBody>
@@ -13958,7 +14890,7 @@
 </p:sld>
 </file>
 
-<file path=ppt/slides/slide4.xml><?xml version="1.0" encoding="utf-8"?>
+<file path=ppt/slides/slide5.xml><?xml version="1.0" encoding="utf-8"?>
 <p:sld xmlns:a="http://schemas.openxmlformats.org/drawingml/2006/main" xmlns:p="http://schemas.openxmlformats.org/presentationml/2006/main" xmlns:r="http://schemas.openxmlformats.org/officeDocument/2006/relationships">
   <p:cSld>
     <p:bg>
@@ -14006,7 +14938,7 @@
                 </a:solidFill>
                 <a:latin typeface="Aptos"/>
               </a:rPr>
-              <a:t>04</a:t>
+              <a:t>05</a:t>
             </a:r>
           </a:p>
         </p:txBody>
@@ -15895,13 +16827,10 @@
           <a:p>
             <a:pPr algn="l"/>
             <a:r>
-              <a:rPr sz="1800" b="1">
-                <a:solidFill>
-                  <a:srgbClr val="38BDF8"/>
-                </a:solidFill>
-                <a:latin typeface="Aptos"/>
-              </a:rPr>
-              <a:t>12</a:t>
+              <a:rPr>
+                <a:latin typeface="Aptos"/>
+              </a:rPr>
+              <a:t>05</a:t>
             </a:r>
           </a:p>
         </p:txBody>
@@ -16156,7 +17085,7 @@
                 </a:solidFill>
                 <a:latin typeface="Aptos"/>
               </a:rPr>
-              <a:t>04/17</a:t>
+              <a:t>05/17</a:t>
             </a:r>
           </a:p>
         </p:txBody>
@@ -16169,7 +17098,7 @@
 </p:sld>
 </file>
 
-<file path=ppt/slides/slide5.xml><?xml version="1.0" encoding="utf-8"?>
+<file path=ppt/slides/slide6.xml><?xml version="1.0" encoding="utf-8"?>
 <p:sld xmlns:a="http://schemas.openxmlformats.org/drawingml/2006/main" xmlns:p="http://schemas.openxmlformats.org/presentationml/2006/main" xmlns:r="http://schemas.openxmlformats.org/officeDocument/2006/relationships">
   <p:cSld>
     <p:bg>
@@ -16262,7 +17191,7 @@
                 </a:solidFill>
                 <a:latin typeface="Aptos"/>
               </a:rPr>
-              <a:t>05</a:t>
+              <a:t>06</a:t>
             </a:r>
           </a:p>
         </p:txBody>
@@ -18123,7 +19052,7 @@
                 </a:solidFill>
                 <a:latin typeface="Aptos"/>
               </a:rPr>
-              <a:t>05/17</a:t>
+              <a:t>06/17</a:t>
             </a:r>
           </a:p>
         </p:txBody>
@@ -18136,7 +19065,7 @@
 </p:sld>
 </file>
 
-<file path=ppt/slides/slide6.xml><?xml version="1.0" encoding="utf-8"?>
+<file path=ppt/slides/slide7.xml><?xml version="1.0" encoding="utf-8"?>
 <p:sld xmlns:a="http://schemas.openxmlformats.org/drawingml/2006/main" xmlns:p="http://schemas.openxmlformats.org/presentationml/2006/main" xmlns:r="http://schemas.openxmlformats.org/officeDocument/2006/relationships">
   <p:cSld>
     <p:bg>
@@ -18184,7 +19113,7 @@
                 </a:solidFill>
                 <a:latin typeface="Aptos"/>
               </a:rPr>
-              <a:t>06</a:t>
+              <a:t>07</a:t>
             </a:r>
           </a:p>
         </p:txBody>
@@ -19832,7 +20761,7 @@
                 </a:solidFill>
                 <a:latin typeface="Aptos"/>
               </a:rPr>
-              <a:t>06/17</a:t>
+              <a:t>07/17</a:t>
             </a:r>
           </a:p>
         </p:txBody>
@@ -19845,7 +20774,7 @@
 </p:sld>
 </file>
 
-<file path=ppt/slides/slide7.xml><?xml version="1.0" encoding="utf-8"?>
+<file path=ppt/slides/slide8.xml><?xml version="1.0" encoding="utf-8"?>
 <p:sld xmlns:a="http://schemas.openxmlformats.org/drawingml/2006/main" xmlns:p="http://schemas.openxmlformats.org/presentationml/2006/main" xmlns:r="http://schemas.openxmlformats.org/officeDocument/2006/relationships">
   <p:cSld>
     <p:bg>
@@ -19938,7 +20867,7 @@
                 </a:solidFill>
                 <a:latin typeface="Aptos"/>
               </a:rPr>
-              <a:t>07</a:t>
+              <a:t>08</a:t>
             </a:r>
           </a:p>
         </p:txBody>
@@ -20632,7 +21561,7 @@
                 </a:solidFill>
                 <a:latin typeface="Aptos"/>
               </a:rPr>
-              <a:t>07/17</a:t>
+              <a:t>08/17</a:t>
             </a:r>
           </a:p>
         </p:txBody>
@@ -20645,7 +21574,7 @@
 </p:sld>
 </file>
 
-<file path=ppt/slides/slide8.xml><?xml version="1.0" encoding="utf-8"?>
+<file path=ppt/slides/slide9.xml><?xml version="1.0" encoding="utf-8"?>
 <p:sld xmlns:a="http://schemas.openxmlformats.org/drawingml/2006/main" xmlns:p="http://schemas.openxmlformats.org/presentationml/2006/main" xmlns:r="http://schemas.openxmlformats.org/officeDocument/2006/relationships">
   <p:cSld>
     <p:bg>
@@ -20738,7 +21667,7 @@
                 </a:solidFill>
                 <a:latin typeface="Aptos"/>
               </a:rPr>
-              <a:t>08</a:t>
+              <a:t>09</a:t>
             </a:r>
           </a:p>
         </p:txBody>
@@ -21419,938 +22348,6 @@
       <p:sp>
         <p:nvSpPr>
           <p:cNvPr id="22" name="TextBox 21"/>
-          <p:cNvSpPr txBox="1"/>
-          <p:nvPr/>
-        </p:nvSpPr>
-        <p:spPr>
-          <a:xfrm>
-            <a:off x="10972800" y="6519672"/>
-            <a:ext cx="640080" cy="164592"/>
-          </a:xfrm>
-          <a:prstGeom prst="rect">
-            <a:avLst/>
-          </a:prstGeom>
-          <a:noFill/>
-        </p:spPr>
-        <p:txBody>
-          <a:bodyPr wrap="square" lIns="0" rIns="0" tIns="0" bIns="0" anchor="t">
-            <a:spAutoFit/>
-          </a:bodyPr>
-          <a:lstStyle/>
-          <a:p>
-            <a:pPr algn="r"/>
-            <a:r>
-              <a:rPr sz="750" b="0">
-                <a:solidFill>
-                  <a:srgbClr val="5C6975"/>
-                </a:solidFill>
-                <a:latin typeface="Aptos"/>
-              </a:rPr>
-              <a:t>08/17</a:t>
-            </a:r>
-          </a:p>
-        </p:txBody>
-      </p:sp>
-    </p:spTree>
-  </p:cSld>
-  <p:clrMapOvr>
-    <a:masterClrMapping/>
-  </p:clrMapOvr>
-</p:sld>
-</file>
-
-<file path=ppt/slides/slide9.xml><?xml version="1.0" encoding="utf-8"?>
-<p:sld xmlns:a="http://schemas.openxmlformats.org/drawingml/2006/main" xmlns:p="http://schemas.openxmlformats.org/presentationml/2006/main" xmlns:r="http://schemas.openxmlformats.org/officeDocument/2006/relationships">
-  <p:cSld>
-    <p:bg>
-      <p:bgPr>
-        <a:solidFill>
-          <a:srgbClr val="FAF7F4"/>
-        </a:solidFill>
-        <a:effectLst/>
-      </p:bgPr>
-    </p:bg>
-    <p:spTree>
-      <p:nvGrpSpPr>
-        <p:cNvPr id="1" name=""/>
-        <p:cNvGrpSpPr/>
-        <p:nvPr/>
-      </p:nvGrpSpPr>
-      <p:grpSpPr/>
-      <p:sp>
-        <p:nvSpPr>
-          <p:cNvPr id="7" name="Rectangle 6"/>
-          <p:cNvSpPr/>
-          <p:nvPr/>
-        </p:nvSpPr>
-        <p:spPr>
-          <a:xfrm>
-            <a:off x="6236207" y="1527048"/>
-            <a:ext cx="5038344" cy="3300984"/>
-          </a:xfrm>
-          <a:prstGeom prst="rect">
-            <a:avLst/>
-          </a:prstGeom>
-          <a:solidFill>
-            <a:srgbClr val="FFFFFF"/>
-          </a:solidFill>
-          <a:ln w="10160">
-            <a:solidFill>
-              <a:srgbClr val="BFCCD6"/>
-            </a:solidFill>
-          </a:ln>
-        </p:spPr>
-        <p:style>
-          <a:lnRef idx="1">
-            <a:schemeClr val="accent1"/>
-          </a:lnRef>
-          <a:fillRef idx="3">
-            <a:schemeClr val="accent1"/>
-          </a:fillRef>
-          <a:effectRef idx="2">
-            <a:schemeClr val="accent1"/>
-          </a:effectRef>
-          <a:fontRef idx="minor">
-            <a:schemeClr val="lt1"/>
-          </a:fontRef>
-        </p:style>
-        <p:txBody>
-          <a:bodyPr rtlCol="0" anchor="ctr"/>
-          <a:lstStyle/>
-          <a:p>
-            <a:pPr algn="ctr"/>
-          </a:p>
-        </p:txBody>
-      </p:sp>
-      <p:sp>
-        <p:nvSpPr>
-          <p:cNvPr id="2" name="TextBox 1"/>
-          <p:cNvSpPr txBox="1"/>
-          <p:nvPr/>
-        </p:nvSpPr>
-        <p:spPr>
-          <a:xfrm>
-            <a:off x="502920" y="384048"/>
-            <a:ext cx="384048" cy="201168"/>
-          </a:xfrm>
-          <a:prstGeom prst="rect">
-            <a:avLst/>
-          </a:prstGeom>
-          <a:noFill/>
-        </p:spPr>
-        <p:txBody>
-          <a:bodyPr wrap="square" lIns="0" rIns="0" tIns="0" bIns="0" anchor="t">
-            <a:spAutoFit/>
-          </a:bodyPr>
-          <a:lstStyle/>
-          <a:p>
-            <a:pPr algn="l"/>
-            <a:r>
-              <a:rPr sz="800" b="1">
-                <a:solidFill>
-                  <a:srgbClr val="0A1820"/>
-                </a:solidFill>
-                <a:latin typeface="Aptos"/>
-              </a:rPr>
-              <a:t>09</a:t>
-            </a:r>
-          </a:p>
-        </p:txBody>
-      </p:sp>
-      <p:cxnSp>
-        <p:nvCxnSpPr>
-          <p:cNvPr id="3" name="Connector 2"/>
-          <p:cNvCxnSpPr/>
-          <p:nvPr/>
-        </p:nvCxnSpPr>
-        <p:spPr>
-          <a:xfrm>
-            <a:off x="941832" y="475488"/>
-            <a:ext cx="685800" cy="0"/>
-          </a:xfrm>
-          <a:prstGeom prst="line">
-            <a:avLst/>
-          </a:prstGeom>
-          <a:ln w="13970">
-            <a:solidFill>
-              <a:srgbClr val="0A1820"/>
-            </a:solidFill>
-          </a:ln>
-        </p:spPr>
-        <p:style>
-          <a:lnRef idx="2">
-            <a:schemeClr val="accent1"/>
-          </a:lnRef>
-          <a:fillRef idx="0">
-            <a:schemeClr val="accent1"/>
-          </a:fillRef>
-          <a:effectRef idx="1">
-            <a:schemeClr val="accent1"/>
-          </a:effectRef>
-          <a:fontRef idx="minor">
-            <a:schemeClr val="tx1"/>
-          </a:fontRef>
-        </p:style>
-      </p:cxnSp>
-      <p:sp>
-        <p:nvSpPr>
-          <p:cNvPr id="4" name="TextBox 3"/>
-          <p:cNvSpPr txBox="1"/>
-          <p:nvPr/>
-        </p:nvSpPr>
-        <p:spPr>
-          <a:xfrm>
-            <a:off x="1737360" y="356616"/>
-            <a:ext cx="3108960" cy="274320"/>
-          </a:xfrm>
-          <a:prstGeom prst="rect">
-            <a:avLst/>
-          </a:prstGeom>
-          <a:noFill/>
-        </p:spPr>
-        <p:txBody>
-          <a:bodyPr wrap="square" lIns="0" rIns="0" tIns="0" bIns="0" anchor="t">
-            <a:spAutoFit/>
-          </a:bodyPr>
-          <a:lstStyle/>
-          <a:p>
-            <a:pPr algn="l"/>
-            <a:r>
-              <a:rPr sz="800" b="1">
-                <a:solidFill>
-                  <a:srgbClr val="0A1820"/>
-                </a:solidFill>
-                <a:latin typeface="Aptos"/>
-              </a:rPr>
-              <a:t>CAÍDA CONTROLADA</a:t>
-            </a:r>
-          </a:p>
-        </p:txBody>
-      </p:sp>
-      <p:sp>
-        <p:nvSpPr>
-          <p:cNvPr id="5" name="TextBox 4"/>
-          <p:cNvSpPr txBox="1"/>
-          <p:nvPr/>
-        </p:nvSpPr>
-        <p:spPr>
-          <a:xfrm>
-            <a:off x="502920" y="713232"/>
-            <a:ext cx="7498079" cy="868680"/>
-          </a:xfrm>
-          <a:prstGeom prst="rect">
-            <a:avLst/>
-          </a:prstGeom>
-          <a:noFill/>
-        </p:spPr>
-        <p:txBody>
-          <a:bodyPr wrap="square" lIns="0" rIns="0" tIns="0" bIns="0" anchor="t">
-            <a:spAutoFit/>
-          </a:bodyPr>
-          <a:lstStyle/>
-          <a:p>
-            <a:pPr algn="l"/>
-            <a:r>
-              <a:rPr sz="3000" b="1">
-                <a:solidFill>
-                  <a:srgbClr val="0A1820"/>
-                </a:solidFill>
-                <a:latin typeface="Aptos Display"/>
-              </a:rPr>
-              <a:t>La caída controlada prueba el flujo completo.</a:t>
-            </a:r>
-          </a:p>
-        </p:txBody>
-      </p:sp>
-      <p:pic>
-        <p:nvPicPr>
-          <p:cNvPr id="6" name="Picture 5" descr="06_zabbix_falla_web_activa.png"/>
-          <p:cNvPicPr>
-            <a:picLocks noChangeAspect="1"/>
-          </p:cNvPicPr>
-          <p:nvPr/>
-        </p:nvPicPr>
-        <p:blipFill>
-          <a:blip r:embed="rId2"/>
-          <a:stretch>
-            <a:fillRect/>
-          </a:stretch>
-        </p:blipFill>
-        <p:spPr>
-          <a:xfrm>
-            <a:off x="6263640" y="1554480"/>
-            <a:ext cx="4983480" cy="3246120"/>
-          </a:xfrm>
-          <a:prstGeom prst="rect">
-            <a:avLst/>
-          </a:prstGeom>
-        </p:spPr>
-      </p:pic>
-      <p:sp>
-        <p:nvSpPr>
-          <p:cNvPr id="8" name="Rounded Rectangle 7"/>
-          <p:cNvSpPr/>
-          <p:nvPr/>
-        </p:nvSpPr>
-        <p:spPr>
-          <a:xfrm>
-            <a:off x="713232" y="2331720"/>
-            <a:ext cx="658368" cy="658368"/>
-          </a:xfrm>
-          <a:prstGeom prst="roundRect">
-            <a:avLst/>
-          </a:prstGeom>
-          <a:solidFill>
-            <a:srgbClr val="EF4444"/>
-          </a:solidFill>
-          <a:ln>
-            <a:noFill/>
-          </a:ln>
-        </p:spPr>
-        <p:style>
-          <a:lnRef idx="1">
-            <a:schemeClr val="accent1"/>
-          </a:lnRef>
-          <a:fillRef idx="3">
-            <a:schemeClr val="accent1"/>
-          </a:fillRef>
-          <a:effectRef idx="2">
-            <a:schemeClr val="accent1"/>
-          </a:effectRef>
-          <a:fontRef idx="minor">
-            <a:schemeClr val="lt1"/>
-          </a:fontRef>
-        </p:style>
-        <p:txBody>
-          <a:bodyPr rtlCol="0" anchor="ctr"/>
-          <a:lstStyle/>
-          <a:p>
-            <a:pPr algn="ctr"/>
-          </a:p>
-        </p:txBody>
-      </p:sp>
-      <p:sp>
-        <p:nvSpPr>
-          <p:cNvPr id="9" name="TextBox 8"/>
-          <p:cNvSpPr txBox="1"/>
-          <p:nvPr/>
-        </p:nvSpPr>
-        <p:spPr>
-          <a:xfrm>
-            <a:off x="932688" y="2505456"/>
-            <a:ext cx="228600" cy="219456"/>
-          </a:xfrm>
-          <a:prstGeom prst="rect">
-            <a:avLst/>
-          </a:prstGeom>
-          <a:noFill/>
-        </p:spPr>
-        <p:txBody>
-          <a:bodyPr wrap="square" lIns="0" rIns="0" tIns="0" bIns="0" anchor="t">
-            <a:spAutoFit/>
-          </a:bodyPr>
-          <a:lstStyle/>
-          <a:p>
-            <a:pPr algn="ctr"/>
-            <a:r>
-              <a:rPr sz="1600" b="1">
-                <a:solidFill>
-                  <a:srgbClr val="FFFFFF"/>
-                </a:solidFill>
-                <a:latin typeface="Aptos"/>
-              </a:rPr>
-              <a:t>1</a:t>
-            </a:r>
-          </a:p>
-        </p:txBody>
-      </p:sp>
-      <p:sp>
-        <p:nvSpPr>
-          <p:cNvPr id="10" name="TextBox 9"/>
-          <p:cNvSpPr txBox="1"/>
-          <p:nvPr/>
-        </p:nvSpPr>
-        <p:spPr>
-          <a:xfrm>
-            <a:off x="603504" y="3163824"/>
-            <a:ext cx="914400" cy="310896"/>
-          </a:xfrm>
-          <a:prstGeom prst="rect">
-            <a:avLst/>
-          </a:prstGeom>
-          <a:noFill/>
-        </p:spPr>
-        <p:txBody>
-          <a:bodyPr wrap="square" lIns="0" rIns="0" tIns="0" bIns="0" anchor="t">
-            <a:spAutoFit/>
-          </a:bodyPr>
-          <a:lstStyle/>
-          <a:p>
-            <a:pPr algn="ctr"/>
-            <a:r>
-              <a:rPr sz="830" b="1">
-                <a:solidFill>
-                  <a:srgbClr val="0A1820"/>
-                </a:solidFill>
-                <a:latin typeface="Aptos"/>
-              </a:rPr>
-              <a:t>stop web-service</a:t>
-            </a:r>
-          </a:p>
-        </p:txBody>
-      </p:sp>
-      <p:cxnSp>
-        <p:nvCxnSpPr>
-          <p:cNvPr id="11" name="Connector 10"/>
-          <p:cNvCxnSpPr/>
-          <p:nvPr/>
-        </p:nvCxnSpPr>
-        <p:spPr>
-          <a:xfrm>
-            <a:off x="1371600" y="2660904"/>
-            <a:ext cx="502919" cy="0"/>
-          </a:xfrm>
-          <a:prstGeom prst="line">
-            <a:avLst/>
-          </a:prstGeom>
-          <a:ln w="20320">
-            <a:solidFill>
-              <a:srgbClr val="BFCCD6"/>
-            </a:solidFill>
-          </a:ln>
-        </p:spPr>
-        <p:style>
-          <a:lnRef idx="2">
-            <a:schemeClr val="accent1"/>
-          </a:lnRef>
-          <a:fillRef idx="0">
-            <a:schemeClr val="accent1"/>
-          </a:fillRef>
-          <a:effectRef idx="1">
-            <a:schemeClr val="accent1"/>
-          </a:effectRef>
-          <a:fontRef idx="minor">
-            <a:schemeClr val="tx1"/>
-          </a:fontRef>
-        </p:style>
-      </p:cxnSp>
-      <p:sp>
-        <p:nvSpPr>
-          <p:cNvPr id="12" name="Rounded Rectangle 11"/>
-          <p:cNvSpPr/>
-          <p:nvPr/>
-        </p:nvSpPr>
-        <p:spPr>
-          <a:xfrm>
-            <a:off x="2011680" y="2331720"/>
-            <a:ext cx="658368" cy="658368"/>
-          </a:xfrm>
-          <a:prstGeom prst="roundRect">
-            <a:avLst/>
-          </a:prstGeom>
-          <a:solidFill>
-            <a:srgbClr val="F59E0B"/>
-          </a:solidFill>
-          <a:ln>
-            <a:noFill/>
-          </a:ln>
-        </p:spPr>
-        <p:style>
-          <a:lnRef idx="1">
-            <a:schemeClr val="accent1"/>
-          </a:lnRef>
-          <a:fillRef idx="3">
-            <a:schemeClr val="accent1"/>
-          </a:fillRef>
-          <a:effectRef idx="2">
-            <a:schemeClr val="accent1"/>
-          </a:effectRef>
-          <a:fontRef idx="minor">
-            <a:schemeClr val="lt1"/>
-          </a:fontRef>
-        </p:style>
-        <p:txBody>
-          <a:bodyPr rtlCol="0" anchor="ctr"/>
-          <a:lstStyle/>
-          <a:p>
-            <a:pPr algn="ctr"/>
-          </a:p>
-        </p:txBody>
-      </p:sp>
-      <p:sp>
-        <p:nvSpPr>
-          <p:cNvPr id="13" name="TextBox 12"/>
-          <p:cNvSpPr txBox="1"/>
-          <p:nvPr/>
-        </p:nvSpPr>
-        <p:spPr>
-          <a:xfrm>
-            <a:off x="2231136" y="2505456"/>
-            <a:ext cx="228600" cy="219456"/>
-          </a:xfrm>
-          <a:prstGeom prst="rect">
-            <a:avLst/>
-          </a:prstGeom>
-          <a:noFill/>
-        </p:spPr>
-        <p:txBody>
-          <a:bodyPr wrap="square" lIns="0" rIns="0" tIns="0" bIns="0" anchor="t">
-            <a:spAutoFit/>
-          </a:bodyPr>
-          <a:lstStyle/>
-          <a:p>
-            <a:pPr algn="ctr"/>
-            <a:r>
-              <a:rPr sz="1600" b="1">
-                <a:solidFill>
-                  <a:srgbClr val="FFFFFF"/>
-                </a:solidFill>
-                <a:latin typeface="Aptos"/>
-              </a:rPr>
-              <a:t>2</a:t>
-            </a:r>
-          </a:p>
-        </p:txBody>
-      </p:sp>
-      <p:sp>
-        <p:nvSpPr>
-          <p:cNvPr id="14" name="TextBox 13"/>
-          <p:cNvSpPr txBox="1"/>
-          <p:nvPr/>
-        </p:nvSpPr>
-        <p:spPr>
-          <a:xfrm>
-            <a:off x="1901952" y="3163824"/>
-            <a:ext cx="914400" cy="310896"/>
-          </a:xfrm>
-          <a:prstGeom prst="rect">
-            <a:avLst/>
-          </a:prstGeom>
-          <a:noFill/>
-        </p:spPr>
-        <p:txBody>
-          <a:bodyPr wrap="square" lIns="0" rIns="0" tIns="0" bIns="0" anchor="t">
-            <a:spAutoFit/>
-          </a:bodyPr>
-          <a:lstStyle/>
-          <a:p>
-            <a:pPr algn="ctr"/>
-            <a:r>
-              <a:rPr sz="830" b="1">
-                <a:solidFill>
-                  <a:srgbClr val="0A1820"/>
-                </a:solidFill>
-                <a:latin typeface="Aptos"/>
-              </a:rPr>
-              <a:t>trigger en Zabbix</a:t>
-            </a:r>
-          </a:p>
-        </p:txBody>
-      </p:sp>
-      <p:cxnSp>
-        <p:nvCxnSpPr>
-          <p:cNvPr id="15" name="Connector 14"/>
-          <p:cNvCxnSpPr/>
-          <p:nvPr/>
-        </p:nvCxnSpPr>
-        <p:spPr>
-          <a:xfrm>
-            <a:off x="2670048" y="2660904"/>
-            <a:ext cx="502920" cy="0"/>
-          </a:xfrm>
-          <a:prstGeom prst="line">
-            <a:avLst/>
-          </a:prstGeom>
-          <a:ln w="20320">
-            <a:solidFill>
-              <a:srgbClr val="BFCCD6"/>
-            </a:solidFill>
-          </a:ln>
-        </p:spPr>
-        <p:style>
-          <a:lnRef idx="2">
-            <a:schemeClr val="accent1"/>
-          </a:lnRef>
-          <a:fillRef idx="0">
-            <a:schemeClr val="accent1"/>
-          </a:fillRef>
-          <a:effectRef idx="1">
-            <a:schemeClr val="accent1"/>
-          </a:effectRef>
-          <a:fontRef idx="minor">
-            <a:schemeClr val="tx1"/>
-          </a:fontRef>
-        </p:style>
-      </p:cxnSp>
-      <p:sp>
-        <p:nvSpPr>
-          <p:cNvPr id="16" name="Rounded Rectangle 15"/>
-          <p:cNvSpPr/>
-          <p:nvPr/>
-        </p:nvSpPr>
-        <p:spPr>
-          <a:xfrm>
-            <a:off x="3310128" y="2331720"/>
-            <a:ext cx="658368" cy="658368"/>
-          </a:xfrm>
-          <a:prstGeom prst="roundRect">
-            <a:avLst/>
-          </a:prstGeom>
-          <a:solidFill>
-            <a:srgbClr val="38BDF8"/>
-          </a:solidFill>
-          <a:ln>
-            <a:noFill/>
-          </a:ln>
-        </p:spPr>
-        <p:style>
-          <a:lnRef idx="1">
-            <a:schemeClr val="accent1"/>
-          </a:lnRef>
-          <a:fillRef idx="3">
-            <a:schemeClr val="accent1"/>
-          </a:fillRef>
-          <a:effectRef idx="2">
-            <a:schemeClr val="accent1"/>
-          </a:effectRef>
-          <a:fontRef idx="minor">
-            <a:schemeClr val="lt1"/>
-          </a:fontRef>
-        </p:style>
-        <p:txBody>
-          <a:bodyPr rtlCol="0" anchor="ctr"/>
-          <a:lstStyle/>
-          <a:p>
-            <a:pPr algn="ctr"/>
-          </a:p>
-        </p:txBody>
-      </p:sp>
-      <p:sp>
-        <p:nvSpPr>
-          <p:cNvPr id="17" name="TextBox 16"/>
-          <p:cNvSpPr txBox="1"/>
-          <p:nvPr/>
-        </p:nvSpPr>
-        <p:spPr>
-          <a:xfrm>
-            <a:off x="3529584" y="2505456"/>
-            <a:ext cx="228600" cy="219456"/>
-          </a:xfrm>
-          <a:prstGeom prst="rect">
-            <a:avLst/>
-          </a:prstGeom>
-          <a:noFill/>
-        </p:spPr>
-        <p:txBody>
-          <a:bodyPr wrap="square" lIns="0" rIns="0" tIns="0" bIns="0" anchor="t">
-            <a:spAutoFit/>
-          </a:bodyPr>
-          <a:lstStyle/>
-          <a:p>
-            <a:pPr algn="ctr"/>
-            <a:r>
-              <a:rPr sz="1600" b="1">
-                <a:solidFill>
-                  <a:srgbClr val="FFFFFF"/>
-                </a:solidFill>
-                <a:latin typeface="Aptos"/>
-              </a:rPr>
-              <a:t>3</a:t>
-            </a:r>
-          </a:p>
-        </p:txBody>
-      </p:sp>
-      <p:sp>
-        <p:nvSpPr>
-          <p:cNvPr id="18" name="TextBox 17"/>
-          <p:cNvSpPr txBox="1"/>
-          <p:nvPr/>
-        </p:nvSpPr>
-        <p:spPr>
-          <a:xfrm>
-            <a:off x="3200400" y="3163824"/>
-            <a:ext cx="914400" cy="310896"/>
-          </a:xfrm>
-          <a:prstGeom prst="rect">
-            <a:avLst/>
-          </a:prstGeom>
-          <a:noFill/>
-        </p:spPr>
-        <p:txBody>
-          <a:bodyPr wrap="square" lIns="0" rIns="0" tIns="0" bIns="0" anchor="t">
-            <a:spAutoFit/>
-          </a:bodyPr>
-          <a:lstStyle/>
-          <a:p>
-            <a:pPr algn="ctr"/>
-            <a:r>
-              <a:rPr sz="830" b="1">
-                <a:solidFill>
-                  <a:srgbClr val="0A1820"/>
-                </a:solidFill>
-                <a:latin typeface="Aptos"/>
-              </a:rPr>
-              <a:t>correo MailHog</a:t>
-            </a:r>
-          </a:p>
-        </p:txBody>
-      </p:sp>
-      <p:cxnSp>
-        <p:nvCxnSpPr>
-          <p:cNvPr id="19" name="Connector 18"/>
-          <p:cNvCxnSpPr/>
-          <p:nvPr/>
-        </p:nvCxnSpPr>
-        <p:spPr>
-          <a:xfrm>
-            <a:off x="3968496" y="2660904"/>
-            <a:ext cx="502920" cy="0"/>
-          </a:xfrm>
-          <a:prstGeom prst="line">
-            <a:avLst/>
-          </a:prstGeom>
-          <a:ln w="20320">
-            <a:solidFill>
-              <a:srgbClr val="BFCCD6"/>
-            </a:solidFill>
-          </a:ln>
-        </p:spPr>
-        <p:style>
-          <a:lnRef idx="2">
-            <a:schemeClr val="accent1"/>
-          </a:lnRef>
-          <a:fillRef idx="0">
-            <a:schemeClr val="accent1"/>
-          </a:fillRef>
-          <a:effectRef idx="1">
-            <a:schemeClr val="accent1"/>
-          </a:effectRef>
-          <a:fontRef idx="minor">
-            <a:schemeClr val="tx1"/>
-          </a:fontRef>
-        </p:style>
-      </p:cxnSp>
-      <p:sp>
-        <p:nvSpPr>
-          <p:cNvPr id="20" name="Rounded Rectangle 19"/>
-          <p:cNvSpPr/>
-          <p:nvPr/>
-        </p:nvSpPr>
-        <p:spPr>
-          <a:xfrm>
-            <a:off x="4608576" y="2331720"/>
-            <a:ext cx="658368" cy="658368"/>
-          </a:xfrm>
-          <a:prstGeom prst="roundRect">
-            <a:avLst/>
-          </a:prstGeom>
-          <a:solidFill>
-            <a:srgbClr val="22C5AA"/>
-          </a:solidFill>
-          <a:ln>
-            <a:noFill/>
-          </a:ln>
-        </p:spPr>
-        <p:style>
-          <a:lnRef idx="1">
-            <a:schemeClr val="accent1"/>
-          </a:lnRef>
-          <a:fillRef idx="3">
-            <a:schemeClr val="accent1"/>
-          </a:fillRef>
-          <a:effectRef idx="2">
-            <a:schemeClr val="accent1"/>
-          </a:effectRef>
-          <a:fontRef idx="minor">
-            <a:schemeClr val="lt1"/>
-          </a:fontRef>
-        </p:style>
-        <p:txBody>
-          <a:bodyPr rtlCol="0" anchor="ctr"/>
-          <a:lstStyle/>
-          <a:p>
-            <a:pPr algn="ctr"/>
-          </a:p>
-        </p:txBody>
-      </p:sp>
-      <p:sp>
-        <p:nvSpPr>
-          <p:cNvPr id="21" name="TextBox 20"/>
-          <p:cNvSpPr txBox="1"/>
-          <p:nvPr/>
-        </p:nvSpPr>
-        <p:spPr>
-          <a:xfrm>
-            <a:off x="4828032" y="2505456"/>
-            <a:ext cx="228600" cy="219456"/>
-          </a:xfrm>
-          <a:prstGeom prst="rect">
-            <a:avLst/>
-          </a:prstGeom>
-          <a:noFill/>
-        </p:spPr>
-        <p:txBody>
-          <a:bodyPr wrap="square" lIns="0" rIns="0" tIns="0" bIns="0" anchor="t">
-            <a:spAutoFit/>
-          </a:bodyPr>
-          <a:lstStyle/>
-          <a:p>
-            <a:pPr algn="ctr"/>
-            <a:r>
-              <a:rPr sz="1600" b="1">
-                <a:solidFill>
-                  <a:srgbClr val="FFFFFF"/>
-                </a:solidFill>
-                <a:latin typeface="Aptos"/>
-              </a:rPr>
-              <a:t>4</a:t>
-            </a:r>
-          </a:p>
-        </p:txBody>
-      </p:sp>
-      <p:sp>
-        <p:nvSpPr>
-          <p:cNvPr id="22" name="TextBox 21"/>
-          <p:cNvSpPr txBox="1"/>
-          <p:nvPr/>
-        </p:nvSpPr>
-        <p:spPr>
-          <a:xfrm>
-            <a:off x="4498848" y="3163824"/>
-            <a:ext cx="914400" cy="310896"/>
-          </a:xfrm>
-          <a:prstGeom prst="rect">
-            <a:avLst/>
-          </a:prstGeom>
-          <a:noFill/>
-        </p:spPr>
-        <p:txBody>
-          <a:bodyPr wrap="square" lIns="0" rIns="0" tIns="0" bIns="0" anchor="t">
-            <a:spAutoFit/>
-          </a:bodyPr>
-          <a:lstStyle/>
-          <a:p>
-            <a:pPr algn="ctr"/>
-            <a:r>
-              <a:rPr sz="830" b="1">
-                <a:solidFill>
-                  <a:srgbClr val="0A1820"/>
-                </a:solidFill>
-                <a:latin typeface="Aptos"/>
-              </a:rPr>
-              <a:t>start + recovery</a:t>
-            </a:r>
-          </a:p>
-        </p:txBody>
-      </p:sp>
-      <p:sp>
-        <p:nvSpPr>
-          <p:cNvPr id="23" name="TextBox 22"/>
-          <p:cNvSpPr txBox="1"/>
-          <p:nvPr/>
-        </p:nvSpPr>
-        <p:spPr>
-          <a:xfrm>
-            <a:off x="713232" y="5074920"/>
-            <a:ext cx="5166360" cy="658368"/>
-          </a:xfrm>
-          <a:prstGeom prst="rect">
-            <a:avLst/>
-          </a:prstGeom>
-          <a:noFill/>
-        </p:spPr>
-        <p:txBody>
-          <a:bodyPr wrap="square" lIns="0" rIns="0" tIns="0" bIns="0" anchor="t">
-            <a:spAutoFit/>
-          </a:bodyPr>
-          <a:lstStyle/>
-          <a:p>
-            <a:pPr algn="l"/>
-            <a:r>
-              <a:rPr sz="1800" b="1">
-                <a:solidFill>
-                  <a:srgbClr val="0A1820"/>
-                </a:solidFill>
-                <a:latin typeface="Aptos"/>
-              </a:rPr>
-              <a:t>El valor de esta prueba está en el flujo completo: no solo aparece el problema, también queda histórico y evidencia de recuperación.</a:t>
-            </a:r>
-          </a:p>
-        </p:txBody>
-      </p:sp>
-      <p:cxnSp>
-        <p:nvCxnSpPr>
-          <p:cNvPr id="24" name="Connector 23"/>
-          <p:cNvCxnSpPr/>
-          <p:nvPr/>
-        </p:nvCxnSpPr>
-        <p:spPr>
-          <a:xfrm>
-            <a:off x="502920" y="6428232"/>
-            <a:ext cx="11155680" cy="0"/>
-          </a:xfrm>
-          <a:prstGeom prst="line">
-            <a:avLst/>
-          </a:prstGeom>
-          <a:ln w="8890">
-            <a:solidFill>
-              <a:srgbClr val="BFCCD6"/>
-            </a:solidFill>
-          </a:ln>
-        </p:spPr>
-        <p:style>
-          <a:lnRef idx="2">
-            <a:schemeClr val="accent1"/>
-          </a:lnRef>
-          <a:fillRef idx="0">
-            <a:schemeClr val="accent1"/>
-          </a:fillRef>
-          <a:effectRef idx="1">
-            <a:schemeClr val="accent1"/>
-          </a:effectRef>
-          <a:fontRef idx="minor">
-            <a:schemeClr val="tx1"/>
-          </a:fontRef>
-        </p:style>
-      </p:cxnSp>
-      <p:sp>
-        <p:nvSpPr>
-          <p:cNvPr id="25" name="TextBox 24"/>
-          <p:cNvSpPr txBox="1"/>
-          <p:nvPr/>
-        </p:nvSpPr>
-        <p:spPr>
-          <a:xfrm>
-            <a:off x="502920" y="6519672"/>
-            <a:ext cx="4754880" cy="164592"/>
-          </a:xfrm>
-          <a:prstGeom prst="rect">
-            <a:avLst/>
-          </a:prstGeom>
-          <a:noFill/>
-        </p:spPr>
-        <p:txBody>
-          <a:bodyPr wrap="square" lIns="0" rIns="0" tIns="0" bIns="0" anchor="t">
-            <a:spAutoFit/>
-          </a:bodyPr>
-          <a:lstStyle/>
-          <a:p>
-            <a:pPr algn="l"/>
-            <a:r>
-              <a:rPr sz="750" b="0">
-                <a:solidFill>
-                  <a:srgbClr val="5C6975"/>
-                </a:solidFill>
-                <a:latin typeface="Aptos"/>
-              </a:rPr>
-              <a:t>Proyecto 7 - Monitoreo de infraestructura con Zabbix</a:t>
-            </a:r>
-          </a:p>
-        </p:txBody>
-      </p:sp>
-      <p:sp>
-        <p:nvSpPr>
-          <p:cNvPr id="26" name="TextBox 25"/>
           <p:cNvSpPr txBox="1"/>
           <p:nvPr/>
         </p:nvSpPr>

--- a/entrega-final/Presentacion_Proyecto7_Zabbix.pptx
+++ b/entrega-final/Presentacion_Proyecto7_Zabbix.pptx
@@ -7,7 +7,7 @@
   <p:sldIdLst>
     <p:sldId id="256" r:id="rId7"/>
     <p:sldId id="257" r:id="rId8"/>
-    <p:sldId id="270" r:id="rId21"/>
+    <p:sldId id="271" r:id="rId22"/>
     <p:sldId id="258" r:id="rId9"/>
     <p:sldId id="259" r:id="rId10"/>
     <p:sldId id="260" r:id="rId11"/>
@@ -18,10 +18,11 @@
     <p:sldId id="265" r:id="rId16"/>
     <p:sldId id="266" r:id="rId17"/>
     <p:sldId id="267" r:id="rId18"/>
-    <p:sldId id="271" r:id="rId22"/>
     <p:sldId id="268" r:id="rId19"/>
+    <p:sldId id="272" r:id="rId23"/>
     <p:sldId id="269" r:id="rId20"/>
-    <p:sldId id="272" r:id="rId23"/>
+    <p:sldId id="270" r:id="rId21"/>
+    <p:sldId id="273" r:id="rId24"/>
   </p:sldIdLst>
   <p:sldSz cx="12191695" cy="6858000" type="screen4x3"/>
   <p:notesSz cx="6858000" cy="9144000"/>
@@ -3928,7 +3929,7 @@
                 </a:solidFill>
                 <a:latin typeface="Aptos"/>
               </a:rPr>
-              <a:t>01/17</a:t>
+              <a:t>01/18</a:t>
             </a:r>
           </a:p>
         </p:txBody>
@@ -3942,6 +3943,938 @@
 </file>
 
 <file path=ppt/slides/slide10.xml><?xml version="1.0" encoding="utf-8"?>
+<p:sld xmlns:a="http://schemas.openxmlformats.org/drawingml/2006/main" xmlns:p="http://schemas.openxmlformats.org/presentationml/2006/main" xmlns:r="http://schemas.openxmlformats.org/officeDocument/2006/relationships">
+  <p:cSld>
+    <p:bg>
+      <p:bgPr>
+        <a:solidFill>
+          <a:srgbClr val="FAF7F4"/>
+        </a:solidFill>
+        <a:effectLst/>
+      </p:bgPr>
+    </p:bg>
+    <p:spTree>
+      <p:nvGrpSpPr>
+        <p:cNvPr id="1" name=""/>
+        <p:cNvGrpSpPr/>
+        <p:nvPr/>
+      </p:nvGrpSpPr>
+      <p:grpSpPr/>
+      <p:sp>
+        <p:nvSpPr>
+          <p:cNvPr id="7" name="Rectangle 6"/>
+          <p:cNvSpPr/>
+          <p:nvPr/>
+        </p:nvSpPr>
+        <p:spPr>
+          <a:xfrm>
+            <a:off x="6236207" y="1527048"/>
+            <a:ext cx="5038344" cy="3300984"/>
+          </a:xfrm>
+          <a:prstGeom prst="rect">
+            <a:avLst/>
+          </a:prstGeom>
+          <a:solidFill>
+            <a:srgbClr val="FFFFFF"/>
+          </a:solidFill>
+          <a:ln w="10160">
+            <a:solidFill>
+              <a:srgbClr val="BFCCD6"/>
+            </a:solidFill>
+          </a:ln>
+        </p:spPr>
+        <p:style>
+          <a:lnRef idx="1">
+            <a:schemeClr val="accent1"/>
+          </a:lnRef>
+          <a:fillRef idx="3">
+            <a:schemeClr val="accent1"/>
+          </a:fillRef>
+          <a:effectRef idx="2">
+            <a:schemeClr val="accent1"/>
+          </a:effectRef>
+          <a:fontRef idx="minor">
+            <a:schemeClr val="lt1"/>
+          </a:fontRef>
+        </p:style>
+        <p:txBody>
+          <a:bodyPr rtlCol="0" anchor="ctr"/>
+          <a:lstStyle/>
+          <a:p>
+            <a:pPr algn="ctr"/>
+          </a:p>
+        </p:txBody>
+      </p:sp>
+      <p:sp>
+        <p:nvSpPr>
+          <p:cNvPr id="2" name="TextBox 1"/>
+          <p:cNvSpPr txBox="1"/>
+          <p:nvPr/>
+        </p:nvSpPr>
+        <p:spPr>
+          <a:xfrm>
+            <a:off x="502920" y="384048"/>
+            <a:ext cx="384048" cy="201168"/>
+          </a:xfrm>
+          <a:prstGeom prst="rect">
+            <a:avLst/>
+          </a:prstGeom>
+          <a:noFill/>
+        </p:spPr>
+        <p:txBody>
+          <a:bodyPr wrap="square" lIns="0" rIns="0" tIns="0" bIns="0" anchor="t">
+            <a:spAutoFit/>
+          </a:bodyPr>
+          <a:lstStyle/>
+          <a:p>
+            <a:pPr algn="l"/>
+            <a:r>
+              <a:rPr sz="800" b="1">
+                <a:solidFill>
+                  <a:srgbClr val="0A1820"/>
+                </a:solidFill>
+                <a:latin typeface="Aptos"/>
+              </a:rPr>
+              <a:t>11</a:t>
+            </a:r>
+          </a:p>
+        </p:txBody>
+      </p:sp>
+      <p:cxnSp>
+        <p:nvCxnSpPr>
+          <p:cNvPr id="3" name="Connector 2"/>
+          <p:cNvCxnSpPr/>
+          <p:nvPr/>
+        </p:nvCxnSpPr>
+        <p:spPr>
+          <a:xfrm>
+            <a:off x="941832" y="475488"/>
+            <a:ext cx="685800" cy="0"/>
+          </a:xfrm>
+          <a:prstGeom prst="line">
+            <a:avLst/>
+          </a:prstGeom>
+          <a:ln w="13970">
+            <a:solidFill>
+              <a:srgbClr val="0A1820"/>
+            </a:solidFill>
+          </a:ln>
+        </p:spPr>
+        <p:style>
+          <a:lnRef idx="2">
+            <a:schemeClr val="accent1"/>
+          </a:lnRef>
+          <a:fillRef idx="0">
+            <a:schemeClr val="accent1"/>
+          </a:fillRef>
+          <a:effectRef idx="1">
+            <a:schemeClr val="accent1"/>
+          </a:effectRef>
+          <a:fontRef idx="minor">
+            <a:schemeClr val="tx1"/>
+          </a:fontRef>
+        </p:style>
+      </p:cxnSp>
+      <p:sp>
+        <p:nvSpPr>
+          <p:cNvPr id="4" name="TextBox 3"/>
+          <p:cNvSpPr txBox="1"/>
+          <p:nvPr/>
+        </p:nvSpPr>
+        <p:spPr>
+          <a:xfrm>
+            <a:off x="1737360" y="356616"/>
+            <a:ext cx="3108960" cy="274320"/>
+          </a:xfrm>
+          <a:prstGeom prst="rect">
+            <a:avLst/>
+          </a:prstGeom>
+          <a:noFill/>
+        </p:spPr>
+        <p:txBody>
+          <a:bodyPr wrap="square" lIns="0" rIns="0" tIns="0" bIns="0" anchor="t">
+            <a:spAutoFit/>
+          </a:bodyPr>
+          <a:lstStyle/>
+          <a:p>
+            <a:pPr algn="l"/>
+            <a:r>
+              <a:rPr sz="800" b="1">
+                <a:solidFill>
+                  <a:srgbClr val="0A1820"/>
+                </a:solidFill>
+                <a:latin typeface="Aptos"/>
+              </a:rPr>
+              <a:t>CAÍDA CONTROLADA</a:t>
+            </a:r>
+          </a:p>
+        </p:txBody>
+      </p:sp>
+      <p:sp>
+        <p:nvSpPr>
+          <p:cNvPr id="5" name="TextBox 4"/>
+          <p:cNvSpPr txBox="1"/>
+          <p:nvPr/>
+        </p:nvSpPr>
+        <p:spPr>
+          <a:xfrm>
+            <a:off x="502920" y="713232"/>
+            <a:ext cx="7498079" cy="868680"/>
+          </a:xfrm>
+          <a:prstGeom prst="rect">
+            <a:avLst/>
+          </a:prstGeom>
+          <a:noFill/>
+        </p:spPr>
+        <p:txBody>
+          <a:bodyPr wrap="square" lIns="0" rIns="0" tIns="0" bIns="0" anchor="t">
+            <a:spAutoFit/>
+          </a:bodyPr>
+          <a:lstStyle/>
+          <a:p>
+            <a:pPr algn="l"/>
+            <a:r>
+              <a:rPr sz="3000" b="1">
+                <a:solidFill>
+                  <a:srgbClr val="0A1820"/>
+                </a:solidFill>
+                <a:latin typeface="Aptos Display"/>
+              </a:rPr>
+              <a:t>La caída controlada prueba el flujo completo.</a:t>
+            </a:r>
+          </a:p>
+        </p:txBody>
+      </p:sp>
+      <p:pic>
+        <p:nvPicPr>
+          <p:cNvPr id="6" name="Picture 5" descr="06_zabbix_falla_web_activa.png"/>
+          <p:cNvPicPr>
+            <a:picLocks noChangeAspect="1"/>
+          </p:cNvPicPr>
+          <p:nvPr/>
+        </p:nvPicPr>
+        <p:blipFill>
+          <a:blip r:embed="rId2"/>
+          <a:stretch>
+            <a:fillRect/>
+          </a:stretch>
+        </p:blipFill>
+        <p:spPr>
+          <a:xfrm>
+            <a:off x="6263640" y="1554480"/>
+            <a:ext cx="4983480" cy="3246120"/>
+          </a:xfrm>
+          <a:prstGeom prst="rect">
+            <a:avLst/>
+          </a:prstGeom>
+        </p:spPr>
+      </p:pic>
+      <p:sp>
+        <p:nvSpPr>
+          <p:cNvPr id="8" name="Rounded Rectangle 7"/>
+          <p:cNvSpPr/>
+          <p:nvPr/>
+        </p:nvSpPr>
+        <p:spPr>
+          <a:xfrm>
+            <a:off x="713232" y="2331720"/>
+            <a:ext cx="658368" cy="658368"/>
+          </a:xfrm>
+          <a:prstGeom prst="roundRect">
+            <a:avLst/>
+          </a:prstGeom>
+          <a:solidFill>
+            <a:srgbClr val="EF4444"/>
+          </a:solidFill>
+          <a:ln>
+            <a:noFill/>
+          </a:ln>
+        </p:spPr>
+        <p:style>
+          <a:lnRef idx="1">
+            <a:schemeClr val="accent1"/>
+          </a:lnRef>
+          <a:fillRef idx="3">
+            <a:schemeClr val="accent1"/>
+          </a:fillRef>
+          <a:effectRef idx="2">
+            <a:schemeClr val="accent1"/>
+          </a:effectRef>
+          <a:fontRef idx="minor">
+            <a:schemeClr val="lt1"/>
+          </a:fontRef>
+        </p:style>
+        <p:txBody>
+          <a:bodyPr rtlCol="0" anchor="ctr"/>
+          <a:lstStyle/>
+          <a:p>
+            <a:pPr algn="ctr"/>
+          </a:p>
+        </p:txBody>
+      </p:sp>
+      <p:sp>
+        <p:nvSpPr>
+          <p:cNvPr id="9" name="TextBox 8"/>
+          <p:cNvSpPr txBox="1"/>
+          <p:nvPr/>
+        </p:nvSpPr>
+        <p:spPr>
+          <a:xfrm>
+            <a:off x="932688" y="2505456"/>
+            <a:ext cx="228600" cy="219456"/>
+          </a:xfrm>
+          <a:prstGeom prst="rect">
+            <a:avLst/>
+          </a:prstGeom>
+          <a:noFill/>
+        </p:spPr>
+        <p:txBody>
+          <a:bodyPr wrap="square" lIns="0" rIns="0" tIns="0" bIns="0" anchor="t">
+            <a:spAutoFit/>
+          </a:bodyPr>
+          <a:lstStyle/>
+          <a:p>
+            <a:pPr algn="ctr"/>
+            <a:r>
+              <a:rPr sz="1600" b="1">
+                <a:solidFill>
+                  <a:srgbClr val="FFFFFF"/>
+                </a:solidFill>
+                <a:latin typeface="Aptos"/>
+              </a:rPr>
+              <a:t>1</a:t>
+            </a:r>
+          </a:p>
+        </p:txBody>
+      </p:sp>
+      <p:sp>
+        <p:nvSpPr>
+          <p:cNvPr id="10" name="TextBox 9"/>
+          <p:cNvSpPr txBox="1"/>
+          <p:nvPr/>
+        </p:nvSpPr>
+        <p:spPr>
+          <a:xfrm>
+            <a:off x="603504" y="3163824"/>
+            <a:ext cx="914400" cy="310896"/>
+          </a:xfrm>
+          <a:prstGeom prst="rect">
+            <a:avLst/>
+          </a:prstGeom>
+          <a:noFill/>
+        </p:spPr>
+        <p:txBody>
+          <a:bodyPr wrap="square" lIns="0" rIns="0" tIns="0" bIns="0" anchor="t">
+            <a:spAutoFit/>
+          </a:bodyPr>
+          <a:lstStyle/>
+          <a:p>
+            <a:pPr algn="ctr"/>
+            <a:r>
+              <a:rPr sz="830" b="1">
+                <a:solidFill>
+                  <a:srgbClr val="0A1820"/>
+                </a:solidFill>
+                <a:latin typeface="Aptos"/>
+              </a:rPr>
+              <a:t>stop web-service</a:t>
+            </a:r>
+          </a:p>
+        </p:txBody>
+      </p:sp>
+      <p:cxnSp>
+        <p:nvCxnSpPr>
+          <p:cNvPr id="11" name="Connector 10"/>
+          <p:cNvCxnSpPr/>
+          <p:nvPr/>
+        </p:nvCxnSpPr>
+        <p:spPr>
+          <a:xfrm>
+            <a:off x="1371600" y="2660904"/>
+            <a:ext cx="502919" cy="0"/>
+          </a:xfrm>
+          <a:prstGeom prst="line">
+            <a:avLst/>
+          </a:prstGeom>
+          <a:ln w="20320">
+            <a:solidFill>
+              <a:srgbClr val="BFCCD6"/>
+            </a:solidFill>
+          </a:ln>
+        </p:spPr>
+        <p:style>
+          <a:lnRef idx="2">
+            <a:schemeClr val="accent1"/>
+          </a:lnRef>
+          <a:fillRef idx="0">
+            <a:schemeClr val="accent1"/>
+          </a:fillRef>
+          <a:effectRef idx="1">
+            <a:schemeClr val="accent1"/>
+          </a:effectRef>
+          <a:fontRef idx="minor">
+            <a:schemeClr val="tx1"/>
+          </a:fontRef>
+        </p:style>
+      </p:cxnSp>
+      <p:sp>
+        <p:nvSpPr>
+          <p:cNvPr id="12" name="Rounded Rectangle 11"/>
+          <p:cNvSpPr/>
+          <p:nvPr/>
+        </p:nvSpPr>
+        <p:spPr>
+          <a:xfrm>
+            <a:off x="2011680" y="2331720"/>
+            <a:ext cx="658368" cy="658368"/>
+          </a:xfrm>
+          <a:prstGeom prst="roundRect">
+            <a:avLst/>
+          </a:prstGeom>
+          <a:solidFill>
+            <a:srgbClr val="F59E0B"/>
+          </a:solidFill>
+          <a:ln>
+            <a:noFill/>
+          </a:ln>
+        </p:spPr>
+        <p:style>
+          <a:lnRef idx="1">
+            <a:schemeClr val="accent1"/>
+          </a:lnRef>
+          <a:fillRef idx="3">
+            <a:schemeClr val="accent1"/>
+          </a:fillRef>
+          <a:effectRef idx="2">
+            <a:schemeClr val="accent1"/>
+          </a:effectRef>
+          <a:fontRef idx="minor">
+            <a:schemeClr val="lt1"/>
+          </a:fontRef>
+        </p:style>
+        <p:txBody>
+          <a:bodyPr rtlCol="0" anchor="ctr"/>
+          <a:lstStyle/>
+          <a:p>
+            <a:pPr algn="ctr"/>
+          </a:p>
+        </p:txBody>
+      </p:sp>
+      <p:sp>
+        <p:nvSpPr>
+          <p:cNvPr id="13" name="TextBox 12"/>
+          <p:cNvSpPr txBox="1"/>
+          <p:nvPr/>
+        </p:nvSpPr>
+        <p:spPr>
+          <a:xfrm>
+            <a:off x="2231136" y="2505456"/>
+            <a:ext cx="228600" cy="219456"/>
+          </a:xfrm>
+          <a:prstGeom prst="rect">
+            <a:avLst/>
+          </a:prstGeom>
+          <a:noFill/>
+        </p:spPr>
+        <p:txBody>
+          <a:bodyPr wrap="square" lIns="0" rIns="0" tIns="0" bIns="0" anchor="t">
+            <a:spAutoFit/>
+          </a:bodyPr>
+          <a:lstStyle/>
+          <a:p>
+            <a:pPr algn="ctr"/>
+            <a:r>
+              <a:rPr sz="1600" b="1">
+                <a:solidFill>
+                  <a:srgbClr val="FFFFFF"/>
+                </a:solidFill>
+                <a:latin typeface="Aptos"/>
+              </a:rPr>
+              <a:t>2</a:t>
+            </a:r>
+          </a:p>
+        </p:txBody>
+      </p:sp>
+      <p:sp>
+        <p:nvSpPr>
+          <p:cNvPr id="14" name="TextBox 13"/>
+          <p:cNvSpPr txBox="1"/>
+          <p:nvPr/>
+        </p:nvSpPr>
+        <p:spPr>
+          <a:xfrm>
+            <a:off x="1901952" y="3163824"/>
+            <a:ext cx="914400" cy="310896"/>
+          </a:xfrm>
+          <a:prstGeom prst="rect">
+            <a:avLst/>
+          </a:prstGeom>
+          <a:noFill/>
+        </p:spPr>
+        <p:txBody>
+          <a:bodyPr wrap="square" lIns="0" rIns="0" tIns="0" bIns="0" anchor="t">
+            <a:spAutoFit/>
+          </a:bodyPr>
+          <a:lstStyle/>
+          <a:p>
+            <a:pPr algn="ctr"/>
+            <a:r>
+              <a:rPr sz="830" b="1">
+                <a:solidFill>
+                  <a:srgbClr val="0A1820"/>
+                </a:solidFill>
+                <a:latin typeface="Aptos"/>
+              </a:rPr>
+              <a:t>trigger en Zabbix</a:t>
+            </a:r>
+          </a:p>
+        </p:txBody>
+      </p:sp>
+      <p:cxnSp>
+        <p:nvCxnSpPr>
+          <p:cNvPr id="15" name="Connector 14"/>
+          <p:cNvCxnSpPr/>
+          <p:nvPr/>
+        </p:nvCxnSpPr>
+        <p:spPr>
+          <a:xfrm>
+            <a:off x="2670048" y="2660904"/>
+            <a:ext cx="502920" cy="0"/>
+          </a:xfrm>
+          <a:prstGeom prst="line">
+            <a:avLst/>
+          </a:prstGeom>
+          <a:ln w="20320">
+            <a:solidFill>
+              <a:srgbClr val="BFCCD6"/>
+            </a:solidFill>
+          </a:ln>
+        </p:spPr>
+        <p:style>
+          <a:lnRef idx="2">
+            <a:schemeClr val="accent1"/>
+          </a:lnRef>
+          <a:fillRef idx="0">
+            <a:schemeClr val="accent1"/>
+          </a:fillRef>
+          <a:effectRef idx="1">
+            <a:schemeClr val="accent1"/>
+          </a:effectRef>
+          <a:fontRef idx="minor">
+            <a:schemeClr val="tx1"/>
+          </a:fontRef>
+        </p:style>
+      </p:cxnSp>
+      <p:sp>
+        <p:nvSpPr>
+          <p:cNvPr id="16" name="Rounded Rectangle 15"/>
+          <p:cNvSpPr/>
+          <p:nvPr/>
+        </p:nvSpPr>
+        <p:spPr>
+          <a:xfrm>
+            <a:off x="3310128" y="2331720"/>
+            <a:ext cx="658368" cy="658368"/>
+          </a:xfrm>
+          <a:prstGeom prst="roundRect">
+            <a:avLst/>
+          </a:prstGeom>
+          <a:solidFill>
+            <a:srgbClr val="38BDF8"/>
+          </a:solidFill>
+          <a:ln>
+            <a:noFill/>
+          </a:ln>
+        </p:spPr>
+        <p:style>
+          <a:lnRef idx="1">
+            <a:schemeClr val="accent1"/>
+          </a:lnRef>
+          <a:fillRef idx="3">
+            <a:schemeClr val="accent1"/>
+          </a:fillRef>
+          <a:effectRef idx="2">
+            <a:schemeClr val="accent1"/>
+          </a:effectRef>
+          <a:fontRef idx="minor">
+            <a:schemeClr val="lt1"/>
+          </a:fontRef>
+        </p:style>
+        <p:txBody>
+          <a:bodyPr rtlCol="0" anchor="ctr"/>
+          <a:lstStyle/>
+          <a:p>
+            <a:pPr algn="ctr"/>
+          </a:p>
+        </p:txBody>
+      </p:sp>
+      <p:sp>
+        <p:nvSpPr>
+          <p:cNvPr id="17" name="TextBox 16"/>
+          <p:cNvSpPr txBox="1"/>
+          <p:nvPr/>
+        </p:nvSpPr>
+        <p:spPr>
+          <a:xfrm>
+            <a:off x="3529584" y="2505456"/>
+            <a:ext cx="228600" cy="219456"/>
+          </a:xfrm>
+          <a:prstGeom prst="rect">
+            <a:avLst/>
+          </a:prstGeom>
+          <a:noFill/>
+        </p:spPr>
+        <p:txBody>
+          <a:bodyPr wrap="square" lIns="0" rIns="0" tIns="0" bIns="0" anchor="t">
+            <a:spAutoFit/>
+          </a:bodyPr>
+          <a:lstStyle/>
+          <a:p>
+            <a:pPr algn="ctr"/>
+            <a:r>
+              <a:rPr sz="1600" b="1">
+                <a:solidFill>
+                  <a:srgbClr val="FFFFFF"/>
+                </a:solidFill>
+                <a:latin typeface="Aptos"/>
+              </a:rPr>
+              <a:t>3</a:t>
+            </a:r>
+          </a:p>
+        </p:txBody>
+      </p:sp>
+      <p:sp>
+        <p:nvSpPr>
+          <p:cNvPr id="18" name="TextBox 17"/>
+          <p:cNvSpPr txBox="1"/>
+          <p:nvPr/>
+        </p:nvSpPr>
+        <p:spPr>
+          <a:xfrm>
+            <a:off x="3200400" y="3163824"/>
+            <a:ext cx="914400" cy="310896"/>
+          </a:xfrm>
+          <a:prstGeom prst="rect">
+            <a:avLst/>
+          </a:prstGeom>
+          <a:noFill/>
+        </p:spPr>
+        <p:txBody>
+          <a:bodyPr wrap="square" lIns="0" rIns="0" tIns="0" bIns="0" anchor="t">
+            <a:spAutoFit/>
+          </a:bodyPr>
+          <a:lstStyle/>
+          <a:p>
+            <a:pPr algn="ctr"/>
+            <a:r>
+              <a:rPr sz="830" b="1">
+                <a:solidFill>
+                  <a:srgbClr val="0A1820"/>
+                </a:solidFill>
+                <a:latin typeface="Aptos"/>
+              </a:rPr>
+              <a:t>correo MailHog</a:t>
+            </a:r>
+          </a:p>
+        </p:txBody>
+      </p:sp>
+      <p:cxnSp>
+        <p:nvCxnSpPr>
+          <p:cNvPr id="19" name="Connector 18"/>
+          <p:cNvCxnSpPr/>
+          <p:nvPr/>
+        </p:nvCxnSpPr>
+        <p:spPr>
+          <a:xfrm>
+            <a:off x="3968496" y="2660904"/>
+            <a:ext cx="502920" cy="0"/>
+          </a:xfrm>
+          <a:prstGeom prst="line">
+            <a:avLst/>
+          </a:prstGeom>
+          <a:ln w="20320">
+            <a:solidFill>
+              <a:srgbClr val="BFCCD6"/>
+            </a:solidFill>
+          </a:ln>
+        </p:spPr>
+        <p:style>
+          <a:lnRef idx="2">
+            <a:schemeClr val="accent1"/>
+          </a:lnRef>
+          <a:fillRef idx="0">
+            <a:schemeClr val="accent1"/>
+          </a:fillRef>
+          <a:effectRef idx="1">
+            <a:schemeClr val="accent1"/>
+          </a:effectRef>
+          <a:fontRef idx="minor">
+            <a:schemeClr val="tx1"/>
+          </a:fontRef>
+        </p:style>
+      </p:cxnSp>
+      <p:sp>
+        <p:nvSpPr>
+          <p:cNvPr id="20" name="Rounded Rectangle 19"/>
+          <p:cNvSpPr/>
+          <p:nvPr/>
+        </p:nvSpPr>
+        <p:spPr>
+          <a:xfrm>
+            <a:off x="4608576" y="2331720"/>
+            <a:ext cx="658368" cy="658368"/>
+          </a:xfrm>
+          <a:prstGeom prst="roundRect">
+            <a:avLst/>
+          </a:prstGeom>
+          <a:solidFill>
+            <a:srgbClr val="22C5AA"/>
+          </a:solidFill>
+          <a:ln>
+            <a:noFill/>
+          </a:ln>
+        </p:spPr>
+        <p:style>
+          <a:lnRef idx="1">
+            <a:schemeClr val="accent1"/>
+          </a:lnRef>
+          <a:fillRef idx="3">
+            <a:schemeClr val="accent1"/>
+          </a:fillRef>
+          <a:effectRef idx="2">
+            <a:schemeClr val="accent1"/>
+          </a:effectRef>
+          <a:fontRef idx="minor">
+            <a:schemeClr val="lt1"/>
+          </a:fontRef>
+        </p:style>
+        <p:txBody>
+          <a:bodyPr rtlCol="0" anchor="ctr"/>
+          <a:lstStyle/>
+          <a:p>
+            <a:pPr algn="ctr"/>
+          </a:p>
+        </p:txBody>
+      </p:sp>
+      <p:sp>
+        <p:nvSpPr>
+          <p:cNvPr id="21" name="TextBox 20"/>
+          <p:cNvSpPr txBox="1"/>
+          <p:nvPr/>
+        </p:nvSpPr>
+        <p:spPr>
+          <a:xfrm>
+            <a:off x="4828032" y="2505456"/>
+            <a:ext cx="228600" cy="219456"/>
+          </a:xfrm>
+          <a:prstGeom prst="rect">
+            <a:avLst/>
+          </a:prstGeom>
+          <a:noFill/>
+        </p:spPr>
+        <p:txBody>
+          <a:bodyPr wrap="square" lIns="0" rIns="0" tIns="0" bIns="0" anchor="t">
+            <a:spAutoFit/>
+          </a:bodyPr>
+          <a:lstStyle/>
+          <a:p>
+            <a:pPr algn="ctr"/>
+            <a:r>
+              <a:rPr sz="1600" b="1">
+                <a:solidFill>
+                  <a:srgbClr val="FFFFFF"/>
+                </a:solidFill>
+                <a:latin typeface="Aptos"/>
+              </a:rPr>
+              <a:t>4</a:t>
+            </a:r>
+          </a:p>
+        </p:txBody>
+      </p:sp>
+      <p:sp>
+        <p:nvSpPr>
+          <p:cNvPr id="22" name="TextBox 21"/>
+          <p:cNvSpPr txBox="1"/>
+          <p:nvPr/>
+        </p:nvSpPr>
+        <p:spPr>
+          <a:xfrm>
+            <a:off x="4498848" y="3163824"/>
+            <a:ext cx="914400" cy="310896"/>
+          </a:xfrm>
+          <a:prstGeom prst="rect">
+            <a:avLst/>
+          </a:prstGeom>
+          <a:noFill/>
+        </p:spPr>
+        <p:txBody>
+          <a:bodyPr wrap="square" lIns="0" rIns="0" tIns="0" bIns="0" anchor="t">
+            <a:spAutoFit/>
+          </a:bodyPr>
+          <a:lstStyle/>
+          <a:p>
+            <a:pPr algn="ctr"/>
+            <a:r>
+              <a:rPr sz="830" b="1">
+                <a:solidFill>
+                  <a:srgbClr val="0A1820"/>
+                </a:solidFill>
+                <a:latin typeface="Aptos"/>
+              </a:rPr>
+              <a:t>start + recovery</a:t>
+            </a:r>
+          </a:p>
+        </p:txBody>
+      </p:sp>
+      <p:sp>
+        <p:nvSpPr>
+          <p:cNvPr id="23" name="TextBox 22"/>
+          <p:cNvSpPr txBox="1"/>
+          <p:nvPr/>
+        </p:nvSpPr>
+        <p:spPr>
+          <a:xfrm>
+            <a:off x="713232" y="5074920"/>
+            <a:ext cx="5166360" cy="658368"/>
+          </a:xfrm>
+          <a:prstGeom prst="rect">
+            <a:avLst/>
+          </a:prstGeom>
+          <a:noFill/>
+        </p:spPr>
+        <p:txBody>
+          <a:bodyPr wrap="square" lIns="0" rIns="0" tIns="0" bIns="0" anchor="t">
+            <a:spAutoFit/>
+          </a:bodyPr>
+          <a:lstStyle/>
+          <a:p>
+            <a:pPr algn="l"/>
+            <a:r>
+              <a:rPr sz="1800" b="1">
+                <a:solidFill>
+                  <a:srgbClr val="0A1820"/>
+                </a:solidFill>
+                <a:latin typeface="Aptos"/>
+              </a:rPr>
+              <a:t>El valor de esta prueba está en el flujo completo: no solo aparece el problema, también queda histórico y evidencia de recuperación.</a:t>
+            </a:r>
+          </a:p>
+        </p:txBody>
+      </p:sp>
+      <p:cxnSp>
+        <p:nvCxnSpPr>
+          <p:cNvPr id="24" name="Connector 23"/>
+          <p:cNvCxnSpPr/>
+          <p:nvPr/>
+        </p:nvCxnSpPr>
+        <p:spPr>
+          <a:xfrm>
+            <a:off x="502920" y="6428232"/>
+            <a:ext cx="11155680" cy="0"/>
+          </a:xfrm>
+          <a:prstGeom prst="line">
+            <a:avLst/>
+          </a:prstGeom>
+          <a:ln w="8890">
+            <a:solidFill>
+              <a:srgbClr val="BFCCD6"/>
+            </a:solidFill>
+          </a:ln>
+        </p:spPr>
+        <p:style>
+          <a:lnRef idx="2">
+            <a:schemeClr val="accent1"/>
+          </a:lnRef>
+          <a:fillRef idx="0">
+            <a:schemeClr val="accent1"/>
+          </a:fillRef>
+          <a:effectRef idx="1">
+            <a:schemeClr val="accent1"/>
+          </a:effectRef>
+          <a:fontRef idx="minor">
+            <a:schemeClr val="tx1"/>
+          </a:fontRef>
+        </p:style>
+      </p:cxnSp>
+      <p:sp>
+        <p:nvSpPr>
+          <p:cNvPr id="25" name="TextBox 24"/>
+          <p:cNvSpPr txBox="1"/>
+          <p:nvPr/>
+        </p:nvSpPr>
+        <p:spPr>
+          <a:xfrm>
+            <a:off x="502920" y="6519672"/>
+            <a:ext cx="4754880" cy="164592"/>
+          </a:xfrm>
+          <a:prstGeom prst="rect">
+            <a:avLst/>
+          </a:prstGeom>
+          <a:noFill/>
+        </p:spPr>
+        <p:txBody>
+          <a:bodyPr wrap="square" lIns="0" rIns="0" tIns="0" bIns="0" anchor="t">
+            <a:spAutoFit/>
+          </a:bodyPr>
+          <a:lstStyle/>
+          <a:p>
+            <a:pPr algn="l"/>
+            <a:r>
+              <a:rPr sz="750" b="0">
+                <a:solidFill>
+                  <a:srgbClr val="5C6975"/>
+                </a:solidFill>
+                <a:latin typeface="Aptos"/>
+              </a:rPr>
+              <a:t>Proyecto 7 - Monitoreo de infraestructura con Zabbix</a:t>
+            </a:r>
+          </a:p>
+        </p:txBody>
+      </p:sp>
+      <p:sp>
+        <p:nvSpPr>
+          <p:cNvPr id="26" name="TextBox 25"/>
+          <p:cNvSpPr txBox="1"/>
+          <p:nvPr/>
+        </p:nvSpPr>
+        <p:spPr>
+          <a:xfrm>
+            <a:off x="10972800" y="6519672"/>
+            <a:ext cx="640080" cy="164592"/>
+          </a:xfrm>
+          <a:prstGeom prst="rect">
+            <a:avLst/>
+          </a:prstGeom>
+          <a:noFill/>
+        </p:spPr>
+        <p:txBody>
+          <a:bodyPr wrap="square" lIns="0" rIns="0" tIns="0" bIns="0" anchor="t">
+            <a:spAutoFit/>
+          </a:bodyPr>
+          <a:lstStyle/>
+          <a:p>
+            <a:pPr algn="r"/>
+            <a:r>
+              <a:rPr sz="750">
+                <a:solidFill>
+                  <a:srgbClr val="5C6975"/>
+                </a:solidFill>
+                <a:latin typeface="Aptos"/>
+              </a:rPr>
+              <a:t>11/18</a:t>
+            </a:r>
+          </a:p>
+        </p:txBody>
+      </p:sp>
+    </p:spTree>
+  </p:cSld>
+  <p:clrMapOvr>
+    <a:masterClrMapping/>
+  </p:clrMapOvr>
+</p:sld>
+</file>
+
+<file path=ppt/slides/slide11.xml><?xml version="1.0" encoding="utf-8"?>
 <p:sld xmlns:a="http://schemas.openxmlformats.org/drawingml/2006/main" xmlns:p="http://schemas.openxmlformats.org/presentationml/2006/main" xmlns:r="http://schemas.openxmlformats.org/officeDocument/2006/relationships">
   <p:cSld>
     <p:bg>
@@ -4034,7 +4967,7 @@
                 </a:solidFill>
                 <a:latin typeface="Aptos"/>
               </a:rPr>
-              <a:t>11</a:t>
+              <a:t>12</a:t>
             </a:r>
           </a:p>
         </p:txBody>
@@ -4584,7 +5517,7 @@
                 </a:solidFill>
                 <a:latin typeface="Aptos"/>
               </a:rPr>
-              <a:t>11/17</a:t>
+              <a:t>12/18</a:t>
             </a:r>
           </a:p>
         </p:txBody>
@@ -4597,7 +5530,7 @@
 </p:sld>
 </file>
 
-<file path=ppt/slides/slide11.xml><?xml version="1.0" encoding="utf-8"?>
+<file path=ppt/slides/slide12.xml><?xml version="1.0" encoding="utf-8"?>
 <p:sld xmlns:a="http://schemas.openxmlformats.org/drawingml/2006/main" xmlns:p="http://schemas.openxmlformats.org/presentationml/2006/main" xmlns:r="http://schemas.openxmlformats.org/officeDocument/2006/relationships">
   <p:cSld>
     <p:bg>
@@ -4645,7 +5578,7 @@
                 </a:solidFill>
                 <a:latin typeface="Aptos"/>
               </a:rPr>
-              <a:t>12</a:t>
+              <a:t>13</a:t>
             </a:r>
           </a:p>
         </p:txBody>
@@ -5545,7 +6478,7 @@
                 </a:solidFill>
                 <a:latin typeface="Aptos"/>
               </a:rPr>
-              <a:t>12/17</a:t>
+              <a:t>13/18</a:t>
             </a:r>
           </a:p>
         </p:txBody>
@@ -5558,7 +6491,7 @@
 </p:sld>
 </file>
 
-<file path=ppt/slides/slide12.xml><?xml version="1.0" encoding="utf-8"?>
+<file path=ppt/slides/slide13.xml><?xml version="1.0" encoding="utf-8"?>
 <p:sld xmlns:a="http://schemas.openxmlformats.org/drawingml/2006/main" xmlns:p="http://schemas.openxmlformats.org/presentationml/2006/main" xmlns:r="http://schemas.openxmlformats.org/officeDocument/2006/relationships">
   <p:cSld>
     <p:bg>
@@ -5651,7 +6584,7 @@
                 </a:solidFill>
                 <a:latin typeface="Aptos"/>
               </a:rPr>
-              <a:t>13</a:t>
+              <a:t>14</a:t>
             </a:r>
           </a:p>
         </p:txBody>
@@ -6698,7 +7631,7 @@
                 </a:solidFill>
                 <a:latin typeface="Aptos"/>
               </a:rPr>
-              <a:t>13/17</a:t>
+              <a:t>14/18</a:t>
             </a:r>
           </a:p>
         </p:txBody>
@@ -6711,7 +7644,7 @@
 </p:sld>
 </file>
 
-<file path=ppt/slides/slide13.xml><?xml version="1.0" encoding="utf-8"?>
+<file path=ppt/slides/slide14.xml><?xml version="1.0" encoding="utf-8"?>
 <p:sld xmlns:a="http://schemas.openxmlformats.org/drawingml/2006/main" xmlns:p="http://schemas.openxmlformats.org/presentationml/2006/main" xmlns:r="http://schemas.openxmlformats.org/officeDocument/2006/relationships">
   <p:cSld>
     <p:bg>
@@ -6759,7 +7692,7 @@
                 </a:solidFill>
                 <a:latin typeface="Aptos"/>
               </a:rPr>
-              <a:t>15</a:t>
+              <a:t>16</a:t>
             </a:r>
           </a:p>
         </p:txBody>
@@ -7636,7 +8569,7 @@
                 </a:solidFill>
                 <a:latin typeface="Aptos"/>
               </a:rPr>
-              <a:t>15/17</a:t>
+              <a:t>16/18</a:t>
             </a:r>
           </a:p>
         </p:txBody>
@@ -7649,7 +8582,7 @@
 </p:sld>
 </file>
 
-<file path=ppt/slides/slide14.xml><?xml version="1.0" encoding="utf-8"?>
+<file path=ppt/slides/slide15.xml><?xml version="1.0" encoding="utf-8"?>
 <p:sld xmlns:a="http://schemas.openxmlformats.org/drawingml/2006/main" xmlns:p="http://schemas.openxmlformats.org/presentationml/2006/main" xmlns:r="http://schemas.openxmlformats.org/officeDocument/2006/relationships">
   <p:cSld>
     <p:bg>
@@ -7742,7 +8675,7 @@
                 </a:solidFill>
                 <a:latin typeface="Aptos"/>
               </a:rPr>
-              <a:t>16</a:t>
+              <a:t>17</a:t>
             </a:r>
           </a:p>
         </p:txBody>
@@ -8603,7 +9536,7 @@
                 </a:solidFill>
                 <a:latin typeface="Aptos"/>
               </a:rPr>
-              <a:t>16/17</a:t>
+              <a:t>17/18</a:t>
             </a:r>
           </a:p>
         </p:txBody>
@@ -8616,7 +9549,7 @@
 </p:sld>
 </file>
 
-<file path=ppt/slides/slide15.xml><?xml version="1.0" encoding="utf-8"?>
+<file path=ppt/slides/slide16.xml><?xml version="1.0" encoding="utf-8"?>
 <p:sld xmlns:a="http://schemas.openxmlformats.org/drawingml/2006/main" xmlns:p="http://schemas.openxmlformats.org/presentationml/2006/main" xmlns:r="http://schemas.openxmlformats.org/officeDocument/2006/relationships">
   <p:cSld>
     <p:bg>
@@ -13211,7 +14144,7 @@
                 </a:solidFill>
                 <a:latin typeface="Aptos"/>
               </a:rPr>
-              <a:t>03/17</a:t>
+              <a:t>03/18</a:t>
             </a:r>
           </a:p>
         </p:txBody>
@@ -13224,7 +14157,7 @@
 </p:sld>
 </file>
 
-<file path=ppt/slides/slide16.xml><?xml version="1.0" encoding="utf-8"?>
+<file path=ppt/slides/slide17.xml><?xml version="1.0" encoding="utf-8"?>
 <p:sld xmlns:a="http://schemas.openxmlformats.org/drawingml/2006/main" xmlns:p="http://schemas.openxmlformats.org/presentationml/2006/main" xmlns:r="http://schemas.openxmlformats.org/officeDocument/2006/relationships">
   <p:cSld>
     <p:bg>
@@ -13272,7 +14205,7 @@
                 </a:solidFill>
                 <a:latin typeface="Aptos"/>
               </a:rPr>
-              <a:t>14</a:t>
+              <a:t>15</a:t>
             </a:r>
           </a:p>
         </p:txBody>
@@ -14026,7 +14959,7 @@
                 </a:solidFill>
                 <a:latin typeface="Aptos"/>
               </a:rPr>
-              <a:t>14/17</a:t>
+              <a:t>15/18</a:t>
             </a:r>
           </a:p>
         </p:txBody>
@@ -14039,7 +14972,7 @@
 </p:sld>
 </file>
 
-<file path=ppt/slides/slide17.xml><?xml version="1.0" encoding="utf-8"?>
+<file path=ppt/slides/slide18.xml><?xml version="1.0" encoding="utf-8"?>
 <p:sld xmlns:a="http://schemas.openxmlformats.org/drawingml/2006/main" xmlns:p="http://schemas.openxmlformats.org/presentationml/2006/main" xmlns:r="http://schemas.openxmlformats.org/officeDocument/2006/relationships">
   <p:cSld>
     <p:bg>
@@ -14087,7 +15020,7 @@
                 </a:solidFill>
                 <a:latin typeface="Aptos"/>
               </a:rPr>
-              <a:t>17</a:t>
+              <a:t>18</a:t>
             </a:r>
           </a:p>
         </p:txBody>
@@ -15022,7 +15955,7 @@
                 </a:solidFill>
                 <a:latin typeface="Aptos"/>
               </a:rPr>
-              <a:t>17/17</a:t>
+              <a:t>18/18</a:t>
             </a:r>
           </a:p>
         </p:txBody>
@@ -16349,7 +17282,7 @@
                 </a:solidFill>
                 <a:latin typeface="Aptos"/>
               </a:rPr>
-              <a:t>02/17</a:t>
+              <a:t>02/18</a:t>
             </a:r>
           </a:p>
         </p:txBody>
@@ -17164,7 +18097,7 @@
                 </a:solidFill>
                 <a:latin typeface="Aptos"/>
               </a:rPr>
-              <a:t>04/17</a:t>
+              <a:t>04/18</a:t>
             </a:r>
           </a:p>
         </p:txBody>
@@ -17330,7 +18263,7 @@
                 </a:solidFill>
                 <a:latin typeface="Aptos Display"/>
               </a:rPr>
-              <a:t>Zabbix observa servicios Docker.</a:t>
+              <a:t>Arquitectura lógica del monitoreo.</a:t>
             </a:r>
           </a:p>
         </p:txBody>
@@ -17343,8 +18276,8 @@
         </p:nvSpPr>
         <p:spPr>
           <a:xfrm>
-            <a:off x="777240" y="1828800"/>
-            <a:ext cx="1417320" cy="713232"/>
+            <a:off x="731520" y="2331720"/>
+            <a:ext cx="1143000" cy="658368"/>
           </a:xfrm>
           <a:prstGeom prst="roundRect">
             <a:avLst/>
@@ -17388,8 +18321,8 @@
         </p:nvSpPr>
         <p:spPr>
           <a:xfrm>
-            <a:off x="886968" y="1938528"/>
-            <a:ext cx="1197864" cy="201168"/>
+            <a:off x="841248" y="2441448"/>
+            <a:ext cx="923544" cy="201168"/>
           </a:xfrm>
           <a:prstGeom prst="rect">
             <a:avLst/>
@@ -17410,7 +18343,7 @@
                 </a:solidFill>
                 <a:latin typeface="Aptos"/>
               </a:rPr>
-              <a:t>Caddy</a:t>
+              <a:t>Profesor</a:t>
             </a:r>
           </a:p>
         </p:txBody>
@@ -17423,8 +18356,8 @@
         </p:nvSpPr>
         <p:spPr>
           <a:xfrm>
-            <a:off x="886968" y="2185416"/>
-            <a:ext cx="1197864" cy="164592"/>
+            <a:off x="841248" y="2688336"/>
+            <a:ext cx="923544" cy="164592"/>
           </a:xfrm>
           <a:prstGeom prst="rect">
             <a:avLst/>
@@ -17445,7 +18378,7 @@
                 </a:solidFill>
                 <a:latin typeface="Aptos"/>
               </a:rPr>
-              <a:t>HTTPS público</a:t>
+              <a:t>demo + revisión</a:t>
             </a:r>
           </a:p>
         </p:txBody>
@@ -17458,8 +18391,8 @@
         </p:nvCxnSpPr>
         <p:spPr>
           <a:xfrm>
-            <a:off x="914400" y="2450592"/>
-            <a:ext cx="1143000" cy="0"/>
+            <a:off x="868680" y="2898647"/>
+            <a:ext cx="868680" cy="0"/>
           </a:xfrm>
           <a:prstGeom prst="line">
             <a:avLst/>
@@ -17493,8 +18426,8 @@
         </p:nvSpPr>
         <p:spPr>
           <a:xfrm>
-            <a:off x="2743200" y="1417320"/>
-            <a:ext cx="1508760" cy="713232"/>
+            <a:off x="2331720" y="1600200"/>
+            <a:ext cx="1325880" cy="658368"/>
           </a:xfrm>
           <a:prstGeom prst="roundRect">
             <a:avLst/>
@@ -17538,8 +18471,8 @@
         </p:nvSpPr>
         <p:spPr>
           <a:xfrm>
-            <a:off x="2852928" y="1527048"/>
-            <a:ext cx="1289304" cy="201168"/>
+            <a:off x="2441448" y="1709928"/>
+            <a:ext cx="1106424" cy="201168"/>
           </a:xfrm>
           <a:prstGeom prst="rect">
             <a:avLst/>
@@ -17560,7 +18493,7 @@
                 </a:solidFill>
                 <a:latin typeface="Aptos"/>
               </a:rPr>
-              <a:t>Zabbix Web</a:t>
+              <a:t>Portal web</a:t>
             </a:r>
           </a:p>
         </p:txBody>
@@ -17573,8 +18506,8 @@
         </p:nvSpPr>
         <p:spPr>
           <a:xfrm>
-            <a:off x="2852928" y="1773936"/>
-            <a:ext cx="1289304" cy="164592"/>
+            <a:off x="2441448" y="1956816"/>
+            <a:ext cx="1106424" cy="164592"/>
           </a:xfrm>
           <a:prstGeom prst="rect">
             <a:avLst/>
@@ -17595,7 +18528,7 @@
                 </a:solidFill>
                 <a:latin typeface="Aptos"/>
               </a:rPr>
-              <a:t>frontend</a:t>
+              <a:t>frontend + API</a:t>
             </a:r>
           </a:p>
         </p:txBody>
@@ -17608,8 +18541,8 @@
         </p:nvCxnSpPr>
         <p:spPr>
           <a:xfrm>
-            <a:off x="2880360" y="2039112"/>
-            <a:ext cx="1234440" cy="0"/>
+            <a:off x="2468879" y="2167127"/>
+            <a:ext cx="1051561" cy="0"/>
           </a:xfrm>
           <a:prstGeom prst="line">
             <a:avLst/>
@@ -17643,8 +18576,8 @@
         </p:nvSpPr>
         <p:spPr>
           <a:xfrm>
-            <a:off x="2743200" y="2697480"/>
-            <a:ext cx="1508760" cy="713232"/>
+            <a:off x="2331720" y="2578608"/>
+            <a:ext cx="1325880" cy="658368"/>
           </a:xfrm>
           <a:prstGeom prst="roundRect">
             <a:avLst/>
@@ -17688,8 +18621,8 @@
         </p:nvSpPr>
         <p:spPr>
           <a:xfrm>
-            <a:off x="2852928" y="2807208"/>
-            <a:ext cx="1289304" cy="201168"/>
+            <a:off x="2441448" y="2688336"/>
+            <a:ext cx="1106424" cy="201168"/>
           </a:xfrm>
           <a:prstGeom prst="rect">
             <a:avLst/>
@@ -17710,7 +18643,7 @@
                 </a:solidFill>
                 <a:latin typeface="Aptos"/>
               </a:rPr>
-              <a:t>Zabbix Server</a:t>
+              <a:t>Zabbix Web</a:t>
             </a:r>
           </a:p>
         </p:txBody>
@@ -17723,8 +18656,8 @@
         </p:nvSpPr>
         <p:spPr>
           <a:xfrm>
-            <a:off x="2852928" y="3054096"/>
-            <a:ext cx="1289304" cy="164592"/>
+            <a:off x="2441448" y="2935224"/>
+            <a:ext cx="1106424" cy="164592"/>
           </a:xfrm>
           <a:prstGeom prst="rect">
             <a:avLst/>
@@ -17745,7 +18678,7 @@
                 </a:solidFill>
                 <a:latin typeface="Aptos"/>
               </a:rPr>
-              <a:t>triggers + API</a:t>
+              <a:t>dashboard</a:t>
             </a:r>
           </a:p>
         </p:txBody>
@@ -17758,8 +18691,8 @@
         </p:nvCxnSpPr>
         <p:spPr>
           <a:xfrm>
-            <a:off x="2880360" y="3319272"/>
-            <a:ext cx="1234440" cy="0"/>
+            <a:off x="2468879" y="3145536"/>
+            <a:ext cx="1051561" cy="0"/>
           </a:xfrm>
           <a:prstGeom prst="line">
             <a:avLst/>
@@ -17793,8 +18726,8 @@
         </p:nvSpPr>
         <p:spPr>
           <a:xfrm>
-            <a:off x="4800600" y="2697480"/>
-            <a:ext cx="1417320" cy="713232"/>
+            <a:off x="2331720" y="3557016"/>
+            <a:ext cx="1325880" cy="658368"/>
           </a:xfrm>
           <a:prstGeom prst="roundRect">
             <a:avLst/>
@@ -17838,8 +18771,8 @@
         </p:nvSpPr>
         <p:spPr>
           <a:xfrm>
-            <a:off x="4910328" y="2807208"/>
-            <a:ext cx="1197864" cy="201168"/>
+            <a:off x="2441448" y="3666744"/>
+            <a:ext cx="1106424" cy="201168"/>
           </a:xfrm>
           <a:prstGeom prst="rect">
             <a:avLst/>
@@ -17860,7 +18793,7 @@
                 </a:solidFill>
                 <a:latin typeface="Aptos"/>
               </a:rPr>
-              <a:t>PostgreSQL</a:t>
+              <a:t>MailHog UI</a:t>
             </a:r>
           </a:p>
         </p:txBody>
@@ -17873,8 +18806,8 @@
         </p:nvSpPr>
         <p:spPr>
           <a:xfrm>
-            <a:off x="4910328" y="3054096"/>
-            <a:ext cx="1197864" cy="164592"/>
+            <a:off x="2441448" y="3913632"/>
+            <a:ext cx="1106424" cy="164592"/>
           </a:xfrm>
           <a:prstGeom prst="rect">
             <a:avLst/>
@@ -17895,7 +18828,7 @@
                 </a:solidFill>
                 <a:latin typeface="Aptos"/>
               </a:rPr>
-              <a:t>históricos</a:t>
+              <a:t>inbox alertas</a:t>
             </a:r>
           </a:p>
         </p:txBody>
@@ -17908,15 +18841,15 @@
         </p:nvCxnSpPr>
         <p:spPr>
           <a:xfrm>
-            <a:off x="4937760" y="3319272"/>
-            <a:ext cx="1142999" cy="0"/>
+            <a:off x="2468879" y="4123944"/>
+            <a:ext cx="1051561" cy="0"/>
           </a:xfrm>
           <a:prstGeom prst="line">
             <a:avLst/>
           </a:prstGeom>
           <a:ln w="27940">
             <a:solidFill>
-              <a:srgbClr val="A3E635"/>
+              <a:srgbClr val="F59E0B"/>
             </a:solidFill>
           </a:ln>
         </p:spPr>
@@ -17943,8 +18876,8 @@
         </p:nvSpPr>
         <p:spPr>
           <a:xfrm>
-            <a:off x="4800600" y="1417320"/>
-            <a:ext cx="1417320" cy="713232"/>
+            <a:off x="4206240" y="1600200"/>
+            <a:ext cx="1417320" cy="658368"/>
           </a:xfrm>
           <a:prstGeom prst="roundRect">
             <a:avLst/>
@@ -17988,7 +18921,7 @@
         </p:nvSpPr>
         <p:spPr>
           <a:xfrm>
-            <a:off x="4910328" y="1527048"/>
+            <a:off x="4315968" y="1709928"/>
             <a:ext cx="1197864" cy="201168"/>
           </a:xfrm>
           <a:prstGeom prst="rect">
@@ -18010,7 +18943,7 @@
                 </a:solidFill>
                 <a:latin typeface="Aptos"/>
               </a:rPr>
-              <a:t>MailHog</a:t>
+              <a:t>API REST</a:t>
             </a:r>
           </a:p>
         </p:txBody>
@@ -18023,7 +18956,7 @@
         </p:nvSpPr>
         <p:spPr>
           <a:xfrm>
-            <a:off x="4910328" y="1773936"/>
+            <a:off x="4315968" y="1956816"/>
             <a:ext cx="1197864" cy="164592"/>
           </a:xfrm>
           <a:prstGeom prst="rect">
@@ -18045,7 +18978,7 @@
                 </a:solidFill>
                 <a:latin typeface="Aptos"/>
               </a:rPr>
-              <a:t>SMTP lab</a:t>
+              <a:t>/health + /metrics</a:t>
             </a:r>
           </a:p>
         </p:txBody>
@@ -18058,7 +18991,7 @@
         </p:nvCxnSpPr>
         <p:spPr>
           <a:xfrm>
-            <a:off x="4937760" y="2039112"/>
+            <a:off x="4343400" y="2167127"/>
             <a:ext cx="1142999" cy="0"/>
           </a:xfrm>
           <a:prstGeom prst="line">
@@ -18066,7 +18999,7 @@
           </a:prstGeom>
           <a:ln w="27940">
             <a:solidFill>
-              <a:srgbClr val="F59E0B"/>
+              <a:srgbClr val="38BDF8"/>
             </a:solidFill>
           </a:ln>
         </p:spPr>
@@ -18093,8 +19026,8 @@
         </p:nvSpPr>
         <p:spPr>
           <a:xfrm>
-            <a:off x="7315200" y="1417320"/>
-            <a:ext cx="1417320" cy="713232"/>
+            <a:off x="4206240" y="2578608"/>
+            <a:ext cx="1417320" cy="658368"/>
           </a:xfrm>
           <a:prstGeom prst="roundRect">
             <a:avLst/>
@@ -18138,7 +19071,7 @@
         </p:nvSpPr>
         <p:spPr>
           <a:xfrm>
-            <a:off x="7424927" y="1527048"/>
+            <a:off x="4315968" y="2688336"/>
             <a:ext cx="1197864" cy="201168"/>
           </a:xfrm>
           <a:prstGeom prst="rect">
@@ -18160,7 +19093,7 @@
                 </a:solidFill>
                 <a:latin typeface="Aptos"/>
               </a:rPr>
-              <a:t>web</a:t>
+              <a:t>Zabbix Server</a:t>
             </a:r>
           </a:p>
         </p:txBody>
@@ -18173,7 +19106,7 @@
         </p:nvSpPr>
         <p:spPr>
           <a:xfrm>
-            <a:off x="7424927" y="1773936"/>
+            <a:off x="4315968" y="2935224"/>
             <a:ext cx="1197864" cy="164592"/>
           </a:xfrm>
           <a:prstGeom prst="rect">
@@ -18195,7 +19128,7 @@
                 </a:solidFill>
                 <a:latin typeface="Aptos"/>
               </a:rPr>
-              <a:t>HTTP</a:t>
+              <a:t>items + triggers</a:t>
             </a:r>
           </a:p>
         </p:txBody>
@@ -18208,8 +19141,8 @@
         </p:nvCxnSpPr>
         <p:spPr>
           <a:xfrm>
-            <a:off x="7452360" y="2039112"/>
-            <a:ext cx="1143000" cy="0"/>
+            <a:off x="4343400" y="3145536"/>
+            <a:ext cx="1142999" cy="0"/>
           </a:xfrm>
           <a:prstGeom prst="line">
             <a:avLst/>
@@ -18243,8 +19176,8 @@
         </p:nvSpPr>
         <p:spPr>
           <a:xfrm>
-            <a:off x="9281160" y="1417320"/>
-            <a:ext cx="1417320" cy="713232"/>
+            <a:off x="4206240" y="3557016"/>
+            <a:ext cx="1417320" cy="658368"/>
           </a:xfrm>
           <a:prstGeom prst="roundRect">
             <a:avLst/>
@@ -18288,7 +19221,7 @@
         </p:nvSpPr>
         <p:spPr>
           <a:xfrm>
-            <a:off x="9390888" y="1527048"/>
+            <a:off x="4315968" y="3666744"/>
             <a:ext cx="1197864" cy="201168"/>
           </a:xfrm>
           <a:prstGeom prst="rect">
@@ -18310,7 +19243,7 @@
                 </a:solidFill>
                 <a:latin typeface="Aptos"/>
               </a:rPr>
-              <a:t>DB</a:t>
+              <a:t>MailHog SMTP</a:t>
             </a:r>
           </a:p>
         </p:txBody>
@@ -18323,7 +19256,7 @@
         </p:nvSpPr>
         <p:spPr>
           <a:xfrm>
-            <a:off x="9390888" y="1773936"/>
+            <a:off x="4315968" y="3913632"/>
             <a:ext cx="1197864" cy="164592"/>
           </a:xfrm>
           <a:prstGeom prst="rect">
@@ -18345,7 +19278,7 @@
                 </a:solidFill>
                 <a:latin typeface="Aptos"/>
               </a:rPr>
-              <a:t>3306</a:t>
+              <a:t>correo lab</a:t>
             </a:r>
           </a:p>
         </p:txBody>
@@ -18358,15 +19291,15 @@
         </p:nvCxnSpPr>
         <p:spPr>
           <a:xfrm>
-            <a:off x="9418320" y="2039112"/>
-            <a:ext cx="1143000" cy="0"/>
+            <a:off x="4343400" y="4123944"/>
+            <a:ext cx="1142999" cy="0"/>
           </a:xfrm>
           <a:prstGeom prst="line">
             <a:avLst/>
           </a:prstGeom>
           <a:ln w="27940">
             <a:solidFill>
-              <a:srgbClr val="38BDF8"/>
+              <a:srgbClr val="F59E0B"/>
             </a:solidFill>
           </a:ln>
         </p:spPr>
@@ -18393,8 +19326,8 @@
         </p:nvSpPr>
         <p:spPr>
           <a:xfrm>
-            <a:off x="7315200" y="2697480"/>
-            <a:ext cx="1417320" cy="713232"/>
+            <a:off x="6172200" y="1600200"/>
+            <a:ext cx="1417320" cy="658368"/>
           </a:xfrm>
           <a:prstGeom prst="roundRect">
             <a:avLst/>
@@ -18438,7 +19371,7 @@
         </p:nvSpPr>
         <p:spPr>
           <a:xfrm>
-            <a:off x="7424927" y="2807208"/>
+            <a:off x="6281928" y="1709928"/>
             <a:ext cx="1197864" cy="201168"/>
           </a:xfrm>
           <a:prstGeom prst="rect">
@@ -18460,7 +19393,7 @@
                 </a:solidFill>
                 <a:latin typeface="Aptos"/>
               </a:rPr>
-              <a:t>DNS</a:t>
+              <a:t>MariaDB demo</a:t>
             </a:r>
           </a:p>
         </p:txBody>
@@ -18473,7 +19406,7 @@
         </p:nvSpPr>
         <p:spPr>
           <a:xfrm>
-            <a:off x="7424927" y="3054096"/>
+            <a:off x="6281928" y="1956816"/>
             <a:ext cx="1197864" cy="164592"/>
           </a:xfrm>
           <a:prstGeom prst="rect">
@@ -18495,7 +19428,7 @@
                 </a:solidFill>
                 <a:latin typeface="Aptos"/>
               </a:rPr>
-              <a:t>53</a:t>
+              <a:t>telemetría</a:t>
             </a:r>
           </a:p>
         </p:txBody>
@@ -18508,7 +19441,7 @@
         </p:nvCxnSpPr>
         <p:spPr>
           <a:xfrm>
-            <a:off x="7452360" y="3319272"/>
+            <a:off x="6309360" y="2167127"/>
             <a:ext cx="1143000" cy="0"/>
           </a:xfrm>
           <a:prstGeom prst="line">
@@ -18543,8 +19476,8 @@
         </p:nvSpPr>
         <p:spPr>
           <a:xfrm>
-            <a:off x="9281160" y="2697480"/>
-            <a:ext cx="1417320" cy="713232"/>
+            <a:off x="6172200" y="2578608"/>
+            <a:ext cx="1417320" cy="658368"/>
           </a:xfrm>
           <a:prstGeom prst="roundRect">
             <a:avLst/>
@@ -18588,7 +19521,7 @@
         </p:nvSpPr>
         <p:spPr>
           <a:xfrm>
-            <a:off x="9390888" y="2807208"/>
+            <a:off x="6281928" y="2688336"/>
             <a:ext cx="1197864" cy="201168"/>
           </a:xfrm>
           <a:prstGeom prst="rect">
@@ -18610,7 +19543,7 @@
                 </a:solidFill>
                 <a:latin typeface="Aptos"/>
               </a:rPr>
-              <a:t>FTP</a:t>
+              <a:t>PostgreSQL</a:t>
             </a:r>
           </a:p>
         </p:txBody>
@@ -18623,7 +19556,7 @@
         </p:nvSpPr>
         <p:spPr>
           <a:xfrm>
-            <a:off x="9390888" y="3054096"/>
+            <a:off x="6281928" y="2935224"/>
             <a:ext cx="1197864" cy="164592"/>
           </a:xfrm>
           <a:prstGeom prst="rect">
@@ -18645,7 +19578,7 @@
                 </a:solidFill>
                 <a:latin typeface="Aptos"/>
               </a:rPr>
-              <a:t>21</a:t>
+              <a:t>histórico Zabbix</a:t>
             </a:r>
           </a:p>
         </p:txBody>
@@ -18658,7 +19591,7 @@
         </p:nvCxnSpPr>
         <p:spPr>
           <a:xfrm>
-            <a:off x="9418320" y="3319272"/>
+            <a:off x="6309360" y="3145536"/>
             <a:ext cx="1143000" cy="0"/>
           </a:xfrm>
           <a:prstGeom prst="line">
@@ -18666,7 +19599,7 @@
           </a:prstGeom>
           <a:ln w="27940">
             <a:solidFill>
-              <a:srgbClr val="F59E0B"/>
+              <a:srgbClr val="A3E635"/>
             </a:solidFill>
           </a:ln>
         </p:spPr>
@@ -18685,261 +19618,16 @@
           </a:fontRef>
         </p:style>
       </p:cxnSp>
-      <p:cxnSp>
-        <p:nvCxnSpPr>
-          <p:cNvPr id="42" name="Connector 41"/>
-          <p:cNvCxnSpPr/>
-          <p:nvPr/>
-        </p:nvCxnSpPr>
-        <p:spPr>
-          <a:xfrm flipV="1">
-            <a:off x="2194560" y="1773936"/>
-            <a:ext cx="548640" cy="411480"/>
-          </a:xfrm>
-          <a:prstGeom prst="line">
-            <a:avLst/>
-          </a:prstGeom>
-          <a:ln w="19050">
-            <a:solidFill>
-              <a:srgbClr val="BFCCD6"/>
-            </a:solidFill>
-          </a:ln>
-        </p:spPr>
-        <p:style>
-          <a:lnRef idx="2">
-            <a:schemeClr val="accent1"/>
-          </a:lnRef>
-          <a:fillRef idx="0">
-            <a:schemeClr val="accent1"/>
-          </a:fillRef>
-          <a:effectRef idx="1">
-            <a:schemeClr val="accent1"/>
-          </a:effectRef>
-          <a:fontRef idx="minor">
-            <a:schemeClr val="tx1"/>
-          </a:fontRef>
-        </p:style>
-      </p:cxnSp>
-      <p:cxnSp>
-        <p:nvCxnSpPr>
-          <p:cNvPr id="43" name="Connector 42"/>
-          <p:cNvCxnSpPr/>
-          <p:nvPr/>
-        </p:nvCxnSpPr>
-        <p:spPr>
-          <a:xfrm>
-            <a:off x="2194560" y="2185416"/>
-            <a:ext cx="548640" cy="868680"/>
-          </a:xfrm>
-          <a:prstGeom prst="line">
-            <a:avLst/>
-          </a:prstGeom>
-          <a:ln w="19050">
-            <a:solidFill>
-              <a:srgbClr val="BFCCD6"/>
-            </a:solidFill>
-          </a:ln>
-        </p:spPr>
-        <p:style>
-          <a:lnRef idx="2">
-            <a:schemeClr val="accent1"/>
-          </a:lnRef>
-          <a:fillRef idx="0">
-            <a:schemeClr val="accent1"/>
-          </a:fillRef>
-          <a:effectRef idx="1">
-            <a:schemeClr val="accent1"/>
-          </a:effectRef>
-          <a:fontRef idx="minor">
-            <a:schemeClr val="tx1"/>
-          </a:fontRef>
-        </p:style>
-      </p:cxnSp>
-      <p:cxnSp>
-        <p:nvCxnSpPr>
-          <p:cNvPr id="44" name="Connector 43"/>
-          <p:cNvCxnSpPr/>
-          <p:nvPr/>
-        </p:nvCxnSpPr>
-        <p:spPr>
-          <a:xfrm>
-            <a:off x="4251960" y="3054096"/>
-            <a:ext cx="548640" cy="0"/>
-          </a:xfrm>
-          <a:prstGeom prst="line">
-            <a:avLst/>
-          </a:prstGeom>
-          <a:ln w="19050">
-            <a:solidFill>
-              <a:srgbClr val="BFCCD6"/>
-            </a:solidFill>
-          </a:ln>
-        </p:spPr>
-        <p:style>
-          <a:lnRef idx="2">
-            <a:schemeClr val="accent1"/>
-          </a:lnRef>
-          <a:fillRef idx="0">
-            <a:schemeClr val="accent1"/>
-          </a:fillRef>
-          <a:effectRef idx="1">
-            <a:schemeClr val="accent1"/>
-          </a:effectRef>
-          <a:fontRef idx="minor">
-            <a:schemeClr val="tx1"/>
-          </a:fontRef>
-        </p:style>
-      </p:cxnSp>
-      <p:cxnSp>
-        <p:nvCxnSpPr>
-          <p:cNvPr id="45" name="Connector 44"/>
-          <p:cNvCxnSpPr/>
-          <p:nvPr/>
-        </p:nvCxnSpPr>
-        <p:spPr>
-          <a:xfrm flipV="1">
-            <a:off x="4251960" y="1773936"/>
-            <a:ext cx="548640" cy="1280160"/>
-          </a:xfrm>
-          <a:prstGeom prst="line">
-            <a:avLst/>
-          </a:prstGeom>
-          <a:ln w="19050">
-            <a:solidFill>
-              <a:srgbClr val="BFCCD6"/>
-            </a:solidFill>
-          </a:ln>
-        </p:spPr>
-        <p:style>
-          <a:lnRef idx="2">
-            <a:schemeClr val="accent1"/>
-          </a:lnRef>
-          <a:fillRef idx="0">
-            <a:schemeClr val="accent1"/>
-          </a:fillRef>
-          <a:effectRef idx="1">
-            <a:schemeClr val="accent1"/>
-          </a:effectRef>
-          <a:fontRef idx="minor">
-            <a:schemeClr val="tx1"/>
-          </a:fontRef>
-        </p:style>
-      </p:cxnSp>
-      <p:cxnSp>
-        <p:nvCxnSpPr>
-          <p:cNvPr id="46" name="Connector 45"/>
-          <p:cNvCxnSpPr/>
-          <p:nvPr/>
-        </p:nvCxnSpPr>
-        <p:spPr>
-          <a:xfrm flipV="1">
-            <a:off x="6217920" y="1773936"/>
-            <a:ext cx="1097280" cy="1280160"/>
-          </a:xfrm>
-          <a:prstGeom prst="line">
-            <a:avLst/>
-          </a:prstGeom>
-          <a:ln w="19050">
-            <a:solidFill>
-              <a:srgbClr val="BFCCD6"/>
-            </a:solidFill>
-          </a:ln>
-        </p:spPr>
-        <p:style>
-          <a:lnRef idx="2">
-            <a:schemeClr val="accent1"/>
-          </a:lnRef>
-          <a:fillRef idx="0">
-            <a:schemeClr val="accent1"/>
-          </a:fillRef>
-          <a:effectRef idx="1">
-            <a:schemeClr val="accent1"/>
-          </a:effectRef>
-          <a:fontRef idx="minor">
-            <a:schemeClr val="tx1"/>
-          </a:fontRef>
-        </p:style>
-      </p:cxnSp>
-      <p:cxnSp>
-        <p:nvCxnSpPr>
-          <p:cNvPr id="47" name="Connector 46"/>
-          <p:cNvCxnSpPr/>
-          <p:nvPr/>
-        </p:nvCxnSpPr>
-        <p:spPr>
-          <a:xfrm>
-            <a:off x="6217920" y="3054096"/>
-            <a:ext cx="1097280" cy="0"/>
-          </a:xfrm>
-          <a:prstGeom prst="line">
-            <a:avLst/>
-          </a:prstGeom>
-          <a:ln w="19050">
-            <a:solidFill>
-              <a:srgbClr val="BFCCD6"/>
-            </a:solidFill>
-          </a:ln>
-        </p:spPr>
-        <p:style>
-          <a:lnRef idx="2">
-            <a:schemeClr val="accent1"/>
-          </a:lnRef>
-          <a:fillRef idx="0">
-            <a:schemeClr val="accent1"/>
-          </a:fillRef>
-          <a:effectRef idx="1">
-            <a:schemeClr val="accent1"/>
-          </a:effectRef>
-          <a:fontRef idx="minor">
-            <a:schemeClr val="tx1"/>
-          </a:fontRef>
-        </p:style>
-      </p:cxnSp>
-      <p:sp>
-        <p:nvSpPr>
-          <p:cNvPr id="48" name="TextBox 47"/>
-          <p:cNvSpPr txBox="1"/>
-          <p:nvPr/>
-        </p:nvSpPr>
-        <p:spPr>
-          <a:xfrm>
-            <a:off x="7315200" y="3913632"/>
-            <a:ext cx="3383280" cy="219456"/>
-          </a:xfrm>
-          <a:prstGeom prst="rect">
-            <a:avLst/>
-          </a:prstGeom>
-          <a:noFill/>
-        </p:spPr>
-        <p:txBody>
-          <a:bodyPr wrap="square" lIns="0" rIns="0" tIns="0" bIns="0" anchor="t">
-            <a:spAutoFit/>
-          </a:bodyPr>
-          <a:lstStyle/>
-          <a:p>
-            <a:pPr algn="ctr"/>
-            <a:r>
-              <a:rPr sz="1000" b="1">
-                <a:solidFill>
-                  <a:srgbClr val="5C6975"/>
-                </a:solidFill>
-                <a:latin typeface="Aptos"/>
-              </a:rPr>
-              <a:t>Infraestructura monitoreada</a:t>
-            </a:r>
-          </a:p>
-        </p:txBody>
-      </p:sp>
-      <p:sp>
-        <p:nvSpPr>
-          <p:cNvPr id="49" name="Rounded Rectangle 48"/>
+      <p:sp>
+        <p:nvSpPr>
+          <p:cNvPr id="42" name="Rounded Rectangle 41"/>
           <p:cNvSpPr/>
           <p:nvPr/>
         </p:nvSpPr>
         <p:spPr>
           <a:xfrm>
-            <a:off x="749808" y="4892040"/>
-            <a:ext cx="1828800" cy="713232"/>
+            <a:off x="6172200" y="3557016"/>
+            <a:ext cx="1417320" cy="658368"/>
           </a:xfrm>
           <a:prstGeom prst="roundRect">
             <a:avLst/>
@@ -18977,84 +19665,119 @@
       </p:sp>
       <p:sp>
         <p:nvSpPr>
-          <p:cNvPr id="50" name="TextBox 49"/>
-          <p:cNvSpPr txBox="1"/>
-          <p:nvPr/>
-        </p:nvSpPr>
-        <p:spPr>
-          <a:xfrm>
-            <a:off x="896112" y="5001768"/>
-            <a:ext cx="1572768" cy="256032"/>
-          </a:xfrm>
-          <a:prstGeom prst="rect">
-            <a:avLst/>
-          </a:prstGeom>
-          <a:noFill/>
-        </p:spPr>
-        <p:txBody>
-          <a:bodyPr wrap="square" lIns="0" rIns="0" tIns="0" bIns="0" anchor="t">
-            <a:spAutoFit/>
-          </a:bodyPr>
-          <a:lstStyle/>
-          <a:p>
-            <a:pPr algn="l"/>
-            <a:r>
-              <a:rPr sz="1800" b="1">
-                <a:solidFill>
-                  <a:srgbClr val="22C5AA"/>
-                </a:solidFill>
-                <a:latin typeface="Aptos"/>
-              </a:rPr>
-              <a:t>3</a:t>
-            </a:r>
-          </a:p>
-        </p:txBody>
-      </p:sp>
-      <p:sp>
-        <p:nvSpPr>
-          <p:cNvPr id="51" name="TextBox 50"/>
-          <p:cNvSpPr txBox="1"/>
-          <p:nvPr/>
-        </p:nvSpPr>
-        <p:spPr>
-          <a:xfrm>
-            <a:off x="896112" y="5303520"/>
-            <a:ext cx="1572768" cy="182880"/>
-          </a:xfrm>
-          <a:prstGeom prst="rect">
-            <a:avLst/>
-          </a:prstGeom>
-          <a:noFill/>
-        </p:spPr>
-        <p:txBody>
-          <a:bodyPr wrap="square" lIns="0" rIns="0" tIns="0" bIns="0" anchor="t">
-            <a:spAutoFit/>
-          </a:bodyPr>
-          <a:lstStyle/>
-          <a:p>
-            <a:pPr algn="l"/>
-            <a:r>
-              <a:rPr sz="780" b="1">
+          <p:cNvPr id="43" name="TextBox 42"/>
+          <p:cNvSpPr txBox="1"/>
+          <p:nvPr/>
+        </p:nvSpPr>
+        <p:spPr>
+          <a:xfrm>
+            <a:off x="6281928" y="3666744"/>
+            <a:ext cx="1197864" cy="201168"/>
+          </a:xfrm>
+          <a:prstGeom prst="rect">
+            <a:avLst/>
+          </a:prstGeom>
+          <a:noFill/>
+        </p:spPr>
+        <p:txBody>
+          <a:bodyPr wrap="square" lIns="0" rIns="0" tIns="0" bIns="0" anchor="t">
+            <a:spAutoFit/>
+          </a:bodyPr>
+          <a:lstStyle/>
+          <a:p>
+            <a:pPr algn="ctr"/>
+            <a:r>
+              <a:rPr sz="1100" b="1">
+                <a:solidFill>
+                  <a:srgbClr val="0A1820"/>
+                </a:solidFill>
+                <a:latin typeface="Aptos"/>
+              </a:rPr>
+              <a:t>4 agentes</a:t>
+            </a:r>
+          </a:p>
+        </p:txBody>
+      </p:sp>
+      <p:sp>
+        <p:nvSpPr>
+          <p:cNvPr id="44" name="TextBox 43"/>
+          <p:cNvSpPr txBox="1"/>
+          <p:nvPr/>
+        </p:nvSpPr>
+        <p:spPr>
+          <a:xfrm>
+            <a:off x="6281928" y="3913632"/>
+            <a:ext cx="1197864" cy="164592"/>
+          </a:xfrm>
+          <a:prstGeom prst="rect">
+            <a:avLst/>
+          </a:prstGeom>
+          <a:noFill/>
+        </p:spPr>
+        <p:txBody>
+          <a:bodyPr wrap="square" lIns="0" rIns="0" tIns="0" bIns="0" anchor="t">
+            <a:spAutoFit/>
+          </a:bodyPr>
+          <a:lstStyle/>
+          <a:p>
+            <a:pPr algn="ctr"/>
+            <a:r>
+              <a:rPr sz="720" b="0">
                 <a:solidFill>
                   <a:srgbClr val="5C6975"/>
                 </a:solidFill>
                 <a:latin typeface="Aptos"/>
               </a:rPr>
-              <a:t>subdominios HTTPS</a:t>
-            </a:r>
-          </a:p>
-        </p:txBody>
-      </p:sp>
-      <p:sp>
-        <p:nvSpPr>
-          <p:cNvPr id="52" name="Rounded Rectangle 51"/>
+              <a:t>web/db/dns/ftp</a:t>
+            </a:r>
+          </a:p>
+        </p:txBody>
+      </p:sp>
+      <p:cxnSp>
+        <p:nvCxnSpPr>
+          <p:cNvPr id="45" name="Connector 44"/>
+          <p:cNvCxnSpPr/>
+          <p:nvPr/>
+        </p:nvCxnSpPr>
+        <p:spPr>
+          <a:xfrm>
+            <a:off x="6309360" y="4123944"/>
+            <a:ext cx="1143000" cy="0"/>
+          </a:xfrm>
+          <a:prstGeom prst="line">
+            <a:avLst/>
+          </a:prstGeom>
+          <a:ln w="27940">
+            <a:solidFill>
+              <a:srgbClr val="22C5AA"/>
+            </a:solidFill>
+          </a:ln>
+        </p:spPr>
+        <p:style>
+          <a:lnRef idx="2">
+            <a:schemeClr val="accent1"/>
+          </a:lnRef>
+          <a:fillRef idx="0">
+            <a:schemeClr val="accent1"/>
+          </a:fillRef>
+          <a:effectRef idx="1">
+            <a:schemeClr val="accent1"/>
+          </a:effectRef>
+          <a:fontRef idx="minor">
+            <a:schemeClr val="tx1"/>
+          </a:fontRef>
+        </p:style>
+      </p:cxnSp>
+      <p:sp>
+        <p:nvSpPr>
+          <p:cNvPr id="46" name="Rounded Rectangle 45"/>
           <p:cNvSpPr/>
           <p:nvPr/>
         </p:nvSpPr>
         <p:spPr>
           <a:xfrm>
-            <a:off x="2880360" y="4892040"/>
-            <a:ext cx="1828800" cy="713232"/>
+            <a:off x="8321040" y="1920240"/>
+            <a:ext cx="1143000" cy="585216"/>
           </a:xfrm>
           <a:prstGeom prst="roundRect">
             <a:avLst/>
@@ -19092,84 +19815,119 @@
       </p:sp>
       <p:sp>
         <p:nvSpPr>
-          <p:cNvPr id="53" name="TextBox 52"/>
-          <p:cNvSpPr txBox="1"/>
-          <p:nvPr/>
-        </p:nvSpPr>
-        <p:spPr>
-          <a:xfrm>
-            <a:off x="3026664" y="5001768"/>
-            <a:ext cx="1572768" cy="256032"/>
-          </a:xfrm>
-          <a:prstGeom prst="rect">
-            <a:avLst/>
-          </a:prstGeom>
-          <a:noFill/>
-        </p:spPr>
-        <p:txBody>
-          <a:bodyPr wrap="square" lIns="0" rIns="0" tIns="0" bIns="0" anchor="t">
-            <a:spAutoFit/>
-          </a:bodyPr>
-          <a:lstStyle/>
-          <a:p>
-            <a:pPr algn="l"/>
-            <a:r>
-              <a:rPr sz="1800" b="1">
-                <a:solidFill>
-                  <a:srgbClr val="38BDF8"/>
-                </a:solidFill>
-                <a:latin typeface="Aptos"/>
-              </a:rPr>
-              <a:t>12</a:t>
-            </a:r>
-          </a:p>
-        </p:txBody>
-      </p:sp>
-      <p:sp>
-        <p:nvSpPr>
-          <p:cNvPr id="54" name="TextBox 53"/>
-          <p:cNvSpPr txBox="1"/>
-          <p:nvPr/>
-        </p:nvSpPr>
-        <p:spPr>
-          <a:xfrm>
-            <a:off x="3026664" y="5303520"/>
-            <a:ext cx="1572768" cy="182880"/>
-          </a:xfrm>
-          <a:prstGeom prst="rect">
-            <a:avLst/>
-          </a:prstGeom>
-          <a:noFill/>
-        </p:spPr>
-        <p:txBody>
-          <a:bodyPr wrap="square" lIns="0" rIns="0" tIns="0" bIns="0" anchor="t">
-            <a:spAutoFit/>
-          </a:bodyPr>
-          <a:lstStyle/>
-          <a:p>
-            <a:pPr algn="l"/>
-            <a:r>
-              <a:rPr sz="780" b="1">
+          <p:cNvPr id="47" name="TextBox 46"/>
+          <p:cNvSpPr txBox="1"/>
+          <p:nvPr/>
+        </p:nvSpPr>
+        <p:spPr>
+          <a:xfrm>
+            <a:off x="8430767" y="2029968"/>
+            <a:ext cx="923544" cy="201168"/>
+          </a:xfrm>
+          <a:prstGeom prst="rect">
+            <a:avLst/>
+          </a:prstGeom>
+          <a:noFill/>
+        </p:spPr>
+        <p:txBody>
+          <a:bodyPr wrap="square" lIns="0" rIns="0" tIns="0" bIns="0" anchor="t">
+            <a:spAutoFit/>
+          </a:bodyPr>
+          <a:lstStyle/>
+          <a:p>
+            <a:pPr algn="ctr"/>
+            <a:r>
+              <a:rPr sz="1100" b="1">
+                <a:solidFill>
+                  <a:srgbClr val="0A1820"/>
+                </a:solidFill>
+                <a:latin typeface="Aptos"/>
+              </a:rPr>
+              <a:t>web</a:t>
+            </a:r>
+          </a:p>
+        </p:txBody>
+      </p:sp>
+      <p:sp>
+        <p:nvSpPr>
+          <p:cNvPr id="48" name="TextBox 47"/>
+          <p:cNvSpPr txBox="1"/>
+          <p:nvPr/>
+        </p:nvSpPr>
+        <p:spPr>
+          <a:xfrm>
+            <a:off x="8430767" y="2276856"/>
+            <a:ext cx="923544" cy="164592"/>
+          </a:xfrm>
+          <a:prstGeom prst="rect">
+            <a:avLst/>
+          </a:prstGeom>
+          <a:noFill/>
+        </p:spPr>
+        <p:txBody>
+          <a:bodyPr wrap="square" lIns="0" rIns="0" tIns="0" bIns="0" anchor="t">
+            <a:spAutoFit/>
+          </a:bodyPr>
+          <a:lstStyle/>
+          <a:p>
+            <a:pPr algn="ctr"/>
+            <a:r>
+              <a:rPr sz="720" b="0">
                 <a:solidFill>
                   <a:srgbClr val="5C6975"/>
                 </a:solidFill>
                 <a:latin typeface="Aptos"/>
               </a:rPr>
-              <a:t>contenedores base</a:t>
-            </a:r>
-          </a:p>
-        </p:txBody>
-      </p:sp>
-      <p:sp>
-        <p:nvSpPr>
-          <p:cNvPr id="55" name="Rounded Rectangle 54"/>
+              <a:t>HTTP + API</a:t>
+            </a:r>
+          </a:p>
+        </p:txBody>
+      </p:sp>
+      <p:cxnSp>
+        <p:nvCxnSpPr>
+          <p:cNvPr id="49" name="Connector 48"/>
+          <p:cNvCxnSpPr/>
+          <p:nvPr/>
+        </p:nvCxnSpPr>
+        <p:spPr>
+          <a:xfrm>
+            <a:off x="8458200" y="2414016"/>
+            <a:ext cx="868680" cy="0"/>
+          </a:xfrm>
+          <a:prstGeom prst="line">
+            <a:avLst/>
+          </a:prstGeom>
+          <a:ln w="27940">
+            <a:solidFill>
+              <a:srgbClr val="22C5AA"/>
+            </a:solidFill>
+          </a:ln>
+        </p:spPr>
+        <p:style>
+          <a:lnRef idx="2">
+            <a:schemeClr val="accent1"/>
+          </a:lnRef>
+          <a:fillRef idx="0">
+            <a:schemeClr val="accent1"/>
+          </a:fillRef>
+          <a:effectRef idx="1">
+            <a:schemeClr val="accent1"/>
+          </a:effectRef>
+          <a:fontRef idx="minor">
+            <a:schemeClr val="tx1"/>
+          </a:fontRef>
+        </p:style>
+      </p:cxnSp>
+      <p:sp>
+        <p:nvSpPr>
+          <p:cNvPr id="50" name="Rounded Rectangle 49"/>
           <p:cNvSpPr/>
           <p:nvPr/>
         </p:nvSpPr>
         <p:spPr>
           <a:xfrm>
-            <a:off x="5010912" y="4892040"/>
-            <a:ext cx="1828800" cy="713232"/>
+            <a:off x="9875519" y="1920240"/>
+            <a:ext cx="1143000" cy="585216"/>
           </a:xfrm>
           <a:prstGeom prst="roundRect">
             <a:avLst/>
@@ -19207,77 +19965,832 @@
       </p:sp>
       <p:sp>
         <p:nvSpPr>
-          <p:cNvPr id="56" name="TextBox 55"/>
-          <p:cNvSpPr txBox="1"/>
-          <p:nvPr/>
-        </p:nvSpPr>
-        <p:spPr>
-          <a:xfrm>
-            <a:off x="5157216" y="5001768"/>
-            <a:ext cx="1572768" cy="256032"/>
-          </a:xfrm>
-          <a:prstGeom prst="rect">
-            <a:avLst/>
-          </a:prstGeom>
-          <a:noFill/>
-        </p:spPr>
-        <p:txBody>
-          <a:bodyPr wrap="square" lIns="0" rIns="0" tIns="0" bIns="0" anchor="t">
-            <a:spAutoFit/>
-          </a:bodyPr>
-          <a:lstStyle/>
-          <a:p>
-            <a:pPr algn="l"/>
-            <a:r>
-              <a:rPr sz="1800" b="1">
-                <a:solidFill>
-                  <a:srgbClr val="A3E635"/>
-                </a:solidFill>
-                <a:latin typeface="Aptos"/>
-              </a:rPr>
-              <a:t>API</a:t>
-            </a:r>
-          </a:p>
-        </p:txBody>
-      </p:sp>
-      <p:sp>
-        <p:nvSpPr>
-          <p:cNvPr id="57" name="TextBox 56"/>
-          <p:cNvSpPr txBox="1"/>
-          <p:nvPr/>
-        </p:nvSpPr>
-        <p:spPr>
-          <a:xfrm>
-            <a:off x="5157216" y="5303520"/>
-            <a:ext cx="1572768" cy="182880"/>
-          </a:xfrm>
-          <a:prstGeom prst="rect">
-            <a:avLst/>
-          </a:prstGeom>
-          <a:noFill/>
-        </p:spPr>
-        <p:txBody>
-          <a:bodyPr wrap="square" lIns="0" rIns="0" tIns="0" bIns="0" anchor="t">
-            <a:spAutoFit/>
-          </a:bodyPr>
-          <a:lstStyle/>
-          <a:p>
-            <a:pPr algn="l"/>
-            <a:r>
-              <a:rPr sz="780" b="1">
+          <p:cNvPr id="51" name="TextBox 50"/>
+          <p:cNvSpPr txBox="1"/>
+          <p:nvPr/>
+        </p:nvSpPr>
+        <p:spPr>
+          <a:xfrm>
+            <a:off x="9985247" y="2029968"/>
+            <a:ext cx="923544" cy="201168"/>
+          </a:xfrm>
+          <a:prstGeom prst="rect">
+            <a:avLst/>
+          </a:prstGeom>
+          <a:noFill/>
+        </p:spPr>
+        <p:txBody>
+          <a:bodyPr wrap="square" lIns="0" rIns="0" tIns="0" bIns="0" anchor="t">
+            <a:spAutoFit/>
+          </a:bodyPr>
+          <a:lstStyle/>
+          <a:p>
+            <a:pPr algn="ctr"/>
+            <a:r>
+              <a:rPr sz="1100" b="1">
+                <a:solidFill>
+                  <a:srgbClr val="0A1820"/>
+                </a:solidFill>
+                <a:latin typeface="Aptos"/>
+              </a:rPr>
+              <a:t>DB</a:t>
+            </a:r>
+          </a:p>
+        </p:txBody>
+      </p:sp>
+      <p:sp>
+        <p:nvSpPr>
+          <p:cNvPr id="52" name="TextBox 51"/>
+          <p:cNvSpPr txBox="1"/>
+          <p:nvPr/>
+        </p:nvSpPr>
+        <p:spPr>
+          <a:xfrm>
+            <a:off x="9985247" y="2276856"/>
+            <a:ext cx="923544" cy="164592"/>
+          </a:xfrm>
+          <a:prstGeom prst="rect">
+            <a:avLst/>
+          </a:prstGeom>
+          <a:noFill/>
+        </p:spPr>
+        <p:txBody>
+          <a:bodyPr wrap="square" lIns="0" rIns="0" tIns="0" bIns="0" anchor="t">
+            <a:spAutoFit/>
+          </a:bodyPr>
+          <a:lstStyle/>
+          <a:p>
+            <a:pPr algn="ctr"/>
+            <a:r>
+              <a:rPr sz="720" b="0">
                 <a:solidFill>
                   <a:srgbClr val="5C6975"/>
                 </a:solidFill>
                 <a:latin typeface="Aptos"/>
               </a:rPr>
-              <a:t>aprovisionamiento</a:t>
+              <a:t>MariaDB</a:t>
             </a:r>
           </a:p>
         </p:txBody>
       </p:sp>
       <p:cxnSp>
         <p:nvCxnSpPr>
-          <p:cNvPr id="58" name="Connector 57"/>
+          <p:cNvPr id="53" name="Connector 52"/>
+          <p:cNvCxnSpPr/>
+          <p:nvPr/>
+        </p:nvCxnSpPr>
+        <p:spPr>
+          <a:xfrm>
+            <a:off x="10012680" y="2414016"/>
+            <a:ext cx="868679" cy="0"/>
+          </a:xfrm>
+          <a:prstGeom prst="line">
+            <a:avLst/>
+          </a:prstGeom>
+          <a:ln w="27940">
+            <a:solidFill>
+              <a:srgbClr val="38BDF8"/>
+            </a:solidFill>
+          </a:ln>
+        </p:spPr>
+        <p:style>
+          <a:lnRef idx="2">
+            <a:schemeClr val="accent1"/>
+          </a:lnRef>
+          <a:fillRef idx="0">
+            <a:schemeClr val="accent1"/>
+          </a:fillRef>
+          <a:effectRef idx="1">
+            <a:schemeClr val="accent1"/>
+          </a:effectRef>
+          <a:fontRef idx="minor">
+            <a:schemeClr val="tx1"/>
+          </a:fontRef>
+        </p:style>
+      </p:cxnSp>
+      <p:sp>
+        <p:nvSpPr>
+          <p:cNvPr id="54" name="Rounded Rectangle 53"/>
+          <p:cNvSpPr/>
+          <p:nvPr/>
+        </p:nvSpPr>
+        <p:spPr>
+          <a:xfrm>
+            <a:off x="8321040" y="3035808"/>
+            <a:ext cx="1143000" cy="585216"/>
+          </a:xfrm>
+          <a:prstGeom prst="roundRect">
+            <a:avLst/>
+          </a:prstGeom>
+          <a:solidFill>
+            <a:srgbClr val="FFFFFF"/>
+          </a:solidFill>
+          <a:ln w="10160">
+            <a:solidFill>
+              <a:srgbClr val="BFCCD6"/>
+            </a:solidFill>
+          </a:ln>
+        </p:spPr>
+        <p:style>
+          <a:lnRef idx="1">
+            <a:schemeClr val="accent1"/>
+          </a:lnRef>
+          <a:fillRef idx="3">
+            <a:schemeClr val="accent1"/>
+          </a:fillRef>
+          <a:effectRef idx="2">
+            <a:schemeClr val="accent1"/>
+          </a:effectRef>
+          <a:fontRef idx="minor">
+            <a:schemeClr val="lt1"/>
+          </a:fontRef>
+        </p:style>
+        <p:txBody>
+          <a:bodyPr rtlCol="0" anchor="ctr"/>
+          <a:lstStyle/>
+          <a:p>
+            <a:pPr algn="ctr"/>
+          </a:p>
+        </p:txBody>
+      </p:sp>
+      <p:sp>
+        <p:nvSpPr>
+          <p:cNvPr id="55" name="TextBox 54"/>
+          <p:cNvSpPr txBox="1"/>
+          <p:nvPr/>
+        </p:nvSpPr>
+        <p:spPr>
+          <a:xfrm>
+            <a:off x="8430767" y="3145536"/>
+            <a:ext cx="923544" cy="201168"/>
+          </a:xfrm>
+          <a:prstGeom prst="rect">
+            <a:avLst/>
+          </a:prstGeom>
+          <a:noFill/>
+        </p:spPr>
+        <p:txBody>
+          <a:bodyPr wrap="square" lIns="0" rIns="0" tIns="0" bIns="0" anchor="t">
+            <a:spAutoFit/>
+          </a:bodyPr>
+          <a:lstStyle/>
+          <a:p>
+            <a:pPr algn="ctr"/>
+            <a:r>
+              <a:rPr sz="1100" b="1">
+                <a:solidFill>
+                  <a:srgbClr val="0A1820"/>
+                </a:solidFill>
+                <a:latin typeface="Aptos"/>
+              </a:rPr>
+              <a:t>DNS</a:t>
+            </a:r>
+          </a:p>
+        </p:txBody>
+      </p:sp>
+      <p:sp>
+        <p:nvSpPr>
+          <p:cNvPr id="56" name="TextBox 55"/>
+          <p:cNvSpPr txBox="1"/>
+          <p:nvPr/>
+        </p:nvSpPr>
+        <p:spPr>
+          <a:xfrm>
+            <a:off x="8430767" y="3392424"/>
+            <a:ext cx="923544" cy="164592"/>
+          </a:xfrm>
+          <a:prstGeom prst="rect">
+            <a:avLst/>
+          </a:prstGeom>
+          <a:noFill/>
+        </p:spPr>
+        <p:txBody>
+          <a:bodyPr wrap="square" lIns="0" rIns="0" tIns="0" bIns="0" anchor="t">
+            <a:spAutoFit/>
+          </a:bodyPr>
+          <a:lstStyle/>
+          <a:p>
+            <a:pPr algn="ctr"/>
+            <a:r>
+              <a:rPr sz="720" b="0">
+                <a:solidFill>
+                  <a:srgbClr val="5C6975"/>
+                </a:solidFill>
+                <a:latin typeface="Aptos"/>
+              </a:rPr>
+              <a:t>CoreDNS</a:t>
+            </a:r>
+          </a:p>
+        </p:txBody>
+      </p:sp>
+      <p:cxnSp>
+        <p:nvCxnSpPr>
+          <p:cNvPr id="57" name="Connector 56"/>
+          <p:cNvCxnSpPr/>
+          <p:nvPr/>
+        </p:nvCxnSpPr>
+        <p:spPr>
+          <a:xfrm>
+            <a:off x="8458200" y="3529584"/>
+            <a:ext cx="868680" cy="0"/>
+          </a:xfrm>
+          <a:prstGeom prst="line">
+            <a:avLst/>
+          </a:prstGeom>
+          <a:ln w="27940">
+            <a:solidFill>
+              <a:srgbClr val="A3E635"/>
+            </a:solidFill>
+          </a:ln>
+        </p:spPr>
+        <p:style>
+          <a:lnRef idx="2">
+            <a:schemeClr val="accent1"/>
+          </a:lnRef>
+          <a:fillRef idx="0">
+            <a:schemeClr val="accent1"/>
+          </a:fillRef>
+          <a:effectRef idx="1">
+            <a:schemeClr val="accent1"/>
+          </a:effectRef>
+          <a:fontRef idx="minor">
+            <a:schemeClr val="tx1"/>
+          </a:fontRef>
+        </p:style>
+      </p:cxnSp>
+      <p:sp>
+        <p:nvSpPr>
+          <p:cNvPr id="58" name="Rounded Rectangle 57"/>
+          <p:cNvSpPr/>
+          <p:nvPr/>
+        </p:nvSpPr>
+        <p:spPr>
+          <a:xfrm>
+            <a:off x="9875519" y="3035808"/>
+            <a:ext cx="1143000" cy="585216"/>
+          </a:xfrm>
+          <a:prstGeom prst="roundRect">
+            <a:avLst/>
+          </a:prstGeom>
+          <a:solidFill>
+            <a:srgbClr val="FFFFFF"/>
+          </a:solidFill>
+          <a:ln w="10160">
+            <a:solidFill>
+              <a:srgbClr val="BFCCD6"/>
+            </a:solidFill>
+          </a:ln>
+        </p:spPr>
+        <p:style>
+          <a:lnRef idx="1">
+            <a:schemeClr val="accent1"/>
+          </a:lnRef>
+          <a:fillRef idx="3">
+            <a:schemeClr val="accent1"/>
+          </a:fillRef>
+          <a:effectRef idx="2">
+            <a:schemeClr val="accent1"/>
+          </a:effectRef>
+          <a:fontRef idx="minor">
+            <a:schemeClr val="lt1"/>
+          </a:fontRef>
+        </p:style>
+        <p:txBody>
+          <a:bodyPr rtlCol="0" anchor="ctr"/>
+          <a:lstStyle/>
+          <a:p>
+            <a:pPr algn="ctr"/>
+          </a:p>
+        </p:txBody>
+      </p:sp>
+      <p:sp>
+        <p:nvSpPr>
+          <p:cNvPr id="59" name="TextBox 58"/>
+          <p:cNvSpPr txBox="1"/>
+          <p:nvPr/>
+        </p:nvSpPr>
+        <p:spPr>
+          <a:xfrm>
+            <a:off x="9985247" y="3145536"/>
+            <a:ext cx="923544" cy="201168"/>
+          </a:xfrm>
+          <a:prstGeom prst="rect">
+            <a:avLst/>
+          </a:prstGeom>
+          <a:noFill/>
+        </p:spPr>
+        <p:txBody>
+          <a:bodyPr wrap="square" lIns="0" rIns="0" tIns="0" bIns="0" anchor="t">
+            <a:spAutoFit/>
+          </a:bodyPr>
+          <a:lstStyle/>
+          <a:p>
+            <a:pPr algn="ctr"/>
+            <a:r>
+              <a:rPr sz="1100" b="1">
+                <a:solidFill>
+                  <a:srgbClr val="0A1820"/>
+                </a:solidFill>
+                <a:latin typeface="Aptos"/>
+              </a:rPr>
+              <a:t>FTP</a:t>
+            </a:r>
+          </a:p>
+        </p:txBody>
+      </p:sp>
+      <p:sp>
+        <p:nvSpPr>
+          <p:cNvPr id="60" name="TextBox 59"/>
+          <p:cNvSpPr txBox="1"/>
+          <p:nvPr/>
+        </p:nvSpPr>
+        <p:spPr>
+          <a:xfrm>
+            <a:off x="9985247" y="3392424"/>
+            <a:ext cx="923544" cy="164592"/>
+          </a:xfrm>
+          <a:prstGeom prst="rect">
+            <a:avLst/>
+          </a:prstGeom>
+          <a:noFill/>
+        </p:spPr>
+        <p:txBody>
+          <a:bodyPr wrap="square" lIns="0" rIns="0" tIns="0" bIns="0" anchor="t">
+            <a:spAutoFit/>
+          </a:bodyPr>
+          <a:lstStyle/>
+          <a:p>
+            <a:pPr algn="ctr"/>
+            <a:r>
+              <a:rPr sz="720" b="0">
+                <a:solidFill>
+                  <a:srgbClr val="5C6975"/>
+                </a:solidFill>
+                <a:latin typeface="Aptos"/>
+              </a:rPr>
+              <a:t>VSFTPD</a:t>
+            </a:r>
+          </a:p>
+        </p:txBody>
+      </p:sp>
+      <p:cxnSp>
+        <p:nvCxnSpPr>
+          <p:cNvPr id="61" name="Connector 60"/>
+          <p:cNvCxnSpPr/>
+          <p:nvPr/>
+        </p:nvCxnSpPr>
+        <p:spPr>
+          <a:xfrm>
+            <a:off x="10012680" y="3529584"/>
+            <a:ext cx="868679" cy="0"/>
+          </a:xfrm>
+          <a:prstGeom prst="line">
+            <a:avLst/>
+          </a:prstGeom>
+          <a:ln w="27940">
+            <a:solidFill>
+              <a:srgbClr val="F59E0B"/>
+            </a:solidFill>
+          </a:ln>
+        </p:spPr>
+        <p:style>
+          <a:lnRef idx="2">
+            <a:schemeClr val="accent1"/>
+          </a:lnRef>
+          <a:fillRef idx="0">
+            <a:schemeClr val="accent1"/>
+          </a:fillRef>
+          <a:effectRef idx="1">
+            <a:schemeClr val="accent1"/>
+          </a:effectRef>
+          <a:fontRef idx="minor">
+            <a:schemeClr val="tx1"/>
+          </a:fontRef>
+        </p:style>
+      </p:cxnSp>
+      <p:cxnSp>
+        <p:nvCxnSpPr>
+          <p:cNvPr id="62" name="Connector 61"/>
+          <p:cNvCxnSpPr/>
+          <p:nvPr/>
+        </p:nvCxnSpPr>
+        <p:spPr>
+          <a:xfrm flipV="1">
+            <a:off x="1874519" y="1929384"/>
+            <a:ext cx="457201" cy="731520"/>
+          </a:xfrm>
+          <a:prstGeom prst="line">
+            <a:avLst/>
+          </a:prstGeom>
+          <a:ln w="17145">
+            <a:solidFill>
+              <a:srgbClr val="BFCCD6"/>
+            </a:solidFill>
+          </a:ln>
+        </p:spPr>
+        <p:style>
+          <a:lnRef idx="2">
+            <a:schemeClr val="accent1"/>
+          </a:lnRef>
+          <a:fillRef idx="0">
+            <a:schemeClr val="accent1"/>
+          </a:fillRef>
+          <a:effectRef idx="1">
+            <a:schemeClr val="accent1"/>
+          </a:effectRef>
+          <a:fontRef idx="minor">
+            <a:schemeClr val="tx1"/>
+          </a:fontRef>
+        </p:style>
+      </p:cxnSp>
+      <p:cxnSp>
+        <p:nvCxnSpPr>
+          <p:cNvPr id="63" name="Connector 62"/>
+          <p:cNvCxnSpPr/>
+          <p:nvPr/>
+        </p:nvCxnSpPr>
+        <p:spPr>
+          <a:xfrm>
+            <a:off x="1874519" y="2660904"/>
+            <a:ext cx="457201" cy="246888"/>
+          </a:xfrm>
+          <a:prstGeom prst="line">
+            <a:avLst/>
+          </a:prstGeom>
+          <a:ln w="17145">
+            <a:solidFill>
+              <a:srgbClr val="BFCCD6"/>
+            </a:solidFill>
+          </a:ln>
+        </p:spPr>
+        <p:style>
+          <a:lnRef idx="2">
+            <a:schemeClr val="accent1"/>
+          </a:lnRef>
+          <a:fillRef idx="0">
+            <a:schemeClr val="accent1"/>
+          </a:fillRef>
+          <a:effectRef idx="1">
+            <a:schemeClr val="accent1"/>
+          </a:effectRef>
+          <a:fontRef idx="minor">
+            <a:schemeClr val="tx1"/>
+          </a:fontRef>
+        </p:style>
+      </p:cxnSp>
+      <p:cxnSp>
+        <p:nvCxnSpPr>
+          <p:cNvPr id="64" name="Connector 63"/>
+          <p:cNvCxnSpPr/>
+          <p:nvPr/>
+        </p:nvCxnSpPr>
+        <p:spPr>
+          <a:xfrm>
+            <a:off x="1874519" y="2660904"/>
+            <a:ext cx="457201" cy="1225296"/>
+          </a:xfrm>
+          <a:prstGeom prst="line">
+            <a:avLst/>
+          </a:prstGeom>
+          <a:ln w="17145">
+            <a:solidFill>
+              <a:srgbClr val="BFCCD6"/>
+            </a:solidFill>
+          </a:ln>
+        </p:spPr>
+        <p:style>
+          <a:lnRef idx="2">
+            <a:schemeClr val="accent1"/>
+          </a:lnRef>
+          <a:fillRef idx="0">
+            <a:schemeClr val="accent1"/>
+          </a:fillRef>
+          <a:effectRef idx="1">
+            <a:schemeClr val="accent1"/>
+          </a:effectRef>
+          <a:fontRef idx="minor">
+            <a:schemeClr val="tx1"/>
+          </a:fontRef>
+        </p:style>
+      </p:cxnSp>
+      <p:cxnSp>
+        <p:nvCxnSpPr>
+          <p:cNvPr id="65" name="Connector 64"/>
+          <p:cNvCxnSpPr/>
+          <p:nvPr/>
+        </p:nvCxnSpPr>
+        <p:spPr>
+          <a:xfrm>
+            <a:off x="3657600" y="1929384"/>
+            <a:ext cx="548640" cy="0"/>
+          </a:xfrm>
+          <a:prstGeom prst="line">
+            <a:avLst/>
+          </a:prstGeom>
+          <a:ln w="17145">
+            <a:solidFill>
+              <a:srgbClr val="BFCCD6"/>
+            </a:solidFill>
+          </a:ln>
+        </p:spPr>
+        <p:style>
+          <a:lnRef idx="2">
+            <a:schemeClr val="accent1"/>
+          </a:lnRef>
+          <a:fillRef idx="0">
+            <a:schemeClr val="accent1"/>
+          </a:fillRef>
+          <a:effectRef idx="1">
+            <a:schemeClr val="accent1"/>
+          </a:effectRef>
+          <a:fontRef idx="minor">
+            <a:schemeClr val="tx1"/>
+          </a:fontRef>
+        </p:style>
+      </p:cxnSp>
+      <p:cxnSp>
+        <p:nvCxnSpPr>
+          <p:cNvPr id="66" name="Connector 65"/>
+          <p:cNvCxnSpPr/>
+          <p:nvPr/>
+        </p:nvCxnSpPr>
+        <p:spPr>
+          <a:xfrm>
+            <a:off x="3657600" y="2907792"/>
+            <a:ext cx="548640" cy="0"/>
+          </a:xfrm>
+          <a:prstGeom prst="line">
+            <a:avLst/>
+          </a:prstGeom>
+          <a:ln w="17145">
+            <a:solidFill>
+              <a:srgbClr val="BFCCD6"/>
+            </a:solidFill>
+          </a:ln>
+        </p:spPr>
+        <p:style>
+          <a:lnRef idx="2">
+            <a:schemeClr val="accent1"/>
+          </a:lnRef>
+          <a:fillRef idx="0">
+            <a:schemeClr val="accent1"/>
+          </a:fillRef>
+          <a:effectRef idx="1">
+            <a:schemeClr val="accent1"/>
+          </a:effectRef>
+          <a:fontRef idx="minor">
+            <a:schemeClr val="tx1"/>
+          </a:fontRef>
+        </p:style>
+      </p:cxnSp>
+      <p:cxnSp>
+        <p:nvCxnSpPr>
+          <p:cNvPr id="67" name="Connector 66"/>
+          <p:cNvCxnSpPr/>
+          <p:nvPr/>
+        </p:nvCxnSpPr>
+        <p:spPr>
+          <a:xfrm>
+            <a:off x="3657600" y="3886200"/>
+            <a:ext cx="548640" cy="0"/>
+          </a:xfrm>
+          <a:prstGeom prst="line">
+            <a:avLst/>
+          </a:prstGeom>
+          <a:ln w="17145">
+            <a:solidFill>
+              <a:srgbClr val="BFCCD6"/>
+            </a:solidFill>
+          </a:ln>
+        </p:spPr>
+        <p:style>
+          <a:lnRef idx="2">
+            <a:schemeClr val="accent1"/>
+          </a:lnRef>
+          <a:fillRef idx="0">
+            <a:schemeClr val="accent1"/>
+          </a:fillRef>
+          <a:effectRef idx="1">
+            <a:schemeClr val="accent1"/>
+          </a:effectRef>
+          <a:fontRef idx="minor">
+            <a:schemeClr val="tx1"/>
+          </a:fontRef>
+        </p:style>
+      </p:cxnSp>
+      <p:cxnSp>
+        <p:nvCxnSpPr>
+          <p:cNvPr id="68" name="Connector 67"/>
+          <p:cNvCxnSpPr/>
+          <p:nvPr/>
+        </p:nvCxnSpPr>
+        <p:spPr>
+          <a:xfrm>
+            <a:off x="5623560" y="1929384"/>
+            <a:ext cx="548640" cy="0"/>
+          </a:xfrm>
+          <a:prstGeom prst="line">
+            <a:avLst/>
+          </a:prstGeom>
+          <a:ln w="17145">
+            <a:solidFill>
+              <a:srgbClr val="BFCCD6"/>
+            </a:solidFill>
+          </a:ln>
+        </p:spPr>
+        <p:style>
+          <a:lnRef idx="2">
+            <a:schemeClr val="accent1"/>
+          </a:lnRef>
+          <a:fillRef idx="0">
+            <a:schemeClr val="accent1"/>
+          </a:fillRef>
+          <a:effectRef idx="1">
+            <a:schemeClr val="accent1"/>
+          </a:effectRef>
+          <a:fontRef idx="minor">
+            <a:schemeClr val="tx1"/>
+          </a:fontRef>
+        </p:style>
+      </p:cxnSp>
+      <p:cxnSp>
+        <p:nvCxnSpPr>
+          <p:cNvPr id="69" name="Connector 68"/>
+          <p:cNvCxnSpPr/>
+          <p:nvPr/>
+        </p:nvCxnSpPr>
+        <p:spPr>
+          <a:xfrm>
+            <a:off x="5623560" y="2907792"/>
+            <a:ext cx="548640" cy="0"/>
+          </a:xfrm>
+          <a:prstGeom prst="line">
+            <a:avLst/>
+          </a:prstGeom>
+          <a:ln w="17145">
+            <a:solidFill>
+              <a:srgbClr val="BFCCD6"/>
+            </a:solidFill>
+          </a:ln>
+        </p:spPr>
+        <p:style>
+          <a:lnRef idx="2">
+            <a:schemeClr val="accent1"/>
+          </a:lnRef>
+          <a:fillRef idx="0">
+            <a:schemeClr val="accent1"/>
+          </a:fillRef>
+          <a:effectRef idx="1">
+            <a:schemeClr val="accent1"/>
+          </a:effectRef>
+          <a:fontRef idx="minor">
+            <a:schemeClr val="tx1"/>
+          </a:fontRef>
+        </p:style>
+      </p:cxnSp>
+      <p:cxnSp>
+        <p:nvCxnSpPr>
+          <p:cNvPr id="70" name="Connector 69"/>
+          <p:cNvCxnSpPr/>
+          <p:nvPr/>
+        </p:nvCxnSpPr>
+        <p:spPr>
+          <a:xfrm>
+            <a:off x="5623560" y="3886200"/>
+            <a:ext cx="548640" cy="0"/>
+          </a:xfrm>
+          <a:prstGeom prst="line">
+            <a:avLst/>
+          </a:prstGeom>
+          <a:ln w="17145">
+            <a:solidFill>
+              <a:srgbClr val="BFCCD6"/>
+            </a:solidFill>
+          </a:ln>
+        </p:spPr>
+        <p:style>
+          <a:lnRef idx="2">
+            <a:schemeClr val="accent1"/>
+          </a:lnRef>
+          <a:fillRef idx="0">
+            <a:schemeClr val="accent1"/>
+          </a:fillRef>
+          <a:effectRef idx="1">
+            <a:schemeClr val="accent1"/>
+          </a:effectRef>
+          <a:fontRef idx="minor">
+            <a:schemeClr val="tx1"/>
+          </a:fontRef>
+        </p:style>
+      </p:cxnSp>
+      <p:cxnSp>
+        <p:nvCxnSpPr>
+          <p:cNvPr id="71" name="Connector 70"/>
+          <p:cNvCxnSpPr/>
+          <p:nvPr/>
+        </p:nvCxnSpPr>
+        <p:spPr>
+          <a:xfrm flipV="1">
+            <a:off x="7589520" y="2212848"/>
+            <a:ext cx="731520" cy="1673352"/>
+          </a:xfrm>
+          <a:prstGeom prst="line">
+            <a:avLst/>
+          </a:prstGeom>
+          <a:ln w="17145">
+            <a:solidFill>
+              <a:srgbClr val="BFCCD6"/>
+            </a:solidFill>
+          </a:ln>
+        </p:spPr>
+        <p:style>
+          <a:lnRef idx="2">
+            <a:schemeClr val="accent1"/>
+          </a:lnRef>
+          <a:fillRef idx="0">
+            <a:schemeClr val="accent1"/>
+          </a:fillRef>
+          <a:effectRef idx="1">
+            <a:schemeClr val="accent1"/>
+          </a:effectRef>
+          <a:fontRef idx="minor">
+            <a:schemeClr val="tx1"/>
+          </a:fontRef>
+        </p:style>
+      </p:cxnSp>
+      <p:cxnSp>
+        <p:nvCxnSpPr>
+          <p:cNvPr id="72" name="Connector 71"/>
+          <p:cNvCxnSpPr/>
+          <p:nvPr/>
+        </p:nvCxnSpPr>
+        <p:spPr>
+          <a:xfrm flipV="1">
+            <a:off x="7589520" y="3328416"/>
+            <a:ext cx="731520" cy="557784"/>
+          </a:xfrm>
+          <a:prstGeom prst="line">
+            <a:avLst/>
+          </a:prstGeom>
+          <a:ln w="17145">
+            <a:solidFill>
+              <a:srgbClr val="BFCCD6"/>
+            </a:solidFill>
+          </a:ln>
+        </p:spPr>
+        <p:style>
+          <a:lnRef idx="2">
+            <a:schemeClr val="accent1"/>
+          </a:lnRef>
+          <a:fillRef idx="0">
+            <a:schemeClr val="accent1"/>
+          </a:fillRef>
+          <a:effectRef idx="1">
+            <a:schemeClr val="accent1"/>
+          </a:effectRef>
+          <a:fontRef idx="minor">
+            <a:schemeClr val="tx1"/>
+          </a:fontRef>
+        </p:style>
+      </p:cxnSp>
+      <p:sp>
+        <p:nvSpPr>
+          <p:cNvPr id="73" name="TextBox 72"/>
+          <p:cNvSpPr txBox="1"/>
+          <p:nvPr/>
+        </p:nvSpPr>
+        <p:spPr>
+          <a:xfrm>
+            <a:off x="777240" y="5138928"/>
+            <a:ext cx="9921240" cy="384048"/>
+          </a:xfrm>
+          <a:prstGeom prst="rect">
+            <a:avLst/>
+          </a:prstGeom>
+          <a:noFill/>
+        </p:spPr>
+        <p:txBody>
+          <a:bodyPr wrap="square" lIns="0" rIns="0" tIns="0" bIns="0" anchor="t">
+            <a:spAutoFit/>
+          </a:bodyPr>
+          <a:lstStyle/>
+          <a:p>
+            <a:pPr algn="l"/>
+            <a:r>
+              <a:rPr sz="1600" b="1">
+                <a:solidFill>
+                  <a:srgbClr val="0A1820"/>
+                </a:solidFill>
+                <a:latin typeface="Aptos"/>
+              </a:rPr>
+              <a:t>Flujo lógico: usuarios ven demo, Zabbix registra estado, agentes observan servicios y MailHog evidencia alertas.</a:t>
+            </a:r>
+          </a:p>
+        </p:txBody>
+      </p:sp>
+      <p:cxnSp>
+        <p:nvCxnSpPr>
+          <p:cNvPr id="74" name="Connector 73"/>
           <p:cNvCxnSpPr/>
           <p:nvPr/>
         </p:nvCxnSpPr>
@@ -19312,7 +20825,7 @@
       </p:cxnSp>
       <p:sp>
         <p:nvSpPr>
-          <p:cNvPr id="59" name="TextBox 58"/>
+          <p:cNvPr id="75" name="TextBox 74"/>
           <p:cNvSpPr txBox="1"/>
           <p:nvPr/>
         </p:nvSpPr>
@@ -19347,7 +20860,7 @@
       </p:sp>
       <p:sp>
         <p:nvSpPr>
-          <p:cNvPr id="60" name="TextBox 59"/>
+          <p:cNvPr id="76" name="TextBox 75"/>
           <p:cNvSpPr txBox="1"/>
           <p:nvPr/>
         </p:nvSpPr>
@@ -19375,7 +20888,7 @@
                 </a:solidFill>
                 <a:latin typeface="Aptos"/>
               </a:rPr>
-              <a:t>05/17</a:t>
+              <a:t>05/18</a:t>
             </a:r>
           </a:p>
         </p:txBody>
@@ -19389,6 +20902,2426 @@
 </file>
 
 <file path=ppt/slides/slide5.xml><?xml version="1.0" encoding="utf-8"?>
+<p:sld xmlns:a="http://schemas.openxmlformats.org/drawingml/2006/main" xmlns:p="http://schemas.openxmlformats.org/presentationml/2006/main" xmlns:r="http://schemas.openxmlformats.org/officeDocument/2006/relationships">
+  <p:cSld>
+    <p:bg>
+      <p:bgPr>
+        <a:solidFill>
+          <a:srgbClr val="F2F7F9"/>
+        </a:solidFill>
+        <a:effectLst/>
+      </p:bgPr>
+    </p:bg>
+    <p:spTree>
+      <p:nvGrpSpPr>
+        <p:cNvPr id="1" name=""/>
+        <p:cNvGrpSpPr/>
+        <p:nvPr/>
+      </p:nvGrpSpPr>
+      <p:grpSpPr/>
+      <p:sp>
+        <p:nvSpPr>
+          <p:cNvPr id="2" name="TextBox 1"/>
+          <p:cNvSpPr txBox="1"/>
+          <p:nvPr/>
+        </p:nvSpPr>
+        <p:spPr>
+          <a:xfrm>
+            <a:off x="502920" y="384048"/>
+            <a:ext cx="384048" cy="201168"/>
+          </a:xfrm>
+          <a:prstGeom prst="rect">
+            <a:avLst/>
+          </a:prstGeom>
+          <a:noFill/>
+        </p:spPr>
+        <p:txBody>
+          <a:bodyPr wrap="square" lIns="0" rIns="0" tIns="0" bIns="0" anchor="t">
+            <a:spAutoFit/>
+          </a:bodyPr>
+          <a:lstStyle/>
+          <a:p>
+            <a:pPr algn="l"/>
+            <a:r>
+              <a:rPr sz="800" b="1">
+                <a:solidFill>
+                  <a:srgbClr val="0A1820"/>
+                </a:solidFill>
+                <a:latin typeface="Aptos"/>
+              </a:rPr>
+              <a:t>06</a:t>
+            </a:r>
+          </a:p>
+        </p:txBody>
+      </p:sp>
+      <p:cxnSp>
+        <p:nvCxnSpPr>
+          <p:cNvPr id="3" name="Connector 2"/>
+          <p:cNvCxnSpPr/>
+          <p:nvPr/>
+        </p:nvCxnSpPr>
+        <p:spPr>
+          <a:xfrm>
+            <a:off x="941832" y="475488"/>
+            <a:ext cx="685800" cy="0"/>
+          </a:xfrm>
+          <a:prstGeom prst="line">
+            <a:avLst/>
+          </a:prstGeom>
+          <a:ln w="13970">
+            <a:solidFill>
+              <a:srgbClr val="0A1820"/>
+            </a:solidFill>
+          </a:ln>
+        </p:spPr>
+        <p:style>
+          <a:lnRef idx="2">
+            <a:schemeClr val="accent1"/>
+          </a:lnRef>
+          <a:fillRef idx="0">
+            <a:schemeClr val="accent1"/>
+          </a:fillRef>
+          <a:effectRef idx="1">
+            <a:schemeClr val="accent1"/>
+          </a:effectRef>
+          <a:fontRef idx="minor">
+            <a:schemeClr val="tx1"/>
+          </a:fontRef>
+        </p:style>
+      </p:cxnSp>
+      <p:sp>
+        <p:nvSpPr>
+          <p:cNvPr id="4" name="TextBox 3"/>
+          <p:cNvSpPr txBox="1"/>
+          <p:nvPr/>
+        </p:nvSpPr>
+        <p:spPr>
+          <a:xfrm>
+            <a:off x="1737360" y="356616"/>
+            <a:ext cx="3108960" cy="274320"/>
+          </a:xfrm>
+          <a:prstGeom prst="rect">
+            <a:avLst/>
+          </a:prstGeom>
+          <a:noFill/>
+        </p:spPr>
+        <p:txBody>
+          <a:bodyPr wrap="square" lIns="0" rIns="0" tIns="0" bIns="0" anchor="t">
+            <a:spAutoFit/>
+          </a:bodyPr>
+          <a:lstStyle/>
+          <a:p>
+            <a:pPr algn="l"/>
+            <a:r>
+              <a:rPr sz="800" b="1">
+                <a:solidFill>
+                  <a:srgbClr val="0A1820"/>
+                </a:solidFill>
+                <a:latin typeface="Aptos"/>
+              </a:rPr>
+              <a:t>DESPLIEGUE</a:t>
+            </a:r>
+          </a:p>
+        </p:txBody>
+      </p:sp>
+      <p:sp>
+        <p:nvSpPr>
+          <p:cNvPr id="5" name="TextBox 4"/>
+          <p:cNvSpPr txBox="1"/>
+          <p:nvPr/>
+        </p:nvSpPr>
+        <p:spPr>
+          <a:xfrm>
+            <a:off x="502920" y="713232"/>
+            <a:ext cx="7498079" cy="868680"/>
+          </a:xfrm>
+          <a:prstGeom prst="rect">
+            <a:avLst/>
+          </a:prstGeom>
+          <a:noFill/>
+        </p:spPr>
+        <p:txBody>
+          <a:bodyPr wrap="square" lIns="0" rIns="0" tIns="0" bIns="0" anchor="t">
+            <a:spAutoFit/>
+          </a:bodyPr>
+          <a:lstStyle/>
+          <a:p>
+            <a:pPr algn="l"/>
+            <a:r>
+              <a:rPr sz="3000" b="1">
+                <a:solidFill>
+                  <a:srgbClr val="0A1820"/>
+                </a:solidFill>
+                <a:latin typeface="Aptos Display"/>
+              </a:rPr>
+              <a:t>La VPS publica solo tres entradas HTTPS.</a:t>
+            </a:r>
+          </a:p>
+        </p:txBody>
+      </p:sp>
+      <p:sp>
+        <p:nvSpPr>
+          <p:cNvPr id="6" name="Rounded Rectangle 5"/>
+          <p:cNvSpPr/>
+          <p:nvPr/>
+        </p:nvSpPr>
+        <p:spPr>
+          <a:xfrm>
+            <a:off x="731520" y="1600200"/>
+            <a:ext cx="2331720" cy="1051560"/>
+          </a:xfrm>
+          <a:prstGeom prst="roundRect">
+            <a:avLst/>
+          </a:prstGeom>
+          <a:solidFill>
+            <a:srgbClr val="FFFFFF"/>
+          </a:solidFill>
+          <a:ln w="10160">
+            <a:solidFill>
+              <a:srgbClr val="BFCCD6"/>
+            </a:solidFill>
+          </a:ln>
+        </p:spPr>
+        <p:style>
+          <a:lnRef idx="1">
+            <a:schemeClr val="accent1"/>
+          </a:lnRef>
+          <a:fillRef idx="3">
+            <a:schemeClr val="accent1"/>
+          </a:fillRef>
+          <a:effectRef idx="2">
+            <a:schemeClr val="accent1"/>
+          </a:effectRef>
+          <a:fontRef idx="minor">
+            <a:schemeClr val="lt1"/>
+          </a:fontRef>
+        </p:style>
+        <p:txBody>
+          <a:bodyPr rtlCol="0" anchor="ctr"/>
+          <a:lstStyle/>
+          <a:p>
+            <a:pPr algn="ctr"/>
+          </a:p>
+        </p:txBody>
+      </p:sp>
+      <p:sp>
+        <p:nvSpPr>
+          <p:cNvPr id="7" name="Rectangle 6"/>
+          <p:cNvSpPr/>
+          <p:nvPr/>
+        </p:nvSpPr>
+        <p:spPr>
+          <a:xfrm>
+            <a:off x="731520" y="1600200"/>
+            <a:ext cx="73152" cy="1051560"/>
+          </a:xfrm>
+          <a:prstGeom prst="rect">
+            <a:avLst/>
+          </a:prstGeom>
+          <a:solidFill>
+            <a:srgbClr val="22C5AA"/>
+          </a:solidFill>
+          <a:ln>
+            <a:noFill/>
+          </a:ln>
+        </p:spPr>
+        <p:style>
+          <a:lnRef idx="1">
+            <a:schemeClr val="accent1"/>
+          </a:lnRef>
+          <a:fillRef idx="3">
+            <a:schemeClr val="accent1"/>
+          </a:fillRef>
+          <a:effectRef idx="2">
+            <a:schemeClr val="accent1"/>
+          </a:effectRef>
+          <a:fontRef idx="minor">
+            <a:schemeClr val="lt1"/>
+          </a:fontRef>
+        </p:style>
+        <p:txBody>
+          <a:bodyPr rtlCol="0" anchor="ctr"/>
+          <a:lstStyle/>
+          <a:p>
+            <a:pPr algn="ctr"/>
+          </a:p>
+        </p:txBody>
+      </p:sp>
+      <p:sp>
+        <p:nvSpPr>
+          <p:cNvPr id="8" name="TextBox 7"/>
+          <p:cNvSpPr txBox="1"/>
+          <p:nvPr/>
+        </p:nvSpPr>
+        <p:spPr>
+          <a:xfrm>
+            <a:off x="960120" y="1746504"/>
+            <a:ext cx="1947672" cy="219456"/>
+          </a:xfrm>
+          <a:prstGeom prst="rect">
+            <a:avLst/>
+          </a:prstGeom>
+          <a:noFill/>
+        </p:spPr>
+        <p:txBody>
+          <a:bodyPr wrap="square" lIns="0" rIns="0" tIns="0" bIns="0" anchor="t">
+            <a:spAutoFit/>
+          </a:bodyPr>
+          <a:lstStyle/>
+          <a:p>
+            <a:pPr algn="l"/>
+            <a:r>
+              <a:rPr sz="1200" b="1">
+                <a:solidFill>
+                  <a:srgbClr val="22C5AA"/>
+                </a:solidFill>
+                <a:latin typeface="Aptos"/>
+              </a:rPr>
+              <a:t>Internet + DNS</a:t>
+            </a:r>
+          </a:p>
+        </p:txBody>
+      </p:sp>
+      <p:sp>
+        <p:nvSpPr>
+          <p:cNvPr id="9" name="TextBox 8"/>
+          <p:cNvSpPr txBox="1"/>
+          <p:nvPr/>
+        </p:nvSpPr>
+        <p:spPr>
+          <a:xfrm>
+            <a:off x="960120" y="2029967"/>
+            <a:ext cx="1947672" cy="539495"/>
+          </a:xfrm>
+          <a:prstGeom prst="rect">
+            <a:avLst/>
+          </a:prstGeom>
+          <a:noFill/>
+        </p:spPr>
+        <p:txBody>
+          <a:bodyPr wrap="square" lIns="0" rIns="0" tIns="0" bIns="0" anchor="t">
+            <a:spAutoFit/>
+          </a:bodyPr>
+          <a:lstStyle/>
+          <a:p>
+            <a:pPr algn="l"/>
+            <a:r>
+              <a:rPr sz="1100" b="0">
+                <a:solidFill>
+                  <a:srgbClr val="0A1820"/>
+                </a:solidFill>
+                <a:latin typeface="Aptos"/>
+              </a:rPr>
+              <a:t>Tres subdominios apuntan al dominio negociocontigo.com.</a:t>
+            </a:r>
+          </a:p>
+        </p:txBody>
+      </p:sp>
+      <p:sp>
+        <p:nvSpPr>
+          <p:cNvPr id="10" name="Rounded Rectangle 9"/>
+          <p:cNvSpPr/>
+          <p:nvPr/>
+        </p:nvSpPr>
+        <p:spPr>
+          <a:xfrm>
+            <a:off x="731520" y="2880360"/>
+            <a:ext cx="2331720" cy="1051560"/>
+          </a:xfrm>
+          <a:prstGeom prst="roundRect">
+            <a:avLst/>
+          </a:prstGeom>
+          <a:solidFill>
+            <a:srgbClr val="FFFFFF"/>
+          </a:solidFill>
+          <a:ln w="10160">
+            <a:solidFill>
+              <a:srgbClr val="BFCCD6"/>
+            </a:solidFill>
+          </a:ln>
+        </p:spPr>
+        <p:style>
+          <a:lnRef idx="1">
+            <a:schemeClr val="accent1"/>
+          </a:lnRef>
+          <a:fillRef idx="3">
+            <a:schemeClr val="accent1"/>
+          </a:fillRef>
+          <a:effectRef idx="2">
+            <a:schemeClr val="accent1"/>
+          </a:effectRef>
+          <a:fontRef idx="minor">
+            <a:schemeClr val="lt1"/>
+          </a:fontRef>
+        </p:style>
+        <p:txBody>
+          <a:bodyPr rtlCol="0" anchor="ctr"/>
+          <a:lstStyle/>
+          <a:p>
+            <a:pPr algn="ctr"/>
+          </a:p>
+        </p:txBody>
+      </p:sp>
+      <p:sp>
+        <p:nvSpPr>
+          <p:cNvPr id="11" name="Rectangle 10"/>
+          <p:cNvSpPr/>
+          <p:nvPr/>
+        </p:nvSpPr>
+        <p:spPr>
+          <a:xfrm>
+            <a:off x="731520" y="2880360"/>
+            <a:ext cx="73152" cy="1051560"/>
+          </a:xfrm>
+          <a:prstGeom prst="rect">
+            <a:avLst/>
+          </a:prstGeom>
+          <a:solidFill>
+            <a:srgbClr val="38BDF8"/>
+          </a:solidFill>
+          <a:ln>
+            <a:noFill/>
+          </a:ln>
+        </p:spPr>
+        <p:style>
+          <a:lnRef idx="1">
+            <a:schemeClr val="accent1"/>
+          </a:lnRef>
+          <a:fillRef idx="3">
+            <a:schemeClr val="accent1"/>
+          </a:fillRef>
+          <a:effectRef idx="2">
+            <a:schemeClr val="accent1"/>
+          </a:effectRef>
+          <a:fontRef idx="minor">
+            <a:schemeClr val="lt1"/>
+          </a:fontRef>
+        </p:style>
+        <p:txBody>
+          <a:bodyPr rtlCol="0" anchor="ctr"/>
+          <a:lstStyle/>
+          <a:p>
+            <a:pPr algn="ctr"/>
+          </a:p>
+        </p:txBody>
+      </p:sp>
+      <p:sp>
+        <p:nvSpPr>
+          <p:cNvPr id="12" name="TextBox 11"/>
+          <p:cNvSpPr txBox="1"/>
+          <p:nvPr/>
+        </p:nvSpPr>
+        <p:spPr>
+          <a:xfrm>
+            <a:off x="960120" y="3026664"/>
+            <a:ext cx="1947672" cy="219456"/>
+          </a:xfrm>
+          <a:prstGeom prst="rect">
+            <a:avLst/>
+          </a:prstGeom>
+          <a:noFill/>
+        </p:spPr>
+        <p:txBody>
+          <a:bodyPr wrap="square" lIns="0" rIns="0" tIns="0" bIns="0" anchor="t">
+            <a:spAutoFit/>
+          </a:bodyPr>
+          <a:lstStyle/>
+          <a:p>
+            <a:pPr algn="l"/>
+            <a:r>
+              <a:rPr sz="1200" b="1">
+                <a:solidFill>
+                  <a:srgbClr val="38BDF8"/>
+                </a:solidFill>
+                <a:latin typeface="Aptos"/>
+              </a:rPr>
+              <a:t>Hostinger VPS</a:t>
+            </a:r>
+          </a:p>
+        </p:txBody>
+      </p:sp>
+      <p:sp>
+        <p:nvSpPr>
+          <p:cNvPr id="13" name="TextBox 12"/>
+          <p:cNvSpPr txBox="1"/>
+          <p:nvPr/>
+        </p:nvSpPr>
+        <p:spPr>
+          <a:xfrm>
+            <a:off x="960120" y="3310128"/>
+            <a:ext cx="1947672" cy="539495"/>
+          </a:xfrm>
+          <a:prstGeom prst="rect">
+            <a:avLst/>
+          </a:prstGeom>
+          <a:noFill/>
+        </p:spPr>
+        <p:txBody>
+          <a:bodyPr wrap="square" lIns="0" rIns="0" tIns="0" bIns="0" anchor="t">
+            <a:spAutoFit/>
+          </a:bodyPr>
+          <a:lstStyle/>
+          <a:p>
+            <a:pPr algn="l"/>
+            <a:r>
+              <a:rPr sz="1100" b="0">
+                <a:solidFill>
+                  <a:srgbClr val="0A1820"/>
+                </a:solidFill>
+                <a:latin typeface="Aptos"/>
+              </a:rPr>
+              <a:t>Ubuntu 24.04 en 187.124.228.23 ejecuta /root/proyecto7-zabbix.</a:t>
+            </a:r>
+          </a:p>
+        </p:txBody>
+      </p:sp>
+      <p:sp>
+        <p:nvSpPr>
+          <p:cNvPr id="14" name="Rounded Rectangle 13"/>
+          <p:cNvSpPr/>
+          <p:nvPr/>
+        </p:nvSpPr>
+        <p:spPr>
+          <a:xfrm>
+            <a:off x="731520" y="4160520"/>
+            <a:ext cx="2331720" cy="1051560"/>
+          </a:xfrm>
+          <a:prstGeom prst="roundRect">
+            <a:avLst/>
+          </a:prstGeom>
+          <a:solidFill>
+            <a:srgbClr val="FFFFFF"/>
+          </a:solidFill>
+          <a:ln w="10160">
+            <a:solidFill>
+              <a:srgbClr val="BFCCD6"/>
+            </a:solidFill>
+          </a:ln>
+        </p:spPr>
+        <p:style>
+          <a:lnRef idx="1">
+            <a:schemeClr val="accent1"/>
+          </a:lnRef>
+          <a:fillRef idx="3">
+            <a:schemeClr val="accent1"/>
+          </a:fillRef>
+          <a:effectRef idx="2">
+            <a:schemeClr val="accent1"/>
+          </a:effectRef>
+          <a:fontRef idx="minor">
+            <a:schemeClr val="lt1"/>
+          </a:fontRef>
+        </p:style>
+        <p:txBody>
+          <a:bodyPr rtlCol="0" anchor="ctr"/>
+          <a:lstStyle/>
+          <a:p>
+            <a:pPr algn="ctr"/>
+          </a:p>
+        </p:txBody>
+      </p:sp>
+      <p:sp>
+        <p:nvSpPr>
+          <p:cNvPr id="15" name="Rectangle 14"/>
+          <p:cNvSpPr/>
+          <p:nvPr/>
+        </p:nvSpPr>
+        <p:spPr>
+          <a:xfrm>
+            <a:off x="731520" y="4160520"/>
+            <a:ext cx="73152" cy="1051560"/>
+          </a:xfrm>
+          <a:prstGeom prst="rect">
+            <a:avLst/>
+          </a:prstGeom>
+          <a:solidFill>
+            <a:srgbClr val="A3E635"/>
+          </a:solidFill>
+          <a:ln>
+            <a:noFill/>
+          </a:ln>
+        </p:spPr>
+        <p:style>
+          <a:lnRef idx="1">
+            <a:schemeClr val="accent1"/>
+          </a:lnRef>
+          <a:fillRef idx="3">
+            <a:schemeClr val="accent1"/>
+          </a:fillRef>
+          <a:effectRef idx="2">
+            <a:schemeClr val="accent1"/>
+          </a:effectRef>
+          <a:fontRef idx="minor">
+            <a:schemeClr val="lt1"/>
+          </a:fontRef>
+        </p:style>
+        <p:txBody>
+          <a:bodyPr rtlCol="0" anchor="ctr"/>
+          <a:lstStyle/>
+          <a:p>
+            <a:pPr algn="ctr"/>
+          </a:p>
+        </p:txBody>
+      </p:sp>
+      <p:sp>
+        <p:nvSpPr>
+          <p:cNvPr id="16" name="TextBox 15"/>
+          <p:cNvSpPr txBox="1"/>
+          <p:nvPr/>
+        </p:nvSpPr>
+        <p:spPr>
+          <a:xfrm>
+            <a:off x="960120" y="4306824"/>
+            <a:ext cx="1947672" cy="219456"/>
+          </a:xfrm>
+          <a:prstGeom prst="rect">
+            <a:avLst/>
+          </a:prstGeom>
+          <a:noFill/>
+        </p:spPr>
+        <p:txBody>
+          <a:bodyPr wrap="square" lIns="0" rIns="0" tIns="0" bIns="0" anchor="t">
+            <a:spAutoFit/>
+          </a:bodyPr>
+          <a:lstStyle/>
+          <a:p>
+            <a:pPr algn="l"/>
+            <a:r>
+              <a:rPr sz="1200" b="1">
+                <a:solidFill>
+                  <a:srgbClr val="A3E635"/>
+                </a:solidFill>
+                <a:latin typeface="Aptos"/>
+              </a:rPr>
+              <a:t>Caddy</a:t>
+            </a:r>
+          </a:p>
+        </p:txBody>
+      </p:sp>
+      <p:sp>
+        <p:nvSpPr>
+          <p:cNvPr id="17" name="TextBox 16"/>
+          <p:cNvSpPr txBox="1"/>
+          <p:nvPr/>
+        </p:nvSpPr>
+        <p:spPr>
+          <a:xfrm>
+            <a:off x="960120" y="4590288"/>
+            <a:ext cx="1947672" cy="539495"/>
+          </a:xfrm>
+          <a:prstGeom prst="rect">
+            <a:avLst/>
+          </a:prstGeom>
+          <a:noFill/>
+        </p:spPr>
+        <p:txBody>
+          <a:bodyPr wrap="square" lIns="0" rIns="0" tIns="0" bIns="0" anchor="t">
+            <a:spAutoFit/>
+          </a:bodyPr>
+          <a:lstStyle/>
+          <a:p>
+            <a:pPr algn="l"/>
+            <a:r>
+              <a:rPr sz="1100" b="0">
+                <a:solidFill>
+                  <a:srgbClr val="0A1820"/>
+                </a:solidFill>
+                <a:latin typeface="Aptos"/>
+              </a:rPr>
+              <a:t>Reverse proxy, HTTPS automático y entrada controlada.</a:t>
+            </a:r>
+          </a:p>
+        </p:txBody>
+      </p:sp>
+      <p:sp>
+        <p:nvSpPr>
+          <p:cNvPr id="18" name="Rounded Rectangle 17"/>
+          <p:cNvSpPr/>
+          <p:nvPr/>
+        </p:nvSpPr>
+        <p:spPr>
+          <a:xfrm>
+            <a:off x="3657600" y="1444752"/>
+            <a:ext cx="7040880" cy="4297680"/>
+          </a:xfrm>
+          <a:prstGeom prst="roundRect">
+            <a:avLst/>
+          </a:prstGeom>
+          <a:solidFill>
+            <a:srgbClr val="FFFFFF"/>
+          </a:solidFill>
+          <a:ln w="10160">
+            <a:solidFill>
+              <a:srgbClr val="BFCCD6"/>
+            </a:solidFill>
+          </a:ln>
+        </p:spPr>
+        <p:style>
+          <a:lnRef idx="1">
+            <a:schemeClr val="accent1"/>
+          </a:lnRef>
+          <a:fillRef idx="3">
+            <a:schemeClr val="accent1"/>
+          </a:fillRef>
+          <a:effectRef idx="2">
+            <a:schemeClr val="accent1"/>
+          </a:effectRef>
+          <a:fontRef idx="minor">
+            <a:schemeClr val="lt1"/>
+          </a:fontRef>
+        </p:style>
+        <p:txBody>
+          <a:bodyPr rtlCol="0" anchor="ctr"/>
+          <a:lstStyle/>
+          <a:p>
+            <a:pPr algn="ctr"/>
+          </a:p>
+        </p:txBody>
+      </p:sp>
+      <p:sp>
+        <p:nvSpPr>
+          <p:cNvPr id="19" name="TextBox 18"/>
+          <p:cNvSpPr txBox="1"/>
+          <p:nvPr/>
+        </p:nvSpPr>
+        <p:spPr>
+          <a:xfrm>
+            <a:off x="3858768" y="1664208"/>
+            <a:ext cx="2377440" cy="219456"/>
+          </a:xfrm>
+          <a:prstGeom prst="rect">
+            <a:avLst/>
+          </a:prstGeom>
+          <a:noFill/>
+        </p:spPr>
+        <p:txBody>
+          <a:bodyPr wrap="square" lIns="0" rIns="0" tIns="0" bIns="0" anchor="t">
+            <a:spAutoFit/>
+          </a:bodyPr>
+          <a:lstStyle/>
+          <a:p>
+            <a:pPr algn="l"/>
+            <a:r>
+              <a:rPr sz="1200" b="1">
+                <a:solidFill>
+                  <a:srgbClr val="0A1820"/>
+                </a:solidFill>
+                <a:latin typeface="Aptos"/>
+              </a:rPr>
+              <a:t>docker-compose.vps.yml</a:t>
+            </a:r>
+          </a:p>
+        </p:txBody>
+      </p:sp>
+      <p:sp>
+        <p:nvSpPr>
+          <p:cNvPr id="20" name="TextBox 19"/>
+          <p:cNvSpPr txBox="1"/>
+          <p:nvPr/>
+        </p:nvSpPr>
+        <p:spPr>
+          <a:xfrm>
+            <a:off x="7543800" y="1682496"/>
+            <a:ext cx="2377440" cy="164592"/>
+          </a:xfrm>
+          <a:prstGeom prst="rect">
+            <a:avLst/>
+          </a:prstGeom>
+          <a:noFill/>
+        </p:spPr>
+        <p:txBody>
+          <a:bodyPr wrap="square" lIns="0" rIns="0" tIns="0" bIns="0" anchor="t">
+            <a:spAutoFit/>
+          </a:bodyPr>
+          <a:lstStyle/>
+          <a:p>
+            <a:pPr algn="r"/>
+            <a:r>
+              <a:rPr sz="850" b="1">
+                <a:solidFill>
+                  <a:srgbClr val="5C6975"/>
+                </a:solidFill>
+                <a:latin typeface="Aptos"/>
+              </a:rPr>
+              <a:t>Red interna: proyecto7-monitoring</a:t>
+            </a:r>
+          </a:p>
+        </p:txBody>
+      </p:sp>
+      <p:sp>
+        <p:nvSpPr>
+          <p:cNvPr id="21" name="Rounded Rectangle 20"/>
+          <p:cNvSpPr/>
+          <p:nvPr/>
+        </p:nvSpPr>
+        <p:spPr>
+          <a:xfrm>
+            <a:off x="3977639" y="2240280"/>
+            <a:ext cx="1234440" cy="594360"/>
+          </a:xfrm>
+          <a:prstGeom prst="roundRect">
+            <a:avLst/>
+          </a:prstGeom>
+          <a:solidFill>
+            <a:srgbClr val="FFFFFF"/>
+          </a:solidFill>
+          <a:ln w="10160">
+            <a:solidFill>
+              <a:srgbClr val="BFCCD6"/>
+            </a:solidFill>
+          </a:ln>
+        </p:spPr>
+        <p:style>
+          <a:lnRef idx="1">
+            <a:schemeClr val="accent1"/>
+          </a:lnRef>
+          <a:fillRef idx="3">
+            <a:schemeClr val="accent1"/>
+          </a:fillRef>
+          <a:effectRef idx="2">
+            <a:schemeClr val="accent1"/>
+          </a:effectRef>
+          <a:fontRef idx="minor">
+            <a:schemeClr val="lt1"/>
+          </a:fontRef>
+        </p:style>
+        <p:txBody>
+          <a:bodyPr rtlCol="0" anchor="ctr"/>
+          <a:lstStyle/>
+          <a:p>
+            <a:pPr algn="ctr"/>
+          </a:p>
+        </p:txBody>
+      </p:sp>
+      <p:sp>
+        <p:nvSpPr>
+          <p:cNvPr id="22" name="TextBox 21"/>
+          <p:cNvSpPr txBox="1"/>
+          <p:nvPr/>
+        </p:nvSpPr>
+        <p:spPr>
+          <a:xfrm>
+            <a:off x="4087368" y="2350008"/>
+            <a:ext cx="1014984" cy="201168"/>
+          </a:xfrm>
+          <a:prstGeom prst="rect">
+            <a:avLst/>
+          </a:prstGeom>
+          <a:noFill/>
+        </p:spPr>
+        <p:txBody>
+          <a:bodyPr wrap="square" lIns="0" rIns="0" tIns="0" bIns="0" anchor="t">
+            <a:spAutoFit/>
+          </a:bodyPr>
+          <a:lstStyle/>
+          <a:p>
+            <a:pPr algn="ctr"/>
+            <a:r>
+              <a:rPr sz="1100" b="1">
+                <a:solidFill>
+                  <a:srgbClr val="0A1820"/>
+                </a:solidFill>
+                <a:latin typeface="Aptos"/>
+              </a:rPr>
+              <a:t>zabbix-web</a:t>
+            </a:r>
+          </a:p>
+        </p:txBody>
+      </p:sp>
+      <p:sp>
+        <p:nvSpPr>
+          <p:cNvPr id="23" name="TextBox 22"/>
+          <p:cNvSpPr txBox="1"/>
+          <p:nvPr/>
+        </p:nvSpPr>
+        <p:spPr>
+          <a:xfrm>
+            <a:off x="4087368" y="2596896"/>
+            <a:ext cx="1014984" cy="164592"/>
+          </a:xfrm>
+          <a:prstGeom prst="rect">
+            <a:avLst/>
+          </a:prstGeom>
+          <a:noFill/>
+        </p:spPr>
+        <p:txBody>
+          <a:bodyPr wrap="square" lIns="0" rIns="0" tIns="0" bIns="0" anchor="t">
+            <a:spAutoFit/>
+          </a:bodyPr>
+          <a:lstStyle/>
+          <a:p>
+            <a:pPr algn="ctr"/>
+            <a:r>
+              <a:rPr sz="720" b="0">
+                <a:solidFill>
+                  <a:srgbClr val="5C6975"/>
+                </a:solidFill>
+                <a:latin typeface="Aptos"/>
+              </a:rPr>
+              <a:t>solo por Caddy</a:t>
+            </a:r>
+          </a:p>
+        </p:txBody>
+      </p:sp>
+      <p:cxnSp>
+        <p:nvCxnSpPr>
+          <p:cNvPr id="24" name="Connector 23"/>
+          <p:cNvCxnSpPr/>
+          <p:nvPr/>
+        </p:nvCxnSpPr>
+        <p:spPr>
+          <a:xfrm>
+            <a:off x="4114800" y="2743200"/>
+            <a:ext cx="960119" cy="0"/>
+          </a:xfrm>
+          <a:prstGeom prst="line">
+            <a:avLst/>
+          </a:prstGeom>
+          <a:ln w="27940">
+            <a:solidFill>
+              <a:srgbClr val="22C5AA"/>
+            </a:solidFill>
+          </a:ln>
+        </p:spPr>
+        <p:style>
+          <a:lnRef idx="2">
+            <a:schemeClr val="accent1"/>
+          </a:lnRef>
+          <a:fillRef idx="0">
+            <a:schemeClr val="accent1"/>
+          </a:fillRef>
+          <a:effectRef idx="1">
+            <a:schemeClr val="accent1"/>
+          </a:effectRef>
+          <a:fontRef idx="minor">
+            <a:schemeClr val="tx1"/>
+          </a:fontRef>
+        </p:style>
+      </p:cxnSp>
+      <p:sp>
+        <p:nvSpPr>
+          <p:cNvPr id="25" name="Rounded Rectangle 24"/>
+          <p:cNvSpPr/>
+          <p:nvPr/>
+        </p:nvSpPr>
+        <p:spPr>
+          <a:xfrm>
+            <a:off x="5532120" y="2240280"/>
+            <a:ext cx="1234440" cy="594360"/>
+          </a:xfrm>
+          <a:prstGeom prst="roundRect">
+            <a:avLst/>
+          </a:prstGeom>
+          <a:solidFill>
+            <a:srgbClr val="FFFFFF"/>
+          </a:solidFill>
+          <a:ln w="10160">
+            <a:solidFill>
+              <a:srgbClr val="BFCCD6"/>
+            </a:solidFill>
+          </a:ln>
+        </p:spPr>
+        <p:style>
+          <a:lnRef idx="1">
+            <a:schemeClr val="accent1"/>
+          </a:lnRef>
+          <a:fillRef idx="3">
+            <a:schemeClr val="accent1"/>
+          </a:fillRef>
+          <a:effectRef idx="2">
+            <a:schemeClr val="accent1"/>
+          </a:effectRef>
+          <a:fontRef idx="minor">
+            <a:schemeClr val="lt1"/>
+          </a:fontRef>
+        </p:style>
+        <p:txBody>
+          <a:bodyPr rtlCol="0" anchor="ctr"/>
+          <a:lstStyle/>
+          <a:p>
+            <a:pPr algn="ctr"/>
+          </a:p>
+        </p:txBody>
+      </p:sp>
+      <p:sp>
+        <p:nvSpPr>
+          <p:cNvPr id="26" name="TextBox 25"/>
+          <p:cNvSpPr txBox="1"/>
+          <p:nvPr/>
+        </p:nvSpPr>
+        <p:spPr>
+          <a:xfrm>
+            <a:off x="5641848" y="2350008"/>
+            <a:ext cx="1014984" cy="201168"/>
+          </a:xfrm>
+          <a:prstGeom prst="rect">
+            <a:avLst/>
+          </a:prstGeom>
+          <a:noFill/>
+        </p:spPr>
+        <p:txBody>
+          <a:bodyPr wrap="square" lIns="0" rIns="0" tIns="0" bIns="0" anchor="t">
+            <a:spAutoFit/>
+          </a:bodyPr>
+          <a:lstStyle/>
+          <a:p>
+            <a:pPr algn="ctr"/>
+            <a:r>
+              <a:rPr sz="1100" b="1">
+                <a:solidFill>
+                  <a:srgbClr val="0A1820"/>
+                </a:solidFill>
+                <a:latin typeface="Aptos"/>
+              </a:rPr>
+              <a:t>web-service</a:t>
+            </a:r>
+          </a:p>
+        </p:txBody>
+      </p:sp>
+      <p:sp>
+        <p:nvSpPr>
+          <p:cNvPr id="27" name="TextBox 26"/>
+          <p:cNvSpPr txBox="1"/>
+          <p:nvPr/>
+        </p:nvSpPr>
+        <p:spPr>
+          <a:xfrm>
+            <a:off x="5641848" y="2596896"/>
+            <a:ext cx="1014984" cy="164592"/>
+          </a:xfrm>
+          <a:prstGeom prst="rect">
+            <a:avLst/>
+          </a:prstGeom>
+          <a:noFill/>
+        </p:spPr>
+        <p:txBody>
+          <a:bodyPr wrap="square" lIns="0" rIns="0" tIns="0" bIns="0" anchor="t">
+            <a:spAutoFit/>
+          </a:bodyPr>
+          <a:lstStyle/>
+          <a:p>
+            <a:pPr algn="ctr"/>
+            <a:r>
+              <a:rPr sz="720" b="0">
+                <a:solidFill>
+                  <a:srgbClr val="5C6975"/>
+                </a:solidFill>
+                <a:latin typeface="Aptos"/>
+              </a:rPr>
+              <a:t>portal demo</a:t>
+            </a:r>
+          </a:p>
+        </p:txBody>
+      </p:sp>
+      <p:cxnSp>
+        <p:nvCxnSpPr>
+          <p:cNvPr id="28" name="Connector 27"/>
+          <p:cNvCxnSpPr/>
+          <p:nvPr/>
+        </p:nvCxnSpPr>
+        <p:spPr>
+          <a:xfrm>
+            <a:off x="5669280" y="2743200"/>
+            <a:ext cx="960120" cy="0"/>
+          </a:xfrm>
+          <a:prstGeom prst="line">
+            <a:avLst/>
+          </a:prstGeom>
+          <a:ln w="27940">
+            <a:solidFill>
+              <a:srgbClr val="38BDF8"/>
+            </a:solidFill>
+          </a:ln>
+        </p:spPr>
+        <p:style>
+          <a:lnRef idx="2">
+            <a:schemeClr val="accent1"/>
+          </a:lnRef>
+          <a:fillRef idx="0">
+            <a:schemeClr val="accent1"/>
+          </a:fillRef>
+          <a:effectRef idx="1">
+            <a:schemeClr val="accent1"/>
+          </a:effectRef>
+          <a:fontRef idx="minor">
+            <a:schemeClr val="tx1"/>
+          </a:fontRef>
+        </p:style>
+      </p:cxnSp>
+      <p:sp>
+        <p:nvSpPr>
+          <p:cNvPr id="29" name="Rounded Rectangle 28"/>
+          <p:cNvSpPr/>
+          <p:nvPr/>
+        </p:nvSpPr>
+        <p:spPr>
+          <a:xfrm>
+            <a:off x="7086600" y="2240280"/>
+            <a:ext cx="1234440" cy="594360"/>
+          </a:xfrm>
+          <a:prstGeom prst="roundRect">
+            <a:avLst/>
+          </a:prstGeom>
+          <a:solidFill>
+            <a:srgbClr val="FFFFFF"/>
+          </a:solidFill>
+          <a:ln w="10160">
+            <a:solidFill>
+              <a:srgbClr val="BFCCD6"/>
+            </a:solidFill>
+          </a:ln>
+        </p:spPr>
+        <p:style>
+          <a:lnRef idx="1">
+            <a:schemeClr val="accent1"/>
+          </a:lnRef>
+          <a:fillRef idx="3">
+            <a:schemeClr val="accent1"/>
+          </a:fillRef>
+          <a:effectRef idx="2">
+            <a:schemeClr val="accent1"/>
+          </a:effectRef>
+          <a:fontRef idx="minor">
+            <a:schemeClr val="lt1"/>
+          </a:fontRef>
+        </p:style>
+        <p:txBody>
+          <a:bodyPr rtlCol="0" anchor="ctr"/>
+          <a:lstStyle/>
+          <a:p>
+            <a:pPr algn="ctr"/>
+          </a:p>
+        </p:txBody>
+      </p:sp>
+      <p:sp>
+        <p:nvSpPr>
+          <p:cNvPr id="30" name="TextBox 29"/>
+          <p:cNvSpPr txBox="1"/>
+          <p:nvPr/>
+        </p:nvSpPr>
+        <p:spPr>
+          <a:xfrm>
+            <a:off x="7196328" y="2350008"/>
+            <a:ext cx="1014984" cy="201168"/>
+          </a:xfrm>
+          <a:prstGeom prst="rect">
+            <a:avLst/>
+          </a:prstGeom>
+          <a:noFill/>
+        </p:spPr>
+        <p:txBody>
+          <a:bodyPr wrap="square" lIns="0" rIns="0" tIns="0" bIns="0" anchor="t">
+            <a:spAutoFit/>
+          </a:bodyPr>
+          <a:lstStyle/>
+          <a:p>
+            <a:pPr algn="ctr"/>
+            <a:r>
+              <a:rPr sz="1100" b="1">
+                <a:solidFill>
+                  <a:srgbClr val="0A1820"/>
+                </a:solidFill>
+                <a:latin typeface="Aptos"/>
+              </a:rPr>
+              <a:t>mailhog-gate</a:t>
+            </a:r>
+          </a:p>
+        </p:txBody>
+      </p:sp>
+      <p:sp>
+        <p:nvSpPr>
+          <p:cNvPr id="31" name="TextBox 30"/>
+          <p:cNvSpPr txBox="1"/>
+          <p:nvPr/>
+        </p:nvSpPr>
+        <p:spPr>
+          <a:xfrm>
+            <a:off x="7196328" y="2596896"/>
+            <a:ext cx="1014984" cy="164592"/>
+          </a:xfrm>
+          <a:prstGeom prst="rect">
+            <a:avLst/>
+          </a:prstGeom>
+          <a:noFill/>
+        </p:spPr>
+        <p:txBody>
+          <a:bodyPr wrap="square" lIns="0" rIns="0" tIns="0" bIns="0" anchor="t">
+            <a:spAutoFit/>
+          </a:bodyPr>
+          <a:lstStyle/>
+          <a:p>
+            <a:pPr algn="ctr"/>
+            <a:r>
+              <a:rPr sz="720" b="0">
+                <a:solidFill>
+                  <a:srgbClr val="5C6975"/>
+                </a:solidFill>
+                <a:latin typeface="Aptos"/>
+              </a:rPr>
+              <a:t>login</a:t>
+            </a:r>
+          </a:p>
+        </p:txBody>
+      </p:sp>
+      <p:cxnSp>
+        <p:nvCxnSpPr>
+          <p:cNvPr id="32" name="Connector 31"/>
+          <p:cNvCxnSpPr/>
+          <p:nvPr/>
+        </p:nvCxnSpPr>
+        <p:spPr>
+          <a:xfrm>
+            <a:off x="7223760" y="2743200"/>
+            <a:ext cx="960119" cy="0"/>
+          </a:xfrm>
+          <a:prstGeom prst="line">
+            <a:avLst/>
+          </a:prstGeom>
+          <a:ln w="27940">
+            <a:solidFill>
+              <a:srgbClr val="F59E0B"/>
+            </a:solidFill>
+          </a:ln>
+        </p:spPr>
+        <p:style>
+          <a:lnRef idx="2">
+            <a:schemeClr val="accent1"/>
+          </a:lnRef>
+          <a:fillRef idx="0">
+            <a:schemeClr val="accent1"/>
+          </a:fillRef>
+          <a:effectRef idx="1">
+            <a:schemeClr val="accent1"/>
+          </a:effectRef>
+          <a:fontRef idx="minor">
+            <a:schemeClr val="tx1"/>
+          </a:fontRef>
+        </p:style>
+      </p:cxnSp>
+      <p:sp>
+        <p:nvSpPr>
+          <p:cNvPr id="33" name="Rounded Rectangle 32"/>
+          <p:cNvSpPr/>
+          <p:nvPr/>
+        </p:nvSpPr>
+        <p:spPr>
+          <a:xfrm>
+            <a:off x="8641080" y="2240280"/>
+            <a:ext cx="1234440" cy="594360"/>
+          </a:xfrm>
+          <a:prstGeom prst="roundRect">
+            <a:avLst/>
+          </a:prstGeom>
+          <a:solidFill>
+            <a:srgbClr val="FFFFFF"/>
+          </a:solidFill>
+          <a:ln w="10160">
+            <a:solidFill>
+              <a:srgbClr val="BFCCD6"/>
+            </a:solidFill>
+          </a:ln>
+        </p:spPr>
+        <p:style>
+          <a:lnRef idx="1">
+            <a:schemeClr val="accent1"/>
+          </a:lnRef>
+          <a:fillRef idx="3">
+            <a:schemeClr val="accent1"/>
+          </a:fillRef>
+          <a:effectRef idx="2">
+            <a:schemeClr val="accent1"/>
+          </a:effectRef>
+          <a:fontRef idx="minor">
+            <a:schemeClr val="lt1"/>
+          </a:fontRef>
+        </p:style>
+        <p:txBody>
+          <a:bodyPr rtlCol="0" anchor="ctr"/>
+          <a:lstStyle/>
+          <a:p>
+            <a:pPr algn="ctr"/>
+          </a:p>
+        </p:txBody>
+      </p:sp>
+      <p:sp>
+        <p:nvSpPr>
+          <p:cNvPr id="34" name="TextBox 33"/>
+          <p:cNvSpPr txBox="1"/>
+          <p:nvPr/>
+        </p:nvSpPr>
+        <p:spPr>
+          <a:xfrm>
+            <a:off x="8750807" y="2350008"/>
+            <a:ext cx="1014984" cy="201168"/>
+          </a:xfrm>
+          <a:prstGeom prst="rect">
+            <a:avLst/>
+          </a:prstGeom>
+          <a:noFill/>
+        </p:spPr>
+        <p:txBody>
+          <a:bodyPr wrap="square" lIns="0" rIns="0" tIns="0" bIns="0" anchor="t">
+            <a:spAutoFit/>
+          </a:bodyPr>
+          <a:lstStyle/>
+          <a:p>
+            <a:pPr algn="ctr"/>
+            <a:r>
+              <a:rPr sz="1100" b="1">
+                <a:solidFill>
+                  <a:srgbClr val="0A1820"/>
+                </a:solidFill>
+                <a:latin typeface="Aptos"/>
+              </a:rPr>
+              <a:t>mailhog</a:t>
+            </a:r>
+          </a:p>
+        </p:txBody>
+      </p:sp>
+      <p:sp>
+        <p:nvSpPr>
+          <p:cNvPr id="35" name="TextBox 34"/>
+          <p:cNvSpPr txBox="1"/>
+          <p:nvPr/>
+        </p:nvSpPr>
+        <p:spPr>
+          <a:xfrm>
+            <a:off x="8750807" y="2596896"/>
+            <a:ext cx="1014984" cy="164592"/>
+          </a:xfrm>
+          <a:prstGeom prst="rect">
+            <a:avLst/>
+          </a:prstGeom>
+          <a:noFill/>
+        </p:spPr>
+        <p:txBody>
+          <a:bodyPr wrap="square" lIns="0" rIns="0" tIns="0" bIns="0" anchor="t">
+            <a:spAutoFit/>
+          </a:bodyPr>
+          <a:lstStyle/>
+          <a:p>
+            <a:pPr algn="ctr"/>
+            <a:r>
+              <a:rPr sz="720" b="0">
+                <a:solidFill>
+                  <a:srgbClr val="5C6975"/>
+                </a:solidFill>
+                <a:latin typeface="Aptos"/>
+              </a:rPr>
+              <a:t>SMTP + inbox</a:t>
+            </a:r>
+          </a:p>
+        </p:txBody>
+      </p:sp>
+      <p:cxnSp>
+        <p:nvCxnSpPr>
+          <p:cNvPr id="36" name="Connector 35"/>
+          <p:cNvCxnSpPr/>
+          <p:nvPr/>
+        </p:nvCxnSpPr>
+        <p:spPr>
+          <a:xfrm>
+            <a:off x="8778240" y="2743200"/>
+            <a:ext cx="960119" cy="0"/>
+          </a:xfrm>
+          <a:prstGeom prst="line">
+            <a:avLst/>
+          </a:prstGeom>
+          <a:ln w="27940">
+            <a:solidFill>
+              <a:srgbClr val="F59E0B"/>
+            </a:solidFill>
+          </a:ln>
+        </p:spPr>
+        <p:style>
+          <a:lnRef idx="2">
+            <a:schemeClr val="accent1"/>
+          </a:lnRef>
+          <a:fillRef idx="0">
+            <a:schemeClr val="accent1"/>
+          </a:fillRef>
+          <a:effectRef idx="1">
+            <a:schemeClr val="accent1"/>
+          </a:effectRef>
+          <a:fontRef idx="minor">
+            <a:schemeClr val="tx1"/>
+          </a:fontRef>
+        </p:style>
+      </p:cxnSp>
+      <p:sp>
+        <p:nvSpPr>
+          <p:cNvPr id="37" name="Rounded Rectangle 36"/>
+          <p:cNvSpPr/>
+          <p:nvPr/>
+        </p:nvSpPr>
+        <p:spPr>
+          <a:xfrm>
+            <a:off x="3977639" y="3364992"/>
+            <a:ext cx="1234440" cy="594360"/>
+          </a:xfrm>
+          <a:prstGeom prst="roundRect">
+            <a:avLst/>
+          </a:prstGeom>
+          <a:solidFill>
+            <a:srgbClr val="FFFFFF"/>
+          </a:solidFill>
+          <a:ln w="10160">
+            <a:solidFill>
+              <a:srgbClr val="BFCCD6"/>
+            </a:solidFill>
+          </a:ln>
+        </p:spPr>
+        <p:style>
+          <a:lnRef idx="1">
+            <a:schemeClr val="accent1"/>
+          </a:lnRef>
+          <a:fillRef idx="3">
+            <a:schemeClr val="accent1"/>
+          </a:fillRef>
+          <a:effectRef idx="2">
+            <a:schemeClr val="accent1"/>
+          </a:effectRef>
+          <a:fontRef idx="minor">
+            <a:schemeClr val="lt1"/>
+          </a:fontRef>
+        </p:style>
+        <p:txBody>
+          <a:bodyPr rtlCol="0" anchor="ctr"/>
+          <a:lstStyle/>
+          <a:p>
+            <a:pPr algn="ctr"/>
+          </a:p>
+        </p:txBody>
+      </p:sp>
+      <p:sp>
+        <p:nvSpPr>
+          <p:cNvPr id="38" name="TextBox 37"/>
+          <p:cNvSpPr txBox="1"/>
+          <p:nvPr/>
+        </p:nvSpPr>
+        <p:spPr>
+          <a:xfrm>
+            <a:off x="4087368" y="3474720"/>
+            <a:ext cx="1014984" cy="201168"/>
+          </a:xfrm>
+          <a:prstGeom prst="rect">
+            <a:avLst/>
+          </a:prstGeom>
+          <a:noFill/>
+        </p:spPr>
+        <p:txBody>
+          <a:bodyPr wrap="square" lIns="0" rIns="0" tIns="0" bIns="0" anchor="t">
+            <a:spAutoFit/>
+          </a:bodyPr>
+          <a:lstStyle/>
+          <a:p>
+            <a:pPr algn="ctr"/>
+            <a:r>
+              <a:rPr sz="1100" b="1">
+                <a:solidFill>
+                  <a:srgbClr val="0A1820"/>
+                </a:solidFill>
+                <a:latin typeface="Aptos"/>
+              </a:rPr>
+              <a:t>Zabbix srv</a:t>
+            </a:r>
+          </a:p>
+        </p:txBody>
+      </p:sp>
+      <p:sp>
+        <p:nvSpPr>
+          <p:cNvPr id="39" name="TextBox 38"/>
+          <p:cNvSpPr txBox="1"/>
+          <p:nvPr/>
+        </p:nvSpPr>
+        <p:spPr>
+          <a:xfrm>
+            <a:off x="4087368" y="3721608"/>
+            <a:ext cx="1014984" cy="164592"/>
+          </a:xfrm>
+          <a:prstGeom prst="rect">
+            <a:avLst/>
+          </a:prstGeom>
+          <a:noFill/>
+        </p:spPr>
+        <p:txBody>
+          <a:bodyPr wrap="square" lIns="0" rIns="0" tIns="0" bIns="0" anchor="t">
+            <a:spAutoFit/>
+          </a:bodyPr>
+          <a:lstStyle/>
+          <a:p>
+            <a:pPr algn="ctr"/>
+            <a:r>
+              <a:rPr sz="720" b="0">
+                <a:solidFill>
+                  <a:srgbClr val="5C6975"/>
+                </a:solidFill>
+                <a:latin typeface="Aptos"/>
+              </a:rPr>
+              <a:t>privado</a:t>
+            </a:r>
+          </a:p>
+        </p:txBody>
+      </p:sp>
+      <p:cxnSp>
+        <p:nvCxnSpPr>
+          <p:cNvPr id="40" name="Connector 39"/>
+          <p:cNvCxnSpPr/>
+          <p:nvPr/>
+        </p:nvCxnSpPr>
+        <p:spPr>
+          <a:xfrm>
+            <a:off x="4114800" y="3867912"/>
+            <a:ext cx="960119" cy="0"/>
+          </a:xfrm>
+          <a:prstGeom prst="line">
+            <a:avLst/>
+          </a:prstGeom>
+          <a:ln w="27940">
+            <a:solidFill>
+              <a:srgbClr val="22C5AA"/>
+            </a:solidFill>
+          </a:ln>
+        </p:spPr>
+        <p:style>
+          <a:lnRef idx="2">
+            <a:schemeClr val="accent1"/>
+          </a:lnRef>
+          <a:fillRef idx="0">
+            <a:schemeClr val="accent1"/>
+          </a:fillRef>
+          <a:effectRef idx="1">
+            <a:schemeClr val="accent1"/>
+          </a:effectRef>
+          <a:fontRef idx="minor">
+            <a:schemeClr val="tx1"/>
+          </a:fontRef>
+        </p:style>
+      </p:cxnSp>
+      <p:sp>
+        <p:nvSpPr>
+          <p:cNvPr id="41" name="Rounded Rectangle 40"/>
+          <p:cNvSpPr/>
+          <p:nvPr/>
+        </p:nvSpPr>
+        <p:spPr>
+          <a:xfrm>
+            <a:off x="5532120" y="3364992"/>
+            <a:ext cx="1234440" cy="594360"/>
+          </a:xfrm>
+          <a:prstGeom prst="roundRect">
+            <a:avLst/>
+          </a:prstGeom>
+          <a:solidFill>
+            <a:srgbClr val="FFFFFF"/>
+          </a:solidFill>
+          <a:ln w="10160">
+            <a:solidFill>
+              <a:srgbClr val="BFCCD6"/>
+            </a:solidFill>
+          </a:ln>
+        </p:spPr>
+        <p:style>
+          <a:lnRef idx="1">
+            <a:schemeClr val="accent1"/>
+          </a:lnRef>
+          <a:fillRef idx="3">
+            <a:schemeClr val="accent1"/>
+          </a:fillRef>
+          <a:effectRef idx="2">
+            <a:schemeClr val="accent1"/>
+          </a:effectRef>
+          <a:fontRef idx="minor">
+            <a:schemeClr val="lt1"/>
+          </a:fontRef>
+        </p:style>
+        <p:txBody>
+          <a:bodyPr rtlCol="0" anchor="ctr"/>
+          <a:lstStyle/>
+          <a:p>
+            <a:pPr algn="ctr"/>
+          </a:p>
+        </p:txBody>
+      </p:sp>
+      <p:sp>
+        <p:nvSpPr>
+          <p:cNvPr id="42" name="TextBox 41"/>
+          <p:cNvSpPr txBox="1"/>
+          <p:nvPr/>
+        </p:nvSpPr>
+        <p:spPr>
+          <a:xfrm>
+            <a:off x="5641848" y="3474720"/>
+            <a:ext cx="1014984" cy="201168"/>
+          </a:xfrm>
+          <a:prstGeom prst="rect">
+            <a:avLst/>
+          </a:prstGeom>
+          <a:noFill/>
+        </p:spPr>
+        <p:txBody>
+          <a:bodyPr wrap="square" lIns="0" rIns="0" tIns="0" bIns="0" anchor="t">
+            <a:spAutoFit/>
+          </a:bodyPr>
+          <a:lstStyle/>
+          <a:p>
+            <a:pPr algn="ctr"/>
+            <a:r>
+              <a:rPr sz="1100" b="1">
+                <a:solidFill>
+                  <a:srgbClr val="0A1820"/>
+                </a:solidFill>
+                <a:latin typeface="Aptos"/>
+              </a:rPr>
+              <a:t>postgres</a:t>
+            </a:r>
+          </a:p>
+        </p:txBody>
+      </p:sp>
+      <p:sp>
+        <p:nvSpPr>
+          <p:cNvPr id="43" name="TextBox 42"/>
+          <p:cNvSpPr txBox="1"/>
+          <p:nvPr/>
+        </p:nvSpPr>
+        <p:spPr>
+          <a:xfrm>
+            <a:off x="5641848" y="3721608"/>
+            <a:ext cx="1014984" cy="164592"/>
+          </a:xfrm>
+          <a:prstGeom prst="rect">
+            <a:avLst/>
+          </a:prstGeom>
+          <a:noFill/>
+        </p:spPr>
+        <p:txBody>
+          <a:bodyPr wrap="square" lIns="0" rIns="0" tIns="0" bIns="0" anchor="t">
+            <a:spAutoFit/>
+          </a:bodyPr>
+          <a:lstStyle/>
+          <a:p>
+            <a:pPr algn="ctr"/>
+            <a:r>
+              <a:rPr sz="720" b="0">
+                <a:solidFill>
+                  <a:srgbClr val="5C6975"/>
+                </a:solidFill>
+                <a:latin typeface="Aptos"/>
+              </a:rPr>
+              <a:t>BD Zabbix</a:t>
+            </a:r>
+          </a:p>
+        </p:txBody>
+      </p:sp>
+      <p:cxnSp>
+        <p:nvCxnSpPr>
+          <p:cNvPr id="44" name="Connector 43"/>
+          <p:cNvCxnSpPr/>
+          <p:nvPr/>
+        </p:nvCxnSpPr>
+        <p:spPr>
+          <a:xfrm>
+            <a:off x="5669280" y="3867912"/>
+            <a:ext cx="960120" cy="0"/>
+          </a:xfrm>
+          <a:prstGeom prst="line">
+            <a:avLst/>
+          </a:prstGeom>
+          <a:ln w="27940">
+            <a:solidFill>
+              <a:srgbClr val="A3E635"/>
+            </a:solidFill>
+          </a:ln>
+        </p:spPr>
+        <p:style>
+          <a:lnRef idx="2">
+            <a:schemeClr val="accent1"/>
+          </a:lnRef>
+          <a:fillRef idx="0">
+            <a:schemeClr val="accent1"/>
+          </a:fillRef>
+          <a:effectRef idx="1">
+            <a:schemeClr val="accent1"/>
+          </a:effectRef>
+          <a:fontRef idx="minor">
+            <a:schemeClr val="tx1"/>
+          </a:fontRef>
+        </p:style>
+      </p:cxnSp>
+      <p:sp>
+        <p:nvSpPr>
+          <p:cNvPr id="45" name="Rounded Rectangle 44"/>
+          <p:cNvSpPr/>
+          <p:nvPr/>
+        </p:nvSpPr>
+        <p:spPr>
+          <a:xfrm>
+            <a:off x="7086600" y="3364992"/>
+            <a:ext cx="1234440" cy="594360"/>
+          </a:xfrm>
+          <a:prstGeom prst="roundRect">
+            <a:avLst/>
+          </a:prstGeom>
+          <a:solidFill>
+            <a:srgbClr val="FFFFFF"/>
+          </a:solidFill>
+          <a:ln w="10160">
+            <a:solidFill>
+              <a:srgbClr val="BFCCD6"/>
+            </a:solidFill>
+          </a:ln>
+        </p:spPr>
+        <p:style>
+          <a:lnRef idx="1">
+            <a:schemeClr val="accent1"/>
+          </a:lnRef>
+          <a:fillRef idx="3">
+            <a:schemeClr val="accent1"/>
+          </a:fillRef>
+          <a:effectRef idx="2">
+            <a:schemeClr val="accent1"/>
+          </a:effectRef>
+          <a:fontRef idx="minor">
+            <a:schemeClr val="lt1"/>
+          </a:fontRef>
+        </p:style>
+        <p:txBody>
+          <a:bodyPr rtlCol="0" anchor="ctr"/>
+          <a:lstStyle/>
+          <a:p>
+            <a:pPr algn="ctr"/>
+          </a:p>
+        </p:txBody>
+      </p:sp>
+      <p:sp>
+        <p:nvSpPr>
+          <p:cNvPr id="46" name="TextBox 45"/>
+          <p:cNvSpPr txBox="1"/>
+          <p:nvPr/>
+        </p:nvSpPr>
+        <p:spPr>
+          <a:xfrm>
+            <a:off x="7196328" y="3474720"/>
+            <a:ext cx="1014984" cy="201168"/>
+          </a:xfrm>
+          <a:prstGeom prst="rect">
+            <a:avLst/>
+          </a:prstGeom>
+          <a:noFill/>
+        </p:spPr>
+        <p:txBody>
+          <a:bodyPr wrap="square" lIns="0" rIns="0" tIns="0" bIns="0" anchor="t">
+            <a:spAutoFit/>
+          </a:bodyPr>
+          <a:lstStyle/>
+          <a:p>
+            <a:pPr algn="ctr"/>
+            <a:r>
+              <a:rPr sz="1100" b="1">
+                <a:solidFill>
+                  <a:srgbClr val="0A1820"/>
+                </a:solidFill>
+                <a:latin typeface="Aptos"/>
+              </a:rPr>
+              <a:t>db-service</a:t>
+            </a:r>
+          </a:p>
+        </p:txBody>
+      </p:sp>
+      <p:sp>
+        <p:nvSpPr>
+          <p:cNvPr id="47" name="TextBox 46"/>
+          <p:cNvSpPr txBox="1"/>
+          <p:nvPr/>
+        </p:nvSpPr>
+        <p:spPr>
+          <a:xfrm>
+            <a:off x="7196328" y="3721608"/>
+            <a:ext cx="1014984" cy="164592"/>
+          </a:xfrm>
+          <a:prstGeom prst="rect">
+            <a:avLst/>
+          </a:prstGeom>
+          <a:noFill/>
+        </p:spPr>
+        <p:txBody>
+          <a:bodyPr wrap="square" lIns="0" rIns="0" tIns="0" bIns="0" anchor="t">
+            <a:spAutoFit/>
+          </a:bodyPr>
+          <a:lstStyle/>
+          <a:p>
+            <a:pPr algn="ctr"/>
+            <a:r>
+              <a:rPr sz="720" b="0">
+                <a:solidFill>
+                  <a:srgbClr val="5C6975"/>
+                </a:solidFill>
+                <a:latin typeface="Aptos"/>
+              </a:rPr>
+              <a:t>MariaDB demo</a:t>
+            </a:r>
+          </a:p>
+        </p:txBody>
+      </p:sp>
+      <p:cxnSp>
+        <p:nvCxnSpPr>
+          <p:cNvPr id="48" name="Connector 47"/>
+          <p:cNvCxnSpPr/>
+          <p:nvPr/>
+        </p:nvCxnSpPr>
+        <p:spPr>
+          <a:xfrm>
+            <a:off x="7223760" y="3867912"/>
+            <a:ext cx="960119" cy="0"/>
+          </a:xfrm>
+          <a:prstGeom prst="line">
+            <a:avLst/>
+          </a:prstGeom>
+          <a:ln w="27940">
+            <a:solidFill>
+              <a:srgbClr val="38BDF8"/>
+            </a:solidFill>
+          </a:ln>
+        </p:spPr>
+        <p:style>
+          <a:lnRef idx="2">
+            <a:schemeClr val="accent1"/>
+          </a:lnRef>
+          <a:fillRef idx="0">
+            <a:schemeClr val="accent1"/>
+          </a:fillRef>
+          <a:effectRef idx="1">
+            <a:schemeClr val="accent1"/>
+          </a:effectRef>
+          <a:fontRef idx="minor">
+            <a:schemeClr val="tx1"/>
+          </a:fontRef>
+        </p:style>
+      </p:cxnSp>
+      <p:sp>
+        <p:nvSpPr>
+          <p:cNvPr id="49" name="Rounded Rectangle 48"/>
+          <p:cNvSpPr/>
+          <p:nvPr/>
+        </p:nvSpPr>
+        <p:spPr>
+          <a:xfrm>
+            <a:off x="8641080" y="3364992"/>
+            <a:ext cx="1234440" cy="594360"/>
+          </a:xfrm>
+          <a:prstGeom prst="roundRect">
+            <a:avLst/>
+          </a:prstGeom>
+          <a:solidFill>
+            <a:srgbClr val="FFFFFF"/>
+          </a:solidFill>
+          <a:ln w="10160">
+            <a:solidFill>
+              <a:srgbClr val="BFCCD6"/>
+            </a:solidFill>
+          </a:ln>
+        </p:spPr>
+        <p:style>
+          <a:lnRef idx="1">
+            <a:schemeClr val="accent1"/>
+          </a:lnRef>
+          <a:fillRef idx="3">
+            <a:schemeClr val="accent1"/>
+          </a:fillRef>
+          <a:effectRef idx="2">
+            <a:schemeClr val="accent1"/>
+          </a:effectRef>
+          <a:fontRef idx="minor">
+            <a:schemeClr val="lt1"/>
+          </a:fontRef>
+        </p:style>
+        <p:txBody>
+          <a:bodyPr rtlCol="0" anchor="ctr"/>
+          <a:lstStyle/>
+          <a:p>
+            <a:pPr algn="ctr"/>
+          </a:p>
+        </p:txBody>
+      </p:sp>
+      <p:sp>
+        <p:nvSpPr>
+          <p:cNvPr id="50" name="TextBox 49"/>
+          <p:cNvSpPr txBox="1"/>
+          <p:nvPr/>
+        </p:nvSpPr>
+        <p:spPr>
+          <a:xfrm>
+            <a:off x="8750807" y="3474720"/>
+            <a:ext cx="1014984" cy="201168"/>
+          </a:xfrm>
+          <a:prstGeom prst="rect">
+            <a:avLst/>
+          </a:prstGeom>
+          <a:noFill/>
+        </p:spPr>
+        <p:txBody>
+          <a:bodyPr wrap="square" lIns="0" rIns="0" tIns="0" bIns="0" anchor="t">
+            <a:spAutoFit/>
+          </a:bodyPr>
+          <a:lstStyle/>
+          <a:p>
+            <a:pPr algn="ctr"/>
+            <a:r>
+              <a:rPr sz="1100" b="1">
+                <a:solidFill>
+                  <a:srgbClr val="0A1820"/>
+                </a:solidFill>
+                <a:latin typeface="Aptos"/>
+              </a:rPr>
+              <a:t>dns + ftp</a:t>
+            </a:r>
+          </a:p>
+        </p:txBody>
+      </p:sp>
+      <p:sp>
+        <p:nvSpPr>
+          <p:cNvPr id="51" name="TextBox 50"/>
+          <p:cNvSpPr txBox="1"/>
+          <p:nvPr/>
+        </p:nvSpPr>
+        <p:spPr>
+          <a:xfrm>
+            <a:off x="8750807" y="3721608"/>
+            <a:ext cx="1014984" cy="164592"/>
+          </a:xfrm>
+          <a:prstGeom prst="rect">
+            <a:avLst/>
+          </a:prstGeom>
+          <a:noFill/>
+        </p:spPr>
+        <p:txBody>
+          <a:bodyPr wrap="square" lIns="0" rIns="0" tIns="0" bIns="0" anchor="t">
+            <a:spAutoFit/>
+          </a:bodyPr>
+          <a:lstStyle/>
+          <a:p>
+            <a:pPr algn="ctr"/>
+            <a:r>
+              <a:rPr sz="720" b="0">
+                <a:solidFill>
+                  <a:srgbClr val="5C6975"/>
+                </a:solidFill>
+                <a:latin typeface="Aptos"/>
+              </a:rPr>
+              <a:t>servicios</a:t>
+            </a:r>
+          </a:p>
+        </p:txBody>
+      </p:sp>
+      <p:cxnSp>
+        <p:nvCxnSpPr>
+          <p:cNvPr id="52" name="Connector 51"/>
+          <p:cNvCxnSpPr/>
+          <p:nvPr/>
+        </p:nvCxnSpPr>
+        <p:spPr>
+          <a:xfrm>
+            <a:off x="8778240" y="3867912"/>
+            <a:ext cx="960119" cy="0"/>
+          </a:xfrm>
+          <a:prstGeom prst="line">
+            <a:avLst/>
+          </a:prstGeom>
+          <a:ln w="27940">
+            <a:solidFill>
+              <a:srgbClr val="A3E635"/>
+            </a:solidFill>
+          </a:ln>
+        </p:spPr>
+        <p:style>
+          <a:lnRef idx="2">
+            <a:schemeClr val="accent1"/>
+          </a:lnRef>
+          <a:fillRef idx="0">
+            <a:schemeClr val="accent1"/>
+          </a:fillRef>
+          <a:effectRef idx="1">
+            <a:schemeClr val="accent1"/>
+          </a:effectRef>
+          <a:fontRef idx="minor">
+            <a:schemeClr val="tx1"/>
+          </a:fontRef>
+        </p:style>
+      </p:cxnSp>
+      <p:sp>
+        <p:nvSpPr>
+          <p:cNvPr id="53" name="Rounded Rectangle 52"/>
+          <p:cNvSpPr/>
+          <p:nvPr/>
+        </p:nvSpPr>
+        <p:spPr>
+          <a:xfrm>
+            <a:off x="5532120" y="4480560"/>
+            <a:ext cx="1234440" cy="594360"/>
+          </a:xfrm>
+          <a:prstGeom prst="roundRect">
+            <a:avLst/>
+          </a:prstGeom>
+          <a:solidFill>
+            <a:srgbClr val="FFFFFF"/>
+          </a:solidFill>
+          <a:ln w="10160">
+            <a:solidFill>
+              <a:srgbClr val="BFCCD6"/>
+            </a:solidFill>
+          </a:ln>
+        </p:spPr>
+        <p:style>
+          <a:lnRef idx="1">
+            <a:schemeClr val="accent1"/>
+          </a:lnRef>
+          <a:fillRef idx="3">
+            <a:schemeClr val="accent1"/>
+          </a:fillRef>
+          <a:effectRef idx="2">
+            <a:schemeClr val="accent1"/>
+          </a:effectRef>
+          <a:fontRef idx="minor">
+            <a:schemeClr val="lt1"/>
+          </a:fontRef>
+        </p:style>
+        <p:txBody>
+          <a:bodyPr rtlCol="0" anchor="ctr"/>
+          <a:lstStyle/>
+          <a:p>
+            <a:pPr algn="ctr"/>
+          </a:p>
+        </p:txBody>
+      </p:sp>
+      <p:sp>
+        <p:nvSpPr>
+          <p:cNvPr id="54" name="TextBox 53"/>
+          <p:cNvSpPr txBox="1"/>
+          <p:nvPr/>
+        </p:nvSpPr>
+        <p:spPr>
+          <a:xfrm>
+            <a:off x="5641848" y="4590288"/>
+            <a:ext cx="1014984" cy="201168"/>
+          </a:xfrm>
+          <a:prstGeom prst="rect">
+            <a:avLst/>
+          </a:prstGeom>
+          <a:noFill/>
+        </p:spPr>
+        <p:txBody>
+          <a:bodyPr wrap="square" lIns="0" rIns="0" tIns="0" bIns="0" anchor="t">
+            <a:spAutoFit/>
+          </a:bodyPr>
+          <a:lstStyle/>
+          <a:p>
+            <a:pPr algn="ctr"/>
+            <a:r>
+              <a:rPr sz="1100" b="1">
+                <a:solidFill>
+                  <a:srgbClr val="0A1820"/>
+                </a:solidFill>
+                <a:latin typeface="Aptos"/>
+              </a:rPr>
+              <a:t>4 agentes</a:t>
+            </a:r>
+          </a:p>
+        </p:txBody>
+      </p:sp>
+      <p:sp>
+        <p:nvSpPr>
+          <p:cNvPr id="55" name="TextBox 54"/>
+          <p:cNvSpPr txBox="1"/>
+          <p:nvPr/>
+        </p:nvSpPr>
+        <p:spPr>
+          <a:xfrm>
+            <a:off x="5641848" y="4837176"/>
+            <a:ext cx="1014984" cy="164592"/>
+          </a:xfrm>
+          <a:prstGeom prst="rect">
+            <a:avLst/>
+          </a:prstGeom>
+          <a:noFill/>
+        </p:spPr>
+        <p:txBody>
+          <a:bodyPr wrap="square" lIns="0" rIns="0" tIns="0" bIns="0" anchor="t">
+            <a:spAutoFit/>
+          </a:bodyPr>
+          <a:lstStyle/>
+          <a:p>
+            <a:pPr algn="ctr"/>
+            <a:r>
+              <a:rPr sz="720" b="0">
+                <a:solidFill>
+                  <a:srgbClr val="5C6975"/>
+                </a:solidFill>
+                <a:latin typeface="Aptos"/>
+              </a:rPr>
+              <a:t>monitoreo</a:t>
+            </a:r>
+          </a:p>
+        </p:txBody>
+      </p:sp>
+      <p:cxnSp>
+        <p:nvCxnSpPr>
+          <p:cNvPr id="56" name="Connector 55"/>
+          <p:cNvCxnSpPr/>
+          <p:nvPr/>
+        </p:nvCxnSpPr>
+        <p:spPr>
+          <a:xfrm>
+            <a:off x="5669280" y="4983480"/>
+            <a:ext cx="960120" cy="0"/>
+          </a:xfrm>
+          <a:prstGeom prst="line">
+            <a:avLst/>
+          </a:prstGeom>
+          <a:ln w="27940">
+            <a:solidFill>
+              <a:srgbClr val="22C5AA"/>
+            </a:solidFill>
+          </a:ln>
+        </p:spPr>
+        <p:style>
+          <a:lnRef idx="2">
+            <a:schemeClr val="accent1"/>
+          </a:lnRef>
+          <a:fillRef idx="0">
+            <a:schemeClr val="accent1"/>
+          </a:fillRef>
+          <a:effectRef idx="1">
+            <a:schemeClr val="accent1"/>
+          </a:effectRef>
+          <a:fontRef idx="minor">
+            <a:schemeClr val="tx1"/>
+          </a:fontRef>
+        </p:style>
+      </p:cxnSp>
+      <p:cxnSp>
+        <p:nvCxnSpPr>
+          <p:cNvPr id="57" name="Connector 56"/>
+          <p:cNvCxnSpPr/>
+          <p:nvPr/>
+        </p:nvCxnSpPr>
+        <p:spPr>
+          <a:xfrm>
+            <a:off x="3063240" y="4681728"/>
+            <a:ext cx="594360" cy="0"/>
+          </a:xfrm>
+          <a:prstGeom prst="line">
+            <a:avLst/>
+          </a:prstGeom>
+          <a:ln w="19050">
+            <a:solidFill>
+              <a:srgbClr val="BFCCD6"/>
+            </a:solidFill>
+          </a:ln>
+        </p:spPr>
+        <p:style>
+          <a:lnRef idx="2">
+            <a:schemeClr val="accent1"/>
+          </a:lnRef>
+          <a:fillRef idx="0">
+            <a:schemeClr val="accent1"/>
+          </a:fillRef>
+          <a:effectRef idx="1">
+            <a:schemeClr val="accent1"/>
+          </a:effectRef>
+          <a:fontRef idx="minor">
+            <a:schemeClr val="tx1"/>
+          </a:fontRef>
+        </p:style>
+      </p:cxnSp>
+      <p:cxnSp>
+        <p:nvCxnSpPr>
+          <p:cNvPr id="58" name="Connector 57"/>
+          <p:cNvCxnSpPr/>
+          <p:nvPr/>
+        </p:nvCxnSpPr>
+        <p:spPr>
+          <a:xfrm>
+            <a:off x="5212080" y="3657600"/>
+            <a:ext cx="320040" cy="0"/>
+          </a:xfrm>
+          <a:prstGeom prst="line">
+            <a:avLst/>
+          </a:prstGeom>
+          <a:ln w="15240">
+            <a:solidFill>
+              <a:srgbClr val="BFCCD6"/>
+            </a:solidFill>
+          </a:ln>
+        </p:spPr>
+        <p:style>
+          <a:lnRef idx="2">
+            <a:schemeClr val="accent1"/>
+          </a:lnRef>
+          <a:fillRef idx="0">
+            <a:schemeClr val="accent1"/>
+          </a:fillRef>
+          <a:effectRef idx="1">
+            <a:schemeClr val="accent1"/>
+          </a:effectRef>
+          <a:fontRef idx="minor">
+            <a:schemeClr val="tx1"/>
+          </a:fontRef>
+        </p:style>
+      </p:cxnSp>
+      <p:cxnSp>
+        <p:nvCxnSpPr>
+          <p:cNvPr id="59" name="Connector 58"/>
+          <p:cNvCxnSpPr/>
+          <p:nvPr/>
+        </p:nvCxnSpPr>
+        <p:spPr>
+          <a:xfrm>
+            <a:off x="5212080" y="3657600"/>
+            <a:ext cx="320040" cy="1124712"/>
+          </a:xfrm>
+          <a:prstGeom prst="line">
+            <a:avLst/>
+          </a:prstGeom>
+          <a:ln w="15240">
+            <a:solidFill>
+              <a:srgbClr val="BFCCD6"/>
+            </a:solidFill>
+          </a:ln>
+        </p:spPr>
+        <p:style>
+          <a:lnRef idx="2">
+            <a:schemeClr val="accent1"/>
+          </a:lnRef>
+          <a:fillRef idx="0">
+            <a:schemeClr val="accent1"/>
+          </a:fillRef>
+          <a:effectRef idx="1">
+            <a:schemeClr val="accent1"/>
+          </a:effectRef>
+          <a:fontRef idx="minor">
+            <a:schemeClr val="tx1"/>
+          </a:fontRef>
+        </p:style>
+      </p:cxnSp>
+      <p:cxnSp>
+        <p:nvCxnSpPr>
+          <p:cNvPr id="60" name="Connector 59"/>
+          <p:cNvCxnSpPr/>
+          <p:nvPr/>
+        </p:nvCxnSpPr>
+        <p:spPr>
+          <a:xfrm flipV="1">
+            <a:off x="6766560" y="3657600"/>
+            <a:ext cx="320040" cy="1124712"/>
+          </a:xfrm>
+          <a:prstGeom prst="line">
+            <a:avLst/>
+          </a:prstGeom>
+          <a:ln w="15240">
+            <a:solidFill>
+              <a:srgbClr val="BFCCD6"/>
+            </a:solidFill>
+          </a:ln>
+        </p:spPr>
+        <p:style>
+          <a:lnRef idx="2">
+            <a:schemeClr val="accent1"/>
+          </a:lnRef>
+          <a:fillRef idx="0">
+            <a:schemeClr val="accent1"/>
+          </a:fillRef>
+          <a:effectRef idx="1">
+            <a:schemeClr val="accent1"/>
+          </a:effectRef>
+          <a:fontRef idx="minor">
+            <a:schemeClr val="tx1"/>
+          </a:fontRef>
+        </p:style>
+      </p:cxnSp>
+      <p:cxnSp>
+        <p:nvCxnSpPr>
+          <p:cNvPr id="61" name="Connector 60"/>
+          <p:cNvCxnSpPr/>
+          <p:nvPr/>
+        </p:nvCxnSpPr>
+        <p:spPr>
+          <a:xfrm>
+            <a:off x="8321040" y="2542032"/>
+            <a:ext cx="320040" cy="0"/>
+          </a:xfrm>
+          <a:prstGeom prst="line">
+            <a:avLst/>
+          </a:prstGeom>
+          <a:ln w="15240">
+            <a:solidFill>
+              <a:srgbClr val="BFCCD6"/>
+            </a:solidFill>
+          </a:ln>
+        </p:spPr>
+        <p:style>
+          <a:lnRef idx="2">
+            <a:schemeClr val="accent1"/>
+          </a:lnRef>
+          <a:fillRef idx="0">
+            <a:schemeClr val="accent1"/>
+          </a:fillRef>
+          <a:effectRef idx="1">
+            <a:schemeClr val="accent1"/>
+          </a:effectRef>
+          <a:fontRef idx="minor">
+            <a:schemeClr val="tx1"/>
+          </a:fontRef>
+        </p:style>
+      </p:cxnSp>
+      <p:sp>
+        <p:nvSpPr>
+          <p:cNvPr id="62" name="TextBox 61"/>
+          <p:cNvSpPr txBox="1"/>
+          <p:nvPr/>
+        </p:nvSpPr>
+        <p:spPr>
+          <a:xfrm>
+            <a:off x="3858768" y="5358384"/>
+            <a:ext cx="6355080" cy="256032"/>
+          </a:xfrm>
+          <a:prstGeom prst="rect">
+            <a:avLst/>
+          </a:prstGeom>
+          <a:noFill/>
+        </p:spPr>
+        <p:txBody>
+          <a:bodyPr wrap="square" lIns="0" rIns="0" tIns="0" bIns="0" anchor="t">
+            <a:spAutoFit/>
+          </a:bodyPr>
+          <a:lstStyle/>
+          <a:p>
+            <a:pPr algn="l"/>
+            <a:r>
+              <a:rPr sz="1150" b="1">
+                <a:solidFill>
+                  <a:srgbClr val="0A1820"/>
+                </a:solidFill>
+                <a:latin typeface="Aptos"/>
+              </a:rPr>
+              <a:t>Mensaje clave: los servicios internos no quedan abiertos a Internet; Caddy publica HTTPS y Docker Compose aísla la red.</a:t>
+            </a:r>
+          </a:p>
+        </p:txBody>
+      </p:sp>
+      <p:cxnSp>
+        <p:nvCxnSpPr>
+          <p:cNvPr id="63" name="Connector 62"/>
+          <p:cNvCxnSpPr/>
+          <p:nvPr/>
+        </p:nvCxnSpPr>
+        <p:spPr>
+          <a:xfrm>
+            <a:off x="502920" y="6428232"/>
+            <a:ext cx="11155680" cy="0"/>
+          </a:xfrm>
+          <a:prstGeom prst="line">
+            <a:avLst/>
+          </a:prstGeom>
+          <a:ln w="8890">
+            <a:solidFill>
+              <a:srgbClr val="BFCCD6"/>
+            </a:solidFill>
+          </a:ln>
+        </p:spPr>
+        <p:style>
+          <a:lnRef idx="2">
+            <a:schemeClr val="accent1"/>
+          </a:lnRef>
+          <a:fillRef idx="0">
+            <a:schemeClr val="accent1"/>
+          </a:fillRef>
+          <a:effectRef idx="1">
+            <a:schemeClr val="accent1"/>
+          </a:effectRef>
+          <a:fontRef idx="minor">
+            <a:schemeClr val="tx1"/>
+          </a:fontRef>
+        </p:style>
+      </p:cxnSp>
+      <p:sp>
+        <p:nvSpPr>
+          <p:cNvPr id="64" name="TextBox 63"/>
+          <p:cNvSpPr txBox="1"/>
+          <p:nvPr/>
+        </p:nvSpPr>
+        <p:spPr>
+          <a:xfrm>
+            <a:off x="502920" y="6519672"/>
+            <a:ext cx="4754880" cy="164592"/>
+          </a:xfrm>
+          <a:prstGeom prst="rect">
+            <a:avLst/>
+          </a:prstGeom>
+          <a:noFill/>
+        </p:spPr>
+        <p:txBody>
+          <a:bodyPr wrap="square" lIns="0" rIns="0" tIns="0" bIns="0" anchor="t">
+            <a:spAutoFit/>
+          </a:bodyPr>
+          <a:lstStyle/>
+          <a:p>
+            <a:pPr algn="l"/>
+            <a:r>
+              <a:rPr sz="750" b="0">
+                <a:solidFill>
+                  <a:srgbClr val="5C6975"/>
+                </a:solidFill>
+                <a:latin typeface="Aptos"/>
+              </a:rPr>
+              <a:t>Proyecto 7 - Monitoreo de infraestructura con Zabbix</a:t>
+            </a:r>
+          </a:p>
+        </p:txBody>
+      </p:sp>
+      <p:sp>
+        <p:nvSpPr>
+          <p:cNvPr id="65" name="TextBox 64"/>
+          <p:cNvSpPr txBox="1"/>
+          <p:nvPr/>
+        </p:nvSpPr>
+        <p:spPr>
+          <a:xfrm>
+            <a:off x="10972800" y="6519672"/>
+            <a:ext cx="640080" cy="164592"/>
+          </a:xfrm>
+          <a:prstGeom prst="rect">
+            <a:avLst/>
+          </a:prstGeom>
+          <a:noFill/>
+        </p:spPr>
+        <p:txBody>
+          <a:bodyPr wrap="square" lIns="0" rIns="0" tIns="0" bIns="0" anchor="t">
+            <a:spAutoFit/>
+          </a:bodyPr>
+          <a:lstStyle/>
+          <a:p>
+            <a:pPr algn="r"/>
+            <a:r>
+              <a:rPr sz="750">
+                <a:solidFill>
+                  <a:srgbClr val="5C6975"/>
+                </a:solidFill>
+                <a:latin typeface="Aptos"/>
+              </a:rPr>
+              <a:t>06/18</a:t>
+            </a:r>
+          </a:p>
+        </p:txBody>
+      </p:sp>
+    </p:spTree>
+  </p:cSld>
+  <p:clrMapOvr>
+    <a:masterClrMapping/>
+  </p:clrMapOvr>
+</p:sld>
+</file>
+
+<file path=ppt/slides/slide6.xml><?xml version="1.0" encoding="utf-8"?>
 <p:sld xmlns:a="http://schemas.openxmlformats.org/drawingml/2006/main" xmlns:p="http://schemas.openxmlformats.org/presentationml/2006/main" xmlns:r="http://schemas.openxmlformats.org/officeDocument/2006/relationships">
   <p:cSld>
     <p:bg>
@@ -19481,7 +23414,7 @@
                 </a:solidFill>
                 <a:latin typeface="Aptos"/>
               </a:rPr>
-              <a:t>06</a:t>
+              <a:t>07</a:t>
             </a:r>
           </a:p>
         </p:txBody>
@@ -21342,7 +25275,7 @@
                 </a:solidFill>
                 <a:latin typeface="Aptos"/>
               </a:rPr>
-              <a:t>06/17</a:t>
+              <a:t>07/18</a:t>
             </a:r>
           </a:p>
         </p:txBody>
@@ -21355,7 +25288,7 @@
 </p:sld>
 </file>
 
-<file path=ppt/slides/slide6.xml><?xml version="1.0" encoding="utf-8"?>
+<file path=ppt/slides/slide7.xml><?xml version="1.0" encoding="utf-8"?>
 <p:sld xmlns:a="http://schemas.openxmlformats.org/drawingml/2006/main" xmlns:p="http://schemas.openxmlformats.org/presentationml/2006/main" xmlns:r="http://schemas.openxmlformats.org/officeDocument/2006/relationships">
   <p:cSld>
     <p:bg>
@@ -21403,7 +25336,7 @@
                 </a:solidFill>
                 <a:latin typeface="Aptos"/>
               </a:rPr>
-              <a:t>07</a:t>
+              <a:t>08</a:t>
             </a:r>
           </a:p>
         </p:txBody>
@@ -23051,7 +26984,7 @@
                 </a:solidFill>
                 <a:latin typeface="Aptos"/>
               </a:rPr>
-              <a:t>07/17</a:t>
+              <a:t>08/18</a:t>
             </a:r>
           </a:p>
         </p:txBody>
@@ -23064,7 +26997,7 @@
 </p:sld>
 </file>
 
-<file path=ppt/slides/slide7.xml><?xml version="1.0" encoding="utf-8"?>
+<file path=ppt/slides/slide8.xml><?xml version="1.0" encoding="utf-8"?>
 <p:sld xmlns:a="http://schemas.openxmlformats.org/drawingml/2006/main" xmlns:p="http://schemas.openxmlformats.org/presentationml/2006/main" xmlns:r="http://schemas.openxmlformats.org/officeDocument/2006/relationships">
   <p:cSld>
     <p:bg>
@@ -23157,7 +27090,7 @@
                 </a:solidFill>
                 <a:latin typeface="Aptos"/>
               </a:rPr>
-              <a:t>08</a:t>
+              <a:t>09</a:t>
             </a:r>
           </a:p>
         </p:txBody>
@@ -23851,7 +27784,7 @@
                 </a:solidFill>
                 <a:latin typeface="Aptos"/>
               </a:rPr>
-              <a:t>08/17</a:t>
+              <a:t>09/18</a:t>
             </a:r>
           </a:p>
         </p:txBody>
@@ -23864,7 +27797,7 @@
 </p:sld>
 </file>
 
-<file path=ppt/slides/slide8.xml><?xml version="1.0" encoding="utf-8"?>
+<file path=ppt/slides/slide9.xml><?xml version="1.0" encoding="utf-8"?>
 <p:sld xmlns:a="http://schemas.openxmlformats.org/drawingml/2006/main" xmlns:p="http://schemas.openxmlformats.org/presentationml/2006/main" xmlns:r="http://schemas.openxmlformats.org/officeDocument/2006/relationships">
   <p:cSld>
     <p:bg>
@@ -23957,7 +27890,7 @@
                 </a:solidFill>
                 <a:latin typeface="Aptos"/>
               </a:rPr>
-              <a:t>09</a:t>
+              <a:t>10</a:t>
             </a:r>
           </a:p>
         </p:txBody>
@@ -24665,939 +28598,7 @@
                 </a:solidFill>
                 <a:latin typeface="Aptos"/>
               </a:rPr>
-              <a:t>09/17</a:t>
-            </a:r>
-          </a:p>
-        </p:txBody>
-      </p:sp>
-    </p:spTree>
-  </p:cSld>
-  <p:clrMapOvr>
-    <a:masterClrMapping/>
-  </p:clrMapOvr>
-</p:sld>
-</file>
-
-<file path=ppt/slides/slide9.xml><?xml version="1.0" encoding="utf-8"?>
-<p:sld xmlns:a="http://schemas.openxmlformats.org/drawingml/2006/main" xmlns:p="http://schemas.openxmlformats.org/presentationml/2006/main" xmlns:r="http://schemas.openxmlformats.org/officeDocument/2006/relationships">
-  <p:cSld>
-    <p:bg>
-      <p:bgPr>
-        <a:solidFill>
-          <a:srgbClr val="FAF7F4"/>
-        </a:solidFill>
-        <a:effectLst/>
-      </p:bgPr>
-    </p:bg>
-    <p:spTree>
-      <p:nvGrpSpPr>
-        <p:cNvPr id="1" name=""/>
-        <p:cNvGrpSpPr/>
-        <p:nvPr/>
-      </p:nvGrpSpPr>
-      <p:grpSpPr/>
-      <p:sp>
-        <p:nvSpPr>
-          <p:cNvPr id="7" name="Rectangle 6"/>
-          <p:cNvSpPr/>
-          <p:nvPr/>
-        </p:nvSpPr>
-        <p:spPr>
-          <a:xfrm>
-            <a:off x="6236207" y="1527048"/>
-            <a:ext cx="5038344" cy="3300984"/>
-          </a:xfrm>
-          <a:prstGeom prst="rect">
-            <a:avLst/>
-          </a:prstGeom>
-          <a:solidFill>
-            <a:srgbClr val="FFFFFF"/>
-          </a:solidFill>
-          <a:ln w="10160">
-            <a:solidFill>
-              <a:srgbClr val="BFCCD6"/>
-            </a:solidFill>
-          </a:ln>
-        </p:spPr>
-        <p:style>
-          <a:lnRef idx="1">
-            <a:schemeClr val="accent1"/>
-          </a:lnRef>
-          <a:fillRef idx="3">
-            <a:schemeClr val="accent1"/>
-          </a:fillRef>
-          <a:effectRef idx="2">
-            <a:schemeClr val="accent1"/>
-          </a:effectRef>
-          <a:fontRef idx="minor">
-            <a:schemeClr val="lt1"/>
-          </a:fontRef>
-        </p:style>
-        <p:txBody>
-          <a:bodyPr rtlCol="0" anchor="ctr"/>
-          <a:lstStyle/>
-          <a:p>
-            <a:pPr algn="ctr"/>
-          </a:p>
-        </p:txBody>
-      </p:sp>
-      <p:sp>
-        <p:nvSpPr>
-          <p:cNvPr id="2" name="TextBox 1"/>
-          <p:cNvSpPr txBox="1"/>
-          <p:nvPr/>
-        </p:nvSpPr>
-        <p:spPr>
-          <a:xfrm>
-            <a:off x="502920" y="384048"/>
-            <a:ext cx="384048" cy="201168"/>
-          </a:xfrm>
-          <a:prstGeom prst="rect">
-            <a:avLst/>
-          </a:prstGeom>
-          <a:noFill/>
-        </p:spPr>
-        <p:txBody>
-          <a:bodyPr wrap="square" lIns="0" rIns="0" tIns="0" bIns="0" anchor="t">
-            <a:spAutoFit/>
-          </a:bodyPr>
-          <a:lstStyle/>
-          <a:p>
-            <a:pPr algn="l"/>
-            <a:r>
-              <a:rPr sz="800" b="1">
-                <a:solidFill>
-                  <a:srgbClr val="0A1820"/>
-                </a:solidFill>
-                <a:latin typeface="Aptos"/>
-              </a:rPr>
-              <a:t>10</a:t>
-            </a:r>
-          </a:p>
-        </p:txBody>
-      </p:sp>
-      <p:cxnSp>
-        <p:nvCxnSpPr>
-          <p:cNvPr id="3" name="Connector 2"/>
-          <p:cNvCxnSpPr/>
-          <p:nvPr/>
-        </p:nvCxnSpPr>
-        <p:spPr>
-          <a:xfrm>
-            <a:off x="941832" y="475488"/>
-            <a:ext cx="685800" cy="0"/>
-          </a:xfrm>
-          <a:prstGeom prst="line">
-            <a:avLst/>
-          </a:prstGeom>
-          <a:ln w="13970">
-            <a:solidFill>
-              <a:srgbClr val="0A1820"/>
-            </a:solidFill>
-          </a:ln>
-        </p:spPr>
-        <p:style>
-          <a:lnRef idx="2">
-            <a:schemeClr val="accent1"/>
-          </a:lnRef>
-          <a:fillRef idx="0">
-            <a:schemeClr val="accent1"/>
-          </a:fillRef>
-          <a:effectRef idx="1">
-            <a:schemeClr val="accent1"/>
-          </a:effectRef>
-          <a:fontRef idx="minor">
-            <a:schemeClr val="tx1"/>
-          </a:fontRef>
-        </p:style>
-      </p:cxnSp>
-      <p:sp>
-        <p:nvSpPr>
-          <p:cNvPr id="4" name="TextBox 3"/>
-          <p:cNvSpPr txBox="1"/>
-          <p:nvPr/>
-        </p:nvSpPr>
-        <p:spPr>
-          <a:xfrm>
-            <a:off x="1737360" y="356616"/>
-            <a:ext cx="3108960" cy="274320"/>
-          </a:xfrm>
-          <a:prstGeom prst="rect">
-            <a:avLst/>
-          </a:prstGeom>
-          <a:noFill/>
-        </p:spPr>
-        <p:txBody>
-          <a:bodyPr wrap="square" lIns="0" rIns="0" tIns="0" bIns="0" anchor="t">
-            <a:spAutoFit/>
-          </a:bodyPr>
-          <a:lstStyle/>
-          <a:p>
-            <a:pPr algn="l"/>
-            <a:r>
-              <a:rPr sz="800" b="1">
-                <a:solidFill>
-                  <a:srgbClr val="0A1820"/>
-                </a:solidFill>
-                <a:latin typeface="Aptos"/>
-              </a:rPr>
-              <a:t>CAÍDA CONTROLADA</a:t>
-            </a:r>
-          </a:p>
-        </p:txBody>
-      </p:sp>
-      <p:sp>
-        <p:nvSpPr>
-          <p:cNvPr id="5" name="TextBox 4"/>
-          <p:cNvSpPr txBox="1"/>
-          <p:nvPr/>
-        </p:nvSpPr>
-        <p:spPr>
-          <a:xfrm>
-            <a:off x="502920" y="713232"/>
-            <a:ext cx="7498079" cy="868680"/>
-          </a:xfrm>
-          <a:prstGeom prst="rect">
-            <a:avLst/>
-          </a:prstGeom>
-          <a:noFill/>
-        </p:spPr>
-        <p:txBody>
-          <a:bodyPr wrap="square" lIns="0" rIns="0" tIns="0" bIns="0" anchor="t">
-            <a:spAutoFit/>
-          </a:bodyPr>
-          <a:lstStyle/>
-          <a:p>
-            <a:pPr algn="l"/>
-            <a:r>
-              <a:rPr sz="3000" b="1">
-                <a:solidFill>
-                  <a:srgbClr val="0A1820"/>
-                </a:solidFill>
-                <a:latin typeface="Aptos Display"/>
-              </a:rPr>
-              <a:t>La caída controlada prueba el flujo completo.</a:t>
-            </a:r>
-          </a:p>
-        </p:txBody>
-      </p:sp>
-      <p:pic>
-        <p:nvPicPr>
-          <p:cNvPr id="6" name="Picture 5" descr="06_zabbix_falla_web_activa.png"/>
-          <p:cNvPicPr>
-            <a:picLocks noChangeAspect="1"/>
-          </p:cNvPicPr>
-          <p:nvPr/>
-        </p:nvPicPr>
-        <p:blipFill>
-          <a:blip r:embed="rId2"/>
-          <a:stretch>
-            <a:fillRect/>
-          </a:stretch>
-        </p:blipFill>
-        <p:spPr>
-          <a:xfrm>
-            <a:off x="6263640" y="1554480"/>
-            <a:ext cx="4983480" cy="3246120"/>
-          </a:xfrm>
-          <a:prstGeom prst="rect">
-            <a:avLst/>
-          </a:prstGeom>
-        </p:spPr>
-      </p:pic>
-      <p:sp>
-        <p:nvSpPr>
-          <p:cNvPr id="8" name="Rounded Rectangle 7"/>
-          <p:cNvSpPr/>
-          <p:nvPr/>
-        </p:nvSpPr>
-        <p:spPr>
-          <a:xfrm>
-            <a:off x="713232" y="2331720"/>
-            <a:ext cx="658368" cy="658368"/>
-          </a:xfrm>
-          <a:prstGeom prst="roundRect">
-            <a:avLst/>
-          </a:prstGeom>
-          <a:solidFill>
-            <a:srgbClr val="EF4444"/>
-          </a:solidFill>
-          <a:ln>
-            <a:noFill/>
-          </a:ln>
-        </p:spPr>
-        <p:style>
-          <a:lnRef idx="1">
-            <a:schemeClr val="accent1"/>
-          </a:lnRef>
-          <a:fillRef idx="3">
-            <a:schemeClr val="accent1"/>
-          </a:fillRef>
-          <a:effectRef idx="2">
-            <a:schemeClr val="accent1"/>
-          </a:effectRef>
-          <a:fontRef idx="minor">
-            <a:schemeClr val="lt1"/>
-          </a:fontRef>
-        </p:style>
-        <p:txBody>
-          <a:bodyPr rtlCol="0" anchor="ctr"/>
-          <a:lstStyle/>
-          <a:p>
-            <a:pPr algn="ctr"/>
-          </a:p>
-        </p:txBody>
-      </p:sp>
-      <p:sp>
-        <p:nvSpPr>
-          <p:cNvPr id="9" name="TextBox 8"/>
-          <p:cNvSpPr txBox="1"/>
-          <p:nvPr/>
-        </p:nvSpPr>
-        <p:spPr>
-          <a:xfrm>
-            <a:off x="932688" y="2505456"/>
-            <a:ext cx="228600" cy="219456"/>
-          </a:xfrm>
-          <a:prstGeom prst="rect">
-            <a:avLst/>
-          </a:prstGeom>
-          <a:noFill/>
-        </p:spPr>
-        <p:txBody>
-          <a:bodyPr wrap="square" lIns="0" rIns="0" tIns="0" bIns="0" anchor="t">
-            <a:spAutoFit/>
-          </a:bodyPr>
-          <a:lstStyle/>
-          <a:p>
-            <a:pPr algn="ctr"/>
-            <a:r>
-              <a:rPr sz="1600" b="1">
-                <a:solidFill>
-                  <a:srgbClr val="FFFFFF"/>
-                </a:solidFill>
-                <a:latin typeface="Aptos"/>
-              </a:rPr>
-              <a:t>1</a:t>
-            </a:r>
-          </a:p>
-        </p:txBody>
-      </p:sp>
-      <p:sp>
-        <p:nvSpPr>
-          <p:cNvPr id="10" name="TextBox 9"/>
-          <p:cNvSpPr txBox="1"/>
-          <p:nvPr/>
-        </p:nvSpPr>
-        <p:spPr>
-          <a:xfrm>
-            <a:off x="603504" y="3163824"/>
-            <a:ext cx="914400" cy="310896"/>
-          </a:xfrm>
-          <a:prstGeom prst="rect">
-            <a:avLst/>
-          </a:prstGeom>
-          <a:noFill/>
-        </p:spPr>
-        <p:txBody>
-          <a:bodyPr wrap="square" lIns="0" rIns="0" tIns="0" bIns="0" anchor="t">
-            <a:spAutoFit/>
-          </a:bodyPr>
-          <a:lstStyle/>
-          <a:p>
-            <a:pPr algn="ctr"/>
-            <a:r>
-              <a:rPr sz="830" b="1">
-                <a:solidFill>
-                  <a:srgbClr val="0A1820"/>
-                </a:solidFill>
-                <a:latin typeface="Aptos"/>
-              </a:rPr>
-              <a:t>stop web-service</a:t>
-            </a:r>
-          </a:p>
-        </p:txBody>
-      </p:sp>
-      <p:cxnSp>
-        <p:nvCxnSpPr>
-          <p:cNvPr id="11" name="Connector 10"/>
-          <p:cNvCxnSpPr/>
-          <p:nvPr/>
-        </p:nvCxnSpPr>
-        <p:spPr>
-          <a:xfrm>
-            <a:off x="1371600" y="2660904"/>
-            <a:ext cx="502919" cy="0"/>
-          </a:xfrm>
-          <a:prstGeom prst="line">
-            <a:avLst/>
-          </a:prstGeom>
-          <a:ln w="20320">
-            <a:solidFill>
-              <a:srgbClr val="BFCCD6"/>
-            </a:solidFill>
-          </a:ln>
-        </p:spPr>
-        <p:style>
-          <a:lnRef idx="2">
-            <a:schemeClr val="accent1"/>
-          </a:lnRef>
-          <a:fillRef idx="0">
-            <a:schemeClr val="accent1"/>
-          </a:fillRef>
-          <a:effectRef idx="1">
-            <a:schemeClr val="accent1"/>
-          </a:effectRef>
-          <a:fontRef idx="minor">
-            <a:schemeClr val="tx1"/>
-          </a:fontRef>
-        </p:style>
-      </p:cxnSp>
-      <p:sp>
-        <p:nvSpPr>
-          <p:cNvPr id="12" name="Rounded Rectangle 11"/>
-          <p:cNvSpPr/>
-          <p:nvPr/>
-        </p:nvSpPr>
-        <p:spPr>
-          <a:xfrm>
-            <a:off x="2011680" y="2331720"/>
-            <a:ext cx="658368" cy="658368"/>
-          </a:xfrm>
-          <a:prstGeom prst="roundRect">
-            <a:avLst/>
-          </a:prstGeom>
-          <a:solidFill>
-            <a:srgbClr val="F59E0B"/>
-          </a:solidFill>
-          <a:ln>
-            <a:noFill/>
-          </a:ln>
-        </p:spPr>
-        <p:style>
-          <a:lnRef idx="1">
-            <a:schemeClr val="accent1"/>
-          </a:lnRef>
-          <a:fillRef idx="3">
-            <a:schemeClr val="accent1"/>
-          </a:fillRef>
-          <a:effectRef idx="2">
-            <a:schemeClr val="accent1"/>
-          </a:effectRef>
-          <a:fontRef idx="minor">
-            <a:schemeClr val="lt1"/>
-          </a:fontRef>
-        </p:style>
-        <p:txBody>
-          <a:bodyPr rtlCol="0" anchor="ctr"/>
-          <a:lstStyle/>
-          <a:p>
-            <a:pPr algn="ctr"/>
-          </a:p>
-        </p:txBody>
-      </p:sp>
-      <p:sp>
-        <p:nvSpPr>
-          <p:cNvPr id="13" name="TextBox 12"/>
-          <p:cNvSpPr txBox="1"/>
-          <p:nvPr/>
-        </p:nvSpPr>
-        <p:spPr>
-          <a:xfrm>
-            <a:off x="2231136" y="2505456"/>
-            <a:ext cx="228600" cy="219456"/>
-          </a:xfrm>
-          <a:prstGeom prst="rect">
-            <a:avLst/>
-          </a:prstGeom>
-          <a:noFill/>
-        </p:spPr>
-        <p:txBody>
-          <a:bodyPr wrap="square" lIns="0" rIns="0" tIns="0" bIns="0" anchor="t">
-            <a:spAutoFit/>
-          </a:bodyPr>
-          <a:lstStyle/>
-          <a:p>
-            <a:pPr algn="ctr"/>
-            <a:r>
-              <a:rPr sz="1600" b="1">
-                <a:solidFill>
-                  <a:srgbClr val="FFFFFF"/>
-                </a:solidFill>
-                <a:latin typeface="Aptos"/>
-              </a:rPr>
-              <a:t>2</a:t>
-            </a:r>
-          </a:p>
-        </p:txBody>
-      </p:sp>
-      <p:sp>
-        <p:nvSpPr>
-          <p:cNvPr id="14" name="TextBox 13"/>
-          <p:cNvSpPr txBox="1"/>
-          <p:nvPr/>
-        </p:nvSpPr>
-        <p:spPr>
-          <a:xfrm>
-            <a:off x="1901952" y="3163824"/>
-            <a:ext cx="914400" cy="310896"/>
-          </a:xfrm>
-          <a:prstGeom prst="rect">
-            <a:avLst/>
-          </a:prstGeom>
-          <a:noFill/>
-        </p:spPr>
-        <p:txBody>
-          <a:bodyPr wrap="square" lIns="0" rIns="0" tIns="0" bIns="0" anchor="t">
-            <a:spAutoFit/>
-          </a:bodyPr>
-          <a:lstStyle/>
-          <a:p>
-            <a:pPr algn="ctr"/>
-            <a:r>
-              <a:rPr sz="830" b="1">
-                <a:solidFill>
-                  <a:srgbClr val="0A1820"/>
-                </a:solidFill>
-                <a:latin typeface="Aptos"/>
-              </a:rPr>
-              <a:t>trigger en Zabbix</a:t>
-            </a:r>
-          </a:p>
-        </p:txBody>
-      </p:sp>
-      <p:cxnSp>
-        <p:nvCxnSpPr>
-          <p:cNvPr id="15" name="Connector 14"/>
-          <p:cNvCxnSpPr/>
-          <p:nvPr/>
-        </p:nvCxnSpPr>
-        <p:spPr>
-          <a:xfrm>
-            <a:off x="2670048" y="2660904"/>
-            <a:ext cx="502920" cy="0"/>
-          </a:xfrm>
-          <a:prstGeom prst="line">
-            <a:avLst/>
-          </a:prstGeom>
-          <a:ln w="20320">
-            <a:solidFill>
-              <a:srgbClr val="BFCCD6"/>
-            </a:solidFill>
-          </a:ln>
-        </p:spPr>
-        <p:style>
-          <a:lnRef idx="2">
-            <a:schemeClr val="accent1"/>
-          </a:lnRef>
-          <a:fillRef idx="0">
-            <a:schemeClr val="accent1"/>
-          </a:fillRef>
-          <a:effectRef idx="1">
-            <a:schemeClr val="accent1"/>
-          </a:effectRef>
-          <a:fontRef idx="minor">
-            <a:schemeClr val="tx1"/>
-          </a:fontRef>
-        </p:style>
-      </p:cxnSp>
-      <p:sp>
-        <p:nvSpPr>
-          <p:cNvPr id="16" name="Rounded Rectangle 15"/>
-          <p:cNvSpPr/>
-          <p:nvPr/>
-        </p:nvSpPr>
-        <p:spPr>
-          <a:xfrm>
-            <a:off x="3310128" y="2331720"/>
-            <a:ext cx="658368" cy="658368"/>
-          </a:xfrm>
-          <a:prstGeom prst="roundRect">
-            <a:avLst/>
-          </a:prstGeom>
-          <a:solidFill>
-            <a:srgbClr val="38BDF8"/>
-          </a:solidFill>
-          <a:ln>
-            <a:noFill/>
-          </a:ln>
-        </p:spPr>
-        <p:style>
-          <a:lnRef idx="1">
-            <a:schemeClr val="accent1"/>
-          </a:lnRef>
-          <a:fillRef idx="3">
-            <a:schemeClr val="accent1"/>
-          </a:fillRef>
-          <a:effectRef idx="2">
-            <a:schemeClr val="accent1"/>
-          </a:effectRef>
-          <a:fontRef idx="minor">
-            <a:schemeClr val="lt1"/>
-          </a:fontRef>
-        </p:style>
-        <p:txBody>
-          <a:bodyPr rtlCol="0" anchor="ctr"/>
-          <a:lstStyle/>
-          <a:p>
-            <a:pPr algn="ctr"/>
-          </a:p>
-        </p:txBody>
-      </p:sp>
-      <p:sp>
-        <p:nvSpPr>
-          <p:cNvPr id="17" name="TextBox 16"/>
-          <p:cNvSpPr txBox="1"/>
-          <p:nvPr/>
-        </p:nvSpPr>
-        <p:spPr>
-          <a:xfrm>
-            <a:off x="3529584" y="2505456"/>
-            <a:ext cx="228600" cy="219456"/>
-          </a:xfrm>
-          <a:prstGeom prst="rect">
-            <a:avLst/>
-          </a:prstGeom>
-          <a:noFill/>
-        </p:spPr>
-        <p:txBody>
-          <a:bodyPr wrap="square" lIns="0" rIns="0" tIns="0" bIns="0" anchor="t">
-            <a:spAutoFit/>
-          </a:bodyPr>
-          <a:lstStyle/>
-          <a:p>
-            <a:pPr algn="ctr"/>
-            <a:r>
-              <a:rPr sz="1600" b="1">
-                <a:solidFill>
-                  <a:srgbClr val="FFFFFF"/>
-                </a:solidFill>
-                <a:latin typeface="Aptos"/>
-              </a:rPr>
-              <a:t>3</a:t>
-            </a:r>
-          </a:p>
-        </p:txBody>
-      </p:sp>
-      <p:sp>
-        <p:nvSpPr>
-          <p:cNvPr id="18" name="TextBox 17"/>
-          <p:cNvSpPr txBox="1"/>
-          <p:nvPr/>
-        </p:nvSpPr>
-        <p:spPr>
-          <a:xfrm>
-            <a:off x="3200400" y="3163824"/>
-            <a:ext cx="914400" cy="310896"/>
-          </a:xfrm>
-          <a:prstGeom prst="rect">
-            <a:avLst/>
-          </a:prstGeom>
-          <a:noFill/>
-        </p:spPr>
-        <p:txBody>
-          <a:bodyPr wrap="square" lIns="0" rIns="0" tIns="0" bIns="0" anchor="t">
-            <a:spAutoFit/>
-          </a:bodyPr>
-          <a:lstStyle/>
-          <a:p>
-            <a:pPr algn="ctr"/>
-            <a:r>
-              <a:rPr sz="830" b="1">
-                <a:solidFill>
-                  <a:srgbClr val="0A1820"/>
-                </a:solidFill>
-                <a:latin typeface="Aptos"/>
-              </a:rPr>
-              <a:t>correo MailHog</a:t>
-            </a:r>
-          </a:p>
-        </p:txBody>
-      </p:sp>
-      <p:cxnSp>
-        <p:nvCxnSpPr>
-          <p:cNvPr id="19" name="Connector 18"/>
-          <p:cNvCxnSpPr/>
-          <p:nvPr/>
-        </p:nvCxnSpPr>
-        <p:spPr>
-          <a:xfrm>
-            <a:off x="3968496" y="2660904"/>
-            <a:ext cx="502920" cy="0"/>
-          </a:xfrm>
-          <a:prstGeom prst="line">
-            <a:avLst/>
-          </a:prstGeom>
-          <a:ln w="20320">
-            <a:solidFill>
-              <a:srgbClr val="BFCCD6"/>
-            </a:solidFill>
-          </a:ln>
-        </p:spPr>
-        <p:style>
-          <a:lnRef idx="2">
-            <a:schemeClr val="accent1"/>
-          </a:lnRef>
-          <a:fillRef idx="0">
-            <a:schemeClr val="accent1"/>
-          </a:fillRef>
-          <a:effectRef idx="1">
-            <a:schemeClr val="accent1"/>
-          </a:effectRef>
-          <a:fontRef idx="minor">
-            <a:schemeClr val="tx1"/>
-          </a:fontRef>
-        </p:style>
-      </p:cxnSp>
-      <p:sp>
-        <p:nvSpPr>
-          <p:cNvPr id="20" name="Rounded Rectangle 19"/>
-          <p:cNvSpPr/>
-          <p:nvPr/>
-        </p:nvSpPr>
-        <p:spPr>
-          <a:xfrm>
-            <a:off x="4608576" y="2331720"/>
-            <a:ext cx="658368" cy="658368"/>
-          </a:xfrm>
-          <a:prstGeom prst="roundRect">
-            <a:avLst/>
-          </a:prstGeom>
-          <a:solidFill>
-            <a:srgbClr val="22C5AA"/>
-          </a:solidFill>
-          <a:ln>
-            <a:noFill/>
-          </a:ln>
-        </p:spPr>
-        <p:style>
-          <a:lnRef idx="1">
-            <a:schemeClr val="accent1"/>
-          </a:lnRef>
-          <a:fillRef idx="3">
-            <a:schemeClr val="accent1"/>
-          </a:fillRef>
-          <a:effectRef idx="2">
-            <a:schemeClr val="accent1"/>
-          </a:effectRef>
-          <a:fontRef idx="minor">
-            <a:schemeClr val="lt1"/>
-          </a:fontRef>
-        </p:style>
-        <p:txBody>
-          <a:bodyPr rtlCol="0" anchor="ctr"/>
-          <a:lstStyle/>
-          <a:p>
-            <a:pPr algn="ctr"/>
-          </a:p>
-        </p:txBody>
-      </p:sp>
-      <p:sp>
-        <p:nvSpPr>
-          <p:cNvPr id="21" name="TextBox 20"/>
-          <p:cNvSpPr txBox="1"/>
-          <p:nvPr/>
-        </p:nvSpPr>
-        <p:spPr>
-          <a:xfrm>
-            <a:off x="4828032" y="2505456"/>
-            <a:ext cx="228600" cy="219456"/>
-          </a:xfrm>
-          <a:prstGeom prst="rect">
-            <a:avLst/>
-          </a:prstGeom>
-          <a:noFill/>
-        </p:spPr>
-        <p:txBody>
-          <a:bodyPr wrap="square" lIns="0" rIns="0" tIns="0" bIns="0" anchor="t">
-            <a:spAutoFit/>
-          </a:bodyPr>
-          <a:lstStyle/>
-          <a:p>
-            <a:pPr algn="ctr"/>
-            <a:r>
-              <a:rPr sz="1600" b="1">
-                <a:solidFill>
-                  <a:srgbClr val="FFFFFF"/>
-                </a:solidFill>
-                <a:latin typeface="Aptos"/>
-              </a:rPr>
-              <a:t>4</a:t>
-            </a:r>
-          </a:p>
-        </p:txBody>
-      </p:sp>
-      <p:sp>
-        <p:nvSpPr>
-          <p:cNvPr id="22" name="TextBox 21"/>
-          <p:cNvSpPr txBox="1"/>
-          <p:nvPr/>
-        </p:nvSpPr>
-        <p:spPr>
-          <a:xfrm>
-            <a:off x="4498848" y="3163824"/>
-            <a:ext cx="914400" cy="310896"/>
-          </a:xfrm>
-          <a:prstGeom prst="rect">
-            <a:avLst/>
-          </a:prstGeom>
-          <a:noFill/>
-        </p:spPr>
-        <p:txBody>
-          <a:bodyPr wrap="square" lIns="0" rIns="0" tIns="0" bIns="0" anchor="t">
-            <a:spAutoFit/>
-          </a:bodyPr>
-          <a:lstStyle/>
-          <a:p>
-            <a:pPr algn="ctr"/>
-            <a:r>
-              <a:rPr sz="830" b="1">
-                <a:solidFill>
-                  <a:srgbClr val="0A1820"/>
-                </a:solidFill>
-                <a:latin typeface="Aptos"/>
-              </a:rPr>
-              <a:t>start + recovery</a:t>
-            </a:r>
-          </a:p>
-        </p:txBody>
-      </p:sp>
-      <p:sp>
-        <p:nvSpPr>
-          <p:cNvPr id="23" name="TextBox 22"/>
-          <p:cNvSpPr txBox="1"/>
-          <p:nvPr/>
-        </p:nvSpPr>
-        <p:spPr>
-          <a:xfrm>
-            <a:off x="713232" y="5074920"/>
-            <a:ext cx="5166360" cy="658368"/>
-          </a:xfrm>
-          <a:prstGeom prst="rect">
-            <a:avLst/>
-          </a:prstGeom>
-          <a:noFill/>
-        </p:spPr>
-        <p:txBody>
-          <a:bodyPr wrap="square" lIns="0" rIns="0" tIns="0" bIns="0" anchor="t">
-            <a:spAutoFit/>
-          </a:bodyPr>
-          <a:lstStyle/>
-          <a:p>
-            <a:pPr algn="l"/>
-            <a:r>
-              <a:rPr sz="1800" b="1">
-                <a:solidFill>
-                  <a:srgbClr val="0A1820"/>
-                </a:solidFill>
-                <a:latin typeface="Aptos"/>
-              </a:rPr>
-              <a:t>El valor de esta prueba está en el flujo completo: no solo aparece el problema, también queda histórico y evidencia de recuperación.</a:t>
-            </a:r>
-          </a:p>
-        </p:txBody>
-      </p:sp>
-      <p:cxnSp>
-        <p:nvCxnSpPr>
-          <p:cNvPr id="24" name="Connector 23"/>
-          <p:cNvCxnSpPr/>
-          <p:nvPr/>
-        </p:nvCxnSpPr>
-        <p:spPr>
-          <a:xfrm>
-            <a:off x="502920" y="6428232"/>
-            <a:ext cx="11155680" cy="0"/>
-          </a:xfrm>
-          <a:prstGeom prst="line">
-            <a:avLst/>
-          </a:prstGeom>
-          <a:ln w="8890">
-            <a:solidFill>
-              <a:srgbClr val="BFCCD6"/>
-            </a:solidFill>
-          </a:ln>
-        </p:spPr>
-        <p:style>
-          <a:lnRef idx="2">
-            <a:schemeClr val="accent1"/>
-          </a:lnRef>
-          <a:fillRef idx="0">
-            <a:schemeClr val="accent1"/>
-          </a:fillRef>
-          <a:effectRef idx="1">
-            <a:schemeClr val="accent1"/>
-          </a:effectRef>
-          <a:fontRef idx="minor">
-            <a:schemeClr val="tx1"/>
-          </a:fontRef>
-        </p:style>
-      </p:cxnSp>
-      <p:sp>
-        <p:nvSpPr>
-          <p:cNvPr id="25" name="TextBox 24"/>
-          <p:cNvSpPr txBox="1"/>
-          <p:nvPr/>
-        </p:nvSpPr>
-        <p:spPr>
-          <a:xfrm>
-            <a:off x="502920" y="6519672"/>
-            <a:ext cx="4754880" cy="164592"/>
-          </a:xfrm>
-          <a:prstGeom prst="rect">
-            <a:avLst/>
-          </a:prstGeom>
-          <a:noFill/>
-        </p:spPr>
-        <p:txBody>
-          <a:bodyPr wrap="square" lIns="0" rIns="0" tIns="0" bIns="0" anchor="t">
-            <a:spAutoFit/>
-          </a:bodyPr>
-          <a:lstStyle/>
-          <a:p>
-            <a:pPr algn="l"/>
-            <a:r>
-              <a:rPr sz="750" b="0">
-                <a:solidFill>
-                  <a:srgbClr val="5C6975"/>
-                </a:solidFill>
-                <a:latin typeface="Aptos"/>
-              </a:rPr>
-              <a:t>Proyecto 7 - Monitoreo de infraestructura con Zabbix</a:t>
-            </a:r>
-          </a:p>
-        </p:txBody>
-      </p:sp>
-      <p:sp>
-        <p:nvSpPr>
-          <p:cNvPr id="26" name="TextBox 25"/>
-          <p:cNvSpPr txBox="1"/>
-          <p:nvPr/>
-        </p:nvSpPr>
-        <p:spPr>
-          <a:xfrm>
-            <a:off x="10972800" y="6519672"/>
-            <a:ext cx="640080" cy="164592"/>
-          </a:xfrm>
-          <a:prstGeom prst="rect">
-            <a:avLst/>
-          </a:prstGeom>
-          <a:noFill/>
-        </p:spPr>
-        <p:txBody>
-          <a:bodyPr wrap="square" lIns="0" rIns="0" tIns="0" bIns="0" anchor="t">
-            <a:spAutoFit/>
-          </a:bodyPr>
-          <a:lstStyle/>
-          <a:p>
-            <a:pPr algn="r"/>
-            <a:r>
-              <a:rPr sz="750">
-                <a:solidFill>
-                  <a:srgbClr val="5C6975"/>
-                </a:solidFill>
-                <a:latin typeface="Aptos"/>
-              </a:rPr>
-              <a:t>10/17</a:t>
+              <a:t>10/18</a:t>
             </a:r>
           </a:p>
         </p:txBody>
